--- a/presentation_oct20/output/UART_SPIFlash_2차발표_1020_코드검증_1.pptx
+++ b/presentation_oct20/output/UART_SPIFlash_2차발표_1020_코드검증_1.pptx
@@ -4,6 +4,9 @@
   <p:sldMasterIdLst>
     <p:sldMasterId id="2147483648" r:id="rId1"/>
   </p:sldMasterIdLst>
+  <p:notesMasterIdLst>
+    <p:notesMasterId r:id="rId15"/>
+  </p:notesMasterIdLst>
   <p:sldIdLst>
     <p:sldId id="256" r:id="rId2"/>
     <p:sldId id="257" r:id="rId3"/>
@@ -19,9 +22,6 @@
     <p:sldId id="267" r:id="rId13"/>
     <p:sldId id="268" r:id="rId14"/>
   </p:sldIdLst>
-  <p:notesMasterIdLst>
-    <p:notesMasterId r:id="rId15"/>
-  </p:notesMasterIdLst>
   <p:sldSz cx="12192000" cy="6858000"/>
   <p:notesSz cx="6858000" cy="12192000"/>
   <p:defaultTextStyle>
@@ -119,21 +119,21 @@
   <p:extLst>
     <p:ext uri="{521415D9-36F7-43E2-AB2F-B90AF26B5E84}">
       <p14:sectionLst xmlns:p14="http://schemas.microsoft.com/office/powerpoint/2010/main">
-        <p14:section name="개요" id="{77fe7ce8-4a0f-ebb2-b7e3-b5ea3d10f099}">
+        <p14:section name="개요" id="{77FE7CE8-4A0F-EBB2-B7E3-B5EA3D10F099}">
           <p14:sldIdLst>
             <p14:sldId id="256"/>
             <p14:sldId id="257"/>
             <p14:sldId id="258"/>
           </p14:sldIdLst>
         </p14:section>
-        <p14:section name="구조와 구현" id="{a82782c5-80ca-3b8f-687a-1f437f075d4a}">
+        <p14:section name="구조와 구현" id="{A82782C5-80CA-3B8F-687A-1F437F075D4A}">
           <p14:sldIdLst>
             <p14:sldId id="259"/>
             <p14:sldId id="260"/>
             <p14:sldId id="261"/>
           </p14:sldIdLst>
         </p14:section>
-        <p14:section name="검증" id="{dacc98b6-6f6c-bca4-9409-1a8273852c25}">
+        <p14:section name="검증" id="{DACC98B6-6F6C-BCA4-9409-1A8273852C25}">
           <p14:sldIdLst>
             <p14:sldId id="262"/>
             <p14:sldId id="263"/>
@@ -143,7 +143,7 @@
             <p14:sldId id="267"/>
           </p14:sldIdLst>
         </p14:section>
-        <p14:section name="Demo" id="{50de6281-f1e6-02e2-b015-297a3610f427}">
+        <p14:section name="Demo" id="{50DE6281-F1E6-02E2-B015-297A3610F427}">
           <p14:sldIdLst>
             <p14:sldId id="268"/>
           </p14:sldIdLst>
@@ -179,240 +179,16 @@
           <a:chExt cx="0" cy="0"/>
         </a:xfrm>
       </p:grpSpPr>
-      <p:sp>
-        <p:nvSpPr>
-          <p:cNvPr id="2" name="Header Placeholder 1"/>
-          <p:cNvSpPr>
-            <a:spLocks noGrp="1"/>
-          </p:cNvSpPr>
-          <p:nvPr>
-            <p:ph type="hdr" sz="quarter"/>
-          </p:nvPr>
-        </p:nvSpPr>
-        <p:spPr>
-          <a:xfrm>
-            <a:off x="0" y="0"/>
-            <a:ext cx="2971800" cy="458788"/>
-          </a:xfrm>
-          <a:prstGeom prst="rect">
-            <a:avLst/>
-          </a:prstGeom>
-        </p:spPr>
-        <p:txBody>
-          <a:bodyPr vert="horz" lIns="91440" tIns="45720" rIns="91440" bIns="45720" rtlCol="0"/>
-          <a:lstStyle>
-            <a:lvl1pPr algn="l">
-              <a:defRPr sz="1200"/>
-            </a:lvl1pPr>
-          </a:lstStyle>
-          <a:p>
-            <a:endParaRPr lang="en-US"/>
-          </a:p>
-        </p:txBody>
-      </p:sp>
-      <p:sp>
-        <p:nvSpPr>
-          <p:cNvPr id="3" name="Date Placeholder 2"/>
-          <p:cNvSpPr>
-            <a:spLocks noGrp="1"/>
-          </p:cNvSpPr>
-          <p:nvPr>
-            <p:ph type="dt" idx="1"/>
-          </p:nvPr>
-        </p:nvSpPr>
-        <p:spPr>
-          <a:xfrm>
-            <a:off x="3884613" y="0"/>
-            <a:ext cx="2971800" cy="458788"/>
-          </a:xfrm>
-          <a:prstGeom prst="rect">
-            <a:avLst/>
-          </a:prstGeom>
-        </p:spPr>
-        <p:txBody>
-          <a:bodyPr vert="horz" lIns="91440" tIns="45720" rIns="91440" bIns="45720" rtlCol="0"/>
-          <a:lstStyle>
-            <a:lvl1pPr algn="r">
-              <a:defRPr sz="1200"/>
-            </a:lvl1pPr>
-          </a:lstStyle>
-          <a:p>
-            <a:fld id="{5282F153-3F37-0F45-9E97-73ACFA13230C}" type="datetimeFigureOut">
-              <a:rPr lang="en-US"/>
-              <a:t>7/23/19</a:t>
-            </a:fld>
-            <a:endParaRPr lang="en-US"/>
-          </a:p>
-        </p:txBody>
-      </p:sp>
-      <p:sp>
-        <p:nvSpPr>
-          <p:cNvPr id="4" name="Slide Image Placeholder 3"/>
-          <p:cNvSpPr>
-            <a:spLocks noGrp="1" noRot="1" noChangeAspect="1"/>
-          </p:cNvSpPr>
-          <p:nvPr>
-            <p:ph type="sldImg" idx="2"/>
-          </p:nvPr>
-        </p:nvSpPr>
-        <p:spPr>
-          <a:xfrm>
-            <a:off x="685800" y="1143000"/>
-            <a:ext cx="5486400" cy="3086100"/>
-          </a:xfrm>
-          <a:prstGeom prst="rect">
-            <a:avLst/>
-          </a:prstGeom>
-          <a:noFill/>
-          <a:ln w="12700">
-            <a:solidFill>
-              <a:prstClr val="black"/>
-            </a:solidFill>
-          </a:ln>
-        </p:spPr>
-        <p:txBody>
-          <a:bodyPr vert="horz" lIns="91440" tIns="45720" rIns="91440" bIns="45720" rtlCol="0" anchor="ctr"/>
-          <a:lstStyle/>
-          <a:p>
-            <a:endParaRPr lang="en-US"/>
-          </a:p>
-        </p:txBody>
-      </p:sp>
-      <p:sp>
-        <p:nvSpPr>
-          <p:cNvPr id="5" name="Notes Placeholder 4"/>
-          <p:cNvSpPr>
-            <a:spLocks noGrp="1"/>
-          </p:cNvSpPr>
-          <p:nvPr>
-            <p:ph type="body" sz="quarter" idx="3"/>
-          </p:nvPr>
-        </p:nvSpPr>
-        <p:spPr>
-          <a:xfrm>
-            <a:off x="685800" y="4400550"/>
-            <a:ext cx="5486400" cy="3600450"/>
-          </a:xfrm>
-          <a:prstGeom prst="rect">
-            <a:avLst/>
-          </a:prstGeom>
-        </p:spPr>
-        <p:txBody>
-          <a:bodyPr vert="horz" lIns="91440" tIns="45720" rIns="91440" bIns="45720" rtlCol="0"/>
-          <a:lstStyle/>
-          <a:p>
-            <a:pPr lvl="0"/>
-            <a:r>
-              <a:rPr lang="en-US"/>
-              <a:t>Click to edit Master text styles</a:t>
-            </a:r>
-          </a:p>
-          <a:p>
-            <a:pPr lvl="1"/>
-            <a:r>
-              <a:rPr lang="en-US"/>
-              <a:t>Second level</a:t>
-            </a:r>
-          </a:p>
-          <a:p>
-            <a:pPr lvl="2"/>
-            <a:r>
-              <a:rPr lang="en-US"/>
-              <a:t>Third level</a:t>
-            </a:r>
-          </a:p>
-          <a:p>
-            <a:pPr lvl="3"/>
-            <a:r>
-              <a:rPr lang="en-US"/>
-              <a:t>Fourth level</a:t>
-            </a:r>
-          </a:p>
-          <a:p>
-            <a:pPr lvl="4"/>
-            <a:r>
-              <a:rPr lang="en-US"/>
-              <a:t>Fifth level</a:t>
-            </a:r>
-          </a:p>
-        </p:txBody>
-      </p:sp>
-      <p:sp>
-        <p:nvSpPr>
-          <p:cNvPr id="6" name="Footer Placeholder 5"/>
-          <p:cNvSpPr>
-            <a:spLocks noGrp="1"/>
-          </p:cNvSpPr>
-          <p:nvPr>
-            <p:ph type="ftr" sz="quarter" idx="4"/>
-          </p:nvPr>
-        </p:nvSpPr>
-        <p:spPr>
-          <a:xfrm>
-            <a:off x="0" y="8685213"/>
-            <a:ext cx="2971800" cy="458787"/>
-          </a:xfrm>
-          <a:prstGeom prst="rect">
-            <a:avLst/>
-          </a:prstGeom>
-        </p:spPr>
-        <p:txBody>
-          <a:bodyPr vert="horz" lIns="91440" tIns="45720" rIns="91440" bIns="45720" rtlCol="0" anchor="b"/>
-          <a:lstStyle>
-            <a:lvl1pPr algn="l">
-              <a:defRPr sz="1200"/>
-            </a:lvl1pPr>
-          </a:lstStyle>
-          <a:p>
-            <a:endParaRPr lang="en-US"/>
-          </a:p>
-        </p:txBody>
-      </p:sp>
-      <p:sp>
-        <p:nvSpPr>
-          <p:cNvPr id="7" name="Slide Number Placeholder 6"/>
-          <p:cNvSpPr>
-            <a:spLocks noGrp="1"/>
-          </p:cNvSpPr>
-          <p:nvPr>
-            <p:ph type="sldNum" sz="quarter" idx="5"/>
-          </p:nvPr>
-        </p:nvSpPr>
-        <p:spPr>
-          <a:xfrm>
-            <a:off x="3884613" y="8685213"/>
-            <a:ext cx="2971800" cy="458787"/>
-          </a:xfrm>
-          <a:prstGeom prst="rect">
-            <a:avLst/>
-          </a:prstGeom>
-        </p:spPr>
-        <p:txBody>
-          <a:bodyPr vert="horz" lIns="91440" tIns="45720" rIns="91440" bIns="45720" rtlCol="0" anchor="b"/>
-          <a:lstStyle>
-            <a:lvl1pPr algn="r">
-              <a:defRPr sz="1200"/>
-            </a:lvl1pPr>
-          </a:lstStyle>
-          <a:p>
-            <a:fld id="{CE5E9CC1-C706-0F49-92D6-E571CC5EEA8F}" type="slidenum">
-              <a:rPr lang="en-US"/>
-              <a:t>‹#›</a:t>
-            </a:fld>
-            <a:endParaRPr lang="en-US"/>
-          </a:p>
-        </p:txBody>
-      </p:sp>
     </p:spTree>
     <p:extLst>
       <p:ext uri="{BB962C8B-B14F-4D97-AF65-F5344CB8AC3E}">
-        <p14:creationId xmlns:p14="http://schemas.microsoft.com/office/powerpoint/2010/main" val="1024086991"/>
+        <p14:creationId xmlns:p14="http://schemas.microsoft.com/office/powerpoint/2010/main" val="4176155696"/>
       </p:ext>
     </p:extLst>
   </p:cSld>
   <p:clrMap bg1="lt1" tx1="dk1" bg2="lt2" tx2="dk2" accent1="accent1" accent2="accent2" accent3="accent3" accent4="accent4" accent5="accent5" accent6="accent6" hlink="hlink" folHlink="folHlink"/>
   <p:notesStyle>
-    <a:lvl1pPr marL="0" algn="l" defTabSz="914400" rtl="0" eaLnBrk="1" latinLnBrk="0" hangingPunct="1">
+    <a:lvl1pPr marL="0" algn="l" defTabSz="914400" rtl="0" eaLnBrk="1" latinLnBrk="1" hangingPunct="1">
       <a:defRPr sz="1200" kern="1200">
         <a:solidFill>
           <a:schemeClr val="tx1"/>
@@ -422,7 +198,7 @@
         <a:cs typeface="+mn-cs"/>
       </a:defRPr>
     </a:lvl1pPr>
-    <a:lvl2pPr marL="457200" algn="l" defTabSz="914400" rtl="0" eaLnBrk="1" latinLnBrk="0" hangingPunct="1">
+    <a:lvl2pPr marL="457200" algn="l" defTabSz="914400" rtl="0" eaLnBrk="1" latinLnBrk="1" hangingPunct="1">
       <a:defRPr sz="1200" kern="1200">
         <a:solidFill>
           <a:schemeClr val="tx1"/>
@@ -432,7 +208,7 @@
         <a:cs typeface="+mn-cs"/>
       </a:defRPr>
     </a:lvl2pPr>
-    <a:lvl3pPr marL="914400" algn="l" defTabSz="914400" rtl="0" eaLnBrk="1" latinLnBrk="0" hangingPunct="1">
+    <a:lvl3pPr marL="914400" algn="l" defTabSz="914400" rtl="0" eaLnBrk="1" latinLnBrk="1" hangingPunct="1">
       <a:defRPr sz="1200" kern="1200">
         <a:solidFill>
           <a:schemeClr val="tx1"/>
@@ -442,7 +218,7 @@
         <a:cs typeface="+mn-cs"/>
       </a:defRPr>
     </a:lvl3pPr>
-    <a:lvl4pPr marL="1371600" algn="l" defTabSz="914400" rtl="0" eaLnBrk="1" latinLnBrk="0" hangingPunct="1">
+    <a:lvl4pPr marL="1371600" algn="l" defTabSz="914400" rtl="0" eaLnBrk="1" latinLnBrk="1" hangingPunct="1">
       <a:defRPr sz="1200" kern="1200">
         <a:solidFill>
           <a:schemeClr val="tx1"/>
@@ -452,7 +228,7 @@
         <a:cs typeface="+mn-cs"/>
       </a:defRPr>
     </a:lvl4pPr>
-    <a:lvl5pPr marL="1828800" algn="l" defTabSz="914400" rtl="0" eaLnBrk="1" latinLnBrk="0" hangingPunct="1">
+    <a:lvl5pPr marL="1828800" algn="l" defTabSz="914400" rtl="0" eaLnBrk="1" latinLnBrk="1" hangingPunct="1">
       <a:defRPr sz="1200" kern="1200">
         <a:solidFill>
           <a:schemeClr val="tx1"/>
@@ -462,7 +238,7 @@
         <a:cs typeface="+mn-cs"/>
       </a:defRPr>
     </a:lvl5pPr>
-    <a:lvl6pPr marL="2286000" algn="l" defTabSz="914400" rtl="0" eaLnBrk="1" latinLnBrk="0" hangingPunct="1">
+    <a:lvl6pPr marL="2286000" algn="l" defTabSz="914400" rtl="0" eaLnBrk="1" latinLnBrk="1" hangingPunct="1">
       <a:defRPr sz="1200" kern="1200">
         <a:solidFill>
           <a:schemeClr val="tx1"/>
@@ -472,7 +248,7 @@
         <a:cs typeface="+mn-cs"/>
       </a:defRPr>
     </a:lvl6pPr>
-    <a:lvl7pPr marL="2743200" algn="l" defTabSz="914400" rtl="0" eaLnBrk="1" latinLnBrk="0" hangingPunct="1">
+    <a:lvl7pPr marL="2743200" algn="l" defTabSz="914400" rtl="0" eaLnBrk="1" latinLnBrk="1" hangingPunct="1">
       <a:defRPr sz="1200" kern="1200">
         <a:solidFill>
           <a:schemeClr val="tx1"/>
@@ -482,7 +258,7 @@
         <a:cs typeface="+mn-cs"/>
       </a:defRPr>
     </a:lvl7pPr>
-    <a:lvl8pPr marL="3200400" algn="l" defTabSz="914400" rtl="0" eaLnBrk="1" latinLnBrk="0" hangingPunct="1">
+    <a:lvl8pPr marL="3200400" algn="l" defTabSz="914400" rtl="0" eaLnBrk="1" latinLnBrk="1" hangingPunct="1">
       <a:defRPr sz="1200" kern="1200">
         <a:solidFill>
           <a:schemeClr val="tx1"/>
@@ -492,7 +268,7 @@
         <a:cs typeface="+mn-cs"/>
       </a:defRPr>
     </a:lvl8pPr>
-    <a:lvl9pPr marL="3657600" algn="l" defTabSz="914400" rtl="0" eaLnBrk="1" latinLnBrk="0" hangingPunct="1">
+    <a:lvl9pPr marL="3657600" algn="l" defTabSz="914400" rtl="0" eaLnBrk="1" latinLnBrk="1" hangingPunct="1">
       <a:defRPr sz="1200" kern="1200">
         <a:solidFill>
           <a:schemeClr val="tx1"/>
@@ -556,7 +332,6 @@
 발표 순서는 먼저 과제 조건을 만족했는지 결론부터 말씀드리고, 하드웨어 구성과 구현, 검증 방법과 결과, 현장 Demo 순서로 진행하겠습니다.
 출처: presentation_oct20/output/evidence_existing.json</a:t>
             </a:r>
-            <a:endParaRPr lang="en-US" dirty="0"/>
           </a:p>
         </p:txBody>
       </p:sp>
@@ -648,7 +423,6 @@
 마지막으로 50, 51행에서 원본과 복원 파일을 바이트 단위로 비교하고 CRC32와 SHA-256도 비교해서 하나라도 다르면 실패합니다. 통과하면 PASS와 함께 JSON 보고서를 남깁니다.
 출처: pc/demo_roundtrip.py, pc/bmp_store.py, Core/Src/uart_flash_test.c (커밋 926d3fc)</a:t>
             </a:r>
-            <a:endParaRPr lang="en-US" dirty="0"/>
           </a:p>
         </p:txBody>
       </p:sp>
@@ -740,7 +514,6 @@
 이미지 자체가 3 MB가 넘어서 320 KB RAM에 들어갈 수 없고, 보드의 SDRAM은 초기화하지 않으며 MPU로 접근을 막아 두었다는 점도 함께 말씀드립니다.
 출처: run_all.py 196–219행, README.md 보드 검증 결과(2026-10-15)</a:t>
             </a:r>
-            <a:endParaRPr lang="en-US" dirty="0"/>
           </a:p>
         </p:txBody>
       </p:sp>
@@ -831,7 +604,6 @@
 저장 실행에서 DMA 은행 M0과 M1이 각각 384번 채워졌고 버퍼 초과는 0회였습니다. 시간은 저장과 복원을 포함해 86.5초, 읽기 전용 복원은 34.6초였습니다. 프로젝트 스크립트와 별도로 shasum과 cmp로도 복원 파일을 원본과 비교해 일치함을 확인했습니다.
 출처: pc/results/demo_report_20261015_200146_452196.json, demo_report_20261015_200453_061600.json, README.md</a:t>
             </a:r>
-            <a:endParaRPr lang="en-US" dirty="0"/>
           </a:p>
         </p:txBody>
       </p:sp>
@@ -923,7 +695,6 @@
 남은 확인 항목은 Flash 칩 모델입니다. W25Q128 대체가 허용되는지 의견 주시면 감사하겠습니다. 이상입니다.
 출처: run_all.py, README.md 보드 검증 결과(2026-10-15)</a:t>
             </a:r>
-            <a:endParaRPr lang="en-US" dirty="0"/>
           </a:p>
         </p:txBody>
       </p:sp>
@@ -1014,7 +785,6 @@
 남은 것은 Flash 칩 모델 하나입니다. 과제 조건은 W25Q32이고 실물 시험은 W25Q128로 했기 때문에 대체가 허용되는지 확인이 필요합니다.
 출처: README.md 보드 검증 결과(2026-10-15), pc/results/demo_report_20261015_*.json, run_all.py</a:t>
             </a:r>
-            <a:endParaRPr lang="en-US" dirty="0"/>
           </a:p>
         </p:txBody>
       </p:sp>
@@ -1107,7 +877,6 @@
 https://www.st.com/resource/en/user_manual/um1907-discovery-kit-for-stm32f7-series-with-stm32f746ng-mcu-stmicroelectronics.pdf
 https://media.digikey.com/pdf/Data%20Sheets/Winbond%20PDFs/W25Q32JV_RevI_5-4-21.pdf</a:t>
             </a:r>
-            <a:endParaRPr lang="en-US" dirty="0"/>
           </a:p>
         </p:txBody>
       </p:sp>
@@ -1196,7 +965,6 @@
               <a:t>전체 데이터 경로입니다. PC의 demo_roundtrip.py가 ST-LINK 가상 COM 포트를 통해 USART1과 통신합니다. USART1은 수신과 송신 모두 4 KiB 버퍼 두 개를 DMA로 사용합니다. 펌웨어는 청크 단위 CRC 확인과 ACK, Flash 주소 관리를 맡고, QUADSPI 주변장치가 SPI 1-1-1, Mode 0, 27 MHz로 W25Q128에 명령을 보냅니다.
 번호는 검증 지점입니다. 1번은 PC와 STM32 사이의 UART 구간, 2번은 DMA 버퍼와 펌웨어 사이, 3번은 STM32와 Flash 사이, 4번 점선은 PC의 원본과 Flash에서 다시 읽어 만든 파일의 종단 간 비교입니다. 각 지점을 확인하는 실제 코드는 7장부터 10장까지 보여드리겠습니다.</a:t>
             </a:r>
-            <a:endParaRPr lang="en-US" dirty="0"/>
           </a:p>
         </p:txBody>
       </p:sp>
@@ -1287,7 +1055,6 @@
 PC는 4 KiB 청크마다 앞에 CRC32 4바이트를 붙여 보냅니다. 펌웨어는 청크 하나를 받으면 CRC를 확인하고, 64 KiB 경계면 블록을 지우고, 256바이트 페이지 단위로 쓴 뒤 다시 읽어 비교하고 나서 ACK를 보냅니다. 어느 단계든 실패하면 ERROR를 보내고 멈춥니다. Flash에서 읽어 PC로 보낼 때는 TX도 4 KiB 두 개의 DMA 버퍼를 씁니다.
 출처: Core/Src/uart_dma_rx.c, uart_dma_tx.c, uart_flash_test.c, pc/bmp_store.py, UM1907</a:t>
             </a:r>
-            <a:endParaRPr lang="en-US" dirty="0"/>
           </a:p>
         </p:txBody>
       </p:sp>
@@ -1379,7 +1146,6 @@
 주소 0x300035, 0x30FFFF는 파일 크기와 블록 수로 계산한 값입니다.
 출처: evidence_existing.json, Core/Src/uart_flash_test.c, STM32F746NG 데이터시트</a:t>
             </a:r>
-            <a:endParaRPr lang="en-US" dirty="0"/>
           </a:p>
         </p:txBody>
       </p:sp>
@@ -1470,7 +1236,6 @@
 가장 중요한 부분은 285, 286행입니다. 방금 쓴 영역을 Flash에서 다시 읽어 받은 데이터와 memcmp로 비교합니다. 그래서 PC가 받는 ACK는 "받았다"가 아니라 "Flash에 쓰고 다시 읽어 같았다"는 뜻입니다. 291행에서 다시 읽은 데이터로 CRC를 누적하고, 루프가 끝나면 297행에서 파일 전체 CRC를 비교해 FILE STORED를 보냅니다.
 출처: Core/Src/uart_flash_test.c 233–307행 (커밋 926d3fc)</a:t>
             </a:r>
-            <a:endParaRPr lang="en-US" dirty="0"/>
           </a:p>
         </p:txBody>
       </p:sp>
@@ -1561,7 +1326,6 @@
 Demo 프로그램은 55행에서 마지막에 통계를 받아 초과가 있으면 실패로 처리합니다. 10월 15일 최신 저장 실행에서 M0 384회, M1 384회, 초과 0회였습니다.
 출처: Core/Src/uart_dma_rx.c, pc/demo_roundtrip.py, pc/results/demo_report_20261015_200146_452196.json</a:t>
             </a:r>
-            <a:endParaRPr lang="en-US" dirty="0"/>
           </a:p>
         </p:txBody>
       </p:sp>
@@ -1654,7 +1418,6 @@
 칩 ID는 main.c에서 0x9F로 읽고, 펌웨어와 PC 프로그램 모두 EF4018과 EF4016만 허용합니다. QSPI는 prescaler 7로 216 MHz를 8분주해 27 MHz, Clock Mode 0입니다.
 출처: Core/Src/flash_test.c, Core/Src/main.c, Core/Src/uart_flash_test.c 356–358행</a:t>
             </a:r>
-            <a:endParaRPr lang="en-US" dirty="0"/>
           </a:p>
         </p:txBody>
       </p:sp>
@@ -1732,6 +1495,7 @@
         <a:solidFill>
           <a:srgbClr val="FFFFFF"/>
         </a:solidFill>
+        <a:effectLst/>
       </p:bgPr>
     </p:bg>
     <p:spTree>
@@ -1764,6 +1528,7 @@
         <a:solidFill>
           <a:srgbClr val="FFFFFF"/>
         </a:solidFill>
+        <a:effectLst/>
       </p:bgPr>
     </p:bg>
     <p:spTree>
@@ -1783,9 +1548,11 @@
       <p:sp>
         <p:nvSpPr>
           <p:cNvPr id="2" name="Text 0"/>
-          <p:cNvSpPr/>
+          <p:cNvSpPr>
+            <a:spLocks noGrp="1"/>
+          </p:cNvSpPr>
           <p:nvPr>
-            <p:ph idx="100" type="title" hasCustomPrompt="1"/>
+            <p:ph type="title" idx="100" hasCustomPrompt="1"/>
           </p:nvPr>
         </p:nvSpPr>
         <p:spPr>
@@ -1802,7 +1569,7 @@
         <p:txBody>
           <a:bodyPr wrap="square" rtlCol="0"/>
           <a:lstStyle>
-            <a:lvl1pPr algn="l" indent="0" marL="0">
+            <a:lvl1pPr marL="0" indent="0" algn="l">
               <a:buNone/>
               <a:defRPr lang="en-US" sz="2600" b="1" dirty="0">
                 <a:solidFill>
@@ -1815,7 +1582,7 @@
             </a:lvl1pPr>
           </a:lstStyle>
           <a:p>
-            <a:pPr algn="l" indent="0" marL="0">
+            <a:pPr marL="0" indent="0" algn="l">
               <a:buNone/>
             </a:pPr>
             <a:endParaRPr lang="en-US" sz="2600" dirty="0"/>
@@ -1843,7 +1610,7 @@
           <a:bodyPr wrap="square" lIns="0" tIns="0" rIns="0" bIns="0" rtlCol="0" anchor="ctr"/>
           <a:lstStyle/>
           <a:p>
-            <a:pPr indent="0" marL="0">
+            <a:pPr marL="0" indent="0">
               <a:buNone/>
             </a:pPr>
             <a:r>
@@ -1881,7 +1648,7 @@
           </a:prstGeom>
           <a:extLst>
             <a:ext uri="{C572A759-6A51-4108-AA02-DFA0A04FC94B}">
-              <ma14:wrappingTextBoxFlag xmlns:ma14="http://schemas.microsoft.com/office/mac/drawingml/2011/main" val="0"/>
+              <ma14:wrappingTextBoxFlag xmlns:ma14="http://schemas.microsoft.com/office/mac/drawingml/2011/main" xmlns="" val="0"/>
             </a:ext>
           </a:extLst>
         </p:spPr>
@@ -1902,8 +1669,8 @@
           <a:p>
             <a:pPr algn="r"/>
             <a:fld id="{F7021451-1387-4CA6-816F-3879F97B5CBC}" type="slidenum">
-              <a:rPr b="0" lang="en-US"/>
-              <a:t>1003</a:t>
+              <a:rPr lang="en-US" b="0"/>
+              <a:t>‹#›</a:t>
             </a:fld>
             <a:endParaRPr lang="en-US"/>
           </a:p>
@@ -1920,6 +1687,11 @@
 <file path=ppt/slideMasters/slideMaster1.xml><?xml version="1.0" encoding="utf-8"?>
 <p:sldMaster xmlns:a="http://schemas.openxmlformats.org/drawingml/2006/main" xmlns:r="http://schemas.openxmlformats.org/officeDocument/2006/relationships" xmlns:p="http://schemas.openxmlformats.org/presentationml/2006/main">
   <p:cSld>
+    <p:bg>
+      <p:bgRef idx="1001">
+        <a:schemeClr val="bg1"/>
+      </p:bgRef>
+    </p:bg>
     <p:spTree>
       <p:nvGrpSpPr>
         <p:cNvPr id="1" name=""/>
@@ -1954,7 +1726,7 @@
           </a:prstGeom>
           <a:extLst>
             <a:ext uri="{C572A759-6A51-4108-AA02-DFA0A04FC94B}">
-              <ma14:wrappingTextBoxFlag xmlns:ma14="http://schemas.microsoft.com/office/mac/drawingml/2011/main" val="0"/>
+              <ma14:wrappingTextBoxFlag xmlns:ma14="http://schemas.microsoft.com/office/mac/drawingml/2011/main" xmlns="" val="0"/>
             </a:ext>
           </a:extLst>
         </p:spPr>
@@ -1975,8 +1747,8 @@
           <a:p>
             <a:pPr algn="r"/>
             <a:fld id="{F7021451-1387-4CA6-816F-3879F97B5CBC}" type="slidenum">
-              <a:rPr b="0" lang="en-US"/>
-              <a:t>null</a:t>
+              <a:rPr lang="en-US" b="0"/>
+              <a:t>‹#›</a:t>
             </a:fld>
             <a:endParaRPr lang="en-US"/>
           </a:p>
@@ -2282,7 +2054,7 @@
           <a:bodyPr wrap="square" lIns="0" tIns="0" rIns="0" bIns="0" rtlCol="0" anchor="t"/>
           <a:lstStyle/>
           <a:p>
-            <a:pPr indent="0" marL="0">
+            <a:pPr marL="0" indent="0">
               <a:buNone/>
             </a:pPr>
             <a:r>
@@ -2294,7 +2066,29 @@
                 <a:ea typeface="Malgun Gothic" pitchFamily="34" charset="-122"/>
                 <a:cs typeface="Malgun Gothic" pitchFamily="34" charset="-120"/>
               </a:rPr>
-              <a:t>2차 발표 · 2026년 10월 20일</a:t>
+              <a:t>2차 발표 · 2026년 10월 2</a:t>
+            </a:r>
+            <a:r>
+              <a:rPr lang="en-US" altLang="ko-KR" sz="1500" b="1" dirty="0">
+                <a:solidFill>
+                  <a:srgbClr val="0F766E"/>
+                </a:solidFill>
+                <a:latin typeface="Malgun Gothic" pitchFamily="34" charset="0"/>
+                <a:ea typeface="Malgun Gothic" pitchFamily="34" charset="-122"/>
+                <a:cs typeface="Malgun Gothic" pitchFamily="34" charset="-120"/>
+              </a:rPr>
+              <a:t>1</a:t>
+            </a:r>
+            <a:r>
+              <a:rPr lang="en-US" sz="1500" b="1" dirty="0">
+                <a:solidFill>
+                  <a:srgbClr val="0F766E"/>
+                </a:solidFill>
+                <a:latin typeface="Malgun Gothic" pitchFamily="34" charset="0"/>
+                <a:ea typeface="Malgun Gothic" pitchFamily="34" charset="-122"/>
+                <a:cs typeface="Malgun Gothic" pitchFamily="34" charset="-120"/>
+              </a:rPr>
+              <a:t>일</a:t>
             </a:r>
             <a:endParaRPr lang="en-US" sz="1500" dirty="0"/>
           </a:p>
@@ -2308,7 +2102,7 @@
         </p:nvSpPr>
         <p:spPr>
           <a:xfrm>
-            <a:off x="731520" y="1920240"/>
+            <a:off x="731520" y="2438400"/>
             <a:ext cx="6217920" cy="1600200"/>
           </a:xfrm>
           <a:prstGeom prst="rect">
@@ -2321,7 +2115,7 @@
           <a:bodyPr wrap="square" lIns="0" tIns="0" rIns="0" bIns="0" rtlCol="0" anchor="t"/>
           <a:lstStyle/>
           <a:p>
-            <a:pPr indent="0" marL="0">
+            <a:pPr marL="0" indent="0">
               <a:lnSpc>
                 <a:spcPct val="105000"/>
               </a:lnSpc>
@@ -2341,7 +2135,7 @@
             <a:endParaRPr lang="en-US" sz="4000" dirty="0"/>
           </a:p>
           <a:p>
-            <a:pPr indent="0" marL="0">
+            <a:pPr marL="0" indent="0">
               <a:lnSpc>
                 <a:spcPct val="105000"/>
               </a:lnSpc>
@@ -2359,68 +2153,6 @@
               <a:t>기본 기능 구현</a:t>
             </a:r>
             <a:endParaRPr lang="en-US" sz="4000" dirty="0"/>
-          </a:p>
-        </p:txBody>
-      </p:sp>
-      <p:sp>
-        <p:nvSpPr>
-          <p:cNvPr id="4" name="Text 2"/>
-          <p:cNvSpPr txBox="1"/>
-          <p:nvPr/>
-        </p:nvSpPr>
-        <p:spPr>
-          <a:xfrm>
-            <a:off x="731520" y="3703320"/>
-            <a:ext cx="6217920" cy="822960"/>
-          </a:xfrm>
-          <a:prstGeom prst="rect">
-            <a:avLst/>
-          </a:prstGeom>
-          <a:noFill/>
-          <a:ln/>
-        </p:spPr>
-        <p:txBody>
-          <a:bodyPr wrap="square" lIns="0" tIns="0" rIns="0" bIns="0" rtlCol="0" anchor="t"/>
-          <a:lstStyle/>
-          <a:p>
-            <a:pPr indent="0" marL="0">
-              <a:lnSpc>
-                <a:spcPct val="120000"/>
-              </a:lnSpc>
-              <a:buNone/>
-            </a:pPr>
-            <a:r>
-              <a:rPr lang="en-US" sz="1800" dirty="0">
-                <a:solidFill>
-                  <a:srgbClr val="5F6B7A"/>
-                </a:solidFill>
-                <a:latin typeface="Malgun Gothic" pitchFamily="34" charset="0"/>
-                <a:ea typeface="Malgun Gothic" pitchFamily="34" charset="-122"/>
-                <a:cs typeface="Malgun Gothic" pitchFamily="34" charset="-120"/>
-              </a:rPr>
-              <a:t>STM32F746G-DISCO에서 3 MiB 이상의 BMP를</a:t>
-            </a:r>
-            <a:endParaRPr lang="en-US" sz="1800" dirty="0"/>
-          </a:p>
-          <a:p>
-            <a:pPr indent="0" marL="0">
-              <a:lnSpc>
-                <a:spcPct val="120000"/>
-              </a:lnSpc>
-              <a:buNone/>
-            </a:pPr>
-            <a:r>
-              <a:rPr lang="en-US" sz="1800" dirty="0">
-                <a:solidFill>
-                  <a:srgbClr val="5F6B7A"/>
-                </a:solidFill>
-                <a:latin typeface="Malgun Gothic" pitchFamily="34" charset="0"/>
-                <a:ea typeface="Malgun Gothic" pitchFamily="34" charset="-122"/>
-                <a:cs typeface="Malgun Gothic" pitchFamily="34" charset="-120"/>
-              </a:rPr>
-              <a:t>SPI Flash에 저장하고 원본으로 복원</a:t>
-            </a:r>
-            <a:endParaRPr lang="en-US" sz="1800" dirty="0"/>
           </a:p>
         </p:txBody>
       </p:sp>
@@ -2445,84 +2177,146 @@
           <a:bodyPr wrap="square" lIns="0" tIns="0" rIns="0" bIns="0" rtlCol="0" anchor="t"/>
           <a:lstStyle/>
           <a:p>
-            <a:pPr indent="0" marL="0">
-              <a:buNone/>
-            </a:pPr>
-            <a:r>
-              <a:rPr lang="en-US" sz="1400" dirty="0">
-                <a:solidFill>
-                  <a:srgbClr val="5F6B7A"/>
+            <a:pPr marL="0" indent="0">
+              <a:buNone/>
+            </a:pPr>
+            <a:r>
+              <a:rPr lang="en-US" altLang="ko-KR" sz="1600" dirty="0">
+                <a:solidFill>
+                  <a:srgbClr val="000000"/>
                 </a:solidFill>
                 <a:latin typeface="Malgun Gothic" pitchFamily="34" charset="0"/>
                 <a:ea typeface="Malgun Gothic" pitchFamily="34" charset="-122"/>
                 <a:cs typeface="Malgun Gothic" pitchFamily="34" charset="-120"/>
               </a:rPr>
-              <a:t>[발표자 이름·소속: 자료 필요]</a:t>
-            </a:r>
-            <a:endParaRPr lang="en-US" sz="1400" dirty="0"/>
-          </a:p>
-        </p:txBody>
-      </p:sp>
-      <p:pic>
-        <p:nvPicPr>
-          <p:cNvPr id="6" name="Image 0" descr="테스트 입력 BMP, 1024×1024 그라데이션">    </p:cNvPr>
-          <p:cNvPicPr>
-            <a:picLocks noChangeAspect="1"/>
-          </p:cNvPicPr>
-          <p:nvPr/>
-        </p:nvPicPr>
-        <p:blipFill>
-          <a:blip r:embed="rId1"/>
-          <a:stretch>
-            <a:fillRect/>
-          </a:stretch>
-        </p:blipFill>
-        <p:spPr>
-          <a:xfrm>
-            <a:off x="7589520" y="1234440"/>
-            <a:ext cx="3886200" cy="3886200"/>
-          </a:xfrm>
-          <a:prstGeom prst="rect">
-            <a:avLst/>
-          </a:prstGeom>
-        </p:spPr>
-      </p:pic>
-      <p:sp>
-        <p:nvSpPr>
-          <p:cNvPr id="7" name="Text 4"/>
-          <p:cNvSpPr txBox="1"/>
-          <p:nvPr/>
-        </p:nvSpPr>
-        <p:spPr>
-          <a:xfrm>
-            <a:off x="7589520" y="5257800"/>
-            <a:ext cx="3886200" cy="274320"/>
-          </a:xfrm>
-          <a:prstGeom prst="rect">
-            <a:avLst/>
-          </a:prstGeom>
-          <a:noFill/>
-          <a:ln/>
-        </p:spPr>
-        <p:txBody>
-          <a:bodyPr wrap="square" lIns="0" tIns="0" rIns="0" bIns="0" rtlCol="0" anchor="t"/>
-          <a:lstStyle/>
-          <a:p>
-            <a:pPr indent="0" marL="0">
-              <a:buNone/>
-            </a:pPr>
-            <a:r>
-              <a:rPr lang="en-US" sz="1200" dirty="0">
-                <a:solidFill>
-                  <a:srgbClr val="5F6B7A"/>
+              <a:t>1</a:t>
+            </a:r>
+            <a:r>
+              <a:rPr lang="ko-KR" altLang="en-US" sz="1600" dirty="0">
+                <a:solidFill>
+                  <a:srgbClr val="000000"/>
                 </a:solidFill>
                 <a:latin typeface="Malgun Gothic" pitchFamily="34" charset="0"/>
                 <a:ea typeface="Malgun Gothic" pitchFamily="34" charset="-122"/>
                 <a:cs typeface="Malgun Gothic" pitchFamily="34" charset="-120"/>
               </a:rPr>
-              <a:t>테스트 입력 BMP · 1024 × 1024 · 24비트</a:t>
-            </a:r>
-            <a:endParaRPr lang="en-US" sz="1200" dirty="0"/>
+              <a:t>조 </a:t>
+            </a:r>
+            <a:r>
+              <a:rPr lang="en-US" altLang="ko-KR" sz="1600" dirty="0">
+                <a:solidFill>
+                  <a:srgbClr val="000000"/>
+                </a:solidFill>
+                <a:latin typeface="Malgun Gothic" pitchFamily="34" charset="0"/>
+                <a:ea typeface="Malgun Gothic" pitchFamily="34" charset="-122"/>
+                <a:cs typeface="Malgun Gothic" pitchFamily="34" charset="-120"/>
+              </a:rPr>
+              <a:t>:</a:t>
+            </a:r>
+            <a:r>
+              <a:rPr lang="ko-KR" altLang="en-US" sz="1600" dirty="0">
+                <a:solidFill>
+                  <a:srgbClr val="000000"/>
+                </a:solidFill>
+                <a:latin typeface="Malgun Gothic" pitchFamily="34" charset="0"/>
+                <a:ea typeface="Malgun Gothic" pitchFamily="34" charset="-122"/>
+                <a:cs typeface="Malgun Gothic" pitchFamily="34" charset="-120"/>
+              </a:rPr>
+              <a:t> 박민호</a:t>
+            </a:r>
+            <a:r>
+              <a:rPr lang="en-US" altLang="ko-KR" sz="1600" dirty="0">
+                <a:solidFill>
+                  <a:srgbClr val="000000"/>
+                </a:solidFill>
+                <a:latin typeface="Malgun Gothic" pitchFamily="34" charset="0"/>
+                <a:ea typeface="Malgun Gothic" pitchFamily="34" charset="-122"/>
+                <a:cs typeface="Malgun Gothic" pitchFamily="34" charset="-120"/>
+              </a:rPr>
+              <a:t>,</a:t>
+            </a:r>
+            <a:r>
+              <a:rPr lang="ko-KR" altLang="en-US" sz="1600" dirty="0">
+                <a:solidFill>
+                  <a:srgbClr val="000000"/>
+                </a:solidFill>
+                <a:latin typeface="Malgun Gothic" pitchFamily="34" charset="0"/>
+                <a:ea typeface="Malgun Gothic" pitchFamily="34" charset="-122"/>
+                <a:cs typeface="Malgun Gothic" pitchFamily="34" charset="-120"/>
+              </a:rPr>
+              <a:t> 박선우</a:t>
+            </a:r>
+            <a:r>
+              <a:rPr lang="en-US" altLang="ko-KR" sz="1600" dirty="0">
+                <a:solidFill>
+                  <a:srgbClr val="000000"/>
+                </a:solidFill>
+                <a:latin typeface="Malgun Gothic" pitchFamily="34" charset="0"/>
+                <a:ea typeface="Malgun Gothic" pitchFamily="34" charset="-122"/>
+                <a:cs typeface="Malgun Gothic" pitchFamily="34" charset="-120"/>
+              </a:rPr>
+              <a:t>,</a:t>
+            </a:r>
+            <a:r>
+              <a:rPr lang="ko-KR" altLang="en-US" sz="1600" dirty="0">
+                <a:solidFill>
+                  <a:srgbClr val="000000"/>
+                </a:solidFill>
+                <a:latin typeface="Malgun Gothic" pitchFamily="34" charset="0"/>
+                <a:ea typeface="Malgun Gothic" pitchFamily="34" charset="-122"/>
+                <a:cs typeface="Malgun Gothic" pitchFamily="34" charset="-120"/>
+              </a:rPr>
+              <a:t> </a:t>
+            </a:r>
+            <a:r>
+              <a:rPr lang="ko-KR" altLang="en-US" sz="1600" dirty="0" err="1">
+                <a:solidFill>
+                  <a:srgbClr val="000000"/>
+                </a:solidFill>
+                <a:latin typeface="Malgun Gothic" pitchFamily="34" charset="0"/>
+                <a:ea typeface="Malgun Gothic" pitchFamily="34" charset="-122"/>
+                <a:cs typeface="Malgun Gothic" pitchFamily="34" charset="-120"/>
+              </a:rPr>
+              <a:t>전세웅</a:t>
+            </a:r>
+            <a:r>
+              <a:rPr lang="en-US" altLang="ko-KR" sz="1600" dirty="0">
+                <a:solidFill>
+                  <a:srgbClr val="000000"/>
+                </a:solidFill>
+                <a:latin typeface="Malgun Gothic" pitchFamily="34" charset="0"/>
+                <a:ea typeface="Malgun Gothic" pitchFamily="34" charset="-122"/>
+                <a:cs typeface="Malgun Gothic" pitchFamily="34" charset="-120"/>
+              </a:rPr>
+              <a:t>,</a:t>
+            </a:r>
+            <a:r>
+              <a:rPr lang="ko-KR" altLang="en-US" sz="1600" dirty="0">
+                <a:solidFill>
+                  <a:srgbClr val="000000"/>
+                </a:solidFill>
+                <a:latin typeface="Malgun Gothic" pitchFamily="34" charset="0"/>
+                <a:ea typeface="Malgun Gothic" pitchFamily="34" charset="-122"/>
+                <a:cs typeface="Malgun Gothic" pitchFamily="34" charset="-120"/>
+              </a:rPr>
+              <a:t> </a:t>
+            </a:r>
+            <a:r>
+              <a:rPr lang="ko-KR" altLang="en-US" sz="1600" dirty="0" err="1">
+                <a:solidFill>
+                  <a:srgbClr val="000000"/>
+                </a:solidFill>
+                <a:latin typeface="Malgun Gothic" pitchFamily="34" charset="0"/>
+                <a:ea typeface="Malgun Gothic" pitchFamily="34" charset="-122"/>
+                <a:cs typeface="Malgun Gothic" pitchFamily="34" charset="-120"/>
+              </a:rPr>
+              <a:t>조명욱</a:t>
+            </a:r>
+            <a:endParaRPr lang="en-US" sz="1600" dirty="0">
+              <a:solidFill>
+                <a:srgbClr val="000000"/>
+              </a:solidFill>
+            </a:endParaRPr>
           </a:p>
         </p:txBody>
       </p:sp>
@@ -2554,9 +2348,11 @@
       <p:sp>
         <p:nvSpPr>
           <p:cNvPr id="2" name="Text 0"/>
-          <p:cNvSpPr/>
+          <p:cNvSpPr>
+            <a:spLocks noGrp="1"/>
+          </p:cNvSpPr>
           <p:nvPr>
-            <p:ph idx="100" type="title" hasCustomPrompt="1"/>
+            <p:ph type="title" idx="100" hasCustomPrompt="1"/>
           </p:nvPr>
         </p:nvSpPr>
         <p:spPr>
@@ -2574,7 +2370,7 @@
           <a:bodyPr wrap="square" lIns="0" tIns="0" rIns="0" bIns="0" rtlCol="0" anchor="ctr"/>
           <a:lstStyle/>
           <a:p>
-            <a:pPr algn="l" indent="0" marL="0">
+            <a:pPr marL="0" indent="0" algn="l">
               <a:buNone/>
             </a:pPr>
             <a:r>
@@ -2616,6 +2412,13 @@
             <a:prstDash val="solid"/>
           </a:ln>
         </p:spPr>
+        <p:txBody>
+          <a:bodyPr/>
+          <a:lstStyle/>
+          <a:p>
+            <a:endParaRPr lang="ko-KR" altLang="en-US"/>
+          </a:p>
+        </p:txBody>
       </p:sp>
       <p:sp>
         <p:nvSpPr>
@@ -2638,7 +2441,7 @@
           <a:bodyPr wrap="none" lIns="0" tIns="0" rIns="0" bIns="0" rtlCol="0" anchor="t"/>
           <a:lstStyle/>
           <a:p>
-            <a:pPr indent="0" marL="0">
+            <a:pPr marL="0" indent="0">
               <a:lnSpc>
                 <a:spcPct val="120000"/>
               </a:lnSpc>
@@ -2658,7 +2461,7 @@
             <a:endParaRPr lang="en-US" sz="1100" dirty="0"/>
           </a:p>
           <a:p>
-            <a:pPr indent="0" marL="0">
+            <a:pPr marL="0" indent="0">
               <a:lnSpc>
                 <a:spcPct val="120000"/>
               </a:lnSpc>
@@ -2675,7 +2478,21 @@
               </a:rPr>
               <a:t>  30  </a:t>
             </a:r>
-            <a:pPr indent="0" marL="0">
+            <a:r>
+              <a:rPr lang="en-US" sz="1100" dirty="0">
+                <a:solidFill>
+                  <a:srgbClr val="1F2933"/>
+                </a:solidFill>
+                <a:latin typeface="Consolas" pitchFamily="34" charset="0"/>
+                <a:ea typeface="Consolas" pitchFamily="34" charset="-122"/>
+                <a:cs typeface="Consolas" pitchFamily="34" charset="-120"/>
+              </a:rPr>
+              <a:t>expected_crc = zlib.crc32(source) &amp; 0xFFFFFFFF</a:t>
+            </a:r>
+            <a:endParaRPr lang="en-US" sz="1100" dirty="0"/>
+          </a:p>
+          <a:p>
+            <a:pPr marL="0" indent="0">
               <a:lnSpc>
                 <a:spcPct val="120000"/>
               </a:lnSpc>
@@ -2684,18 +2501,29 @@
             <a:r>
               <a:rPr lang="en-US" sz="1100" dirty="0">
                 <a:solidFill>
-                  <a:srgbClr val="1F2933"/>
+                  <a:srgbClr val="8A94A3"/>
                 </a:solidFill>
                 <a:latin typeface="Consolas" pitchFamily="34" charset="0"/>
                 <a:ea typeface="Consolas" pitchFamily="34" charset="-122"/>
                 <a:cs typeface="Consolas" pitchFamily="34" charset="-120"/>
               </a:rPr>
-              <a:t>expected_crc = zlib.crc32(source) &amp; 0xFFFFFFFF</a:t>
+              <a:t>  31  </a:t>
+            </a:r>
+            <a:r>
+              <a:rPr lang="en-US" sz="1100" dirty="0">
+                <a:solidFill>
+                  <a:srgbClr val="1F2933"/>
+                </a:solidFill>
+                <a:latin typeface="Consolas" pitchFamily="34" charset="0"/>
+                <a:ea typeface="Consolas" pitchFamily="34" charset="-122"/>
+                <a:cs typeface="Consolas" pitchFamily="34" charset="-120"/>
+              </a:rPr>
+              <a:t>expected_sha = hashlib.sha256(source).hexdigest()</a:t>
             </a:r>
             <a:endParaRPr lang="en-US" sz="1100" dirty="0"/>
           </a:p>
           <a:p>
-            <a:pPr indent="0" marL="0">
+            <a:pPr marL="0" indent="0">
               <a:lnSpc>
                 <a:spcPct val="120000"/>
               </a:lnSpc>
@@ -2710,9 +2538,12 @@
                 <a:ea typeface="Consolas" pitchFamily="34" charset="-122"/>
                 <a:cs typeface="Consolas" pitchFamily="34" charset="-120"/>
               </a:rPr>
-              <a:t>  31  </a:t>
-            </a:r>
-            <a:pPr indent="0" marL="0">
+              <a:t>      ⋮</a:t>
+            </a:r>
+            <a:endParaRPr lang="en-US" sz="1100" dirty="0"/>
+          </a:p>
+          <a:p>
+            <a:pPr marL="0" indent="0">
               <a:lnSpc>
                 <a:spcPct val="120000"/>
               </a:lnSpc>
@@ -2721,18 +2552,29 @@
             <a:r>
               <a:rPr lang="en-US" sz="1100" dirty="0">
                 <a:solidFill>
-                  <a:srgbClr val="1F2933"/>
+                  <a:srgbClr val="8A94A3"/>
                 </a:solidFill>
                 <a:latin typeface="Consolas" pitchFamily="34" charset="0"/>
                 <a:ea typeface="Consolas" pitchFamily="34" charset="-122"/>
                 <a:cs typeface="Consolas" pitchFamily="34" charset="-120"/>
               </a:rPr>
-              <a:t>expected_sha = hashlib.sha256(source).hexdigest()</a:t>
+              <a:t>  45  </a:t>
+            </a:r>
+            <a:r>
+              <a:rPr lang="en-US" sz="1100" b="1" dirty="0">
+                <a:solidFill>
+                  <a:srgbClr val="0F766E"/>
+                </a:solidFill>
+                <a:latin typeface="Consolas" pitchFamily="34" charset="0"/>
+                <a:ea typeface="Consolas" pitchFamily="34" charset="-122"/>
+                <a:cs typeface="Consolas" pitchFamily="34" charset="-120"/>
+              </a:rPr>
+              <a:t>if not args.read_only: store_ms = send_file(port, source)</a:t>
             </a:r>
             <a:endParaRPr lang="en-US" sz="1100" dirty="0"/>
           </a:p>
           <a:p>
-            <a:pPr indent="0" marL="0">
+            <a:pPr marL="0" indent="0">
               <a:lnSpc>
                 <a:spcPct val="120000"/>
               </a:lnSpc>
@@ -2747,12 +2589,23 @@
                 <a:ea typeface="Consolas" pitchFamily="34" charset="-122"/>
                 <a:cs typeface="Consolas" pitchFamily="34" charset="-120"/>
               </a:rPr>
-              <a:t>      ⋮</a:t>
+              <a:t>  47  </a:t>
+            </a:r>
+            <a:r>
+              <a:rPr lang="en-US" sz="1100" dirty="0">
+                <a:solidFill>
+                  <a:srgbClr val="1F2933"/>
+                </a:solidFill>
+                <a:latin typeface="Consolas" pitchFamily="34" charset="0"/>
+                <a:ea typeface="Consolas" pitchFamily="34" charset="-122"/>
+                <a:cs typeface="Consolas" pitchFamily="34" charset="-120"/>
+              </a:rPr>
+              <a:t>actual_crc = read_flash_file(port, len(source), destination)</a:t>
             </a:r>
             <a:endParaRPr lang="en-US" sz="1100" dirty="0"/>
           </a:p>
           <a:p>
-            <a:pPr indent="0" marL="0">
+            <a:pPr marL="0" indent="0">
               <a:lnSpc>
                 <a:spcPct val="120000"/>
               </a:lnSpc>
@@ -2767,29 +2620,54 @@
                 <a:ea typeface="Consolas" pitchFamily="34" charset="-122"/>
                 <a:cs typeface="Consolas" pitchFamily="34" charset="-120"/>
               </a:rPr>
-              <a:t>  45  </a:t>
-            </a:r>
-            <a:pPr indent="0" marL="0">
+              <a:t>  48  </a:t>
+            </a:r>
+            <a:r>
+              <a:rPr lang="en-US" sz="1100" dirty="0">
+                <a:solidFill>
+                  <a:srgbClr val="1F2933"/>
+                </a:solidFill>
+                <a:latin typeface="Consolas" pitchFamily="34" charset="0"/>
+                <a:ea typeface="Consolas" pitchFamily="34" charset="-122"/>
+                <a:cs typeface="Consolas" pitchFamily="34" charset="-120"/>
+              </a:rPr>
+              <a:t>restored = destination.read_bytes()</a:t>
+            </a:r>
+            <a:endParaRPr lang="en-US" sz="1100" dirty="0"/>
+          </a:p>
+          <a:p>
+            <a:pPr marL="0" indent="0">
               <a:lnSpc>
                 <a:spcPct val="120000"/>
               </a:lnSpc>
               <a:buNone/>
             </a:pPr>
             <a:r>
-              <a:rPr lang="en-US" sz="1100" b="1" dirty="0">
-                <a:solidFill>
-                  <a:srgbClr val="0F766E"/>
+              <a:rPr lang="en-US" sz="1100" dirty="0">
+                <a:solidFill>
+                  <a:srgbClr val="8A94A3"/>
                 </a:solidFill>
                 <a:latin typeface="Consolas" pitchFamily="34" charset="0"/>
                 <a:ea typeface="Consolas" pitchFamily="34" charset="-122"/>
                 <a:cs typeface="Consolas" pitchFamily="34" charset="-120"/>
               </a:rPr>
-              <a:t>if not args.read_only: store_ms = send_file(port, source)</a:t>
+              <a:t>  49  </a:t>
+            </a:r>
+            <a:r>
+              <a:rPr lang="en-US" sz="1100" dirty="0">
+                <a:solidFill>
+                  <a:srgbClr val="1F2933"/>
+                </a:solidFill>
+                <a:latin typeface="Consolas" pitchFamily="34" charset="0"/>
+                <a:ea typeface="Consolas" pitchFamily="34" charset="-122"/>
+                <a:cs typeface="Consolas" pitchFamily="34" charset="-120"/>
+              </a:rPr>
+              <a:t>actual_sha = hashlib.sha256(restored).hexdigest()</a:t>
             </a:r>
             <a:endParaRPr lang="en-US" sz="1100" dirty="0"/>
           </a:p>
           <a:p>
-            <a:pPr indent="0" marL="0">
+            <a:pPr marL="0" indent="0">
               <a:lnSpc>
                 <a:spcPct val="120000"/>
               </a:lnSpc>
@@ -2804,9 +2682,23 @@
                 <a:ea typeface="Consolas" pitchFamily="34" charset="-122"/>
                 <a:cs typeface="Consolas" pitchFamily="34" charset="-120"/>
               </a:rPr>
-              <a:t>  47  </a:t>
-            </a:r>
-            <a:pPr indent="0" marL="0">
+              <a:t>  50  </a:t>
+            </a:r>
+            <a:r>
+              <a:rPr lang="en-US" sz="1100" b="1" dirty="0">
+                <a:solidFill>
+                  <a:srgbClr val="0F766E"/>
+                </a:solidFill>
+                <a:latin typeface="Consolas" pitchFamily="34" charset="0"/>
+                <a:ea typeface="Consolas" pitchFamily="34" charset="-122"/>
+                <a:cs typeface="Consolas" pitchFamily="34" charset="-120"/>
+              </a:rPr>
+              <a:t>equal = source == restored</a:t>
+            </a:r>
+            <a:endParaRPr lang="en-US" sz="1100" dirty="0"/>
+          </a:p>
+          <a:p>
+            <a:pPr marL="0" indent="0">
               <a:lnSpc>
                 <a:spcPct val="120000"/>
               </a:lnSpc>
@@ -2815,18 +2707,29 @@
             <a:r>
               <a:rPr lang="en-US" sz="1100" dirty="0">
                 <a:solidFill>
-                  <a:srgbClr val="1F2933"/>
+                  <a:srgbClr val="8A94A3"/>
                 </a:solidFill>
                 <a:latin typeface="Consolas" pitchFamily="34" charset="0"/>
                 <a:ea typeface="Consolas" pitchFamily="34" charset="-122"/>
                 <a:cs typeface="Consolas" pitchFamily="34" charset="-120"/>
               </a:rPr>
-              <a:t>actual_crc = read_flash_file(port, len(source), destination)</a:t>
+              <a:t>  51  </a:t>
+            </a:r>
+            <a:r>
+              <a:rPr lang="en-US" sz="1100" b="1" dirty="0">
+                <a:solidFill>
+                  <a:srgbClr val="0F766E"/>
+                </a:solidFill>
+                <a:latin typeface="Consolas" pitchFamily="34" charset="0"/>
+                <a:ea typeface="Consolas" pitchFamily="34" charset="-122"/>
+                <a:cs typeface="Consolas" pitchFamily="34" charset="-120"/>
+              </a:rPr>
+              <a:t>if not equal or actual_crc != expected_crc or actual_sha != expected_sha:</a:t>
             </a:r>
             <a:endParaRPr lang="en-US" sz="1100" dirty="0"/>
           </a:p>
           <a:p>
-            <a:pPr indent="0" marL="0">
+            <a:pPr marL="0" indent="0">
               <a:lnSpc>
                 <a:spcPct val="120000"/>
               </a:lnSpc>
@@ -2841,29 +2744,91 @@
                 <a:ea typeface="Consolas" pitchFamily="34" charset="-122"/>
                 <a:cs typeface="Consolas" pitchFamily="34" charset="-120"/>
               </a:rPr>
-              <a:t>  48  </a:t>
-            </a:r>
-            <a:pPr indent="0" marL="0">
+              <a:t>  52  </a:t>
+            </a:r>
+            <a:r>
+              <a:rPr lang="en-US" sz="1100" dirty="0">
+                <a:solidFill>
+                  <a:srgbClr val="1F2933"/>
+                </a:solidFill>
+                <a:latin typeface="Consolas" pitchFamily="34" charset="0"/>
+                <a:ea typeface="Consolas" pitchFamily="34" charset="-122"/>
+                <a:cs typeface="Consolas" pitchFamily="34" charset="-120"/>
+              </a:rPr>
+              <a:t>    raise TestError("원본과 복원 파일의 내용이 다릅니다.")</a:t>
+            </a:r>
+            <a:endParaRPr lang="en-US" sz="1100" dirty="0"/>
+          </a:p>
+          <a:p>
+            <a:pPr marL="0" indent="0">
               <a:lnSpc>
                 <a:spcPct val="120000"/>
               </a:lnSpc>
               <a:buNone/>
             </a:pPr>
             <a:r>
+              <a:rPr lang="en-US" sz="600" dirty="0">
+                <a:solidFill>
+                  <a:srgbClr val="000000"/>
+                </a:solidFill>
+              </a:rPr>
+              <a:t> </a:t>
+            </a:r>
+            <a:endParaRPr lang="en-US" sz="1100" dirty="0"/>
+          </a:p>
+          <a:p>
+            <a:pPr marL="0" indent="0">
+              <a:lnSpc>
+                <a:spcPct val="120000"/>
+              </a:lnSpc>
+              <a:buNone/>
+            </a:pPr>
+            <a:r>
+              <a:rPr lang="en-US" sz="1100" b="1" dirty="0">
+                <a:solidFill>
+                  <a:srgbClr val="5F6B7A"/>
+                </a:solidFill>
+                <a:latin typeface="Malgun Gothic" pitchFamily="34" charset="0"/>
+                <a:ea typeface="Malgun Gothic" pitchFamily="34" charset="-122"/>
+                <a:cs typeface="Malgun Gothic" pitchFamily="34" charset="-120"/>
+              </a:rPr>
+              <a:t>Core/Src/uart_flash_test.c — stream_flash()</a:t>
+            </a:r>
+            <a:endParaRPr lang="en-US" sz="1100" dirty="0"/>
+          </a:p>
+          <a:p>
+            <a:pPr marL="0" indent="0">
+              <a:lnSpc>
+                <a:spcPct val="120000"/>
+              </a:lnSpc>
+              <a:buNone/>
+            </a:pPr>
+            <a:r>
               <a:rPr lang="en-US" sz="1100" dirty="0">
                 <a:solidFill>
-                  <a:srgbClr val="1F2933"/>
+                  <a:srgbClr val="8A94A3"/>
                 </a:solidFill>
                 <a:latin typeface="Consolas" pitchFamily="34" charset="0"/>
                 <a:ea typeface="Consolas" pitchFamily="34" charset="-122"/>
                 <a:cs typeface="Consolas" pitchFamily="34" charset="-120"/>
               </a:rPr>
-              <a:t>restored = destination.read_bytes()</a:t>
+              <a:t> 221  </a:t>
+            </a:r>
+            <a:r>
+              <a:rPr lang="en-US" sz="1100" b="1" dirty="0">
+                <a:solidFill>
+                  <a:srgbClr val="0F766E"/>
+                </a:solidFill>
+                <a:latin typeface="Consolas" pitchFamily="34" charset="0"/>
+                <a:ea typeface="Consolas" pitchFamily="34" charset="-122"/>
+                <a:cs typeface="Consolas" pitchFamily="34" charset="-120"/>
+              </a:rPr>
+              <a:t>  crc = crc32_update(crc, file_buffer, count);</a:t>
             </a:r>
             <a:endParaRPr lang="en-US" sz="1100" dirty="0"/>
           </a:p>
           <a:p>
-            <a:pPr indent="0" marL="0">
+            <a:pPr marL="0" indent="0">
               <a:lnSpc>
                 <a:spcPct val="120000"/>
               </a:lnSpc>
@@ -2878,9 +2843,12 @@
                 <a:ea typeface="Consolas" pitchFamily="34" charset="-122"/>
                 <a:cs typeface="Consolas" pitchFamily="34" charset="-120"/>
               </a:rPr>
-              <a:t>  49  </a:t>
-            </a:r>
-            <a:pPr indent="0" marL="0">
+              <a:t>      ⋮</a:t>
+            </a:r>
+            <a:endParaRPr lang="en-US" sz="1100" dirty="0"/>
+          </a:p>
+          <a:p>
+            <a:pPr marL="0" indent="0">
               <a:lnSpc>
                 <a:spcPct val="120000"/>
               </a:lnSpc>
@@ -2889,18 +2857,29 @@
             <a:r>
               <a:rPr lang="en-US" sz="1100" dirty="0">
                 <a:solidFill>
-                  <a:srgbClr val="1F2933"/>
+                  <a:srgbClr val="8A94A3"/>
                 </a:solidFill>
                 <a:latin typeface="Consolas" pitchFamily="34" charset="0"/>
                 <a:ea typeface="Consolas" pitchFamily="34" charset="-122"/>
                 <a:cs typeface="Consolas" pitchFamily="34" charset="-120"/>
               </a:rPr>
-              <a:t>actual_sha = hashlib.sha256(restored).hexdigest()</a:t>
+              <a:t> 228  </a:t>
+            </a:r>
+            <a:r>
+              <a:rPr lang="en-US" sz="1100" dirty="0">
+                <a:solidFill>
+                  <a:srgbClr val="1F2933"/>
+                </a:solidFill>
+                <a:latin typeface="Consolas" pitchFamily="34" charset="0"/>
+                <a:ea typeface="Consolas" pitchFamily="34" charset="-122"/>
+                <a:cs typeface="Consolas" pitchFamily="34" charset="-120"/>
+              </a:rPr>
+              <a:t>snprintf(line, sizeof(line), "FILE DATA DONE %08lX\n",</a:t>
             </a:r>
             <a:endParaRPr lang="en-US" sz="1100" dirty="0"/>
           </a:p>
           <a:p>
-            <a:pPr indent="0" marL="0">
+            <a:pPr marL="0" indent="0">
               <a:lnSpc>
                 <a:spcPct val="120000"/>
               </a:lnSpc>
@@ -2915,29 +2894,91 @@
                 <a:ea typeface="Consolas" pitchFamily="34" charset="-122"/>
                 <a:cs typeface="Consolas" pitchFamily="34" charset="-120"/>
               </a:rPr>
-              <a:t>  50  </a:t>
-            </a:r>
-            <a:pPr indent="0" marL="0">
+              <a:t> 229  </a:t>
+            </a:r>
+            <a:r>
+              <a:rPr lang="en-US" sz="1100" dirty="0">
+                <a:solidFill>
+                  <a:srgbClr val="1F2933"/>
+                </a:solidFill>
+                <a:latin typeface="Consolas" pitchFamily="34" charset="0"/>
+                <a:ea typeface="Consolas" pitchFamily="34" charset="-122"/>
+                <a:cs typeface="Consolas" pitchFamily="34" charset="-120"/>
+              </a:rPr>
+              <a:t>         (unsigned long)(crc ^ 0xFFFFFFFFU));</a:t>
+            </a:r>
+            <a:endParaRPr lang="en-US" sz="1100" dirty="0"/>
+          </a:p>
+          <a:p>
+            <a:pPr marL="0" indent="0">
               <a:lnSpc>
                 <a:spcPct val="120000"/>
               </a:lnSpc>
               <a:buNone/>
             </a:pPr>
             <a:r>
+              <a:rPr lang="en-US" sz="600" dirty="0">
+                <a:solidFill>
+                  <a:srgbClr val="000000"/>
+                </a:solidFill>
+              </a:rPr>
+              <a:t> </a:t>
+            </a:r>
+            <a:endParaRPr lang="en-US" sz="1100" dirty="0"/>
+          </a:p>
+          <a:p>
+            <a:pPr marL="0" indent="0">
+              <a:lnSpc>
+                <a:spcPct val="120000"/>
+              </a:lnSpc>
+              <a:buNone/>
+            </a:pPr>
+            <a:r>
               <a:rPr lang="en-US" sz="1100" b="1" dirty="0">
                 <a:solidFill>
-                  <a:srgbClr val="0F766E"/>
+                  <a:srgbClr val="5F6B7A"/>
+                </a:solidFill>
+                <a:latin typeface="Malgun Gothic" pitchFamily="34" charset="0"/>
+                <a:ea typeface="Malgun Gothic" pitchFamily="34" charset="-122"/>
+                <a:cs typeface="Malgun Gothic" pitchFamily="34" charset="-120"/>
+              </a:rPr>
+              <a:t>pc/bmp_store.py — read_flash_file()</a:t>
+            </a:r>
+            <a:endParaRPr lang="en-US" sz="1100" dirty="0"/>
+          </a:p>
+          <a:p>
+            <a:pPr marL="0" indent="0">
+              <a:lnSpc>
+                <a:spcPct val="120000"/>
+              </a:lnSpc>
+              <a:buNone/>
+            </a:pPr>
+            <a:r>
+              <a:rPr lang="en-US" sz="1100" dirty="0">
+                <a:solidFill>
+                  <a:srgbClr val="8A94A3"/>
                 </a:solidFill>
                 <a:latin typeface="Consolas" pitchFamily="34" charset="0"/>
                 <a:ea typeface="Consolas" pitchFamily="34" charset="-122"/>
                 <a:cs typeface="Consolas" pitchFamily="34" charset="-120"/>
               </a:rPr>
-              <a:t>equal = source == restored</a:t>
+              <a:t>  85  </a:t>
+            </a:r>
+            <a:r>
+              <a:rPr lang="en-US" sz="1100" b="1" dirty="0">
+                <a:solidFill>
+                  <a:srgbClr val="0F766E"/>
+                </a:solidFill>
+                <a:latin typeface="Consolas" pitchFamily="34" charset="0"/>
+                <a:ea typeface="Consolas" pitchFamily="34" charset="-122"/>
+                <a:cs typeface="Consolas" pitchFamily="34" charset="-120"/>
+              </a:rPr>
+              <a:t>if line != f"FILE DATA DONE {crc &amp; 0xFFFFFFFF:08X}":</a:t>
             </a:r>
             <a:endParaRPr lang="en-US" sz="1100" dirty="0"/>
           </a:p>
           <a:p>
-            <a:pPr indent="0" marL="0">
+            <a:pPr marL="0" indent="0">
               <a:lnSpc>
                 <a:spcPct val="120000"/>
               </a:lnSpc>
@@ -2952,330 +2993,8 @@
                 <a:ea typeface="Consolas" pitchFamily="34" charset="-122"/>
                 <a:cs typeface="Consolas" pitchFamily="34" charset="-120"/>
               </a:rPr>
-              <a:t>  51  </a:t>
-            </a:r>
-            <a:pPr indent="0" marL="0">
-              <a:lnSpc>
-                <a:spcPct val="120000"/>
-              </a:lnSpc>
-              <a:buNone/>
-            </a:pPr>
-            <a:r>
-              <a:rPr lang="en-US" sz="1100" b="1" dirty="0">
-                <a:solidFill>
-                  <a:srgbClr val="0F766E"/>
-                </a:solidFill>
-                <a:latin typeface="Consolas" pitchFamily="34" charset="0"/>
-                <a:ea typeface="Consolas" pitchFamily="34" charset="-122"/>
-                <a:cs typeface="Consolas" pitchFamily="34" charset="-120"/>
-              </a:rPr>
-              <a:t>if not equal or actual_crc != expected_crc or actual_sha != expected_sha:</a:t>
-            </a:r>
-            <a:endParaRPr lang="en-US" sz="1100" dirty="0"/>
-          </a:p>
-          <a:p>
-            <a:pPr indent="0" marL="0">
-              <a:lnSpc>
-                <a:spcPct val="120000"/>
-              </a:lnSpc>
-              <a:buNone/>
-            </a:pPr>
-            <a:r>
-              <a:rPr lang="en-US" sz="1100" dirty="0">
-                <a:solidFill>
-                  <a:srgbClr val="8A94A3"/>
-                </a:solidFill>
-                <a:latin typeface="Consolas" pitchFamily="34" charset="0"/>
-                <a:ea typeface="Consolas" pitchFamily="34" charset="-122"/>
-                <a:cs typeface="Consolas" pitchFamily="34" charset="-120"/>
-              </a:rPr>
-              <a:t>  52  </a:t>
-            </a:r>
-            <a:pPr indent="0" marL="0">
-              <a:lnSpc>
-                <a:spcPct val="120000"/>
-              </a:lnSpc>
-              <a:buNone/>
-            </a:pPr>
-            <a:r>
-              <a:rPr lang="en-US" sz="1100" dirty="0">
-                <a:solidFill>
-                  <a:srgbClr val="1F2933"/>
-                </a:solidFill>
-                <a:latin typeface="Consolas" pitchFamily="34" charset="0"/>
-                <a:ea typeface="Consolas" pitchFamily="34" charset="-122"/>
-                <a:cs typeface="Consolas" pitchFamily="34" charset="-120"/>
-              </a:rPr>
-              <a:t>    raise TestError("원본과 복원 파일의 내용이 다릅니다.")</a:t>
-            </a:r>
-            <a:endParaRPr lang="en-US" sz="1100" dirty="0"/>
-          </a:p>
-          <a:p>
-            <a:pPr indent="0" marL="0">
-              <a:lnSpc>
-                <a:spcPct val="120000"/>
-              </a:lnSpc>
-              <a:buNone/>
-            </a:pPr>
-            <a:r>
-              <a:rPr lang="en-US" sz="600" dirty="0">
-                <a:solidFill>
-                  <a:srgbClr val="000000"/>
-                </a:solidFill>
-              </a:rPr>
-              <a:t> </a:t>
-            </a:r>
-            <a:endParaRPr lang="en-US" sz="1100" dirty="0"/>
-          </a:p>
-          <a:p>
-            <a:pPr indent="0" marL="0">
-              <a:lnSpc>
-                <a:spcPct val="120000"/>
-              </a:lnSpc>
-              <a:buNone/>
-            </a:pPr>
-            <a:r>
-              <a:rPr lang="en-US" sz="1100" b="1" dirty="0">
-                <a:solidFill>
-                  <a:srgbClr val="5F6B7A"/>
-                </a:solidFill>
-                <a:latin typeface="Malgun Gothic" pitchFamily="34" charset="0"/>
-                <a:ea typeface="Malgun Gothic" pitchFamily="34" charset="-122"/>
-                <a:cs typeface="Malgun Gothic" pitchFamily="34" charset="-120"/>
-              </a:rPr>
-              <a:t>Core/Src/uart_flash_test.c — stream_flash()</a:t>
-            </a:r>
-            <a:endParaRPr lang="en-US" sz="1100" dirty="0"/>
-          </a:p>
-          <a:p>
-            <a:pPr indent="0" marL="0">
-              <a:lnSpc>
-                <a:spcPct val="120000"/>
-              </a:lnSpc>
-              <a:buNone/>
-            </a:pPr>
-            <a:r>
-              <a:rPr lang="en-US" sz="1100" dirty="0">
-                <a:solidFill>
-                  <a:srgbClr val="8A94A3"/>
-                </a:solidFill>
-                <a:latin typeface="Consolas" pitchFamily="34" charset="0"/>
-                <a:ea typeface="Consolas" pitchFamily="34" charset="-122"/>
-                <a:cs typeface="Consolas" pitchFamily="34" charset="-120"/>
-              </a:rPr>
-              <a:t> 221  </a:t>
-            </a:r>
-            <a:pPr indent="0" marL="0">
-              <a:lnSpc>
-                <a:spcPct val="120000"/>
-              </a:lnSpc>
-              <a:buNone/>
-            </a:pPr>
-            <a:r>
-              <a:rPr lang="en-US" sz="1100" b="1" dirty="0">
-                <a:solidFill>
-                  <a:srgbClr val="0F766E"/>
-                </a:solidFill>
-                <a:latin typeface="Consolas" pitchFamily="34" charset="0"/>
-                <a:ea typeface="Consolas" pitchFamily="34" charset="-122"/>
-                <a:cs typeface="Consolas" pitchFamily="34" charset="-120"/>
-              </a:rPr>
-              <a:t>  crc = crc32_update(crc, file_buffer, count);</a:t>
-            </a:r>
-            <a:endParaRPr lang="en-US" sz="1100" dirty="0"/>
-          </a:p>
-          <a:p>
-            <a:pPr indent="0" marL="0">
-              <a:lnSpc>
-                <a:spcPct val="120000"/>
-              </a:lnSpc>
-              <a:buNone/>
-            </a:pPr>
-            <a:r>
-              <a:rPr lang="en-US" sz="1100" dirty="0">
-                <a:solidFill>
-                  <a:srgbClr val="8A94A3"/>
-                </a:solidFill>
-                <a:latin typeface="Consolas" pitchFamily="34" charset="0"/>
-                <a:ea typeface="Consolas" pitchFamily="34" charset="-122"/>
-                <a:cs typeface="Consolas" pitchFamily="34" charset="-120"/>
-              </a:rPr>
-              <a:t>      ⋮</a:t>
-            </a:r>
-            <a:endParaRPr lang="en-US" sz="1100" dirty="0"/>
-          </a:p>
-          <a:p>
-            <a:pPr indent="0" marL="0">
-              <a:lnSpc>
-                <a:spcPct val="120000"/>
-              </a:lnSpc>
-              <a:buNone/>
-            </a:pPr>
-            <a:r>
-              <a:rPr lang="en-US" sz="1100" dirty="0">
-                <a:solidFill>
-                  <a:srgbClr val="8A94A3"/>
-                </a:solidFill>
-                <a:latin typeface="Consolas" pitchFamily="34" charset="0"/>
-                <a:ea typeface="Consolas" pitchFamily="34" charset="-122"/>
-                <a:cs typeface="Consolas" pitchFamily="34" charset="-120"/>
-              </a:rPr>
-              <a:t> 228  </a:t>
-            </a:r>
-            <a:pPr indent="0" marL="0">
-              <a:lnSpc>
-                <a:spcPct val="120000"/>
-              </a:lnSpc>
-              <a:buNone/>
-            </a:pPr>
-            <a:r>
-              <a:rPr lang="en-US" sz="1100" dirty="0">
-                <a:solidFill>
-                  <a:srgbClr val="1F2933"/>
-                </a:solidFill>
-                <a:latin typeface="Consolas" pitchFamily="34" charset="0"/>
-                <a:ea typeface="Consolas" pitchFamily="34" charset="-122"/>
-                <a:cs typeface="Consolas" pitchFamily="34" charset="-120"/>
-              </a:rPr>
-              <a:t>snprintf(line, sizeof(line), "FILE DATA DONE %08lX\n",</a:t>
-            </a:r>
-            <a:endParaRPr lang="en-US" sz="1100" dirty="0"/>
-          </a:p>
-          <a:p>
-            <a:pPr indent="0" marL="0">
-              <a:lnSpc>
-                <a:spcPct val="120000"/>
-              </a:lnSpc>
-              <a:buNone/>
-            </a:pPr>
-            <a:r>
-              <a:rPr lang="en-US" sz="1100" dirty="0">
-                <a:solidFill>
-                  <a:srgbClr val="8A94A3"/>
-                </a:solidFill>
-                <a:latin typeface="Consolas" pitchFamily="34" charset="0"/>
-                <a:ea typeface="Consolas" pitchFamily="34" charset="-122"/>
-                <a:cs typeface="Consolas" pitchFamily="34" charset="-120"/>
-              </a:rPr>
-              <a:t> 229  </a:t>
-            </a:r>
-            <a:pPr indent="0" marL="0">
-              <a:lnSpc>
-                <a:spcPct val="120000"/>
-              </a:lnSpc>
-              <a:buNone/>
-            </a:pPr>
-            <a:r>
-              <a:rPr lang="en-US" sz="1100" dirty="0">
-                <a:solidFill>
-                  <a:srgbClr val="1F2933"/>
-                </a:solidFill>
-                <a:latin typeface="Consolas" pitchFamily="34" charset="0"/>
-                <a:ea typeface="Consolas" pitchFamily="34" charset="-122"/>
-                <a:cs typeface="Consolas" pitchFamily="34" charset="-120"/>
-              </a:rPr>
-              <a:t>         (unsigned long)(crc ^ 0xFFFFFFFFU));</a:t>
-            </a:r>
-            <a:endParaRPr lang="en-US" sz="1100" dirty="0"/>
-          </a:p>
-          <a:p>
-            <a:pPr indent="0" marL="0">
-              <a:lnSpc>
-                <a:spcPct val="120000"/>
-              </a:lnSpc>
-              <a:buNone/>
-            </a:pPr>
-            <a:r>
-              <a:rPr lang="en-US" sz="600" dirty="0">
-                <a:solidFill>
-                  <a:srgbClr val="000000"/>
-                </a:solidFill>
-              </a:rPr>
-              <a:t> </a:t>
-            </a:r>
-            <a:endParaRPr lang="en-US" sz="1100" dirty="0"/>
-          </a:p>
-          <a:p>
-            <a:pPr indent="0" marL="0">
-              <a:lnSpc>
-                <a:spcPct val="120000"/>
-              </a:lnSpc>
-              <a:buNone/>
-            </a:pPr>
-            <a:r>
-              <a:rPr lang="en-US" sz="1100" b="1" dirty="0">
-                <a:solidFill>
-                  <a:srgbClr val="5F6B7A"/>
-                </a:solidFill>
-                <a:latin typeface="Malgun Gothic" pitchFamily="34" charset="0"/>
-                <a:ea typeface="Malgun Gothic" pitchFamily="34" charset="-122"/>
-                <a:cs typeface="Malgun Gothic" pitchFamily="34" charset="-120"/>
-              </a:rPr>
-              <a:t>pc/bmp_store.py — read_flash_file()</a:t>
-            </a:r>
-            <a:endParaRPr lang="en-US" sz="1100" dirty="0"/>
-          </a:p>
-          <a:p>
-            <a:pPr indent="0" marL="0">
-              <a:lnSpc>
-                <a:spcPct val="120000"/>
-              </a:lnSpc>
-              <a:buNone/>
-            </a:pPr>
-            <a:r>
-              <a:rPr lang="en-US" sz="1100" dirty="0">
-                <a:solidFill>
-                  <a:srgbClr val="8A94A3"/>
-                </a:solidFill>
-                <a:latin typeface="Consolas" pitchFamily="34" charset="0"/>
-                <a:ea typeface="Consolas" pitchFamily="34" charset="-122"/>
-                <a:cs typeface="Consolas" pitchFamily="34" charset="-120"/>
-              </a:rPr>
-              <a:t>  85  </a:t>
-            </a:r>
-            <a:pPr indent="0" marL="0">
-              <a:lnSpc>
-                <a:spcPct val="120000"/>
-              </a:lnSpc>
-              <a:buNone/>
-            </a:pPr>
-            <a:r>
-              <a:rPr lang="en-US" sz="1100" b="1" dirty="0">
-                <a:solidFill>
-                  <a:srgbClr val="0F766E"/>
-                </a:solidFill>
-                <a:latin typeface="Consolas" pitchFamily="34" charset="0"/>
-                <a:ea typeface="Consolas" pitchFamily="34" charset="-122"/>
-                <a:cs typeface="Consolas" pitchFamily="34" charset="-120"/>
-              </a:rPr>
-              <a:t>if line != f"FILE DATA DONE {crc &amp; 0xFFFFFFFF:08X}":</a:t>
-            </a:r>
-            <a:endParaRPr lang="en-US" sz="1100" dirty="0"/>
-          </a:p>
-          <a:p>
-            <a:pPr indent="0" marL="0">
-              <a:lnSpc>
-                <a:spcPct val="120000"/>
-              </a:lnSpc>
-              <a:buNone/>
-            </a:pPr>
-            <a:r>
-              <a:rPr lang="en-US" sz="1100" dirty="0">
-                <a:solidFill>
-                  <a:srgbClr val="8A94A3"/>
-                </a:solidFill>
-                <a:latin typeface="Consolas" pitchFamily="34" charset="0"/>
-                <a:ea typeface="Consolas" pitchFamily="34" charset="-122"/>
-                <a:cs typeface="Consolas" pitchFamily="34" charset="-120"/>
-              </a:rPr>
               <a:t>  86  </a:t>
             </a:r>
-            <a:pPr indent="0" marL="0">
-              <a:lnSpc>
-                <a:spcPct val="120000"/>
-              </a:lnSpc>
-              <a:buNone/>
-            </a:pPr>
             <a:r>
               <a:rPr lang="en-US" sz="1100" dirty="0">
                 <a:solidFill>
@@ -3312,7 +3031,7 @@
           <a:bodyPr wrap="square" lIns="0" tIns="0" rIns="0" bIns="0" rtlCol="0" anchor="t"/>
           <a:lstStyle/>
           <a:p>
-            <a:pPr indent="0" marL="0">
+            <a:pPr marL="0" indent="0">
               <a:lnSpc>
                 <a:spcPct val="110000"/>
               </a:lnSpc>
@@ -3332,7 +3051,7 @@
             <a:endParaRPr lang="en-US" sz="1600" dirty="0"/>
           </a:p>
           <a:p>
-            <a:pPr indent="0" marL="0">
+            <a:pPr marL="0" indent="0">
               <a:lnSpc>
                 <a:spcPct val="110000"/>
               </a:lnSpc>
@@ -3355,7 +3074,7 @@
             <a:endParaRPr lang="en-US" sz="1600" dirty="0"/>
           </a:p>
           <a:p>
-            <a:pPr indent="0" marL="0">
+            <a:pPr marL="0" indent="0">
               <a:lnSpc>
                 <a:spcPct val="110000"/>
               </a:lnSpc>
@@ -3375,7 +3094,7 @@
             <a:endParaRPr lang="en-US" sz="1600" dirty="0"/>
           </a:p>
           <a:p>
-            <a:pPr indent="0" marL="0">
+            <a:pPr marL="0" indent="0">
               <a:lnSpc>
                 <a:spcPct val="110000"/>
               </a:lnSpc>
@@ -3398,7 +3117,7 @@
             <a:endParaRPr lang="en-US" sz="1600" dirty="0"/>
           </a:p>
           <a:p>
-            <a:pPr indent="0" marL="0">
+            <a:pPr marL="0" indent="0">
               <a:lnSpc>
                 <a:spcPct val="110000"/>
               </a:lnSpc>
@@ -3418,7 +3137,7 @@
             <a:endParaRPr lang="en-US" sz="1600" dirty="0"/>
           </a:p>
           <a:p>
-            <a:pPr indent="0" marL="0">
+            <a:pPr marL="0" indent="0">
               <a:lnSpc>
                 <a:spcPct val="110000"/>
               </a:lnSpc>
@@ -3441,7 +3160,7 @@
             <a:endParaRPr lang="en-US" sz="1600" dirty="0"/>
           </a:p>
           <a:p>
-            <a:pPr indent="0" marL="0">
+            <a:pPr marL="0" indent="0">
               <a:lnSpc>
                 <a:spcPct val="110000"/>
               </a:lnSpc>
@@ -3461,7 +3180,7 @@
             <a:endParaRPr lang="en-US" sz="1600" dirty="0"/>
           </a:p>
           <a:p>
-            <a:pPr indent="0" marL="0">
+            <a:pPr marL="0" indent="0">
               <a:lnSpc>
                 <a:spcPct val="110000"/>
               </a:lnSpc>
@@ -3482,45 +3201,6 @@
               <a:t>원본과 복원 파일의 바이트, CRC32, SHA-256이 모두 같아야 통과</a:t>
             </a:r>
             <a:endParaRPr lang="en-US" sz="1600" dirty="0"/>
-          </a:p>
-        </p:txBody>
-      </p:sp>
-      <p:sp>
-        <p:nvSpPr>
-          <p:cNvPr id="6" name="Text 4"/>
-          <p:cNvSpPr txBox="1"/>
-          <p:nvPr/>
-        </p:nvSpPr>
-        <p:spPr>
-          <a:xfrm>
-            <a:off x="8412480" y="5715000"/>
-            <a:ext cx="3227832" cy="457200"/>
-          </a:xfrm>
-          <a:prstGeom prst="rect">
-            <a:avLst/>
-          </a:prstGeom>
-          <a:noFill/>
-          <a:ln/>
-        </p:spPr>
-        <p:txBody>
-          <a:bodyPr wrap="square" lIns="0" tIns="0" rIns="0" bIns="0" rtlCol="0" anchor="t"/>
-          <a:lstStyle/>
-          <a:p>
-            <a:pPr indent="0" marL="0">
-              <a:buNone/>
-            </a:pPr>
-            <a:r>
-              <a:rPr lang="en-US" sz="1200" dirty="0">
-                <a:solidFill>
-                  <a:srgbClr val="5F6B7A"/>
-                </a:solidFill>
-                <a:latin typeface="Malgun Gothic" pitchFamily="34" charset="0"/>
-                <a:ea typeface="Malgun Gothic" pitchFamily="34" charset="-122"/>
-                <a:cs typeface="Malgun Gothic" pitchFamily="34" charset="-120"/>
-              </a:rPr>
-              <a:t>결과는 demo_report_*.json에 byte_equal, CRC32, SHA-256, JEDEC, DMA 통계로 저장</a:t>
-            </a:r>
-            <a:endParaRPr lang="en-US" sz="1200" dirty="0"/>
           </a:p>
         </p:txBody>
       </p:sp>
@@ -3544,7 +3224,7 @@
           </a:prstGeom>
           <a:extLst>
             <a:ext uri="{C572A759-6A51-4108-AA02-DFA0A04FC94B}">
-              <ma14:wrappingTextBoxFlag xmlns:ma14="http://schemas.microsoft.com/office/mac/drawingml/2011/main" val="0"/>
+              <ma14:wrappingTextBoxFlag xmlns:ma14="http://schemas.microsoft.com/office/mac/drawingml/2011/main" xmlns="" val="0"/>
             </a:ext>
           </a:extLst>
         </p:spPr>
@@ -3565,7 +3245,7 @@
           <a:p>
             <a:pPr algn="r"/>
             <a:fld id="{F7021451-1387-4CA6-816F-3879F97B5CBC}" type="slidenum">
-              <a:rPr b="0" lang="en-US"/>
+              <a:rPr lang="en-US" b="0"/>
               <a:t>10</a:t>
             </a:fld>
             <a:endParaRPr lang="en-US"/>
@@ -3600,9 +3280,11 @@
       <p:sp>
         <p:nvSpPr>
           <p:cNvPr id="2" name="Text 0"/>
-          <p:cNvSpPr/>
+          <p:cNvSpPr>
+            <a:spLocks noGrp="1"/>
+          </p:cNvSpPr>
           <p:nvPr>
-            <p:ph idx="100" type="title" hasCustomPrompt="1"/>
+            <p:ph type="title" idx="100" hasCustomPrompt="1"/>
           </p:nvPr>
         </p:nvSpPr>
         <p:spPr>
@@ -3620,7 +3302,7 @@
           <a:bodyPr wrap="square" lIns="0" tIns="0" rIns="0" bIns="0" rtlCol="0" anchor="ctr"/>
           <a:lstStyle/>
           <a:p>
-            <a:pPr algn="l" indent="0" marL="0">
+            <a:pPr marL="0" indent="0" algn="l">
               <a:buNone/>
             </a:pPr>
             <a:r>
@@ -3662,6 +3344,13 @@
             <a:prstDash val="solid"/>
           </a:ln>
         </p:spPr>
+        <p:txBody>
+          <a:bodyPr/>
+          <a:lstStyle/>
+          <a:p>
+            <a:endParaRPr lang="ko-KR" altLang="en-US"/>
+          </a:p>
+        </p:txBody>
       </p:sp>
       <p:sp>
         <p:nvSpPr>
@@ -3684,7 +3373,7 @@
           <a:bodyPr wrap="none" lIns="0" tIns="0" rIns="0" bIns="0" rtlCol="0" anchor="t"/>
           <a:lstStyle/>
           <a:p>
-            <a:pPr indent="0" marL="0">
+            <a:pPr marL="0" indent="0">
               <a:lnSpc>
                 <a:spcPct val="120000"/>
               </a:lnSpc>
@@ -3704,7 +3393,7 @@
             <a:endParaRPr lang="en-US" sz="1000" dirty="0"/>
           </a:p>
           <a:p>
-            <a:pPr indent="0" marL="0">
+            <a:pPr marL="0" indent="0">
               <a:lnSpc>
                 <a:spcPct val="120000"/>
               </a:lnSpc>
@@ -3721,27 +3410,52 @@
               </a:rPr>
               <a:t> 199  </a:t>
             </a:r>
-            <a:pPr indent="0" marL="0">
+            <a:r>
+              <a:rPr lang="en-US" sz="1000" b="1" dirty="0">
+                <a:solidFill>
+                  <a:srgbClr val="0F766E"/>
+                </a:solidFill>
+                <a:latin typeface="Consolas" pitchFamily="34" charset="0"/>
+                <a:ea typeface="Consolas" pitchFamily="34" charset="-122"/>
+                <a:cs typeface="Consolas" pitchFamily="34" charset="-120"/>
+              </a:rPr>
+              <a:t>capture([programmer, "-c", "port=SWD", "mode=UR", "-el", tools["ExternalLoader"],</a:t>
+            </a:r>
+            <a:endParaRPr lang="en-US" sz="1000" dirty="0"/>
+          </a:p>
+          <a:p>
+            <a:pPr marL="0" indent="0">
               <a:lnSpc>
                 <a:spcPct val="120000"/>
               </a:lnSpc>
               <a:buNone/>
             </a:pPr>
             <a:r>
-              <a:rPr lang="en-US" sz="1000" b="1" dirty="0">
-                <a:solidFill>
-                  <a:srgbClr val="0F766E"/>
+              <a:rPr lang="en-US" sz="1000" dirty="0">
+                <a:solidFill>
+                  <a:srgbClr val="8A94A3"/>
                 </a:solidFill>
                 <a:latin typeface="Consolas" pitchFamily="34" charset="0"/>
                 <a:ea typeface="Consolas" pitchFamily="34" charset="-122"/>
                 <a:cs typeface="Consolas" pitchFamily="34" charset="-120"/>
               </a:rPr>
-              <a:t>capture([programmer, "-c", "port=SWD", "mode=UR", "-el", tools["ExternalLoader"],</a:t>
+              <a:t> 200  </a:t>
+            </a:r>
+            <a:r>
+              <a:rPr lang="en-US" sz="1000" b="1" dirty="0">
+                <a:solidFill>
+                  <a:srgbClr val="0F766E"/>
+                </a:solidFill>
+                <a:latin typeface="Consolas" pitchFamily="34" charset="0"/>
+                <a:ea typeface="Consolas" pitchFamily="34" charset="-122"/>
+                <a:cs typeface="Consolas" pitchFamily="34" charset="-120"/>
+              </a:rPr>
+              <a:t>         "-u", "0x90000000", size, dump])</a:t>
             </a:r>
             <a:endParaRPr lang="en-US" sz="1000" dirty="0"/>
           </a:p>
           <a:p>
-            <a:pPr indent="0" marL="0">
+            <a:pPr marL="0" indent="0">
               <a:lnSpc>
                 <a:spcPct val="120000"/>
               </a:lnSpc>
@@ -3756,29 +3470,43 @@
                 <a:ea typeface="Consolas" pitchFamily="34" charset="-122"/>
                 <a:cs typeface="Consolas" pitchFamily="34" charset="-120"/>
               </a:rPr>
-              <a:t> 200  </a:t>
-            </a:r>
-            <a:pPr indent="0" marL="0">
+              <a:t>      ⋮</a:t>
+            </a:r>
+            <a:endParaRPr lang="en-US" sz="1000" dirty="0"/>
+          </a:p>
+          <a:p>
+            <a:pPr marL="0" indent="0">
               <a:lnSpc>
                 <a:spcPct val="120000"/>
               </a:lnSpc>
               <a:buNone/>
             </a:pPr>
             <a:r>
-              <a:rPr lang="en-US" sz="1000" b="1" dirty="0">
-                <a:solidFill>
-                  <a:srgbClr val="0F766E"/>
+              <a:rPr lang="en-US" sz="1000" dirty="0">
+                <a:solidFill>
+                  <a:srgbClr val="8A94A3"/>
                 </a:solidFill>
                 <a:latin typeface="Consolas" pitchFamily="34" charset="0"/>
                 <a:ea typeface="Consolas" pitchFamily="34" charset="-122"/>
                 <a:cs typeface="Consolas" pitchFamily="34" charset="-120"/>
               </a:rPr>
-              <a:t>         "-u", "0x90000000", size, dump])</a:t>
+              <a:t> 205  </a:t>
+            </a:r>
+            <a:r>
+              <a:rPr lang="en-US" sz="1000" b="1" dirty="0">
+                <a:solidFill>
+                  <a:srgbClr val="0F766E"/>
+                </a:solidFill>
+                <a:latin typeface="Consolas" pitchFamily="34" charset="0"/>
+                <a:ea typeface="Consolas" pitchFamily="34" charset="-122"/>
+                <a:cs typeface="Consolas" pitchFamily="34" charset="-120"/>
+              </a:rPr>
+              <a:t>if dumped != original:</a:t>
             </a:r>
             <a:endParaRPr lang="en-US" sz="1000" dirty="0"/>
           </a:p>
           <a:p>
-            <a:pPr indent="0" marL="0">
+            <a:pPr marL="0" indent="0">
               <a:lnSpc>
                 <a:spcPct val="120000"/>
               </a:lnSpc>
@@ -3793,18 +3521,66 @@
                 <a:ea typeface="Consolas" pitchFamily="34" charset="-122"/>
                 <a:cs typeface="Consolas" pitchFamily="34" charset="-120"/>
               </a:rPr>
-              <a:t>      ⋮</a:t>
+              <a:t> 206  </a:t>
+            </a:r>
+            <a:r>
+              <a:rPr lang="en-US" sz="1000" dirty="0">
+                <a:solidFill>
+                  <a:srgbClr val="1F2933"/>
+                </a:solidFill>
+                <a:latin typeface="Consolas" pitchFamily="34" charset="0"/>
+                <a:ea typeface="Consolas" pitchFamily="34" charset="-122"/>
+                <a:cs typeface="Consolas" pitchFamily="34" charset="-120"/>
+              </a:rPr>
+              <a:t>    raise StepFailed("Flash 칩 내용이 원본과 다릅니다")</a:t>
             </a:r>
             <a:endParaRPr lang="en-US" sz="1000" dirty="0"/>
           </a:p>
           <a:p>
-            <a:pPr indent="0" marL="0">
+            <a:pPr marL="0" indent="0">
               <a:lnSpc>
                 <a:spcPct val="120000"/>
               </a:lnSpc>
               <a:buNone/>
             </a:pPr>
             <a:r>
+              <a:rPr lang="en-US" sz="600" dirty="0">
+                <a:solidFill>
+                  <a:srgbClr val="000000"/>
+                </a:solidFill>
+              </a:rPr>
+              <a:t> </a:t>
+            </a:r>
+            <a:endParaRPr lang="en-US" sz="1000" dirty="0"/>
+          </a:p>
+          <a:p>
+            <a:pPr marL="0" indent="0">
+              <a:lnSpc>
+                <a:spcPct val="120000"/>
+              </a:lnSpc>
+              <a:buNone/>
+            </a:pPr>
+            <a:r>
+              <a:rPr lang="en-US" sz="1000" b="1" dirty="0">
+                <a:solidFill>
+                  <a:srgbClr val="5F6B7A"/>
+                </a:solidFill>
+                <a:latin typeface="Malgun Gothic" pitchFamily="34" charset="0"/>
+                <a:ea typeface="Malgun Gothic" pitchFamily="34" charset="-122"/>
+                <a:cs typeface="Malgun Gothic" pitchFamily="34" charset="-120"/>
+              </a:rPr>
+              <a:t>run_all.py — 9단계: RAM 320 KB를 0xA5로 덮어쓴 뒤 Flash에서만 복원</a:t>
+            </a:r>
+            <a:endParaRPr lang="en-US" sz="1000" dirty="0"/>
+          </a:p>
+          <a:p>
+            <a:pPr marL="0" indent="0">
+              <a:lnSpc>
+                <a:spcPct val="120000"/>
+              </a:lnSpc>
+              <a:buNone/>
+            </a:pPr>
+            <a:r>
               <a:rPr lang="en-US" sz="1000" dirty="0">
                 <a:solidFill>
                   <a:srgbClr val="8A94A3"/>
@@ -3813,29 +3589,54 @@
                 <a:ea typeface="Consolas" pitchFamily="34" charset="-122"/>
                 <a:cs typeface="Consolas" pitchFamily="34" charset="-120"/>
               </a:rPr>
-              <a:t> 205  </a:t>
-            </a:r>
-            <a:pPr indent="0" marL="0">
+              <a:t> 210  </a:t>
+            </a:r>
+            <a:r>
+              <a:rPr lang="en-US" sz="1000" b="1" dirty="0">
+                <a:solidFill>
+                  <a:srgbClr val="0F766E"/>
+                </a:solidFill>
+                <a:latin typeface="Consolas" pitchFamily="34" charset="0"/>
+                <a:ea typeface="Consolas" pitchFamily="34" charset="-122"/>
+                <a:cs typeface="Consolas" pitchFamily="34" charset="-120"/>
+              </a:rPr>
+              <a:t>output = capture([programmer, "-c", "port=SWD", "mode=UR", "-fillmemory", "0x20000000", "size=0x50000",</a:t>
+            </a:r>
+            <a:endParaRPr lang="en-US" sz="1000" dirty="0"/>
+          </a:p>
+          <a:p>
+            <a:pPr marL="0" indent="0">
               <a:lnSpc>
                 <a:spcPct val="120000"/>
               </a:lnSpc>
               <a:buNone/>
             </a:pPr>
             <a:r>
-              <a:rPr lang="en-US" sz="1000" b="1" dirty="0">
-                <a:solidFill>
-                  <a:srgbClr val="0F766E"/>
+              <a:rPr lang="en-US" sz="1000" dirty="0">
+                <a:solidFill>
+                  <a:srgbClr val="8A94A3"/>
                 </a:solidFill>
                 <a:latin typeface="Consolas" pitchFamily="34" charset="0"/>
                 <a:ea typeface="Consolas" pitchFamily="34" charset="-122"/>
                 <a:cs typeface="Consolas" pitchFamily="34" charset="-120"/>
               </a:rPr>
-              <a:t>if dumped != original:</a:t>
+              <a:t> 211  </a:t>
+            </a:r>
+            <a:r>
+              <a:rPr lang="en-US" sz="1000" dirty="0">
+                <a:solidFill>
+                  <a:srgbClr val="1F2933"/>
+                </a:solidFill>
+                <a:latin typeface="Consolas" pitchFamily="34" charset="0"/>
+                <a:ea typeface="Consolas" pitchFamily="34" charset="-122"/>
+                <a:cs typeface="Consolas" pitchFamily="34" charset="-120"/>
+              </a:rPr>
+              <a:t>                  "pattern=0xA5A5A5A5", "dataWidth=32", "-r32", "0x20000000", "0x10",</a:t>
             </a:r>
             <a:endParaRPr lang="en-US" sz="1000" dirty="0"/>
           </a:p>
           <a:p>
-            <a:pPr indent="0" marL="0">
+            <a:pPr marL="0" indent="0">
               <a:lnSpc>
                 <a:spcPct val="120000"/>
               </a:lnSpc>
@@ -3850,9 +3651,23 @@
                 <a:ea typeface="Consolas" pitchFamily="34" charset="-122"/>
                 <a:cs typeface="Consolas" pitchFamily="34" charset="-120"/>
               </a:rPr>
-              <a:t> 206  </a:t>
-            </a:r>
-            <a:pPr indent="0" marL="0">
+              <a:t> 212  </a:t>
+            </a:r>
+            <a:r>
+              <a:rPr lang="en-US" sz="1000" dirty="0">
+                <a:solidFill>
+                  <a:srgbClr val="1F2933"/>
+                </a:solidFill>
+                <a:latin typeface="Consolas" pitchFamily="34" charset="0"/>
+                <a:ea typeface="Consolas" pitchFamily="34" charset="-122"/>
+                <a:cs typeface="Consolas" pitchFamily="34" charset="-120"/>
+              </a:rPr>
+              <a:t>                  "-r32", "0x20027FF0", "0x10", "-r32", "0x2004FFF0", "0x10"])</a:t>
+            </a:r>
+            <a:endParaRPr lang="en-US" sz="1000" dirty="0"/>
+          </a:p>
+          <a:p>
+            <a:pPr marL="0" indent="0">
               <a:lnSpc>
                 <a:spcPct val="120000"/>
               </a:lnSpc>
@@ -3861,55 +3676,80 @@
             <a:r>
               <a:rPr lang="en-US" sz="1000" dirty="0">
                 <a:solidFill>
-                  <a:srgbClr val="1F2933"/>
+                  <a:srgbClr val="8A94A3"/>
                 </a:solidFill>
                 <a:latin typeface="Consolas" pitchFamily="34" charset="0"/>
                 <a:ea typeface="Consolas" pitchFamily="34" charset="-122"/>
                 <a:cs typeface="Consolas" pitchFamily="34" charset="-120"/>
               </a:rPr>
-              <a:t>    raise StepFailed("Flash 칩 내용이 원본과 다릅니다")</a:t>
+              <a:t> 213  </a:t>
+            </a:r>
+            <a:r>
+              <a:rPr lang="en-US" sz="1000" b="1" dirty="0">
+                <a:solidFill>
+                  <a:srgbClr val="0F766E"/>
+                </a:solidFill>
+                <a:latin typeface="Consolas" pitchFamily="34" charset="0"/>
+                <a:ea typeface="Consolas" pitchFamily="34" charset="-122"/>
+                <a:cs typeface="Consolas" pitchFamily="34" charset="-120"/>
+              </a:rPr>
+              <a:t>if output.count("A5A5A5A5 A5A5A5A5 A5A5A5A5 A5A5A5A5") != 3:</a:t>
             </a:r>
             <a:endParaRPr lang="en-US" sz="1000" dirty="0"/>
           </a:p>
           <a:p>
-            <a:pPr indent="0" marL="0">
+            <a:pPr marL="0" indent="0">
               <a:lnSpc>
                 <a:spcPct val="120000"/>
               </a:lnSpc>
               <a:buNone/>
             </a:pPr>
             <a:r>
-              <a:rPr lang="en-US" sz="600" dirty="0">
-                <a:solidFill>
-                  <a:srgbClr val="000000"/>
-                </a:solidFill>
-              </a:rPr>
-              <a:t> </a:t>
+              <a:rPr lang="en-US" sz="1000" dirty="0">
+                <a:solidFill>
+                  <a:srgbClr val="8A94A3"/>
+                </a:solidFill>
+                <a:latin typeface="Consolas" pitchFamily="34" charset="0"/>
+                <a:ea typeface="Consolas" pitchFamily="34" charset="-122"/>
+                <a:cs typeface="Consolas" pitchFamily="34" charset="-120"/>
+              </a:rPr>
+              <a:t>      ⋮</a:t>
             </a:r>
             <a:endParaRPr lang="en-US" sz="1000" dirty="0"/>
           </a:p>
           <a:p>
-            <a:pPr indent="0" marL="0">
+            <a:pPr marL="0" indent="0">
               <a:lnSpc>
                 <a:spcPct val="120000"/>
               </a:lnSpc>
               <a:buNone/>
             </a:pPr>
             <a:r>
-              <a:rPr lang="en-US" sz="1000" b="1" dirty="0">
-                <a:solidFill>
-                  <a:srgbClr val="5F6B7A"/>
-                </a:solidFill>
-                <a:latin typeface="Malgun Gothic" pitchFamily="34" charset="0"/>
-                <a:ea typeface="Malgun Gothic" pitchFamily="34" charset="-122"/>
-                <a:cs typeface="Malgun Gothic" pitchFamily="34" charset="-120"/>
-              </a:rPr>
-              <a:t>run_all.py — 9단계: RAM 320 KB를 0xA5로 덮어쓴 뒤 Flash에서만 복원</a:t>
+              <a:rPr lang="en-US" sz="1000" dirty="0">
+                <a:solidFill>
+                  <a:srgbClr val="8A94A3"/>
+                </a:solidFill>
+                <a:latin typeface="Consolas" pitchFamily="34" charset="0"/>
+                <a:ea typeface="Consolas" pitchFamily="34" charset="-122"/>
+                <a:cs typeface="Consolas" pitchFamily="34" charset="-120"/>
+              </a:rPr>
+              <a:t> 216  </a:t>
+            </a:r>
+            <a:r>
+              <a:rPr lang="en-US" sz="1000" dirty="0">
+                <a:solidFill>
+                  <a:srgbClr val="1F2933"/>
+                </a:solidFill>
+                <a:latin typeface="Consolas" pitchFamily="34" charset="0"/>
+                <a:ea typeface="Consolas" pitchFamily="34" charset="-122"/>
+                <a:cs typeface="Consolas" pitchFamily="34" charset="-120"/>
+              </a:rPr>
+              <a:t>capture([programmer, "-c", "port=SWD", "mode=HOTPLUG", "-rst"])</a:t>
             </a:r>
             <a:endParaRPr lang="en-US" sz="1000" dirty="0"/>
           </a:p>
           <a:p>
-            <a:pPr indent="0" marL="0">
+            <a:pPr marL="0" indent="0">
               <a:lnSpc>
                 <a:spcPct val="120000"/>
               </a:lnSpc>
@@ -3924,256 +3764,39 @@
                 <a:ea typeface="Consolas" pitchFamily="34" charset="-122"/>
                 <a:cs typeface="Consolas" pitchFamily="34" charset="-120"/>
               </a:rPr>
-              <a:t> 210  </a:t>
-            </a:r>
-            <a:pPr indent="0" marL="0">
+              <a:t> 218  </a:t>
+            </a:r>
+            <a:r>
+              <a:rPr lang="en-US" sz="1000" b="1" dirty="0">
+                <a:solidFill>
+                  <a:srgbClr val="0F766E"/>
+                </a:solidFill>
+                <a:latin typeface="Consolas" pitchFamily="34" charset="0"/>
+                <a:ea typeface="Consolas" pitchFamily="34" charset="-122"/>
+                <a:cs typeface="Consolas" pitchFamily="34" charset="-120"/>
+              </a:rPr>
+              <a:t>run([sys.executable, "pc/demo_roundtrip.py", "--read-only"])</a:t>
+            </a:r>
+            <a:endParaRPr lang="en-US" sz="1000" dirty="0"/>
+          </a:p>
+          <a:p>
+            <a:pPr marL="0" indent="0">
               <a:lnSpc>
                 <a:spcPct val="120000"/>
               </a:lnSpc>
               <a:buNone/>
             </a:pPr>
             <a:r>
-              <a:rPr lang="en-US" sz="1000" b="1" dirty="0">
-                <a:solidFill>
-                  <a:srgbClr val="0F766E"/>
+              <a:rPr lang="en-US" sz="1000" dirty="0">
+                <a:solidFill>
+                  <a:srgbClr val="8A94A3"/>
                 </a:solidFill>
                 <a:latin typeface="Consolas" pitchFamily="34" charset="0"/>
                 <a:ea typeface="Consolas" pitchFamily="34" charset="-122"/>
                 <a:cs typeface="Consolas" pitchFamily="34" charset="-120"/>
               </a:rPr>
-              <a:t>output = capture([programmer, "-c", "port=SWD", "mode=UR", "-fillmemory", "0x20000000", "size=0x50000",</a:t>
-            </a:r>
-            <a:endParaRPr lang="en-US" sz="1000" dirty="0"/>
-          </a:p>
-          <a:p>
-            <a:pPr indent="0" marL="0">
-              <a:lnSpc>
-                <a:spcPct val="120000"/>
-              </a:lnSpc>
-              <a:buNone/>
-            </a:pPr>
-            <a:r>
-              <a:rPr lang="en-US" sz="1000" dirty="0">
-                <a:solidFill>
-                  <a:srgbClr val="8A94A3"/>
-                </a:solidFill>
-                <a:latin typeface="Consolas" pitchFamily="34" charset="0"/>
-                <a:ea typeface="Consolas" pitchFamily="34" charset="-122"/>
-                <a:cs typeface="Consolas" pitchFamily="34" charset="-120"/>
-              </a:rPr>
-              <a:t> 211  </a:t>
-            </a:r>
-            <a:pPr indent="0" marL="0">
-              <a:lnSpc>
-                <a:spcPct val="120000"/>
-              </a:lnSpc>
-              <a:buNone/>
-            </a:pPr>
-            <a:r>
-              <a:rPr lang="en-US" sz="1000" dirty="0">
-                <a:solidFill>
-                  <a:srgbClr val="1F2933"/>
-                </a:solidFill>
-                <a:latin typeface="Consolas" pitchFamily="34" charset="0"/>
-                <a:ea typeface="Consolas" pitchFamily="34" charset="-122"/>
-                <a:cs typeface="Consolas" pitchFamily="34" charset="-120"/>
-              </a:rPr>
-              <a:t>                  "pattern=0xA5A5A5A5", "dataWidth=32", "-r32", "0x20000000", "0x10",</a:t>
-            </a:r>
-            <a:endParaRPr lang="en-US" sz="1000" dirty="0"/>
-          </a:p>
-          <a:p>
-            <a:pPr indent="0" marL="0">
-              <a:lnSpc>
-                <a:spcPct val="120000"/>
-              </a:lnSpc>
-              <a:buNone/>
-            </a:pPr>
-            <a:r>
-              <a:rPr lang="en-US" sz="1000" dirty="0">
-                <a:solidFill>
-                  <a:srgbClr val="8A94A3"/>
-                </a:solidFill>
-                <a:latin typeface="Consolas" pitchFamily="34" charset="0"/>
-                <a:ea typeface="Consolas" pitchFamily="34" charset="-122"/>
-                <a:cs typeface="Consolas" pitchFamily="34" charset="-120"/>
-              </a:rPr>
-              <a:t> 212  </a:t>
-            </a:r>
-            <a:pPr indent="0" marL="0">
-              <a:lnSpc>
-                <a:spcPct val="120000"/>
-              </a:lnSpc>
-              <a:buNone/>
-            </a:pPr>
-            <a:r>
-              <a:rPr lang="en-US" sz="1000" dirty="0">
-                <a:solidFill>
-                  <a:srgbClr val="1F2933"/>
-                </a:solidFill>
-                <a:latin typeface="Consolas" pitchFamily="34" charset="0"/>
-                <a:ea typeface="Consolas" pitchFamily="34" charset="-122"/>
-                <a:cs typeface="Consolas" pitchFamily="34" charset="-120"/>
-              </a:rPr>
-              <a:t>                  "-r32", "0x20027FF0", "0x10", "-r32", "0x2004FFF0", "0x10"])</a:t>
-            </a:r>
-            <a:endParaRPr lang="en-US" sz="1000" dirty="0"/>
-          </a:p>
-          <a:p>
-            <a:pPr indent="0" marL="0">
-              <a:lnSpc>
-                <a:spcPct val="120000"/>
-              </a:lnSpc>
-              <a:buNone/>
-            </a:pPr>
-            <a:r>
-              <a:rPr lang="en-US" sz="1000" dirty="0">
-                <a:solidFill>
-                  <a:srgbClr val="8A94A3"/>
-                </a:solidFill>
-                <a:latin typeface="Consolas" pitchFamily="34" charset="0"/>
-                <a:ea typeface="Consolas" pitchFamily="34" charset="-122"/>
-                <a:cs typeface="Consolas" pitchFamily="34" charset="-120"/>
-              </a:rPr>
-              <a:t> 213  </a:t>
-            </a:r>
-            <a:pPr indent="0" marL="0">
-              <a:lnSpc>
-                <a:spcPct val="120000"/>
-              </a:lnSpc>
-              <a:buNone/>
-            </a:pPr>
-            <a:r>
-              <a:rPr lang="en-US" sz="1000" b="1" dirty="0">
-                <a:solidFill>
-                  <a:srgbClr val="0F766E"/>
-                </a:solidFill>
-                <a:latin typeface="Consolas" pitchFamily="34" charset="0"/>
-                <a:ea typeface="Consolas" pitchFamily="34" charset="-122"/>
-                <a:cs typeface="Consolas" pitchFamily="34" charset="-120"/>
-              </a:rPr>
-              <a:t>if output.count("A5A5A5A5 A5A5A5A5 A5A5A5A5 A5A5A5A5") != 3:</a:t>
-            </a:r>
-            <a:endParaRPr lang="en-US" sz="1000" dirty="0"/>
-          </a:p>
-          <a:p>
-            <a:pPr indent="0" marL="0">
-              <a:lnSpc>
-                <a:spcPct val="120000"/>
-              </a:lnSpc>
-              <a:buNone/>
-            </a:pPr>
-            <a:r>
-              <a:rPr lang="en-US" sz="1000" dirty="0">
-                <a:solidFill>
-                  <a:srgbClr val="8A94A3"/>
-                </a:solidFill>
-                <a:latin typeface="Consolas" pitchFamily="34" charset="0"/>
-                <a:ea typeface="Consolas" pitchFamily="34" charset="-122"/>
-                <a:cs typeface="Consolas" pitchFamily="34" charset="-120"/>
-              </a:rPr>
-              <a:t>      ⋮</a:t>
-            </a:r>
-            <a:endParaRPr lang="en-US" sz="1000" dirty="0"/>
-          </a:p>
-          <a:p>
-            <a:pPr indent="0" marL="0">
-              <a:lnSpc>
-                <a:spcPct val="120000"/>
-              </a:lnSpc>
-              <a:buNone/>
-            </a:pPr>
-            <a:r>
-              <a:rPr lang="en-US" sz="1000" dirty="0">
-                <a:solidFill>
-                  <a:srgbClr val="8A94A3"/>
-                </a:solidFill>
-                <a:latin typeface="Consolas" pitchFamily="34" charset="0"/>
-                <a:ea typeface="Consolas" pitchFamily="34" charset="-122"/>
-                <a:cs typeface="Consolas" pitchFamily="34" charset="-120"/>
-              </a:rPr>
-              <a:t> 216  </a:t>
-            </a:r>
-            <a:pPr indent="0" marL="0">
-              <a:lnSpc>
-                <a:spcPct val="120000"/>
-              </a:lnSpc>
-              <a:buNone/>
-            </a:pPr>
-            <a:r>
-              <a:rPr lang="en-US" sz="1000" dirty="0">
-                <a:solidFill>
-                  <a:srgbClr val="1F2933"/>
-                </a:solidFill>
-                <a:latin typeface="Consolas" pitchFamily="34" charset="0"/>
-                <a:ea typeface="Consolas" pitchFamily="34" charset="-122"/>
-                <a:cs typeface="Consolas" pitchFamily="34" charset="-120"/>
-              </a:rPr>
-              <a:t>capture([programmer, "-c", "port=SWD", "mode=HOTPLUG", "-rst"])</a:t>
-            </a:r>
-            <a:endParaRPr lang="en-US" sz="1000" dirty="0"/>
-          </a:p>
-          <a:p>
-            <a:pPr indent="0" marL="0">
-              <a:lnSpc>
-                <a:spcPct val="120000"/>
-              </a:lnSpc>
-              <a:buNone/>
-            </a:pPr>
-            <a:r>
-              <a:rPr lang="en-US" sz="1000" dirty="0">
-                <a:solidFill>
-                  <a:srgbClr val="8A94A3"/>
-                </a:solidFill>
-                <a:latin typeface="Consolas" pitchFamily="34" charset="0"/>
-                <a:ea typeface="Consolas" pitchFamily="34" charset="-122"/>
-                <a:cs typeface="Consolas" pitchFamily="34" charset="-120"/>
-              </a:rPr>
-              <a:t> 218  </a:t>
-            </a:r>
-            <a:pPr indent="0" marL="0">
-              <a:lnSpc>
-                <a:spcPct val="120000"/>
-              </a:lnSpc>
-              <a:buNone/>
-            </a:pPr>
-            <a:r>
-              <a:rPr lang="en-US" sz="1000" b="1" dirty="0">
-                <a:solidFill>
-                  <a:srgbClr val="0F766E"/>
-                </a:solidFill>
-                <a:latin typeface="Consolas" pitchFamily="34" charset="0"/>
-                <a:ea typeface="Consolas" pitchFamily="34" charset="-122"/>
-                <a:cs typeface="Consolas" pitchFamily="34" charset="-120"/>
-              </a:rPr>
-              <a:t>run([sys.executable, "pc/demo_roundtrip.py", "--read-only"])</a:t>
-            </a:r>
-            <a:endParaRPr lang="en-US" sz="1000" dirty="0"/>
-          </a:p>
-          <a:p>
-            <a:pPr indent="0" marL="0">
-              <a:lnSpc>
-                <a:spcPct val="120000"/>
-              </a:lnSpc>
-              <a:buNone/>
-            </a:pPr>
-            <a:r>
-              <a:rPr lang="en-US" sz="1000" dirty="0">
-                <a:solidFill>
-                  <a:srgbClr val="8A94A3"/>
-                </a:solidFill>
-                <a:latin typeface="Consolas" pitchFamily="34" charset="0"/>
-                <a:ea typeface="Consolas" pitchFamily="34" charset="-122"/>
-                <a:cs typeface="Consolas" pitchFamily="34" charset="-120"/>
-              </a:rPr>
               <a:t> 219  </a:t>
             </a:r>
-            <a:pPr indent="0" marL="0">
-              <a:lnSpc>
-                <a:spcPct val="120000"/>
-              </a:lnSpc>
-              <a:buNone/>
-            </a:pPr>
             <a:r>
               <a:rPr lang="en-US" sz="1000" dirty="0">
                 <a:solidFill>
@@ -4205,15 +3828,27 @@
         </p:nvGraphicFramePr>
         <p:xfrm>
           <a:off x="548640" y="4553712"/>
-          <a:ext cx="6949440" cy="914400"/>
+          <a:ext cx="6949440" cy="1691640"/>
         </p:xfrm>
         <a:graphic>
           <a:graphicData uri="http://schemas.openxmlformats.org/drawingml/2006/table">
             <a:tbl>
               <a:tblPr/>
               <a:tblGrid>
-                <a:gridCol w="1828800"/>
-                <a:gridCol w="5120640"/>
+                <a:gridCol w="1828800">
+                  <a:extLst>
+                    <a:ext uri="{9D8B030D-6E8A-4147-A177-3AD203B41FA5}">
+                      <a16:colId xmlns:a16="http://schemas.microsoft.com/office/drawing/2014/main" val="20000"/>
+                    </a:ext>
+                  </a:extLst>
+                </a:gridCol>
+                <a:gridCol w="5120640">
+                  <a:extLst>
+                    <a:ext uri="{9D8B030D-6E8A-4147-A177-3AD203B41FA5}">
+                      <a16:colId xmlns:a16="http://schemas.microsoft.com/office/drawing/2014/main" val="20001"/>
+                    </a:ext>
+                  </a:extLst>
+                </a:gridCol>
               </a:tblGrid>
               <a:tr h="338328">
                 <a:tc>
@@ -4221,7 +3856,7 @@
                     <a:bodyPr/>
                     <a:lstStyle/>
                     <a:p>
-                      <a:pPr indent="0" marL="0">
+                      <a:pPr marL="0" indent="0">
                         <a:buNone/>
                       </a:pPr>
                       <a:r>
@@ -4289,7 +3924,7 @@
                     <a:bodyPr/>
                     <a:lstStyle/>
                     <a:p>
-                      <a:pPr indent="0" marL="0">
+                      <a:pPr marL="0" indent="0">
                         <a:buNone/>
                       </a:pPr>
                       <a:r>
@@ -4352,6 +3987,11 @@
                     </a:solidFill>
                   </a:tcPr>
                 </a:tc>
+                <a:extLst>
+                  <a:ext uri="{0D108BD9-81ED-4DB2-BD59-A6C34878D82A}">
+                    <a16:rowId xmlns:a16="http://schemas.microsoft.com/office/drawing/2014/main" val="10000"/>
+                  </a:ext>
+                </a:extLst>
               </a:tr>
               <a:tr h="338328">
                 <a:tc>
@@ -4359,7 +3999,7 @@
                     <a:bodyPr/>
                     <a:lstStyle/>
                     <a:p>
-                      <a:pPr indent="0" marL="0">
+                      <a:pPr marL="0" indent="0">
                         <a:buNone/>
                       </a:pPr>
                       <a:r>
@@ -4424,7 +4064,7 @@
                     <a:bodyPr/>
                     <a:lstStyle/>
                     <a:p>
-                      <a:pPr indent="0" marL="0">
+                      <a:pPr marL="0" indent="0">
                         <a:buNone/>
                       </a:pPr>
                       <a:r>
@@ -4484,6 +4124,11 @@
                     </a:lnB>
                   </a:tcPr>
                 </a:tc>
+                <a:extLst>
+                  <a:ext uri="{0D108BD9-81ED-4DB2-BD59-A6C34878D82A}">
+                    <a16:rowId xmlns:a16="http://schemas.microsoft.com/office/drawing/2014/main" val="10001"/>
+                  </a:ext>
+                </a:extLst>
               </a:tr>
               <a:tr h="338328">
                 <a:tc>
@@ -4491,7 +4136,7 @@
                     <a:bodyPr/>
                     <a:lstStyle/>
                     <a:p>
-                      <a:pPr indent="0" marL="0">
+                      <a:pPr marL="0" indent="0">
                         <a:buNone/>
                       </a:pPr>
                       <a:r>
@@ -4556,7 +4201,7 @@
                     <a:bodyPr/>
                     <a:lstStyle/>
                     <a:p>
-                      <a:pPr indent="0" marL="0">
+                      <a:pPr marL="0" indent="0">
                         <a:buNone/>
                       </a:pPr>
                       <a:r>
@@ -4616,6 +4261,11 @@
                     </a:lnB>
                   </a:tcPr>
                 </a:tc>
+                <a:extLst>
+                  <a:ext uri="{0D108BD9-81ED-4DB2-BD59-A6C34878D82A}">
+                    <a16:rowId xmlns:a16="http://schemas.microsoft.com/office/drawing/2014/main" val="10002"/>
+                  </a:ext>
+                </a:extLst>
               </a:tr>
               <a:tr h="338328">
                 <a:tc>
@@ -4623,7 +4273,7 @@
                     <a:bodyPr/>
                     <a:lstStyle/>
                     <a:p>
-                      <a:pPr indent="0" marL="0">
+                      <a:pPr marL="0" indent="0">
                         <a:buNone/>
                       </a:pPr>
                       <a:r>
@@ -4688,7 +4338,7 @@
                     <a:bodyPr/>
                     <a:lstStyle/>
                     <a:p>
-                      <a:pPr indent="0" marL="0">
+                      <a:pPr marL="0" indent="0">
                         <a:buNone/>
                       </a:pPr>
                       <a:r>
@@ -4748,6 +4398,11 @@
                     </a:lnB>
                   </a:tcPr>
                 </a:tc>
+                <a:extLst>
+                  <a:ext uri="{0D108BD9-81ED-4DB2-BD59-A6C34878D82A}">
+                    <a16:rowId xmlns:a16="http://schemas.microsoft.com/office/drawing/2014/main" val="10003"/>
+                  </a:ext>
+                </a:extLst>
               </a:tr>
               <a:tr h="338328">
                 <a:tc>
@@ -4755,7 +4410,7 @@
                     <a:bodyPr/>
                     <a:lstStyle/>
                     <a:p>
-                      <a:pPr indent="0" marL="0">
+                      <a:pPr marL="0" indent="0">
                         <a:buNone/>
                       </a:pPr>
                       <a:r>
@@ -4820,7 +4475,7 @@
                     <a:bodyPr/>
                     <a:lstStyle/>
                     <a:p>
-                      <a:pPr indent="0" marL="0">
+                      <a:pPr marL="0" indent="0">
                         <a:buNone/>
                       </a:pPr>
                       <a:r>
@@ -4880,6 +4535,11 @@
                     </a:lnB>
                   </a:tcPr>
                 </a:tc>
+                <a:extLst>
+                  <a:ext uri="{0D108BD9-81ED-4DB2-BD59-A6C34878D82A}">
+                    <a16:rowId xmlns:a16="http://schemas.microsoft.com/office/drawing/2014/main" val="10004"/>
+                  </a:ext>
+                </a:extLst>
               </a:tr>
             </a:tbl>
           </a:graphicData>
@@ -4906,7 +4566,7 @@
           <a:bodyPr wrap="square" lIns="0" tIns="0" rIns="0" bIns="0" rtlCol="0" anchor="t"/>
           <a:lstStyle/>
           <a:p>
-            <a:pPr indent="0" marL="0">
+            <a:pPr marL="0" indent="0">
               <a:lnSpc>
                 <a:spcPct val="120000"/>
               </a:lnSpc>
@@ -4924,45 +4584,6 @@
               <a:t>이미지 3,145,782 B는 MCU RAM 320 KB보다 큽니다. 보드의 SDRAM은 초기화하지 않으며 MPU로 막혀 있습니다.</a:t>
             </a:r>
             <a:endParaRPr lang="en-US" sz="1400" dirty="0"/>
-          </a:p>
-        </p:txBody>
-      </p:sp>
-      <p:sp>
-        <p:nvSpPr>
-          <p:cNvPr id="7" name="Text 4"/>
-          <p:cNvSpPr txBox="1"/>
-          <p:nvPr/>
-        </p:nvSpPr>
-        <p:spPr>
-          <a:xfrm>
-            <a:off x="7863840" y="5806440"/>
-            <a:ext cx="3776472" cy="274320"/>
-          </a:xfrm>
-          <a:prstGeom prst="rect">
-            <a:avLst/>
-          </a:prstGeom>
-          <a:noFill/>
-          <a:ln/>
-        </p:spPr>
-        <p:txBody>
-          <a:bodyPr wrap="square" lIns="0" tIns="0" rIns="0" bIns="0" rtlCol="0" anchor="t"/>
-          <a:lstStyle/>
-          <a:p>
-            <a:pPr indent="0" marL="0">
-              <a:buNone/>
-            </a:pPr>
-            <a:r>
-              <a:rPr lang="en-US" sz="1100" dirty="0">
-                <a:solidFill>
-                  <a:srgbClr val="5F6B7A"/>
-                </a:solidFill>
-                <a:latin typeface="Malgun Gothic" pitchFamily="34" charset="0"/>
-                <a:ea typeface="Malgun Gothic" pitchFamily="34" charset="-122"/>
-                <a:cs typeface="Malgun Gothic" pitchFamily="34" charset="-120"/>
-              </a:rPr>
-              <a:t>2026-10-15 run_all.py 실행 · 출처: README.md</a:t>
-            </a:r>
-            <a:endParaRPr lang="en-US" sz="1100" dirty="0"/>
           </a:p>
         </p:txBody>
       </p:sp>
@@ -4986,7 +4607,7 @@
           </a:prstGeom>
           <a:extLst>
             <a:ext uri="{C572A759-6A51-4108-AA02-DFA0A04FC94B}">
-              <ma14:wrappingTextBoxFlag xmlns:ma14="http://schemas.microsoft.com/office/mac/drawingml/2011/main" val="0"/>
+              <ma14:wrappingTextBoxFlag xmlns:ma14="http://schemas.microsoft.com/office/mac/drawingml/2011/main" xmlns="" val="0"/>
             </a:ext>
           </a:extLst>
         </p:spPr>
@@ -5007,7 +4628,7 @@
           <a:p>
             <a:pPr algn="r"/>
             <a:fld id="{F7021451-1387-4CA6-816F-3879F97B5CBC}" type="slidenum">
-              <a:rPr b="0" lang="en-US"/>
+              <a:rPr lang="en-US" b="0"/>
               <a:t>11</a:t>
             </a:fld>
             <a:endParaRPr lang="en-US"/>
@@ -5042,9 +4663,11 @@
       <p:sp>
         <p:nvSpPr>
           <p:cNvPr id="2" name="Text 0"/>
-          <p:cNvSpPr/>
+          <p:cNvSpPr>
+            <a:spLocks noGrp="1"/>
+          </p:cNvSpPr>
           <p:nvPr>
-            <p:ph idx="100" type="title" hasCustomPrompt="1"/>
+            <p:ph type="title" idx="100" hasCustomPrompt="1"/>
           </p:nvPr>
         </p:nvSpPr>
         <p:spPr>
@@ -5062,7 +4685,7 @@
           <a:bodyPr wrap="square" lIns="0" tIns="0" rIns="0" bIns="0" rtlCol="0" anchor="ctr"/>
           <a:lstStyle/>
           <a:p>
-            <a:pPr algn="l" indent="0" marL="0">
+            <a:pPr marL="0" indent="0" algn="l">
               <a:buNone/>
             </a:pPr>
             <a:r>
@@ -5101,7 +4724,7 @@
           <a:bodyPr wrap="square" lIns="0" tIns="0" rIns="0" bIns="0" rtlCol="0" anchor="t"/>
           <a:lstStyle/>
           <a:p>
-            <a:pPr indent="0" marL="0">
+            <a:pPr marL="0" indent="0">
               <a:buNone/>
             </a:pPr>
             <a:r>
@@ -5140,7 +4763,7 @@
           <a:bodyPr wrap="square" lIns="0" tIns="0" rIns="0" bIns="0" rtlCol="0" anchor="t"/>
           <a:lstStyle/>
           <a:p>
-            <a:pPr indent="0" marL="0">
+            <a:pPr marL="0" indent="0">
               <a:buNone/>
             </a:pPr>
             <a:r>
@@ -5160,14 +4783,14 @@
       </p:sp>
       <p:pic>
         <p:nvPicPr>
-          <p:cNvPr id="5" name="Image 0" descr="PC 원본 BMP">    </p:cNvPr>
+          <p:cNvPr id="5" name="Image 0" descr="PC 원본 BMP"/>
           <p:cNvPicPr>
             <a:picLocks noChangeAspect="1"/>
           </p:cNvPicPr>
           <p:nvPr/>
         </p:nvPicPr>
         <p:blipFill>
-          <a:blip r:embed="rId1"/>
+          <a:blip r:embed="rId3"/>
           <a:stretch>
             <a:fillRect/>
           </a:stretch>
@@ -5184,14 +4807,14 @@
       </p:pic>
       <p:pic>
         <p:nvPicPr>
-          <p:cNvPr id="6" name="Image 1" descr="Flash에서 재읽기한 BMP">    </p:cNvPr>
+          <p:cNvPr id="6" name="Image 1" descr="Flash에서 재읽기한 BMP"/>
           <p:cNvPicPr>
             <a:picLocks noChangeAspect="1"/>
           </p:cNvPicPr>
           <p:nvPr/>
         </p:nvPicPr>
         <p:blipFill>
-          <a:blip r:embed="rId2"/>
+          <a:blip r:embed="rId3"/>
           <a:stretch>
             <a:fillRect/>
           </a:stretch>
@@ -5227,7 +4850,7 @@
           <a:bodyPr wrap="square" lIns="0" tIns="0" rIns="0" bIns="0" rtlCol="0" anchor="t"/>
           <a:lstStyle/>
           <a:p>
-            <a:pPr indent="0" marL="0">
+            <a:pPr marL="0" indent="0">
               <a:lnSpc>
                 <a:spcPct val="130000"/>
               </a:lnSpc>
@@ -5244,33 +4867,27 @@
               </a:rPr>
               <a:t>CRC32  </a:t>
             </a:r>
-            <a:pPr indent="0" marL="0">
+            <a:r>
+              <a:rPr lang="en-US" sz="1400" dirty="0">
+                <a:solidFill>
+                  <a:srgbClr val="1F2933"/>
+                </a:solidFill>
+                <a:latin typeface="Consolas" pitchFamily="34" charset="0"/>
+                <a:ea typeface="Consolas" pitchFamily="34" charset="-122"/>
+                <a:cs typeface="Consolas" pitchFamily="34" charset="-120"/>
+              </a:rPr>
+              <a:t>978AB7D9 = 978AB7D9</a:t>
+            </a:r>
+            <a:endParaRPr lang="en-US" sz="1400" dirty="0"/>
+          </a:p>
+          <a:p>
+            <a:pPr marL="0" indent="0">
               <a:lnSpc>
                 <a:spcPct val="130000"/>
               </a:lnSpc>
               <a:buNone/>
             </a:pPr>
             <a:r>
-              <a:rPr lang="en-US" sz="1400" dirty="0">
-                <a:solidFill>
-                  <a:srgbClr val="1F2933"/>
-                </a:solidFill>
-                <a:latin typeface="Consolas" pitchFamily="34" charset="0"/>
-                <a:ea typeface="Consolas" pitchFamily="34" charset="-122"/>
-                <a:cs typeface="Consolas" pitchFamily="34" charset="-120"/>
-              </a:rPr>
-              <a:t>978AB7D9 = 978AB7D9</a:t>
-            </a:r>
-            <a:endParaRPr lang="en-US" sz="1400" dirty="0"/>
-          </a:p>
-          <a:p>
-            <a:pPr indent="0" marL="0">
-              <a:lnSpc>
-                <a:spcPct val="130000"/>
-              </a:lnSpc>
-              <a:buNone/>
-            </a:pPr>
-            <a:r>
               <a:rPr lang="en-US" sz="1400" b="1" dirty="0">
                 <a:solidFill>
                   <a:srgbClr val="1F2933"/>
@@ -5281,12 +4898,6 @@
               </a:rPr>
               <a:t>SHA-256  </a:t>
             </a:r>
-            <a:pPr indent="0" marL="0">
-              <a:lnSpc>
-                <a:spcPct val="130000"/>
-              </a:lnSpc>
-              <a:buNone/>
-            </a:pPr>
             <a:r>
               <a:rPr lang="en-US" sz="1400" dirty="0">
                 <a:solidFill>
@@ -5318,16 +4929,34 @@
         </p:nvGraphicFramePr>
         <p:xfrm>
           <a:off x="6263640" y="1828800"/>
-          <a:ext cx="5376672" cy="914400"/>
+          <a:ext cx="5376672" cy="2267712"/>
         </p:xfrm>
         <a:graphic>
           <a:graphicData uri="http://schemas.openxmlformats.org/drawingml/2006/table">
             <a:tbl>
               <a:tblPr/>
               <a:tblGrid>
-                <a:gridCol w="1783080"/>
-                <a:gridCol w="2011680"/>
-                <a:gridCol w="1581912"/>
+                <a:gridCol w="1783080">
+                  <a:extLst>
+                    <a:ext uri="{9D8B030D-6E8A-4147-A177-3AD203B41FA5}">
+                      <a16:colId xmlns:a16="http://schemas.microsoft.com/office/drawing/2014/main" val="20000"/>
+                    </a:ext>
+                  </a:extLst>
+                </a:gridCol>
+                <a:gridCol w="2011680">
+                  <a:extLst>
+                    <a:ext uri="{9D8B030D-6E8A-4147-A177-3AD203B41FA5}">
+                      <a16:colId xmlns:a16="http://schemas.microsoft.com/office/drawing/2014/main" val="20001"/>
+                    </a:ext>
+                  </a:extLst>
+                </a:gridCol>
+                <a:gridCol w="1581912">
+                  <a:extLst>
+                    <a:ext uri="{9D8B030D-6E8A-4147-A177-3AD203B41FA5}">
+                      <a16:colId xmlns:a16="http://schemas.microsoft.com/office/drawing/2014/main" val="20002"/>
+                    </a:ext>
+                  </a:extLst>
+                </a:gridCol>
               </a:tblGrid>
               <a:tr h="566928">
                 <a:tc>
@@ -5335,7 +4964,7 @@
                     <a:bodyPr/>
                     <a:lstStyle/>
                     <a:p>
-                      <a:pPr indent="0" marL="0">
+                      <a:pPr marL="0" indent="0">
                         <a:buNone/>
                       </a:pPr>
                       <a:r>
@@ -5403,7 +5032,7 @@
                     <a:bodyPr/>
                     <a:lstStyle/>
                     <a:p>
-                      <a:pPr indent="0" marL="0">
+                      <a:pPr marL="0" indent="0">
                         <a:buNone/>
                       </a:pPr>
                       <a:r>
@@ -5471,7 +5100,7 @@
                     <a:bodyPr/>
                     <a:lstStyle/>
                     <a:p>
-                      <a:pPr indent="0" marL="0">
+                      <a:pPr marL="0" indent="0">
                         <a:buNone/>
                       </a:pPr>
                       <a:r>
@@ -5534,6 +5163,11 @@
                     </a:solidFill>
                   </a:tcPr>
                 </a:tc>
+                <a:extLst>
+                  <a:ext uri="{0D108BD9-81ED-4DB2-BD59-A6C34878D82A}">
+                    <a16:rowId xmlns:a16="http://schemas.microsoft.com/office/drawing/2014/main" val="10000"/>
+                  </a:ext>
+                </a:extLst>
               </a:tr>
               <a:tr h="566928">
                 <a:tc>
@@ -5541,7 +5175,7 @@
                     <a:bodyPr/>
                     <a:lstStyle/>
                     <a:p>
-                      <a:pPr indent="0" marL="0">
+                      <a:pPr marL="0" indent="0">
                         <a:buNone/>
                       </a:pPr>
                       <a:r>
@@ -5606,7 +5240,7 @@
                     <a:bodyPr/>
                     <a:lstStyle/>
                     <a:p>
-                      <a:pPr indent="0" marL="0">
+                      <a:pPr marL="0" indent="0">
                         <a:buNone/>
                       </a:pPr>
                       <a:r>
@@ -5671,7 +5305,7 @@
                     <a:bodyPr/>
                     <a:lstStyle/>
                     <a:p>
-                      <a:pPr indent="0" marL="0">
+                      <a:pPr marL="0" indent="0">
                         <a:buNone/>
                       </a:pPr>
                       <a:r>
@@ -5731,6 +5365,11 @@
                     </a:lnB>
                   </a:tcPr>
                 </a:tc>
+                <a:extLst>
+                  <a:ext uri="{0D108BD9-81ED-4DB2-BD59-A6C34878D82A}">
+                    <a16:rowId xmlns:a16="http://schemas.microsoft.com/office/drawing/2014/main" val="10001"/>
+                  </a:ext>
+                </a:extLst>
               </a:tr>
               <a:tr h="566928">
                 <a:tc>
@@ -5738,7 +5377,7 @@
                     <a:bodyPr/>
                     <a:lstStyle/>
                     <a:p>
-                      <a:pPr indent="0" marL="0">
+                      <a:pPr marL="0" indent="0">
                         <a:buNone/>
                       </a:pPr>
                       <a:r>
@@ -5803,7 +5442,7 @@
                     <a:bodyPr/>
                     <a:lstStyle/>
                     <a:p>
-                      <a:pPr indent="0" marL="0">
+                      <a:pPr marL="0" indent="0">
                         <a:buNone/>
                       </a:pPr>
                       <a:r>
@@ -5868,7 +5507,7 @@
                     <a:bodyPr/>
                     <a:lstStyle/>
                     <a:p>
-                      <a:pPr indent="0" marL="0">
+                      <a:pPr marL="0" indent="0">
                         <a:buNone/>
                       </a:pPr>
                       <a:r>
@@ -5928,6 +5567,11 @@
                     </a:lnB>
                   </a:tcPr>
                 </a:tc>
+                <a:extLst>
+                  <a:ext uri="{0D108BD9-81ED-4DB2-BD59-A6C34878D82A}">
+                    <a16:rowId xmlns:a16="http://schemas.microsoft.com/office/drawing/2014/main" val="10002"/>
+                  </a:ext>
+                </a:extLst>
               </a:tr>
               <a:tr h="566928">
                 <a:tc>
@@ -5935,7 +5579,7 @@
                     <a:bodyPr/>
                     <a:lstStyle/>
                     <a:p>
-                      <a:pPr indent="0" marL="0">
+                      <a:pPr marL="0" indent="0">
                         <a:buNone/>
                       </a:pPr>
                       <a:r>
@@ -6000,7 +5644,7 @@
                     <a:bodyPr/>
                     <a:lstStyle/>
                     <a:p>
-                      <a:pPr indent="0" marL="0">
+                      <a:pPr marL="0" indent="0">
                         <a:buNone/>
                       </a:pPr>
                       <a:r>
@@ -6065,7 +5709,7 @@
                     <a:bodyPr/>
                     <a:lstStyle/>
                     <a:p>
-                      <a:pPr indent="0" marL="0">
+                      <a:pPr marL="0" indent="0">
                         <a:buNone/>
                       </a:pPr>
                       <a:r>
@@ -6125,6 +5769,11 @@
                     </a:lnB>
                   </a:tcPr>
                 </a:tc>
+                <a:extLst>
+                  <a:ext uri="{0D108BD9-81ED-4DB2-BD59-A6C34878D82A}">
+                    <a16:rowId xmlns:a16="http://schemas.microsoft.com/office/drawing/2014/main" val="10003"/>
+                  </a:ext>
+                </a:extLst>
               </a:tr>
             </a:tbl>
           </a:graphicData>
@@ -6151,7 +5800,7 @@
           <a:bodyPr wrap="square" lIns="0" tIns="0" rIns="0" bIns="0" rtlCol="0" anchor="t"/>
           <a:lstStyle/>
           <a:p>
-            <a:pPr indent="0" marL="0">
+            <a:pPr marL="0" indent="0">
               <a:lnSpc>
                 <a:spcPct val="120000"/>
               </a:lnSpc>
@@ -6171,7 +5820,7 @@
             <a:endParaRPr lang="en-US" sz="1300" dirty="0"/>
           </a:p>
           <a:p>
-            <a:pPr indent="0" marL="0">
+            <a:pPr marL="0" indent="0">
               <a:lnSpc>
                 <a:spcPct val="120000"/>
               </a:lnSpc>
@@ -6213,7 +5862,7 @@
           <a:bodyPr wrap="square" lIns="0" tIns="0" rIns="0" bIns="0" rtlCol="0" anchor="t"/>
           <a:lstStyle/>
           <a:p>
-            <a:pPr indent="0" marL="0">
+            <a:pPr marL="0" indent="0">
               <a:buNone/>
             </a:pPr>
             <a:r>
@@ -6251,7 +5900,7 @@
           </a:prstGeom>
           <a:extLst>
             <a:ext uri="{C572A759-6A51-4108-AA02-DFA0A04FC94B}">
-              <ma14:wrappingTextBoxFlag xmlns:ma14="http://schemas.microsoft.com/office/mac/drawingml/2011/main" val="0"/>
+              <ma14:wrappingTextBoxFlag xmlns:ma14="http://schemas.microsoft.com/office/mac/drawingml/2011/main" xmlns="" val="0"/>
             </a:ext>
           </a:extLst>
         </p:spPr>
@@ -6272,7 +5921,7 @@
           <a:p>
             <a:pPr algn="r"/>
             <a:fld id="{F7021451-1387-4CA6-816F-3879F97B5CBC}" type="slidenum">
-              <a:rPr b="0" lang="en-US"/>
+              <a:rPr lang="en-US" b="0"/>
               <a:t>12</a:t>
             </a:fld>
             <a:endParaRPr lang="en-US"/>
@@ -6307,9 +5956,11 @@
       <p:sp>
         <p:nvSpPr>
           <p:cNvPr id="2" name="Text 0"/>
-          <p:cNvSpPr/>
+          <p:cNvSpPr>
+            <a:spLocks noGrp="1"/>
+          </p:cNvSpPr>
           <p:nvPr>
-            <p:ph idx="100" type="title" hasCustomPrompt="1"/>
+            <p:ph type="title" idx="100" hasCustomPrompt="1"/>
           </p:nvPr>
         </p:nvSpPr>
         <p:spPr>
@@ -6327,7 +5978,7 @@
           <a:bodyPr wrap="square" lIns="0" tIns="0" rIns="0" bIns="0" rtlCol="0" anchor="ctr"/>
           <a:lstStyle/>
           <a:p>
-            <a:pPr algn="l" indent="0" marL="0">
+            <a:pPr marL="0" indent="0" algn="l">
               <a:buNone/>
             </a:pPr>
             <a:r>
@@ -6354,23 +6005,41 @@
           <p:nvPr>
             <p:extLst>
               <p:ext uri="{D42A27DB-BD31-4B8C-83A1-F6EECF244321}">
-                <p14:modId xmlns:p14="http://schemas.microsoft.com/office/powerpoint/2010/main" val="1579011935"/>
+                <p14:modId xmlns:p14="http://schemas.microsoft.com/office/powerpoint/2010/main" val="1721077744"/>
               </p:ext>
             </p:extLst>
           </p:nvPr>
         </p:nvGraphicFramePr>
         <p:xfrm>
           <a:off x="548640" y="1417320"/>
-          <a:ext cx="6949440" cy="914400"/>
+          <a:ext cx="6949440" cy="4297680"/>
         </p:xfrm>
         <a:graphic>
           <a:graphicData uri="http://schemas.openxmlformats.org/drawingml/2006/table">
             <a:tbl>
               <a:tblPr/>
               <a:tblGrid>
-                <a:gridCol w="685800"/>
-                <a:gridCol w="3429000"/>
-                <a:gridCol w="2834640"/>
+                <a:gridCol w="685800">
+                  <a:extLst>
+                    <a:ext uri="{9D8B030D-6E8A-4147-A177-3AD203B41FA5}">
+                      <a16:colId xmlns:a16="http://schemas.microsoft.com/office/drawing/2014/main" val="20000"/>
+                    </a:ext>
+                  </a:extLst>
+                </a:gridCol>
+                <a:gridCol w="3429000">
+                  <a:extLst>
+                    <a:ext uri="{9D8B030D-6E8A-4147-A177-3AD203B41FA5}">
+                      <a16:colId xmlns:a16="http://schemas.microsoft.com/office/drawing/2014/main" val="20001"/>
+                    </a:ext>
+                  </a:extLst>
+                </a:gridCol>
+                <a:gridCol w="2834640">
+                  <a:extLst>
+                    <a:ext uri="{9D8B030D-6E8A-4147-A177-3AD203B41FA5}">
+                      <a16:colId xmlns:a16="http://schemas.microsoft.com/office/drawing/2014/main" val="20002"/>
+                    </a:ext>
+                  </a:extLst>
+                </a:gridCol>
               </a:tblGrid>
               <a:tr h="429768">
                 <a:tc>
@@ -6378,7 +6047,7 @@
                     <a:bodyPr/>
                     <a:lstStyle/>
                     <a:p>
-                      <a:pPr indent="0" marL="0">
+                      <a:pPr marL="0" indent="0">
                         <a:buNone/>
                       </a:pPr>
                       <a:r>
@@ -6446,7 +6115,7 @@
                     <a:bodyPr/>
                     <a:lstStyle/>
                     <a:p>
-                      <a:pPr indent="0" marL="0">
+                      <a:pPr marL="0" indent="0">
                         <a:buNone/>
                       </a:pPr>
                       <a:r>
@@ -6514,7 +6183,7 @@
                     <a:bodyPr/>
                     <a:lstStyle/>
                     <a:p>
-                      <a:pPr indent="0" marL="0">
+                      <a:pPr marL="0" indent="0">
                         <a:buNone/>
                       </a:pPr>
                       <a:r>
@@ -6577,6 +6246,11 @@
                     </a:solidFill>
                   </a:tcPr>
                 </a:tc>
+                <a:extLst>
+                  <a:ext uri="{0D108BD9-81ED-4DB2-BD59-A6C34878D82A}">
+                    <a16:rowId xmlns:a16="http://schemas.microsoft.com/office/drawing/2014/main" val="10000"/>
+                  </a:ext>
+                </a:extLst>
               </a:tr>
               <a:tr h="429768">
                 <a:tc>
@@ -6584,7 +6258,7 @@
                     <a:bodyPr/>
                     <a:lstStyle/>
                     <a:p>
-                      <a:pPr indent="0" marL="0">
+                      <a:pPr marL="0" indent="0">
                         <a:buNone/>
                       </a:pPr>
                       <a:r>
@@ -6649,7 +6323,7 @@
                     <a:bodyPr/>
                     <a:lstStyle/>
                     <a:p>
-                      <a:pPr indent="0" marL="0">
+                      <a:pPr marL="0" indent="0">
                         <a:buNone/>
                       </a:pPr>
                       <a:r>
@@ -6714,7 +6388,7 @@
                     <a:bodyPr/>
                     <a:lstStyle/>
                     <a:p>
-                      <a:pPr indent="0" marL="0">
+                      <a:pPr marL="0" indent="0">
                         <a:buNone/>
                       </a:pPr>
                       <a:r>
@@ -6774,6 +6448,11 @@
                     </a:lnB>
                   </a:tcPr>
                 </a:tc>
+                <a:extLst>
+                  <a:ext uri="{0D108BD9-81ED-4DB2-BD59-A6C34878D82A}">
+                    <a16:rowId xmlns:a16="http://schemas.microsoft.com/office/drawing/2014/main" val="10001"/>
+                  </a:ext>
+                </a:extLst>
               </a:tr>
               <a:tr h="429768">
                 <a:tc>
@@ -6781,7 +6460,7 @@
                     <a:bodyPr/>
                     <a:lstStyle/>
                     <a:p>
-                      <a:pPr indent="0" marL="0">
+                      <a:pPr marL="0" indent="0">
                         <a:buNone/>
                       </a:pPr>
                       <a:r>
@@ -6846,7 +6525,7 @@
                     <a:bodyPr/>
                     <a:lstStyle/>
                     <a:p>
-                      <a:pPr indent="0" marL="0">
+                      <a:pPr marL="0" indent="0">
                         <a:buNone/>
                       </a:pPr>
                       <a:r>
@@ -6911,7 +6590,7 @@
                     <a:bodyPr/>
                     <a:lstStyle/>
                     <a:p>
-                      <a:pPr indent="0" marL="0">
+                      <a:pPr marL="0" indent="0">
                         <a:buNone/>
                       </a:pPr>
                       <a:r>
@@ -6971,6 +6650,11 @@
                     </a:lnB>
                   </a:tcPr>
                 </a:tc>
+                <a:extLst>
+                  <a:ext uri="{0D108BD9-81ED-4DB2-BD59-A6C34878D82A}">
+                    <a16:rowId xmlns:a16="http://schemas.microsoft.com/office/drawing/2014/main" val="10002"/>
+                  </a:ext>
+                </a:extLst>
               </a:tr>
               <a:tr h="429768">
                 <a:tc>
@@ -6978,7 +6662,7 @@
                     <a:bodyPr/>
                     <a:lstStyle/>
                     <a:p>
-                      <a:pPr indent="0" marL="0">
+                      <a:pPr marL="0" indent="0">
                         <a:buNone/>
                       </a:pPr>
                       <a:r>
@@ -7043,7 +6727,7 @@
                     <a:bodyPr/>
                     <a:lstStyle/>
                     <a:p>
-                      <a:pPr indent="0" marL="0">
+                      <a:pPr marL="0" indent="0">
                         <a:buNone/>
                       </a:pPr>
                       <a:r>
@@ -7108,7 +6792,7 @@
                     <a:bodyPr/>
                     <a:lstStyle/>
                     <a:p>
-                      <a:pPr indent="0" marL="0">
+                      <a:pPr marL="0" indent="0">
                         <a:buNone/>
                       </a:pPr>
                       <a:r>
@@ -7168,6 +6852,11 @@
                     </a:lnB>
                   </a:tcPr>
                 </a:tc>
+                <a:extLst>
+                  <a:ext uri="{0D108BD9-81ED-4DB2-BD59-A6C34878D82A}">
+                    <a16:rowId xmlns:a16="http://schemas.microsoft.com/office/drawing/2014/main" val="10003"/>
+                  </a:ext>
+                </a:extLst>
               </a:tr>
               <a:tr h="429768">
                 <a:tc>
@@ -7175,7 +6864,7 @@
                     <a:bodyPr/>
                     <a:lstStyle/>
                     <a:p>
-                      <a:pPr indent="0" marL="0">
+                      <a:pPr marL="0" indent="0">
                         <a:buNone/>
                       </a:pPr>
                       <a:r>
@@ -7240,7 +6929,7 @@
                     <a:bodyPr/>
                     <a:lstStyle/>
                     <a:p>
-                      <a:pPr indent="0" marL="0">
+                      <a:pPr marL="0" indent="0">
                         <a:buNone/>
                       </a:pPr>
                       <a:r>
@@ -7305,7 +6994,7 @@
                     <a:bodyPr/>
                     <a:lstStyle/>
                     <a:p>
-                      <a:pPr indent="0" marL="0">
+                      <a:pPr marL="0" indent="0">
                         <a:buNone/>
                       </a:pPr>
                       <a:r>
@@ -7365,6 +7054,11 @@
                     </a:lnB>
                   </a:tcPr>
                 </a:tc>
+                <a:extLst>
+                  <a:ext uri="{0D108BD9-81ED-4DB2-BD59-A6C34878D82A}">
+                    <a16:rowId xmlns:a16="http://schemas.microsoft.com/office/drawing/2014/main" val="10004"/>
+                  </a:ext>
+                </a:extLst>
               </a:tr>
               <a:tr h="429768">
                 <a:tc>
@@ -7372,7 +7066,7 @@
                     <a:bodyPr/>
                     <a:lstStyle/>
                     <a:p>
-                      <a:pPr indent="0" marL="0">
+                      <a:pPr marL="0" indent="0">
                         <a:buNone/>
                       </a:pPr>
                       <a:r>
@@ -7437,7 +7131,7 @@
                     <a:bodyPr/>
                     <a:lstStyle/>
                     <a:p>
-                      <a:pPr indent="0" marL="0">
+                      <a:pPr marL="0" indent="0">
                         <a:buNone/>
                       </a:pPr>
                       <a:r>
@@ -7502,7 +7196,7 @@
                     <a:bodyPr/>
                     <a:lstStyle/>
                     <a:p>
-                      <a:pPr indent="0" marL="0">
+                      <a:pPr marL="0" indent="0">
                         <a:buNone/>
                       </a:pPr>
                       <a:r>
@@ -7562,6 +7256,11 @@
                     </a:lnB>
                   </a:tcPr>
                 </a:tc>
+                <a:extLst>
+                  <a:ext uri="{0D108BD9-81ED-4DB2-BD59-A6C34878D82A}">
+                    <a16:rowId xmlns:a16="http://schemas.microsoft.com/office/drawing/2014/main" val="10005"/>
+                  </a:ext>
+                </a:extLst>
               </a:tr>
               <a:tr h="429768">
                 <a:tc>
@@ -7569,7 +7268,7 @@
                     <a:bodyPr/>
                     <a:lstStyle/>
                     <a:p>
-                      <a:pPr indent="0" marL="0">
+                      <a:pPr marL="0" indent="0">
                         <a:buNone/>
                       </a:pPr>
                       <a:r>
@@ -7634,7 +7333,7 @@
                     <a:bodyPr/>
                     <a:lstStyle/>
                     <a:p>
-                      <a:pPr indent="0" marL="0">
+                      <a:pPr marL="0" indent="0">
                         <a:buNone/>
                       </a:pPr>
                       <a:r>
@@ -7699,7 +7398,7 @@
                     <a:bodyPr/>
                     <a:lstStyle/>
                     <a:p>
-                      <a:pPr indent="0" marL="0">
+                      <a:pPr marL="0" indent="0">
                         <a:buNone/>
                       </a:pPr>
                       <a:r>
@@ -7759,6 +7458,11 @@
                     </a:lnB>
                   </a:tcPr>
                 </a:tc>
+                <a:extLst>
+                  <a:ext uri="{0D108BD9-81ED-4DB2-BD59-A6C34878D82A}">
+                    <a16:rowId xmlns:a16="http://schemas.microsoft.com/office/drawing/2014/main" val="10006"/>
+                  </a:ext>
+                </a:extLst>
               </a:tr>
               <a:tr h="429768">
                 <a:tc>
@@ -7766,7 +7470,7 @@
                     <a:bodyPr/>
                     <a:lstStyle/>
                     <a:p>
-                      <a:pPr indent="0" marL="0">
+                      <a:pPr marL="0" indent="0">
                         <a:buNone/>
                       </a:pPr>
                       <a:r>
@@ -7831,7 +7535,7 @@
                     <a:bodyPr/>
                     <a:lstStyle/>
                     <a:p>
-                      <a:pPr indent="0" marL="0">
+                      <a:pPr marL="0" indent="0">
                         <a:buNone/>
                       </a:pPr>
                       <a:r>
@@ -7896,7 +7600,7 @@
                     <a:bodyPr/>
                     <a:lstStyle/>
                     <a:p>
-                      <a:pPr indent="0" marL="0">
+                      <a:pPr marL="0" indent="0">
                         <a:buNone/>
                       </a:pPr>
                       <a:r>
@@ -7956,6 +7660,11 @@
                     </a:lnB>
                   </a:tcPr>
                 </a:tc>
+                <a:extLst>
+                  <a:ext uri="{0D108BD9-81ED-4DB2-BD59-A6C34878D82A}">
+                    <a16:rowId xmlns:a16="http://schemas.microsoft.com/office/drawing/2014/main" val="10007"/>
+                  </a:ext>
+                </a:extLst>
               </a:tr>
               <a:tr h="429768">
                 <a:tc>
@@ -7963,7 +7672,7 @@
                     <a:bodyPr/>
                     <a:lstStyle/>
                     <a:p>
-                      <a:pPr indent="0" marL="0">
+                      <a:pPr marL="0" indent="0">
                         <a:buNone/>
                       </a:pPr>
                       <a:r>
@@ -8028,7 +7737,7 @@
                     <a:bodyPr/>
                     <a:lstStyle/>
                     <a:p>
-                      <a:pPr indent="0" marL="0">
+                      <a:pPr marL="0" indent="0">
                         <a:buNone/>
                       </a:pPr>
                       <a:r>
@@ -8093,7 +7802,7 @@
                     <a:bodyPr/>
                     <a:lstStyle/>
                     <a:p>
-                      <a:pPr indent="0" marL="0">
+                      <a:pPr marL="0" indent="0">
                         <a:buNone/>
                       </a:pPr>
                       <a:r>
@@ -8153,6 +7862,11 @@
                     </a:lnB>
                   </a:tcPr>
                 </a:tc>
+                <a:extLst>
+                  <a:ext uri="{0D108BD9-81ED-4DB2-BD59-A6C34878D82A}">
+                    <a16:rowId xmlns:a16="http://schemas.microsoft.com/office/drawing/2014/main" val="10008"/>
+                  </a:ext>
+                </a:extLst>
               </a:tr>
               <a:tr h="429768">
                 <a:tc>
@@ -8160,7 +7874,7 @@
                     <a:bodyPr/>
                     <a:lstStyle/>
                     <a:p>
-                      <a:pPr indent="0" marL="0">
+                      <a:pPr marL="0" indent="0">
                         <a:buNone/>
                       </a:pPr>
                       <a:r>
@@ -8225,7 +7939,7 @@
                     <a:bodyPr/>
                     <a:lstStyle/>
                     <a:p>
-                      <a:pPr indent="0" marL="0">
+                      <a:pPr marL="0" indent="0">
                         <a:buNone/>
                       </a:pPr>
                       <a:r>
@@ -8290,7 +8004,7 @@
                     <a:bodyPr/>
                     <a:lstStyle/>
                     <a:p>
-                      <a:pPr indent="0" marL="0">
+                      <a:pPr marL="0" indent="0">
                         <a:buNone/>
                       </a:pPr>
                       <a:r>
@@ -8350,6 +8064,11 @@
                     </a:lnB>
                   </a:tcPr>
                 </a:tc>
+                <a:extLst>
+                  <a:ext uri="{0D108BD9-81ED-4DB2-BD59-A6C34878D82A}">
+                    <a16:rowId xmlns:a16="http://schemas.microsoft.com/office/drawing/2014/main" val="10009"/>
+                  </a:ext>
+                </a:extLst>
               </a:tr>
             </a:tbl>
           </a:graphicData>
@@ -8379,6 +8098,13 @@
             <a:prstDash val="solid"/>
           </a:ln>
         </p:spPr>
+        <p:txBody>
+          <a:bodyPr/>
+          <a:lstStyle/>
+          <a:p>
+            <a:endParaRPr lang="ko-KR" altLang="en-US"/>
+          </a:p>
+        </p:txBody>
       </p:sp>
       <p:sp>
         <p:nvSpPr>
@@ -8401,7 +8127,7 @@
           <a:bodyPr wrap="square" lIns="0" tIns="0" rIns="0" bIns="0" rtlCol="0" anchor="t"/>
           <a:lstStyle/>
           <a:p>
-            <a:pPr indent="0" marL="0">
+            <a:pPr marL="0" indent="0">
               <a:buNone/>
             </a:pPr>
             <a:r>
@@ -8440,7 +8166,7 @@
           <a:bodyPr wrap="square" lIns="0" tIns="0" rIns="0" bIns="0" rtlCol="0" anchor="t"/>
           <a:lstStyle/>
           <a:p>
-            <a:pPr indent="0" marL="0">
+            <a:pPr marL="0" indent="0">
               <a:buNone/>
             </a:pPr>
             <a:r>
@@ -8479,7 +8205,7 @@
           <a:bodyPr wrap="square" lIns="0" tIns="0" rIns="0" bIns="0" rtlCol="0" anchor="t"/>
           <a:lstStyle/>
           <a:p>
-            <a:pPr indent="0" marL="0">
+            <a:pPr marL="0" indent="0">
               <a:lnSpc>
                 <a:spcPct val="120000"/>
               </a:lnSpc>
@@ -8499,7 +8225,7 @@
             <a:endParaRPr lang="en-US" sz="1400" dirty="0"/>
           </a:p>
           <a:p>
-            <a:pPr indent="0" marL="0">
+            <a:pPr marL="0" indent="0">
               <a:lnSpc>
                 <a:spcPct val="120000"/>
               </a:lnSpc>
@@ -8541,7 +8267,7 @@
           <a:bodyPr wrap="square" lIns="0" tIns="0" rIns="0" bIns="0" rtlCol="0" anchor="t"/>
           <a:lstStyle/>
           <a:p>
-            <a:pPr indent="0" marL="0">
+            <a:pPr marL="0" indent="0">
               <a:buNone/>
             </a:pPr>
             <a:r>
@@ -8583,6 +8309,13 @@
             <a:prstDash val="solid"/>
           </a:ln>
         </p:spPr>
+        <p:txBody>
+          <a:bodyPr/>
+          <a:lstStyle/>
+          <a:p>
+            <a:endParaRPr lang="ko-KR" altLang="en-US"/>
+          </a:p>
+        </p:txBody>
       </p:sp>
       <p:sp>
         <p:nvSpPr>
@@ -8605,7 +8338,7 @@
           <a:bodyPr wrap="square" lIns="0" tIns="0" rIns="0" bIns="0" rtlCol="0" anchor="t"/>
           <a:lstStyle/>
           <a:p>
-            <a:pPr indent="0" marL="0">
+            <a:pPr marL="0" indent="0">
               <a:lnSpc>
                 <a:spcPct val="120000"/>
               </a:lnSpc>
@@ -8625,7 +8358,7 @@
             <a:endParaRPr lang="en-US" sz="1400" dirty="0"/>
           </a:p>
           <a:p>
-            <a:pPr indent="0" marL="0">
+            <a:pPr marL="0" indent="0">
               <a:lnSpc>
                 <a:spcPct val="120000"/>
               </a:lnSpc>
@@ -8666,7 +8399,7 @@
           </a:prstGeom>
           <a:extLst>
             <a:ext uri="{C572A759-6A51-4108-AA02-DFA0A04FC94B}">
-              <ma14:wrappingTextBoxFlag xmlns:ma14="http://schemas.microsoft.com/office/mac/drawingml/2011/main" val="0"/>
+              <ma14:wrappingTextBoxFlag xmlns:ma14="http://schemas.microsoft.com/office/mac/drawingml/2011/main" xmlns="" val="0"/>
             </a:ext>
           </a:extLst>
         </p:spPr>
@@ -8687,7 +8420,7 @@
           <a:p>
             <a:pPr algn="r"/>
             <a:fld id="{F7021451-1387-4CA6-816F-3879F97B5CBC}" type="slidenum">
-              <a:rPr b="0" lang="en-US"/>
+              <a:rPr lang="en-US" b="0"/>
               <a:t>13</a:t>
             </a:fld>
             <a:endParaRPr lang="en-US"/>
@@ -8722,9 +8455,11 @@
       <p:sp>
         <p:nvSpPr>
           <p:cNvPr id="2" name="Text 0"/>
-          <p:cNvSpPr/>
+          <p:cNvSpPr>
+            <a:spLocks noGrp="1"/>
+          </p:cNvSpPr>
           <p:nvPr>
-            <p:ph idx="100" type="title" hasCustomPrompt="1"/>
+            <p:ph type="title" idx="100" hasCustomPrompt="1"/>
           </p:nvPr>
         </p:nvSpPr>
         <p:spPr>
@@ -8742,11 +8477,11 @@
           <a:bodyPr wrap="square" lIns="0" tIns="0" rIns="0" bIns="0" rtlCol="0" anchor="ctr"/>
           <a:lstStyle/>
           <a:p>
-            <a:pPr algn="l" indent="0" marL="0">
-              <a:buNone/>
-            </a:pPr>
-            <a:r>
-              <a:rPr lang="en-US" sz="2600" b="1" dirty="0">
+            <a:pPr marL="0" indent="0" algn="l">
+              <a:buNone/>
+            </a:pPr>
+            <a:r>
+              <a:rPr lang="ko-KR" altLang="en-US" sz="2600" b="1" dirty="0">
                 <a:solidFill>
                   <a:srgbClr val="1F2933"/>
                 </a:solidFill>
@@ -8754,7 +8489,7 @@
                 <a:ea typeface="Malgun Gothic" pitchFamily="34" charset="-122"/>
                 <a:cs typeface="Malgun Gothic" pitchFamily="34" charset="-120"/>
               </a:rPr>
-              <a:t>요구 기능은 10월 15일 보드 실행으로 확인했고, Flash 칩 모델만 남았습니다</a:t>
+              <a:t>발표 요건 충족 현황</a:t>
             </a:r>
             <a:endParaRPr lang="en-US" sz="2600" dirty="0"/>
           </a:p>
@@ -8769,24 +8504,48 @@
           <p:nvPr>
             <p:extLst>
               <p:ext uri="{D42A27DB-BD31-4B8C-83A1-F6EECF244321}">
-                <p14:modId xmlns:p14="http://schemas.microsoft.com/office/powerpoint/2010/main" val="1579011935"/>
+                <p14:modId xmlns:p14="http://schemas.microsoft.com/office/powerpoint/2010/main" val="2950239015"/>
               </p:ext>
             </p:extLst>
           </p:nvPr>
         </p:nvGraphicFramePr>
         <p:xfrm>
-          <a:off x="548640" y="1417320"/>
-          <a:ext cx="11091672" cy="914400"/>
+          <a:off x="548640" y="1569720"/>
+          <a:ext cx="11091672" cy="4114800"/>
         </p:xfrm>
         <a:graphic>
           <a:graphicData uri="http://schemas.openxmlformats.org/drawingml/2006/table">
             <a:tbl>
               <a:tblPr/>
               <a:tblGrid>
-                <a:gridCol w="2697480"/>
-                <a:gridCol w="3429000"/>
-                <a:gridCol w="3794760"/>
-                <a:gridCol w="1170432"/>
+                <a:gridCol w="2697480">
+                  <a:extLst>
+                    <a:ext uri="{9D8B030D-6E8A-4147-A177-3AD203B41FA5}">
+                      <a16:colId xmlns:a16="http://schemas.microsoft.com/office/drawing/2014/main" val="20000"/>
+                    </a:ext>
+                  </a:extLst>
+                </a:gridCol>
+                <a:gridCol w="3429000">
+                  <a:extLst>
+                    <a:ext uri="{9D8B030D-6E8A-4147-A177-3AD203B41FA5}">
+                      <a16:colId xmlns:a16="http://schemas.microsoft.com/office/drawing/2014/main" val="20001"/>
+                    </a:ext>
+                  </a:extLst>
+                </a:gridCol>
+                <a:gridCol w="3794760">
+                  <a:extLst>
+                    <a:ext uri="{9D8B030D-6E8A-4147-A177-3AD203B41FA5}">
+                      <a16:colId xmlns:a16="http://schemas.microsoft.com/office/drawing/2014/main" val="20002"/>
+                    </a:ext>
+                  </a:extLst>
+                </a:gridCol>
+                <a:gridCol w="1170432">
+                  <a:extLst>
+                    <a:ext uri="{9D8B030D-6E8A-4147-A177-3AD203B41FA5}">
+                      <a16:colId xmlns:a16="http://schemas.microsoft.com/office/drawing/2014/main" val="20003"/>
+                    </a:ext>
+                  </a:extLst>
+                </a:gridCol>
               </a:tblGrid>
               <a:tr h="457200">
                 <a:tc>
@@ -8794,7 +8553,7 @@
                     <a:bodyPr/>
                     <a:lstStyle/>
                     <a:p>
-                      <a:pPr indent="0" marL="0">
+                      <a:pPr marL="0" indent="0">
                         <a:buNone/>
                       </a:pPr>
                       <a:r>
@@ -8862,7 +8621,7 @@
                     <a:bodyPr/>
                     <a:lstStyle/>
                     <a:p>
-                      <a:pPr indent="0" marL="0">
+                      <a:pPr marL="0" indent="0">
                         <a:buNone/>
                       </a:pPr>
                       <a:r>
@@ -8930,7 +8689,7 @@
                     <a:bodyPr/>
                     <a:lstStyle/>
                     <a:p>
-                      <a:pPr indent="0" marL="0">
+                      <a:pPr marL="0" indent="0">
                         <a:buNone/>
                       </a:pPr>
                       <a:r>
@@ -8998,7 +8757,7 @@
                     <a:bodyPr/>
                     <a:lstStyle/>
                     <a:p>
-                      <a:pPr indent="0" marL="0">
+                      <a:pPr marL="0" indent="0">
                         <a:buNone/>
                       </a:pPr>
                       <a:r>
@@ -9061,6 +8820,11 @@
                     </a:solidFill>
                   </a:tcPr>
                 </a:tc>
+                <a:extLst>
+                  <a:ext uri="{0D108BD9-81ED-4DB2-BD59-A6C34878D82A}">
+                    <a16:rowId xmlns:a16="http://schemas.microsoft.com/office/drawing/2014/main" val="10000"/>
+                  </a:ext>
+                </a:extLst>
               </a:tr>
               <a:tr h="457200">
                 <a:tc>
@@ -9068,7 +8832,7 @@
                     <a:bodyPr/>
                     <a:lstStyle/>
                     <a:p>
-                      <a:pPr indent="0" marL="0">
+                      <a:pPr marL="0" indent="0">
                         <a:buNone/>
                       </a:pPr>
                       <a:r>
@@ -9133,7 +8897,7 @@
                     <a:bodyPr/>
                     <a:lstStyle/>
                     <a:p>
-                      <a:pPr indent="0" marL="0">
+                      <a:pPr marL="0" indent="0">
                         <a:buNone/>
                       </a:pPr>
                       <a:r>
@@ -9198,7 +8962,7 @@
                     <a:bodyPr/>
                     <a:lstStyle/>
                     <a:p>
-                      <a:pPr indent="0" marL="0">
+                      <a:pPr marL="0" indent="0">
                         <a:buNone/>
                       </a:pPr>
                       <a:r>
@@ -9263,7 +9027,7 @@
                     <a:bodyPr/>
                     <a:lstStyle/>
                     <a:p>
-                      <a:pPr indent="0" marL="0">
+                      <a:pPr marL="0" indent="0">
                         <a:buNone/>
                       </a:pPr>
                       <a:r>
@@ -9323,6 +9087,11 @@
                     </a:lnB>
                   </a:tcPr>
                 </a:tc>
+                <a:extLst>
+                  <a:ext uri="{0D108BD9-81ED-4DB2-BD59-A6C34878D82A}">
+                    <a16:rowId xmlns:a16="http://schemas.microsoft.com/office/drawing/2014/main" val="10001"/>
+                  </a:ext>
+                </a:extLst>
               </a:tr>
               <a:tr h="457200">
                 <a:tc>
@@ -9330,7 +9099,7 @@
                     <a:bodyPr/>
                     <a:lstStyle/>
                     <a:p>
-                      <a:pPr indent="0" marL="0">
+                      <a:pPr marL="0" indent="0">
                         <a:buNone/>
                       </a:pPr>
                       <a:r>
@@ -9395,7 +9164,7 @@
                     <a:bodyPr/>
                     <a:lstStyle/>
                     <a:p>
-                      <a:pPr indent="0" marL="0">
+                      <a:pPr marL="0" indent="0">
                         <a:buNone/>
                       </a:pPr>
                       <a:r>
@@ -9460,7 +9229,7 @@
                     <a:bodyPr/>
                     <a:lstStyle/>
                     <a:p>
-                      <a:pPr indent="0" marL="0">
+                      <a:pPr marL="0" indent="0">
                         <a:buNone/>
                       </a:pPr>
                       <a:r>
@@ -9525,7 +9294,7 @@
                     <a:bodyPr/>
                     <a:lstStyle/>
                     <a:p>
-                      <a:pPr indent="0" marL="0">
+                      <a:pPr marL="0" indent="0">
                         <a:buNone/>
                       </a:pPr>
                       <a:r>
@@ -9585,6 +9354,11 @@
                     </a:lnB>
                   </a:tcPr>
                 </a:tc>
+                <a:extLst>
+                  <a:ext uri="{0D108BD9-81ED-4DB2-BD59-A6C34878D82A}">
+                    <a16:rowId xmlns:a16="http://schemas.microsoft.com/office/drawing/2014/main" val="10002"/>
+                  </a:ext>
+                </a:extLst>
               </a:tr>
               <a:tr h="457200">
                 <a:tc>
@@ -9592,7 +9366,7 @@
                     <a:bodyPr/>
                     <a:lstStyle/>
                     <a:p>
-                      <a:pPr indent="0" marL="0">
+                      <a:pPr marL="0" indent="0">
                         <a:buNone/>
                       </a:pPr>
                       <a:r>
@@ -9657,7 +9431,7 @@
                     <a:bodyPr/>
                     <a:lstStyle/>
                     <a:p>
-                      <a:pPr indent="0" marL="0">
+                      <a:pPr marL="0" indent="0">
                         <a:buNone/>
                       </a:pPr>
                       <a:r>
@@ -9722,7 +9496,7 @@
                     <a:bodyPr/>
                     <a:lstStyle/>
                     <a:p>
-                      <a:pPr indent="0" marL="0">
+                      <a:pPr marL="0" indent="0">
                         <a:buNone/>
                       </a:pPr>
                       <a:r>
@@ -9787,7 +9561,7 @@
                     <a:bodyPr/>
                     <a:lstStyle/>
                     <a:p>
-                      <a:pPr indent="0" marL="0">
+                      <a:pPr marL="0" indent="0">
                         <a:buNone/>
                       </a:pPr>
                       <a:r>
@@ -9847,6 +9621,11 @@
                     </a:lnB>
                   </a:tcPr>
                 </a:tc>
+                <a:extLst>
+                  <a:ext uri="{0D108BD9-81ED-4DB2-BD59-A6C34878D82A}">
+                    <a16:rowId xmlns:a16="http://schemas.microsoft.com/office/drawing/2014/main" val="10003"/>
+                  </a:ext>
+                </a:extLst>
               </a:tr>
               <a:tr h="457200">
                 <a:tc>
@@ -9854,7 +9633,7 @@
                     <a:bodyPr/>
                     <a:lstStyle/>
                     <a:p>
-                      <a:pPr indent="0" marL="0">
+                      <a:pPr marL="0" indent="0">
                         <a:buNone/>
                       </a:pPr>
                       <a:r>
@@ -9919,7 +9698,7 @@
                     <a:bodyPr/>
                     <a:lstStyle/>
                     <a:p>
-                      <a:pPr indent="0" marL="0">
+                      <a:pPr marL="0" indent="0">
                         <a:buNone/>
                       </a:pPr>
                       <a:r>
@@ -9984,7 +9763,7 @@
                     <a:bodyPr/>
                     <a:lstStyle/>
                     <a:p>
-                      <a:pPr indent="0" marL="0">
+                      <a:pPr marL="0" indent="0">
                         <a:buNone/>
                       </a:pPr>
                       <a:r>
@@ -10049,7 +9828,7 @@
                     <a:bodyPr/>
                     <a:lstStyle/>
                     <a:p>
-                      <a:pPr indent="0" marL="0">
+                      <a:pPr marL="0" indent="0">
                         <a:buNone/>
                       </a:pPr>
                       <a:r>
@@ -10109,6 +9888,11 @@
                     </a:lnB>
                   </a:tcPr>
                 </a:tc>
+                <a:extLst>
+                  <a:ext uri="{0D108BD9-81ED-4DB2-BD59-A6C34878D82A}">
+                    <a16:rowId xmlns:a16="http://schemas.microsoft.com/office/drawing/2014/main" val="10004"/>
+                  </a:ext>
+                </a:extLst>
               </a:tr>
               <a:tr h="457200">
                 <a:tc>
@@ -10116,7 +9900,7 @@
                     <a:bodyPr/>
                     <a:lstStyle/>
                     <a:p>
-                      <a:pPr indent="0" marL="0">
+                      <a:pPr marL="0" indent="0">
                         <a:buNone/>
                       </a:pPr>
                       <a:r>
@@ -10181,7 +9965,7 @@
                     <a:bodyPr/>
                     <a:lstStyle/>
                     <a:p>
-                      <a:pPr indent="0" marL="0">
+                      <a:pPr marL="0" indent="0">
                         <a:buNone/>
                       </a:pPr>
                       <a:r>
@@ -10246,7 +10030,7 @@
                     <a:bodyPr/>
                     <a:lstStyle/>
                     <a:p>
-                      <a:pPr indent="0" marL="0">
+                      <a:pPr marL="0" indent="0">
                         <a:buNone/>
                       </a:pPr>
                       <a:r>
@@ -10311,7 +10095,7 @@
                     <a:bodyPr/>
                     <a:lstStyle/>
                     <a:p>
-                      <a:pPr indent="0" marL="0">
+                      <a:pPr marL="0" indent="0">
                         <a:buNone/>
                       </a:pPr>
                       <a:r>
@@ -10371,6 +10155,11 @@
                     </a:lnB>
                   </a:tcPr>
                 </a:tc>
+                <a:extLst>
+                  <a:ext uri="{0D108BD9-81ED-4DB2-BD59-A6C34878D82A}">
+                    <a16:rowId xmlns:a16="http://schemas.microsoft.com/office/drawing/2014/main" val="10005"/>
+                  </a:ext>
+                </a:extLst>
               </a:tr>
               <a:tr h="457200">
                 <a:tc>
@@ -10378,7 +10167,7 @@
                     <a:bodyPr/>
                     <a:lstStyle/>
                     <a:p>
-                      <a:pPr indent="0" marL="0">
+                      <a:pPr marL="0" indent="0">
                         <a:buNone/>
                       </a:pPr>
                       <a:r>
@@ -10443,7 +10232,7 @@
                     <a:bodyPr/>
                     <a:lstStyle/>
                     <a:p>
-                      <a:pPr indent="0" marL="0">
+                      <a:pPr marL="0" indent="0">
                         <a:buNone/>
                       </a:pPr>
                       <a:r>
@@ -10508,7 +10297,7 @@
                     <a:bodyPr/>
                     <a:lstStyle/>
                     <a:p>
-                      <a:pPr indent="0" marL="0">
+                      <a:pPr marL="0" indent="0">
                         <a:buNone/>
                       </a:pPr>
                       <a:r>
@@ -10573,7 +10362,7 @@
                     <a:bodyPr/>
                     <a:lstStyle/>
                     <a:p>
-                      <a:pPr indent="0" marL="0">
+                      <a:pPr marL="0" indent="0">
                         <a:buNone/>
                       </a:pPr>
                       <a:r>
@@ -10633,6 +10422,11 @@
                     </a:lnB>
                   </a:tcPr>
                 </a:tc>
+                <a:extLst>
+                  <a:ext uri="{0D108BD9-81ED-4DB2-BD59-A6C34878D82A}">
+                    <a16:rowId xmlns:a16="http://schemas.microsoft.com/office/drawing/2014/main" val="10006"/>
+                  </a:ext>
+                </a:extLst>
               </a:tr>
               <a:tr h="457200">
                 <a:tc>
@@ -10640,7 +10434,7 @@
                     <a:bodyPr/>
                     <a:lstStyle/>
                     <a:p>
-                      <a:pPr indent="0" marL="0">
+                      <a:pPr marL="0" indent="0">
                         <a:buNone/>
                       </a:pPr>
                       <a:r>
@@ -10705,7 +10499,7 @@
                     <a:bodyPr/>
                     <a:lstStyle/>
                     <a:p>
-                      <a:pPr indent="0" marL="0">
+                      <a:pPr marL="0" indent="0">
                         <a:buNone/>
                       </a:pPr>
                       <a:r>
@@ -10770,7 +10564,7 @@
                     <a:bodyPr/>
                     <a:lstStyle/>
                     <a:p>
-                      <a:pPr indent="0" marL="0">
+                      <a:pPr marL="0" indent="0">
                         <a:buNone/>
                       </a:pPr>
                       <a:r>
@@ -10835,7 +10629,7 @@
                     <a:bodyPr/>
                     <a:lstStyle/>
                     <a:p>
-                      <a:pPr indent="0" marL="0">
+                      <a:pPr marL="0" indent="0">
                         <a:buNone/>
                       </a:pPr>
                       <a:r>
@@ -10895,6 +10689,11 @@
                     </a:lnB>
                   </a:tcPr>
                 </a:tc>
+                <a:extLst>
+                  <a:ext uri="{0D108BD9-81ED-4DB2-BD59-A6C34878D82A}">
+                    <a16:rowId xmlns:a16="http://schemas.microsoft.com/office/drawing/2014/main" val="10007"/>
+                  </a:ext>
+                </a:extLst>
               </a:tr>
               <a:tr h="457200">
                 <a:tc>
@@ -10902,7 +10701,7 @@
                     <a:bodyPr/>
                     <a:lstStyle/>
                     <a:p>
-                      <a:pPr indent="0" marL="0">
+                      <a:pPr marL="0" indent="0">
                         <a:buNone/>
                       </a:pPr>
                       <a:r>
@@ -10967,7 +10766,7 @@
                     <a:bodyPr/>
                     <a:lstStyle/>
                     <a:p>
-                      <a:pPr indent="0" marL="0">
+                      <a:pPr marL="0" indent="0">
                         <a:buNone/>
                       </a:pPr>
                       <a:r>
@@ -11032,7 +10831,7 @@
                     <a:bodyPr/>
                     <a:lstStyle/>
                     <a:p>
-                      <a:pPr indent="0" marL="0">
+                      <a:pPr marL="0" indent="0">
                         <a:buNone/>
                       </a:pPr>
                       <a:r>
@@ -11097,7 +10896,7 @@
                     <a:bodyPr/>
                     <a:lstStyle/>
                     <a:p>
-                      <a:pPr indent="0" marL="0">
+                      <a:pPr marL="0" indent="0">
                         <a:buNone/>
                       </a:pPr>
                       <a:r>
@@ -11160,73 +10959,16 @@
                     </a:solidFill>
                   </a:tcPr>
                 </a:tc>
+                <a:extLst>
+                  <a:ext uri="{0D108BD9-81ED-4DB2-BD59-A6C34878D82A}">
+                    <a16:rowId xmlns:a16="http://schemas.microsoft.com/office/drawing/2014/main" val="10008"/>
+                  </a:ext>
+                </a:extLst>
               </a:tr>
             </a:tbl>
           </a:graphicData>
         </a:graphic>
       </p:graphicFrame>
-      <p:sp>
-        <p:nvSpPr>
-          <p:cNvPr id="4" name="Text 1"/>
-          <p:cNvSpPr txBox="1"/>
-          <p:nvPr/>
-        </p:nvSpPr>
-        <p:spPr>
-          <a:xfrm>
-            <a:off x="548640" y="5669280"/>
-            <a:ext cx="11091672" cy="548640"/>
-          </a:xfrm>
-          <a:prstGeom prst="rect">
-            <a:avLst/>
-          </a:prstGeom>
-          <a:noFill/>
-          <a:ln/>
-        </p:spPr>
-        <p:txBody>
-          <a:bodyPr wrap="square" lIns="0" tIns="0" rIns="0" bIns="0" rtlCol="0" anchor="t"/>
-          <a:lstStyle/>
-          <a:p>
-            <a:pPr indent="0" marL="0">
-              <a:lnSpc>
-                <a:spcPct val="120000"/>
-              </a:lnSpc>
-              <a:buNone/>
-            </a:pPr>
-            <a:r>
-              <a:rPr lang="en-US" sz="1300" dirty="0">
-                <a:solidFill>
-                  <a:srgbClr val="5F6B7A"/>
-                </a:solidFill>
-                <a:latin typeface="Malgun Gothic" pitchFamily="34" charset="0"/>
-                <a:ea typeface="Malgun Gothic" pitchFamily="34" charset="-122"/>
-                <a:cs typeface="Malgun Gothic" pitchFamily="34" charset="-120"/>
-              </a:rPr>
-              <a:t>확인: 2026-10-15 최신 펌웨어를 다운로드한 뒤 run_all.py로 실행한 결과 기준</a:t>
-            </a:r>
-            <a:endParaRPr lang="en-US" sz="1300" dirty="0"/>
-          </a:p>
-          <a:p>
-            <a:pPr indent="0" marL="0">
-              <a:lnSpc>
-                <a:spcPct val="120000"/>
-              </a:lnSpc>
-              <a:buNone/>
-            </a:pPr>
-            <a:r>
-              <a:rPr lang="en-US" sz="1300" dirty="0">
-                <a:solidFill>
-                  <a:srgbClr val="5F6B7A"/>
-                </a:solidFill>
-                <a:latin typeface="Malgun Gothic" pitchFamily="34" charset="0"/>
-                <a:ea typeface="Malgun Gothic" pitchFamily="34" charset="-122"/>
-                <a:cs typeface="Malgun Gothic" pitchFamily="34" charset="-120"/>
-              </a:rPr>
-              <a:t>출처: README.md 보드 검증 결과, pc/results/demo_report_20261015_*.json</a:t>
-            </a:r>
-            <a:endParaRPr lang="en-US" sz="1300" dirty="0"/>
-          </a:p>
-        </p:txBody>
-      </p:sp>
       <p:sp>
         <p:nvSpPr>
           <p:cNvPr id="25" name="Slide Number Placeholder 0"/>
@@ -11247,7 +10989,7 @@
           </a:prstGeom>
           <a:extLst>
             <a:ext uri="{C572A759-6A51-4108-AA02-DFA0A04FC94B}">
-              <ma14:wrappingTextBoxFlag xmlns:ma14="http://schemas.microsoft.com/office/mac/drawingml/2011/main" val="0"/>
+              <ma14:wrappingTextBoxFlag xmlns:ma14="http://schemas.microsoft.com/office/mac/drawingml/2011/main" xmlns="" val="0"/>
             </a:ext>
           </a:extLst>
         </p:spPr>
@@ -11268,7 +11010,7 @@
           <a:p>
             <a:pPr algn="r"/>
             <a:fld id="{F7021451-1387-4CA6-816F-3879F97B5CBC}" type="slidenum">
-              <a:rPr b="0" lang="en-US"/>
+              <a:rPr lang="en-US" b="0"/>
               <a:t>2</a:t>
             </a:fld>
             <a:endParaRPr lang="en-US"/>
@@ -11303,9 +11045,11 @@
       <p:sp>
         <p:nvSpPr>
           <p:cNvPr id="2" name="Text 0"/>
-          <p:cNvSpPr/>
+          <p:cNvSpPr>
+            <a:spLocks noGrp="1"/>
+          </p:cNvSpPr>
           <p:nvPr>
-            <p:ph idx="100" type="title" hasCustomPrompt="1"/>
+            <p:ph type="title" idx="100" hasCustomPrompt="1"/>
           </p:nvPr>
         </p:nvSpPr>
         <p:spPr>
@@ -11323,11 +11067,11 @@
           <a:bodyPr wrap="square" lIns="0" tIns="0" rIns="0" bIns="0" rtlCol="0" anchor="ctr"/>
           <a:lstStyle/>
           <a:p>
-            <a:pPr algn="l" indent="0" marL="0">
-              <a:buNone/>
-            </a:pPr>
-            <a:r>
-              <a:rPr lang="en-US" sz="2600" b="1" dirty="0">
+            <a:pPr marL="0" indent="0" algn="l">
+              <a:buNone/>
+            </a:pPr>
+            <a:r>
+              <a:rPr lang="ko-KR" altLang="en-US" sz="2600" b="1" dirty="0">
                 <a:solidFill>
                   <a:srgbClr val="1F2933"/>
                 </a:solidFill>
@@ -11335,7 +11079,29 @@
                 <a:ea typeface="Malgun Gothic" pitchFamily="34" charset="-122"/>
                 <a:cs typeface="Malgun Gothic" pitchFamily="34" charset="-120"/>
               </a:rPr>
-              <a:t>실물 시험 칩은 W25Q128이며, 이미지 영역을 첫 4 MiB로 제한했습니다</a:t>
+              <a:t>사용 </a:t>
+            </a:r>
+            <a:r>
+              <a:rPr lang="en-US" altLang="ko-KR" sz="2600" b="1" dirty="0">
+                <a:solidFill>
+                  <a:srgbClr val="1F2933"/>
+                </a:solidFill>
+                <a:latin typeface="Malgun Gothic" pitchFamily="34" charset="0"/>
+                <a:ea typeface="Malgun Gothic" pitchFamily="34" charset="-122"/>
+                <a:cs typeface="Malgun Gothic" pitchFamily="34" charset="-120"/>
+              </a:rPr>
+              <a:t>Flash memory</a:t>
+            </a:r>
+            <a:r>
+              <a:rPr lang="ko-KR" altLang="en-US" sz="2600" b="1" dirty="0">
+                <a:solidFill>
+                  <a:srgbClr val="1F2933"/>
+                </a:solidFill>
+                <a:latin typeface="Malgun Gothic" pitchFamily="34" charset="0"/>
+                <a:ea typeface="Malgun Gothic" pitchFamily="34" charset="-122"/>
+                <a:cs typeface="Malgun Gothic" pitchFamily="34" charset="-120"/>
+              </a:rPr>
+              <a:t> 변경사항</a:t>
             </a:r>
             <a:endParaRPr lang="en-US" sz="2600" dirty="0"/>
           </a:p>
@@ -11357,16 +11123,34 @@
         </p:nvGraphicFramePr>
         <p:xfrm>
           <a:off x="548640" y="1508760"/>
-          <a:ext cx="6355080" cy="914400"/>
+          <a:ext cx="6355080" cy="3730752"/>
         </p:xfrm>
         <a:graphic>
           <a:graphicData uri="http://schemas.openxmlformats.org/drawingml/2006/table">
             <a:tbl>
               <a:tblPr/>
               <a:tblGrid>
-                <a:gridCol w="1417320"/>
-                <a:gridCol w="2697480"/>
-                <a:gridCol w="2240280"/>
+                <a:gridCol w="1417320">
+                  <a:extLst>
+                    <a:ext uri="{9D8B030D-6E8A-4147-A177-3AD203B41FA5}">
+                      <a16:colId xmlns:a16="http://schemas.microsoft.com/office/drawing/2014/main" val="20000"/>
+                    </a:ext>
+                  </a:extLst>
+                </a:gridCol>
+                <a:gridCol w="2697480">
+                  <a:extLst>
+                    <a:ext uri="{9D8B030D-6E8A-4147-A177-3AD203B41FA5}">
+                      <a16:colId xmlns:a16="http://schemas.microsoft.com/office/drawing/2014/main" val="20001"/>
+                    </a:ext>
+                  </a:extLst>
+                </a:gridCol>
+                <a:gridCol w="2240280">
+                  <a:extLst>
+                    <a:ext uri="{9D8B030D-6E8A-4147-A177-3AD203B41FA5}">
+                      <a16:colId xmlns:a16="http://schemas.microsoft.com/office/drawing/2014/main" val="20002"/>
+                    </a:ext>
+                  </a:extLst>
+                </a:gridCol>
               </a:tblGrid>
               <a:tr h="621792">
                 <a:tc>
@@ -11374,7 +11158,7 @@
                     <a:bodyPr/>
                     <a:lstStyle/>
                     <a:p>
-                      <a:pPr indent="0" marL="0">
+                      <a:pPr marL="0" indent="0">
                         <a:buNone/>
                       </a:pPr>
                       <a:r>
@@ -11442,7 +11226,7 @@
                     <a:bodyPr/>
                     <a:lstStyle/>
                     <a:p>
-                      <a:pPr indent="0" marL="0">
+                      <a:pPr marL="0" indent="0">
                         <a:buNone/>
                       </a:pPr>
                       <a:r>
@@ -11510,7 +11294,7 @@
                     <a:bodyPr/>
                     <a:lstStyle/>
                     <a:p>
-                      <a:pPr indent="0" marL="0">
+                      <a:pPr marL="0" indent="0">
                         <a:buNone/>
                       </a:pPr>
                       <a:r>
@@ -11573,6 +11357,11 @@
                     </a:solidFill>
                   </a:tcPr>
                 </a:tc>
+                <a:extLst>
+                  <a:ext uri="{0D108BD9-81ED-4DB2-BD59-A6C34878D82A}">
+                    <a16:rowId xmlns:a16="http://schemas.microsoft.com/office/drawing/2014/main" val="10000"/>
+                  </a:ext>
+                </a:extLst>
               </a:tr>
               <a:tr h="621792">
                 <a:tc>
@@ -11580,7 +11369,7 @@
                     <a:bodyPr/>
                     <a:lstStyle/>
                     <a:p>
-                      <a:pPr indent="0" marL="0">
+                      <a:pPr marL="0" indent="0">
                         <a:buNone/>
                       </a:pPr>
                       <a:r>
@@ -11645,7 +11434,7 @@
                     <a:bodyPr/>
                     <a:lstStyle/>
                     <a:p>
-                      <a:pPr indent="0" marL="0">
+                      <a:pPr marL="0" indent="0">
                         <a:buNone/>
                       </a:pPr>
                       <a:r>
@@ -11710,7 +11499,7 @@
                     <a:bodyPr/>
                     <a:lstStyle/>
                     <a:p>
-                      <a:pPr indent="0" marL="0">
+                      <a:pPr marL="0" indent="0">
                         <a:buNone/>
                       </a:pPr>
                       <a:r>
@@ -11770,6 +11559,11 @@
                     </a:lnB>
                   </a:tcPr>
                 </a:tc>
+                <a:extLst>
+                  <a:ext uri="{0D108BD9-81ED-4DB2-BD59-A6C34878D82A}">
+                    <a16:rowId xmlns:a16="http://schemas.microsoft.com/office/drawing/2014/main" val="10001"/>
+                  </a:ext>
+                </a:extLst>
               </a:tr>
               <a:tr h="621792">
                 <a:tc>
@@ -11777,7 +11571,7 @@
                     <a:bodyPr/>
                     <a:lstStyle/>
                     <a:p>
-                      <a:pPr indent="0" marL="0">
+                      <a:pPr marL="0" indent="0">
                         <a:buNone/>
                       </a:pPr>
                       <a:r>
@@ -11842,7 +11636,7 @@
                     <a:bodyPr/>
                     <a:lstStyle/>
                     <a:p>
-                      <a:pPr indent="0" marL="0">
+                      <a:pPr marL="0" indent="0">
                         <a:buNone/>
                       </a:pPr>
                       <a:r>
@@ -11907,7 +11701,7 @@
                     <a:bodyPr/>
                     <a:lstStyle/>
                     <a:p>
-                      <a:pPr indent="0" marL="0">
+                      <a:pPr marL="0" indent="0">
                         <a:buNone/>
                       </a:pPr>
                       <a:r>
@@ -11967,6 +11761,11 @@
                     </a:lnB>
                   </a:tcPr>
                 </a:tc>
+                <a:extLst>
+                  <a:ext uri="{0D108BD9-81ED-4DB2-BD59-A6C34878D82A}">
+                    <a16:rowId xmlns:a16="http://schemas.microsoft.com/office/drawing/2014/main" val="10002"/>
+                  </a:ext>
+                </a:extLst>
               </a:tr>
               <a:tr h="621792">
                 <a:tc>
@@ -11974,7 +11773,7 @@
                     <a:bodyPr/>
                     <a:lstStyle/>
                     <a:p>
-                      <a:pPr indent="0" marL="0">
+                      <a:pPr marL="0" indent="0">
                         <a:buNone/>
                       </a:pPr>
                       <a:r>
@@ -12039,7 +11838,7 @@
                     <a:bodyPr/>
                     <a:lstStyle/>
                     <a:p>
-                      <a:pPr indent="0" marL="0">
+                      <a:pPr marL="0" indent="0">
                         <a:buNone/>
                       </a:pPr>
                       <a:r>
@@ -12104,7 +11903,7 @@
                     <a:bodyPr/>
                     <a:lstStyle/>
                     <a:p>
-                      <a:pPr indent="0" marL="0">
+                      <a:pPr marL="0" indent="0">
                         <a:buNone/>
                       </a:pPr>
                       <a:r>
@@ -12164,6 +11963,11 @@
                     </a:lnB>
                   </a:tcPr>
                 </a:tc>
+                <a:extLst>
+                  <a:ext uri="{0D108BD9-81ED-4DB2-BD59-A6C34878D82A}">
+                    <a16:rowId xmlns:a16="http://schemas.microsoft.com/office/drawing/2014/main" val="10003"/>
+                  </a:ext>
+                </a:extLst>
               </a:tr>
               <a:tr h="621792">
                 <a:tc>
@@ -12171,7 +11975,7 @@
                     <a:bodyPr/>
                     <a:lstStyle/>
                     <a:p>
-                      <a:pPr indent="0" marL="0">
+                      <a:pPr marL="0" indent="0">
                         <a:buNone/>
                       </a:pPr>
                       <a:r>
@@ -12236,7 +12040,7 @@
                     <a:bodyPr/>
                     <a:lstStyle/>
                     <a:p>
-                      <a:pPr indent="0" marL="0">
+                      <a:pPr marL="0" indent="0">
                         <a:buNone/>
                       </a:pPr>
                       <a:r>
@@ -12301,7 +12105,7 @@
                     <a:bodyPr/>
                     <a:lstStyle/>
                     <a:p>
-                      <a:pPr indent="0" marL="0">
+                      <a:pPr marL="0" indent="0">
                         <a:buNone/>
                       </a:pPr>
                       <a:r>
@@ -12361,6 +12165,11 @@
                     </a:lnB>
                   </a:tcPr>
                 </a:tc>
+                <a:extLst>
+                  <a:ext uri="{0D108BD9-81ED-4DB2-BD59-A6C34878D82A}">
+                    <a16:rowId xmlns:a16="http://schemas.microsoft.com/office/drawing/2014/main" val="10004"/>
+                  </a:ext>
+                </a:extLst>
               </a:tr>
               <a:tr h="621792">
                 <a:tc>
@@ -12368,7 +12177,7 @@
                     <a:bodyPr/>
                     <a:lstStyle/>
                     <a:p>
-                      <a:pPr indent="0" marL="0">
+                      <a:pPr marL="0" indent="0">
                         <a:buNone/>
                       </a:pPr>
                       <a:r>
@@ -12433,7 +12242,7 @@
                     <a:bodyPr/>
                     <a:lstStyle/>
                     <a:p>
-                      <a:pPr indent="0" marL="0">
+                      <a:pPr marL="0" indent="0">
                         <a:buNone/>
                       </a:pPr>
                       <a:r>
@@ -12498,7 +12307,7 @@
                     <a:bodyPr/>
                     <a:lstStyle/>
                     <a:p>
-                      <a:pPr indent="0" marL="0">
+                      <a:pPr marL="0" indent="0">
                         <a:buNone/>
                       </a:pPr>
                       <a:r>
@@ -12558,6 +12367,11 @@
                     </a:lnB>
                   </a:tcPr>
                 </a:tc>
+                <a:extLst>
+                  <a:ext uri="{0D108BD9-81ED-4DB2-BD59-A6C34878D82A}">
+                    <a16:rowId xmlns:a16="http://schemas.microsoft.com/office/drawing/2014/main" val="10005"/>
+                  </a:ext>
+                </a:extLst>
               </a:tr>
             </a:tbl>
           </a:graphicData>
@@ -12565,7 +12379,7 @@
       </p:graphicFrame>
       <p:sp>
         <p:nvSpPr>
-          <p:cNvPr id="4" name="Text 1"/>
+          <p:cNvPr id="3" name="Text 1"/>
           <p:cNvSpPr txBox="1"/>
           <p:nvPr/>
         </p:nvSpPr>
@@ -12584,7 +12398,7 @@
           <a:bodyPr wrap="square" lIns="0" tIns="0" rIns="0" bIns="0" rtlCol="0" anchor="t"/>
           <a:lstStyle/>
           <a:p>
-            <a:pPr indent="0" marL="0">
+            <a:pPr marL="0" indent="0">
               <a:buNone/>
             </a:pPr>
             <a:r>
@@ -12717,6 +12531,13 @@
             <a:prstDash val="solid"/>
           </a:ln>
         </p:spPr>
+        <p:txBody>
+          <a:bodyPr/>
+          <a:lstStyle/>
+          <a:p>
+            <a:endParaRPr lang="ko-KR" altLang="en-US"/>
+          </a:p>
+        </p:txBody>
       </p:sp>
       <p:sp>
         <p:nvSpPr>
@@ -12739,7 +12560,7 @@
           <a:bodyPr wrap="square" lIns="0" tIns="0" rIns="0" bIns="0" rtlCol="0" anchor="t"/>
           <a:lstStyle/>
           <a:p>
-            <a:pPr indent="0" marL="0">
+            <a:pPr marL="0" indent="0">
               <a:lnSpc>
                 <a:spcPct val="115000"/>
               </a:lnSpc>
@@ -12759,7 +12580,7 @@
             <a:endParaRPr lang="en-US" sz="1500" dirty="0"/>
           </a:p>
           <a:p>
-            <a:pPr indent="0" marL="0">
+            <a:pPr marL="0" indent="0">
               <a:lnSpc>
                 <a:spcPct val="115000"/>
               </a:lnSpc>
@@ -12800,7 +12621,7 @@
           </a:prstGeom>
           <a:extLst>
             <a:ext uri="{C572A759-6A51-4108-AA02-DFA0A04FC94B}">
-              <ma14:wrappingTextBoxFlag xmlns:ma14="http://schemas.microsoft.com/office/mac/drawingml/2011/main" val="0"/>
+              <ma14:wrappingTextBoxFlag xmlns:ma14="http://schemas.microsoft.com/office/mac/drawingml/2011/main" xmlns="" val="0"/>
             </a:ext>
           </a:extLst>
         </p:spPr>
@@ -12821,7 +12642,7 @@
           <a:p>
             <a:pPr algn="r"/>
             <a:fld id="{F7021451-1387-4CA6-816F-3879F97B5CBC}" type="slidenum">
-              <a:rPr b="0" lang="en-US"/>
+              <a:rPr lang="en-US" b="0"/>
               <a:t>3</a:t>
             </a:fld>
             <a:endParaRPr lang="en-US"/>
@@ -12856,9 +12677,11 @@
       <p:sp>
         <p:nvSpPr>
           <p:cNvPr id="2" name="Text 0"/>
-          <p:cNvSpPr/>
+          <p:cNvSpPr>
+            <a:spLocks noGrp="1"/>
+          </p:cNvSpPr>
           <p:nvPr>
-            <p:ph idx="100" type="title" hasCustomPrompt="1"/>
+            <p:ph type="title" idx="100" hasCustomPrompt="1"/>
           </p:nvPr>
         </p:nvSpPr>
         <p:spPr>
@@ -12876,7 +12699,7 @@
           <a:bodyPr wrap="square" lIns="0" tIns="0" rIns="0" bIns="0" rtlCol="0" anchor="ctr"/>
           <a:lstStyle/>
           <a:p>
-            <a:pPr algn="l" indent="0" marL="0">
+            <a:pPr marL="0" indent="0" algn="l">
               <a:buNone/>
             </a:pPr>
             <a:r>
@@ -12918,6 +12741,13 @@
             <a:prstDash val="dash"/>
           </a:ln>
         </p:spPr>
+        <p:txBody>
+          <a:bodyPr/>
+          <a:lstStyle/>
+          <a:p>
+            <a:endParaRPr lang="ko-KR" altLang="en-US"/>
+          </a:p>
+        </p:txBody>
       </p:sp>
       <p:sp>
         <p:nvSpPr>
@@ -12940,7 +12770,7 @@
           <a:bodyPr wrap="square" lIns="0" tIns="0" rIns="0" bIns="0" rtlCol="0" anchor="t"/>
           <a:lstStyle/>
           <a:p>
-            <a:pPr indent="0" marL="0">
+            <a:pPr marL="0" indent="0">
               <a:buNone/>
             </a:pPr>
             <a:r>
@@ -12982,6 +12812,13 @@
             <a:prstDash val="solid"/>
           </a:ln>
         </p:spPr>
+        <p:txBody>
+          <a:bodyPr/>
+          <a:lstStyle/>
+          <a:p>
+            <a:endParaRPr lang="ko-KR" altLang="en-US"/>
+          </a:p>
+        </p:txBody>
       </p:sp>
       <p:sp>
         <p:nvSpPr>
@@ -13004,7 +12841,7 @@
           <a:bodyPr wrap="square" lIns="0" tIns="0" rIns="0" bIns="0" rtlCol="0" anchor="ctr"/>
           <a:lstStyle/>
           <a:p>
-            <a:pPr indent="0" marL="0">
+            <a:pPr marL="0" indent="0">
               <a:lnSpc>
                 <a:spcPct val="110000"/>
               </a:lnSpc>
@@ -13024,7 +12861,7 @@
             <a:endParaRPr lang="en-US" sz="1600" dirty="0"/>
           </a:p>
           <a:p>
-            <a:pPr indent="0" marL="0">
+            <a:pPr marL="0" indent="0">
               <a:lnSpc>
                 <a:spcPct val="110000"/>
               </a:lnSpc>
@@ -13044,7 +12881,7 @@
             <a:endParaRPr lang="en-US" sz="1600" dirty="0"/>
           </a:p>
           <a:p>
-            <a:pPr indent="0" marL="0">
+            <a:pPr marL="0" indent="0">
               <a:lnSpc>
                 <a:spcPct val="110000"/>
               </a:lnSpc>
@@ -13089,6 +12926,13 @@
             <a:prstDash val="solid"/>
           </a:ln>
         </p:spPr>
+        <p:txBody>
+          <a:bodyPr/>
+          <a:lstStyle/>
+          <a:p>
+            <a:endParaRPr lang="ko-KR" altLang="en-US"/>
+          </a:p>
+        </p:txBody>
       </p:sp>
       <p:sp>
         <p:nvSpPr>
@@ -13111,7 +12955,7 @@
           <a:bodyPr wrap="square" lIns="0" tIns="0" rIns="0" bIns="0" rtlCol="0" anchor="ctr"/>
           <a:lstStyle/>
           <a:p>
-            <a:pPr indent="0" marL="0">
+            <a:pPr marL="0" indent="0">
               <a:lnSpc>
                 <a:spcPct val="110000"/>
               </a:lnSpc>
@@ -13131,7 +12975,7 @@
             <a:endParaRPr lang="en-US" sz="1600" dirty="0"/>
           </a:p>
           <a:p>
-            <a:pPr indent="0" marL="0">
+            <a:pPr marL="0" indent="0">
               <a:lnSpc>
                 <a:spcPct val="110000"/>
               </a:lnSpc>
@@ -13176,6 +13020,13 @@
             <a:prstDash val="solid"/>
           </a:ln>
         </p:spPr>
+        <p:txBody>
+          <a:bodyPr/>
+          <a:lstStyle/>
+          <a:p>
+            <a:endParaRPr lang="ko-KR" altLang="en-US"/>
+          </a:p>
+        </p:txBody>
       </p:sp>
       <p:sp>
         <p:nvSpPr>
@@ -13198,7 +13049,7 @@
           <a:bodyPr wrap="square" lIns="0" tIns="0" rIns="0" bIns="0" rtlCol="0" anchor="ctr"/>
           <a:lstStyle/>
           <a:p>
-            <a:pPr indent="0" marL="0">
+            <a:pPr marL="0" indent="0">
               <a:lnSpc>
                 <a:spcPct val="110000"/>
               </a:lnSpc>
@@ -13218,7 +13069,7 @@
             <a:endParaRPr lang="en-US" sz="1600" dirty="0"/>
           </a:p>
           <a:p>
-            <a:pPr indent="0" marL="0">
+            <a:pPr marL="0" indent="0">
               <a:lnSpc>
                 <a:spcPct val="110000"/>
               </a:lnSpc>
@@ -13263,6 +13114,13 @@
             <a:prstDash val="solid"/>
           </a:ln>
         </p:spPr>
+        <p:txBody>
+          <a:bodyPr/>
+          <a:lstStyle/>
+          <a:p>
+            <a:endParaRPr lang="ko-KR" altLang="en-US"/>
+          </a:p>
+        </p:txBody>
       </p:sp>
       <p:sp>
         <p:nvSpPr>
@@ -13285,7 +13143,7 @@
           <a:bodyPr wrap="square" lIns="0" tIns="0" rIns="0" bIns="0" rtlCol="0" anchor="ctr"/>
           <a:lstStyle/>
           <a:p>
-            <a:pPr indent="0" marL="0">
+            <a:pPr marL="0" indent="0">
               <a:lnSpc>
                 <a:spcPct val="110000"/>
               </a:lnSpc>
@@ -13305,7 +13163,7 @@
             <a:endParaRPr lang="en-US" sz="1600" dirty="0"/>
           </a:p>
           <a:p>
-            <a:pPr indent="0" marL="0">
+            <a:pPr marL="0" indent="0">
               <a:lnSpc>
                 <a:spcPct val="110000"/>
               </a:lnSpc>
@@ -13350,6 +13208,13 @@
             <a:prstDash val="solid"/>
           </a:ln>
         </p:spPr>
+        <p:txBody>
+          <a:bodyPr/>
+          <a:lstStyle/>
+          <a:p>
+            <a:endParaRPr lang="ko-KR" altLang="en-US"/>
+          </a:p>
+        </p:txBody>
       </p:sp>
       <p:sp>
         <p:nvSpPr>
@@ -13372,7 +13237,7 @@
           <a:bodyPr wrap="square" lIns="0" tIns="0" rIns="0" bIns="0" rtlCol="0" anchor="ctr"/>
           <a:lstStyle/>
           <a:p>
-            <a:pPr indent="0" marL="0">
+            <a:pPr marL="0" indent="0">
               <a:lnSpc>
                 <a:spcPct val="110000"/>
               </a:lnSpc>
@@ -13392,7 +13257,7 @@
             <a:endParaRPr lang="en-US" sz="1600" dirty="0"/>
           </a:p>
           <a:p>
-            <a:pPr indent="0" marL="0">
+            <a:pPr marL="0" indent="0">
               <a:lnSpc>
                 <a:spcPct val="110000"/>
               </a:lnSpc>
@@ -13437,6 +13302,13 @@
             <a:prstDash val="solid"/>
           </a:ln>
         </p:spPr>
+        <p:txBody>
+          <a:bodyPr/>
+          <a:lstStyle/>
+          <a:p>
+            <a:endParaRPr lang="ko-KR" altLang="en-US"/>
+          </a:p>
+        </p:txBody>
       </p:sp>
       <p:sp>
         <p:nvSpPr>
@@ -13459,7 +13331,7 @@
           <a:bodyPr wrap="square" lIns="0" tIns="0" rIns="0" bIns="0" rtlCol="0" anchor="ctr"/>
           <a:lstStyle/>
           <a:p>
-            <a:pPr indent="0" marL="0">
+            <a:pPr marL="0" indent="0">
               <a:lnSpc>
                 <a:spcPct val="110000"/>
               </a:lnSpc>
@@ -13479,7 +13351,7 @@
             <a:endParaRPr lang="en-US" sz="1600" dirty="0"/>
           </a:p>
           <a:p>
-            <a:pPr indent="0" marL="0">
+            <a:pPr marL="0" indent="0">
               <a:lnSpc>
                 <a:spcPct val="110000"/>
               </a:lnSpc>
@@ -13524,6 +13396,13 @@
             <a:tailEnd type="triangle"/>
           </a:ln>
         </p:spPr>
+        <p:txBody>
+          <a:bodyPr/>
+          <a:lstStyle/>
+          <a:p>
+            <a:endParaRPr lang="ko-KR" altLang="en-US"/>
+          </a:p>
+        </p:txBody>
       </p:sp>
       <p:sp>
         <p:nvSpPr>
@@ -13549,6 +13428,13 @@
             <a:tailEnd type="triangle"/>
           </a:ln>
         </p:spPr>
+        <p:txBody>
+          <a:bodyPr/>
+          <a:lstStyle/>
+          <a:p>
+            <a:endParaRPr lang="ko-KR" altLang="en-US"/>
+          </a:p>
+        </p:txBody>
       </p:sp>
       <p:sp>
         <p:nvSpPr>
@@ -13574,6 +13460,13 @@
             <a:tailEnd type="triangle"/>
           </a:ln>
         </p:spPr>
+        <p:txBody>
+          <a:bodyPr/>
+          <a:lstStyle/>
+          <a:p>
+            <a:endParaRPr lang="ko-KR" altLang="en-US"/>
+          </a:p>
+        </p:txBody>
       </p:sp>
       <p:sp>
         <p:nvSpPr>
@@ -13599,6 +13492,13 @@
             <a:tailEnd type="triangle"/>
           </a:ln>
         </p:spPr>
+        <p:txBody>
+          <a:bodyPr/>
+          <a:lstStyle/>
+          <a:p>
+            <a:endParaRPr lang="ko-KR" altLang="en-US"/>
+          </a:p>
+        </p:txBody>
       </p:sp>
       <p:sp>
         <p:nvSpPr>
@@ -13624,6 +13524,13 @@
             <a:tailEnd type="triangle"/>
           </a:ln>
         </p:spPr>
+        <p:txBody>
+          <a:bodyPr/>
+          <a:lstStyle/>
+          <a:p>
+            <a:endParaRPr lang="ko-KR" altLang="en-US"/>
+          </a:p>
+        </p:txBody>
       </p:sp>
       <p:sp>
         <p:nvSpPr>
@@ -13646,7 +13553,7 @@
           <a:bodyPr wrap="square" lIns="0" tIns="0" rIns="0" bIns="0" rtlCol="0" anchor="t"/>
           <a:lstStyle/>
           <a:p>
-            <a:pPr algn="ctr" indent="0" marL="0">
+            <a:pPr marL="0" indent="0" algn="ctr">
               <a:buNone/>
             </a:pPr>
             <a:r>
@@ -13685,7 +13592,7 @@
           <a:bodyPr wrap="square" lIns="0" tIns="0" rIns="0" bIns="0" rtlCol="0" anchor="t"/>
           <a:lstStyle/>
           <a:p>
-            <a:pPr algn="ctr" indent="0" marL="0">
+            <a:pPr marL="0" indent="0" algn="ctr">
               <a:buNone/>
             </a:pPr>
             <a:r>
@@ -13702,7 +13609,7 @@
             <a:endParaRPr lang="en-US" sz="1200" dirty="0"/>
           </a:p>
           <a:p>
-            <a:pPr algn="ctr" indent="0" marL="0">
+            <a:pPr marL="0" indent="0" algn="ctr">
               <a:buNone/>
             </a:pPr>
             <a:r>
@@ -13742,6 +13649,13 @@
             <a:prstDash val="dash"/>
           </a:ln>
         </p:spPr>
+        <p:txBody>
+          <a:bodyPr/>
+          <a:lstStyle/>
+          <a:p>
+            <a:endParaRPr lang="ko-KR" altLang="en-US"/>
+          </a:p>
+        </p:txBody>
       </p:sp>
       <p:sp>
         <p:nvSpPr>
@@ -13765,6 +13679,13 @@
             <a:prstDash val="dash"/>
           </a:ln>
         </p:spPr>
+        <p:txBody>
+          <a:bodyPr/>
+          <a:lstStyle/>
+          <a:p>
+            <a:endParaRPr lang="ko-KR" altLang="en-US"/>
+          </a:p>
+        </p:txBody>
       </p:sp>
       <p:sp>
         <p:nvSpPr>
@@ -13789,6 +13710,13 @@
             <a:headEnd type="triangle"/>
           </a:ln>
         </p:spPr>
+        <p:txBody>
+          <a:bodyPr/>
+          <a:lstStyle/>
+          <a:p>
+            <a:endParaRPr lang="ko-KR" altLang="en-US"/>
+          </a:p>
+        </p:txBody>
       </p:sp>
       <p:sp>
         <p:nvSpPr>
@@ -13811,7 +13739,7 @@
           <a:bodyPr wrap="square" lIns="0" tIns="0" rIns="0" bIns="0" rtlCol="0" anchor="t"/>
           <a:lstStyle/>
           <a:p>
-            <a:pPr algn="r" indent="0" marL="0">
+            <a:pPr marL="0" indent="0" algn="r">
               <a:buNone/>
             </a:pPr>
             <a:r>
@@ -13850,7 +13778,7 @@
           <a:bodyPr wrap="square" lIns="0" tIns="0" rIns="0" bIns="0" rtlCol="0" anchor="t"/>
           <a:lstStyle/>
           <a:p>
-            <a:pPr indent="0" marL="0">
+            <a:pPr marL="0" indent="0">
               <a:buNone/>
             </a:pPr>
             <a:r>
@@ -13892,6 +13820,13 @@
             <a:prstDash val="solid"/>
           </a:ln>
         </p:spPr>
+        <p:txBody>
+          <a:bodyPr/>
+          <a:lstStyle/>
+          <a:p>
+            <a:endParaRPr lang="ko-KR" altLang="en-US"/>
+          </a:p>
+        </p:txBody>
       </p:sp>
       <p:sp>
         <p:nvSpPr>
@@ -13914,7 +13849,7 @@
           <a:bodyPr wrap="square" lIns="0" tIns="0" rIns="0" bIns="0" rtlCol="0" anchor="ctr"/>
           <a:lstStyle/>
           <a:p>
-            <a:pPr algn="ctr" indent="0" marL="0">
+            <a:pPr marL="0" indent="0" algn="ctr">
               <a:buNone/>
             </a:pPr>
             <a:r>
@@ -13956,6 +13891,13 @@
             <a:prstDash val="solid"/>
           </a:ln>
         </p:spPr>
+        <p:txBody>
+          <a:bodyPr/>
+          <a:lstStyle/>
+          <a:p>
+            <a:endParaRPr lang="ko-KR" altLang="en-US"/>
+          </a:p>
+        </p:txBody>
       </p:sp>
       <p:sp>
         <p:nvSpPr>
@@ -13978,7 +13920,7 @@
           <a:bodyPr wrap="square" lIns="0" tIns="0" rIns="0" bIns="0" rtlCol="0" anchor="ctr"/>
           <a:lstStyle/>
           <a:p>
-            <a:pPr algn="ctr" indent="0" marL="0">
+            <a:pPr marL="0" indent="0" algn="ctr">
               <a:buNone/>
             </a:pPr>
             <a:r>
@@ -14020,6 +13962,13 @@
             <a:prstDash val="solid"/>
           </a:ln>
         </p:spPr>
+        <p:txBody>
+          <a:bodyPr/>
+          <a:lstStyle/>
+          <a:p>
+            <a:endParaRPr lang="ko-KR" altLang="en-US"/>
+          </a:p>
+        </p:txBody>
       </p:sp>
       <p:sp>
         <p:nvSpPr>
@@ -14042,7 +13991,7 @@
           <a:bodyPr wrap="square" lIns="0" tIns="0" rIns="0" bIns="0" rtlCol="0" anchor="ctr"/>
           <a:lstStyle/>
           <a:p>
-            <a:pPr algn="ctr" indent="0" marL="0">
+            <a:pPr marL="0" indent="0" algn="ctr">
               <a:buNone/>
             </a:pPr>
             <a:r>
@@ -14084,6 +14033,13 @@
             <a:prstDash val="solid"/>
           </a:ln>
         </p:spPr>
+        <p:txBody>
+          <a:bodyPr/>
+          <a:lstStyle/>
+          <a:p>
+            <a:endParaRPr lang="ko-KR" altLang="en-US"/>
+          </a:p>
+        </p:txBody>
       </p:sp>
       <p:sp>
         <p:nvSpPr>
@@ -14106,7 +14062,7 @@
           <a:bodyPr wrap="square" lIns="0" tIns="0" rIns="0" bIns="0" rtlCol="0" anchor="ctr"/>
           <a:lstStyle/>
           <a:p>
-            <a:pPr algn="ctr" indent="0" marL="0">
+            <a:pPr marL="0" indent="0" algn="ctr">
               <a:buNone/>
             </a:pPr>
             <a:r>
@@ -14126,7 +14082,7 @@
       </p:sp>
       <p:sp>
         <p:nvSpPr>
-          <p:cNvPr id="25" name="Slide Number Placeholder 0"/>
+          <p:cNvPr id="37" name="Slide Number Placeholder 0"/>
           <p:cNvSpPr>
             <a:spLocks noGrp="1"/>
           </p:cNvSpPr>
@@ -14144,7 +14100,7 @@
           </a:prstGeom>
           <a:extLst>
             <a:ext uri="{C572A759-6A51-4108-AA02-DFA0A04FC94B}">
-              <ma14:wrappingTextBoxFlag xmlns:ma14="http://schemas.microsoft.com/office/mac/drawingml/2011/main" val="0"/>
+              <ma14:wrappingTextBoxFlag xmlns:ma14="http://schemas.microsoft.com/office/mac/drawingml/2011/main" xmlns="" val="0"/>
             </a:ext>
           </a:extLst>
         </p:spPr>
@@ -14165,7 +14121,7 @@
           <a:p>
             <a:pPr algn="r"/>
             <a:fld id="{F7021451-1387-4CA6-816F-3879F97B5CBC}" type="slidenum">
-              <a:rPr b="0" lang="en-US"/>
+              <a:rPr lang="en-US" b="0"/>
               <a:t>4</a:t>
             </a:fld>
             <a:endParaRPr lang="en-US"/>
@@ -14200,9 +14156,11 @@
       <p:sp>
         <p:nvSpPr>
           <p:cNvPr id="2" name="Text 0"/>
-          <p:cNvSpPr/>
+          <p:cNvSpPr>
+            <a:spLocks noGrp="1"/>
+          </p:cNvSpPr>
           <p:nvPr>
-            <p:ph idx="100" type="title" hasCustomPrompt="1"/>
+            <p:ph type="title" idx="100" hasCustomPrompt="1"/>
           </p:nvPr>
         </p:nvSpPr>
         <p:spPr>
@@ -14220,7 +14178,7 @@
           <a:bodyPr wrap="square" lIns="0" tIns="0" rIns="0" bIns="0" rtlCol="0" anchor="ctr"/>
           <a:lstStyle/>
           <a:p>
-            <a:pPr algn="l" indent="0" marL="0">
+            <a:pPr marL="0" indent="0" algn="l">
               <a:buNone/>
             </a:pPr>
             <a:r>
@@ -14232,7 +14190,29 @@
                 <a:ea typeface="Malgun Gothic" pitchFamily="34" charset="-122"/>
                 <a:cs typeface="Malgun Gothic" pitchFamily="34" charset="-120"/>
               </a:rPr>
-              <a:t>UART 수신: 4 KiB DMA 이중 버퍼와 청크 단위 확인</a:t>
+              <a:t>UART 수신: 4 KiB DMA double </a:t>
+            </a:r>
+            <a:r>
+              <a:rPr lang="en-US" sz="2600" b="1" dirty="0" err="1">
+                <a:solidFill>
+                  <a:srgbClr val="1F2933"/>
+                </a:solidFill>
+                <a:latin typeface="Malgun Gothic" pitchFamily="34" charset="0"/>
+                <a:ea typeface="Malgun Gothic" pitchFamily="34" charset="-122"/>
+                <a:cs typeface="Malgun Gothic" pitchFamily="34" charset="-120"/>
+              </a:rPr>
+              <a:t>buffer와</a:t>
+            </a:r>
+            <a:r>
+              <a:rPr lang="en-US" sz="2600" b="1" dirty="0">
+                <a:solidFill>
+                  <a:srgbClr val="1F2933"/>
+                </a:solidFill>
+                <a:latin typeface="Malgun Gothic" pitchFamily="34" charset="0"/>
+                <a:ea typeface="Malgun Gothic" pitchFamily="34" charset="-122"/>
+                <a:cs typeface="Malgun Gothic" pitchFamily="34" charset="-120"/>
+              </a:rPr>
+              <a:t> 청크 단위 확인</a:t>
             </a:r>
             <a:endParaRPr lang="en-US" sz="2600" dirty="0"/>
           </a:p>
@@ -14259,7 +14239,7 @@
           <a:bodyPr wrap="square" lIns="0" tIns="0" rIns="0" bIns="0" rtlCol="0" anchor="t"/>
           <a:lstStyle/>
           <a:p>
-            <a:pPr indent="0" marL="0">
+            <a:pPr marL="0" indent="0">
               <a:buNone/>
             </a:pPr>
             <a:r>
@@ -14301,6 +14281,13 @@
             <a:prstDash val="solid"/>
           </a:ln>
         </p:spPr>
+        <p:txBody>
+          <a:bodyPr/>
+          <a:lstStyle/>
+          <a:p>
+            <a:endParaRPr lang="ko-KR" altLang="en-US"/>
+          </a:p>
+        </p:txBody>
       </p:sp>
       <p:sp>
         <p:nvSpPr>
@@ -14323,7 +14310,7 @@
           <a:bodyPr wrap="square" lIns="0" tIns="0" rIns="0" bIns="0" rtlCol="0" anchor="ctr"/>
           <a:lstStyle/>
           <a:p>
-            <a:pPr algn="ctr" indent="0" marL="0">
+            <a:pPr marL="0" indent="0" algn="ctr">
               <a:buNone/>
             </a:pPr>
             <a:r>
@@ -14365,6 +14352,13 @@
             <a:prstDash val="solid"/>
           </a:ln>
         </p:spPr>
+        <p:txBody>
+          <a:bodyPr/>
+          <a:lstStyle/>
+          <a:p>
+            <a:endParaRPr lang="ko-KR" altLang="en-US"/>
+          </a:p>
+        </p:txBody>
       </p:sp>
       <p:sp>
         <p:nvSpPr>
@@ -14387,7 +14381,7 @@
           <a:bodyPr wrap="square" lIns="0" tIns="0" rIns="0" bIns="0" rtlCol="0" anchor="ctr"/>
           <a:lstStyle/>
           <a:p>
-            <a:pPr algn="ctr" indent="0" marL="0">
+            <a:pPr marL="0" indent="0" algn="ctr">
               <a:buNone/>
             </a:pPr>
             <a:r>
@@ -14429,6 +14423,13 @@
             <a:prstDash val="solid"/>
           </a:ln>
         </p:spPr>
+        <p:txBody>
+          <a:bodyPr/>
+          <a:lstStyle/>
+          <a:p>
+            <a:endParaRPr lang="ko-KR" altLang="en-US"/>
+          </a:p>
+        </p:txBody>
       </p:sp>
       <p:sp>
         <p:nvSpPr>
@@ -14451,7 +14452,7 @@
           <a:bodyPr wrap="square" lIns="0" tIns="0" rIns="0" bIns="0" rtlCol="0" anchor="ctr"/>
           <a:lstStyle/>
           <a:p>
-            <a:pPr algn="ctr" indent="0" marL="0">
+            <a:pPr marL="0" indent="0" algn="ctr">
               <a:buNone/>
             </a:pPr>
             <a:r>
@@ -14493,6 +14494,13 @@
             <a:prstDash val="solid"/>
           </a:ln>
         </p:spPr>
+        <p:txBody>
+          <a:bodyPr/>
+          <a:lstStyle/>
+          <a:p>
+            <a:endParaRPr lang="ko-KR" altLang="en-US"/>
+          </a:p>
+        </p:txBody>
       </p:sp>
       <p:sp>
         <p:nvSpPr>
@@ -14515,7 +14523,7 @@
           <a:bodyPr wrap="square" lIns="0" tIns="0" rIns="0" bIns="0" rtlCol="0" anchor="ctr"/>
           <a:lstStyle/>
           <a:p>
-            <a:pPr algn="ctr" indent="0" marL="0">
+            <a:pPr marL="0" indent="0" algn="ctr">
               <a:buNone/>
             </a:pPr>
             <a:r>
@@ -14554,7 +14562,7 @@
           <a:bodyPr wrap="square" lIns="0" tIns="0" rIns="0" bIns="0" rtlCol="0" anchor="t"/>
           <a:lstStyle/>
           <a:p>
-            <a:pPr indent="0" marL="0">
+            <a:pPr marL="0" indent="0">
               <a:buNone/>
             </a:pPr>
             <a:r>
@@ -14593,7 +14601,7 @@
           <a:bodyPr wrap="square" lIns="0" tIns="0" rIns="0" bIns="0" rtlCol="0" anchor="t"/>
           <a:lstStyle/>
           <a:p>
-            <a:pPr indent="0" marL="0">
+            <a:pPr marL="0" indent="0">
               <a:buNone/>
             </a:pPr>
             <a:r>
@@ -14637,6 +14645,13 @@
             <a:prstDash val="solid"/>
           </a:ln>
         </p:spPr>
+        <p:txBody>
+          <a:bodyPr/>
+          <a:lstStyle/>
+          <a:p>
+            <a:endParaRPr lang="ko-KR" altLang="en-US"/>
+          </a:p>
+        </p:txBody>
       </p:sp>
       <p:sp>
         <p:nvSpPr>
@@ -14659,7 +14674,7 @@
           <a:bodyPr wrap="square" lIns="0" tIns="0" rIns="0" bIns="0" rtlCol="0" anchor="ctr"/>
           <a:lstStyle/>
           <a:p>
-            <a:pPr algn="ctr" indent="0" marL="0">
+            <a:pPr marL="0" indent="0" algn="ctr">
               <a:lnSpc>
                 <a:spcPct val="110000"/>
               </a:lnSpc>
@@ -14703,6 +14718,13 @@
             <a:tailEnd type="triangle"/>
           </a:ln>
         </p:spPr>
+        <p:txBody>
+          <a:bodyPr/>
+          <a:lstStyle/>
+          <a:p>
+            <a:endParaRPr lang="ko-KR" altLang="en-US"/>
+          </a:p>
+        </p:txBody>
       </p:sp>
       <p:sp>
         <p:nvSpPr>
@@ -14730,6 +14752,13 @@
             <a:prstDash val="solid"/>
           </a:ln>
         </p:spPr>
+        <p:txBody>
+          <a:bodyPr/>
+          <a:lstStyle/>
+          <a:p>
+            <a:endParaRPr lang="ko-KR" altLang="en-US"/>
+          </a:p>
+        </p:txBody>
       </p:sp>
       <p:sp>
         <p:nvSpPr>
@@ -14752,7 +14781,7 @@
           <a:bodyPr wrap="square" lIns="0" tIns="0" rIns="0" bIns="0" rtlCol="0" anchor="ctr"/>
           <a:lstStyle/>
           <a:p>
-            <a:pPr algn="ctr" indent="0" marL="0">
+            <a:pPr marL="0" indent="0" algn="ctr">
               <a:lnSpc>
                 <a:spcPct val="110000"/>
               </a:lnSpc>
@@ -14772,7 +14801,7 @@
             <a:endParaRPr lang="en-US" sz="1300" dirty="0"/>
           </a:p>
           <a:p>
-            <a:pPr algn="ctr" indent="0" marL="0">
+            <a:pPr marL="0" indent="0" algn="ctr">
               <a:lnSpc>
                 <a:spcPct val="110000"/>
               </a:lnSpc>
@@ -14816,6 +14845,13 @@
             <a:tailEnd type="triangle"/>
           </a:ln>
         </p:spPr>
+        <p:txBody>
+          <a:bodyPr/>
+          <a:lstStyle/>
+          <a:p>
+            <a:endParaRPr lang="ko-KR" altLang="en-US"/>
+          </a:p>
+        </p:txBody>
       </p:sp>
       <p:sp>
         <p:nvSpPr>
@@ -14843,6 +14879,13 @@
             <a:prstDash val="solid"/>
           </a:ln>
         </p:spPr>
+        <p:txBody>
+          <a:bodyPr/>
+          <a:lstStyle/>
+          <a:p>
+            <a:endParaRPr lang="ko-KR" altLang="en-US"/>
+          </a:p>
+        </p:txBody>
       </p:sp>
       <p:sp>
         <p:nvSpPr>
@@ -14865,7 +14908,7 @@
           <a:bodyPr wrap="square" lIns="0" tIns="0" rIns="0" bIns="0" rtlCol="0" anchor="ctr"/>
           <a:lstStyle/>
           <a:p>
-            <a:pPr algn="ctr" indent="0" marL="0">
+            <a:pPr marL="0" indent="0" algn="ctr">
               <a:lnSpc>
                 <a:spcPct val="110000"/>
               </a:lnSpc>
@@ -14885,7 +14928,7 @@
             <a:endParaRPr lang="en-US" sz="1300" dirty="0"/>
           </a:p>
           <a:p>
-            <a:pPr algn="ctr" indent="0" marL="0">
+            <a:pPr marL="0" indent="0" algn="ctr">
               <a:lnSpc>
                 <a:spcPct val="110000"/>
               </a:lnSpc>
@@ -14929,6 +14972,13 @@
             <a:tailEnd type="triangle"/>
           </a:ln>
         </p:spPr>
+        <p:txBody>
+          <a:bodyPr/>
+          <a:lstStyle/>
+          <a:p>
+            <a:endParaRPr lang="ko-KR" altLang="en-US"/>
+          </a:p>
+        </p:txBody>
       </p:sp>
       <p:sp>
         <p:nvSpPr>
@@ -14956,6 +15006,13 @@
             <a:prstDash val="solid"/>
           </a:ln>
         </p:spPr>
+        <p:txBody>
+          <a:bodyPr/>
+          <a:lstStyle/>
+          <a:p>
+            <a:endParaRPr lang="ko-KR" altLang="en-US"/>
+          </a:p>
+        </p:txBody>
       </p:sp>
       <p:sp>
         <p:nvSpPr>
@@ -14978,7 +15035,7 @@
           <a:bodyPr wrap="square" lIns="0" tIns="0" rIns="0" bIns="0" rtlCol="0" anchor="ctr"/>
           <a:lstStyle/>
           <a:p>
-            <a:pPr algn="ctr" indent="0" marL="0">
+            <a:pPr marL="0" indent="0" algn="ctr">
               <a:lnSpc>
                 <a:spcPct val="110000"/>
               </a:lnSpc>
@@ -14998,7 +15055,7 @@
             <a:endParaRPr lang="en-US" sz="1300" dirty="0"/>
           </a:p>
           <a:p>
-            <a:pPr algn="ctr" indent="0" marL="0">
+            <a:pPr marL="0" indent="0" algn="ctr">
               <a:lnSpc>
                 <a:spcPct val="110000"/>
               </a:lnSpc>
@@ -15042,6 +15099,13 @@
             <a:tailEnd type="triangle"/>
           </a:ln>
         </p:spPr>
+        <p:txBody>
+          <a:bodyPr/>
+          <a:lstStyle/>
+          <a:p>
+            <a:endParaRPr lang="ko-KR" altLang="en-US"/>
+          </a:p>
+        </p:txBody>
       </p:sp>
       <p:sp>
         <p:nvSpPr>
@@ -15069,6 +15133,13 @@
             <a:prstDash val="solid"/>
           </a:ln>
         </p:spPr>
+        <p:txBody>
+          <a:bodyPr/>
+          <a:lstStyle/>
+          <a:p>
+            <a:endParaRPr lang="ko-KR" altLang="en-US"/>
+          </a:p>
+        </p:txBody>
       </p:sp>
       <p:sp>
         <p:nvSpPr>
@@ -15091,7 +15162,7 @@
           <a:bodyPr wrap="square" lIns="0" tIns="0" rIns="0" bIns="0" rtlCol="0" anchor="ctr"/>
           <a:lstStyle/>
           <a:p>
-            <a:pPr algn="ctr" indent="0" marL="0">
+            <a:pPr marL="0" indent="0" algn="ctr">
               <a:lnSpc>
                 <a:spcPct val="110000"/>
               </a:lnSpc>
@@ -15133,7 +15204,7 @@
           <a:bodyPr wrap="square" lIns="0" tIns="0" rIns="0" bIns="0" rtlCol="0" anchor="t"/>
           <a:lstStyle/>
           <a:p>
-            <a:pPr indent="0" marL="0">
+            <a:pPr marL="0" indent="0">
               <a:buNone/>
             </a:pPr>
             <a:r>
@@ -15153,29 +15224,41 @@
       </p:sp>
       <p:graphicFrame>
         <p:nvGraphicFramePr>
-          <p:cNvPr id="6" name="Table 0"/>
+          <p:cNvPr id="29" name="Table 0"/>
           <p:cNvGraphicFramePr>
             <a:graphicFrameLocks noGrp="1"/>
           </p:cNvGraphicFramePr>
           <p:nvPr>
             <p:extLst>
               <p:ext uri="{D42A27DB-BD31-4B8C-83A1-F6EECF244321}">
-                <p14:modId xmlns:p14="http://schemas.microsoft.com/office/powerpoint/2010/main" val="1579011935"/>
+                <p14:modId xmlns:p14="http://schemas.microsoft.com/office/powerpoint/2010/main" val="1155012420"/>
               </p:ext>
             </p:extLst>
           </p:nvPr>
         </p:nvGraphicFramePr>
         <p:xfrm>
           <a:off x="7680960" y="1463040"/>
-          <a:ext cx="3959352" cy="914400"/>
+          <a:ext cx="3959352" cy="3968496"/>
         </p:xfrm>
         <a:graphic>
           <a:graphicData uri="http://schemas.openxmlformats.org/drawingml/2006/table">
             <a:tbl>
               <a:tblPr/>
               <a:tblGrid>
-                <a:gridCol w="1143000"/>
-                <a:gridCol w="2816352"/>
+                <a:gridCol w="1143000">
+                  <a:extLst>
+                    <a:ext uri="{9D8B030D-6E8A-4147-A177-3AD203B41FA5}">
+                      <a16:colId xmlns:a16="http://schemas.microsoft.com/office/drawing/2014/main" val="20000"/>
+                    </a:ext>
+                  </a:extLst>
+                </a:gridCol>
+                <a:gridCol w="2816352">
+                  <a:extLst>
+                    <a:ext uri="{9D8B030D-6E8A-4147-A177-3AD203B41FA5}">
+                      <a16:colId xmlns:a16="http://schemas.microsoft.com/office/drawing/2014/main" val="20001"/>
+                    </a:ext>
+                  </a:extLst>
+                </a:gridCol>
               </a:tblGrid>
               <a:tr h="566928">
                 <a:tc>
@@ -15183,7 +15266,7 @@
                     <a:bodyPr/>
                     <a:lstStyle/>
                     <a:p>
-                      <a:pPr indent="0" marL="0">
+                      <a:pPr marL="0" indent="0">
                         <a:buNone/>
                       </a:pPr>
                       <a:r>
@@ -15251,7 +15334,7 @@
                     <a:bodyPr/>
                     <a:lstStyle/>
                     <a:p>
-                      <a:pPr indent="0" marL="0">
+                      <a:pPr marL="0" indent="0">
                         <a:buNone/>
                       </a:pPr>
                       <a:r>
@@ -15311,6 +15394,11 @@
                     </a:lnB>
                   </a:tcPr>
                 </a:tc>
+                <a:extLst>
+                  <a:ext uri="{0D108BD9-81ED-4DB2-BD59-A6C34878D82A}">
+                    <a16:rowId xmlns:a16="http://schemas.microsoft.com/office/drawing/2014/main" val="10000"/>
+                  </a:ext>
+                </a:extLst>
               </a:tr>
               <a:tr h="566928">
                 <a:tc>
@@ -15318,7 +15406,7 @@
                     <a:bodyPr/>
                     <a:lstStyle/>
                     <a:p>
-                      <a:pPr indent="0" marL="0">
+                      <a:pPr marL="0" indent="0">
                         <a:buNone/>
                       </a:pPr>
                       <a:r>
@@ -15386,7 +15474,7 @@
                     <a:bodyPr/>
                     <a:lstStyle/>
                     <a:p>
-                      <a:pPr indent="0" marL="0">
+                      <a:pPr marL="0" indent="0">
                         <a:buNone/>
                       </a:pPr>
                       <a:r>
@@ -15446,6 +15534,11 @@
                     </a:lnB>
                   </a:tcPr>
                 </a:tc>
+                <a:extLst>
+                  <a:ext uri="{0D108BD9-81ED-4DB2-BD59-A6C34878D82A}">
+                    <a16:rowId xmlns:a16="http://schemas.microsoft.com/office/drawing/2014/main" val="10001"/>
+                  </a:ext>
+                </a:extLst>
               </a:tr>
               <a:tr h="566928">
                 <a:tc>
@@ -15453,7 +15546,7 @@
                     <a:bodyPr/>
                     <a:lstStyle/>
                     <a:p>
-                      <a:pPr indent="0" marL="0">
+                      <a:pPr marL="0" indent="0">
                         <a:buNone/>
                       </a:pPr>
                       <a:r>
@@ -15521,7 +15614,7 @@
                     <a:bodyPr/>
                     <a:lstStyle/>
                     <a:p>
-                      <a:pPr indent="0" marL="0">
+                      <a:pPr marL="0" indent="0">
                         <a:buNone/>
                       </a:pPr>
                       <a:r>
@@ -15581,6 +15674,11 @@
                     </a:lnB>
                   </a:tcPr>
                 </a:tc>
+                <a:extLst>
+                  <a:ext uri="{0D108BD9-81ED-4DB2-BD59-A6C34878D82A}">
+                    <a16:rowId xmlns:a16="http://schemas.microsoft.com/office/drawing/2014/main" val="10002"/>
+                  </a:ext>
+                </a:extLst>
               </a:tr>
               <a:tr h="566928">
                 <a:tc>
@@ -15588,7 +15686,7 @@
                     <a:bodyPr/>
                     <a:lstStyle/>
                     <a:p>
-                      <a:pPr indent="0" marL="0">
+                      <a:pPr marL="0" indent="0">
                         <a:buNone/>
                       </a:pPr>
                       <a:r>
@@ -15656,7 +15754,7 @@
                     <a:bodyPr/>
                     <a:lstStyle/>
                     <a:p>
-                      <a:pPr indent="0" marL="0">
+                      <a:pPr marL="0" indent="0">
                         <a:buNone/>
                       </a:pPr>
                       <a:r>
@@ -15716,6 +15814,11 @@
                     </a:lnB>
                   </a:tcPr>
                 </a:tc>
+                <a:extLst>
+                  <a:ext uri="{0D108BD9-81ED-4DB2-BD59-A6C34878D82A}">
+                    <a16:rowId xmlns:a16="http://schemas.microsoft.com/office/drawing/2014/main" val="10003"/>
+                  </a:ext>
+                </a:extLst>
               </a:tr>
               <a:tr h="566928">
                 <a:tc>
@@ -15723,7 +15826,7 @@
                     <a:bodyPr/>
                     <a:lstStyle/>
                     <a:p>
-                      <a:pPr indent="0" marL="0">
+                      <a:pPr marL="0" indent="0">
                         <a:buNone/>
                       </a:pPr>
                       <a:r>
@@ -15791,7 +15894,7 @@
                     <a:bodyPr/>
                     <a:lstStyle/>
                     <a:p>
-                      <a:pPr indent="0" marL="0">
+                      <a:pPr marL="0" indent="0">
                         <a:buNone/>
                       </a:pPr>
                       <a:r>
@@ -15851,6 +15954,11 @@
                     </a:lnB>
                   </a:tcPr>
                 </a:tc>
+                <a:extLst>
+                  <a:ext uri="{0D108BD9-81ED-4DB2-BD59-A6C34878D82A}">
+                    <a16:rowId xmlns:a16="http://schemas.microsoft.com/office/drawing/2014/main" val="10004"/>
+                  </a:ext>
+                </a:extLst>
               </a:tr>
               <a:tr h="566928">
                 <a:tc>
@@ -15858,7 +15966,7 @@
                     <a:bodyPr/>
                     <a:lstStyle/>
                     <a:p>
-                      <a:pPr indent="0" marL="0">
+                      <a:pPr marL="0" indent="0">
                         <a:buNone/>
                       </a:pPr>
                       <a:r>
@@ -15926,7 +16034,7 @@
                     <a:bodyPr/>
                     <a:lstStyle/>
                     <a:p>
-                      <a:pPr indent="0" marL="0">
+                      <a:pPr marL="0" indent="0">
                         <a:buNone/>
                       </a:pPr>
                       <a:r>
@@ -15986,6 +16094,11 @@
                     </a:lnB>
                   </a:tcPr>
                 </a:tc>
+                <a:extLst>
+                  <a:ext uri="{0D108BD9-81ED-4DB2-BD59-A6C34878D82A}">
+                    <a16:rowId xmlns:a16="http://schemas.microsoft.com/office/drawing/2014/main" val="10005"/>
+                  </a:ext>
+                </a:extLst>
               </a:tr>
               <a:tr h="566928">
                 <a:tc>
@@ -15993,7 +16106,7 @@
                     <a:bodyPr/>
                     <a:lstStyle/>
                     <a:p>
-                      <a:pPr indent="0" marL="0">
+                      <a:pPr marL="0" indent="0">
                         <a:buNone/>
                       </a:pPr>
                       <a:r>
@@ -16061,7 +16174,7 @@
                     <a:bodyPr/>
                     <a:lstStyle/>
                     <a:p>
-                      <a:pPr indent="0" marL="0">
+                      <a:pPr marL="0" indent="0">
                         <a:buNone/>
                       </a:pPr>
                       <a:r>
@@ -16121,6 +16234,11 @@
                     </a:lnB>
                   </a:tcPr>
                 </a:tc>
+                <a:extLst>
+                  <a:ext uri="{0D108BD9-81ED-4DB2-BD59-A6C34878D82A}">
+                    <a16:rowId xmlns:a16="http://schemas.microsoft.com/office/drawing/2014/main" val="10006"/>
+                  </a:ext>
+                </a:extLst>
               </a:tr>
             </a:tbl>
           </a:graphicData>
@@ -16128,7 +16246,7 @@
       </p:graphicFrame>
       <p:sp>
         <p:nvSpPr>
-          <p:cNvPr id="25" name="Slide Number Placeholder 0"/>
+          <p:cNvPr id="30" name="Slide Number Placeholder 0"/>
           <p:cNvSpPr>
             <a:spLocks noGrp="1"/>
           </p:cNvSpPr>
@@ -16146,7 +16264,7 @@
           </a:prstGeom>
           <a:extLst>
             <a:ext uri="{C572A759-6A51-4108-AA02-DFA0A04FC94B}">
-              <ma14:wrappingTextBoxFlag xmlns:ma14="http://schemas.microsoft.com/office/mac/drawingml/2011/main" val="0"/>
+              <ma14:wrappingTextBoxFlag xmlns:ma14="http://schemas.microsoft.com/office/mac/drawingml/2011/main" xmlns="" val="0"/>
             </a:ext>
           </a:extLst>
         </p:spPr>
@@ -16167,7 +16285,7 @@
           <a:p>
             <a:pPr algn="r"/>
             <a:fld id="{F7021451-1387-4CA6-816F-3879F97B5CBC}" type="slidenum">
-              <a:rPr b="0" lang="en-US"/>
+              <a:rPr lang="en-US" b="0"/>
               <a:t>5</a:t>
             </a:fld>
             <a:endParaRPr lang="en-US"/>
@@ -16202,9 +16320,11 @@
       <p:sp>
         <p:nvSpPr>
           <p:cNvPr id="2" name="Text 0"/>
-          <p:cNvSpPr/>
+          <p:cNvSpPr>
+            <a:spLocks noGrp="1"/>
+          </p:cNvSpPr>
           <p:nvPr>
-            <p:ph idx="100" type="title" hasCustomPrompt="1"/>
+            <p:ph type="title" idx="100" hasCustomPrompt="1"/>
           </p:nvPr>
         </p:nvSpPr>
         <p:spPr>
@@ -16222,7 +16342,7 @@
           <a:bodyPr wrap="square" lIns="0" tIns="0" rIns="0" bIns="0" rtlCol="0" anchor="ctr"/>
           <a:lstStyle/>
           <a:p>
-            <a:pPr algn="l" indent="0" marL="0">
+            <a:pPr marL="0" indent="0" algn="l">
               <a:buNone/>
             </a:pPr>
             <a:r>
@@ -16264,6 +16384,13 @@
             <a:prstDash val="solid"/>
           </a:ln>
         </p:spPr>
+        <p:txBody>
+          <a:bodyPr/>
+          <a:lstStyle/>
+          <a:p>
+            <a:endParaRPr lang="ko-KR" altLang="en-US"/>
+          </a:p>
+        </p:txBody>
       </p:sp>
       <p:sp>
         <p:nvSpPr>
@@ -16286,7 +16413,7 @@
           <a:bodyPr wrap="square" lIns="0" tIns="0" rIns="0" bIns="0" rtlCol="0" anchor="ctr"/>
           <a:lstStyle/>
           <a:p>
-            <a:pPr indent="0" marL="0">
+            <a:pPr marL="0" indent="0">
               <a:buNone/>
             </a:pPr>
             <a:r>
@@ -16328,6 +16455,13 @@
             <a:prstDash val="solid"/>
           </a:ln>
         </p:spPr>
+        <p:txBody>
+          <a:bodyPr/>
+          <a:lstStyle/>
+          <a:p>
+            <a:endParaRPr lang="ko-KR" altLang="en-US"/>
+          </a:p>
+        </p:txBody>
       </p:sp>
       <p:sp>
         <p:nvSpPr>
@@ -16353,6 +16487,13 @@
             <a:prstDash val="solid"/>
           </a:ln>
         </p:spPr>
+        <p:txBody>
+          <a:bodyPr/>
+          <a:lstStyle/>
+          <a:p>
+            <a:endParaRPr lang="ko-KR" altLang="en-US"/>
+          </a:p>
+        </p:txBody>
       </p:sp>
       <p:sp>
         <p:nvSpPr>
@@ -16375,7 +16516,7 @@
           <a:bodyPr wrap="square" lIns="0" tIns="0" rIns="0" bIns="0" rtlCol="0" anchor="ctr"/>
           <a:lstStyle/>
           <a:p>
-            <a:pPr algn="ctr" indent="0" marL="0">
+            <a:pPr marL="0" indent="0" algn="ctr">
               <a:buNone/>
             </a:pPr>
             <a:r>
@@ -16417,6 +16558,13 @@
             <a:prstDash val="solid"/>
           </a:ln>
         </p:spPr>
+        <p:txBody>
+          <a:bodyPr/>
+          <a:lstStyle/>
+          <a:p>
+            <a:endParaRPr lang="ko-KR" altLang="en-US"/>
+          </a:p>
+        </p:txBody>
       </p:sp>
       <p:sp>
         <p:nvSpPr>
@@ -16439,7 +16587,7 @@
           <a:bodyPr wrap="square" lIns="0" tIns="0" rIns="0" bIns="0" rtlCol="0" anchor="t"/>
           <a:lstStyle/>
           <a:p>
-            <a:pPr indent="0" marL="0">
+            <a:pPr marL="0" indent="0">
               <a:buNone/>
             </a:pPr>
             <a:r>
@@ -16478,7 +16626,7 @@
           <a:bodyPr wrap="square" lIns="0" tIns="0" rIns="0" bIns="0" rtlCol="0" anchor="t"/>
           <a:lstStyle/>
           <a:p>
-            <a:pPr algn="r" indent="0" marL="0">
+            <a:pPr marL="0" indent="0" algn="r">
               <a:buNone/>
             </a:pPr>
             <a:r>
@@ -16517,7 +16665,7 @@
           <a:bodyPr wrap="square" lIns="0" tIns="0" rIns="0" bIns="0" rtlCol="0" anchor="t"/>
           <a:lstStyle/>
           <a:p>
-            <a:pPr algn="r" indent="0" marL="0">
+            <a:pPr marL="0" indent="0" algn="r">
               <a:buNone/>
             </a:pPr>
             <a:r>
@@ -16557,6 +16705,13 @@
             <a:prstDash val="solid"/>
           </a:ln>
         </p:spPr>
+        <p:txBody>
+          <a:bodyPr/>
+          <a:lstStyle/>
+          <a:p>
+            <a:endParaRPr lang="ko-KR" altLang="en-US"/>
+          </a:p>
+        </p:txBody>
       </p:sp>
       <p:sp>
         <p:nvSpPr>
@@ -16580,6 +16735,13 @@
             <a:prstDash val="solid"/>
           </a:ln>
         </p:spPr>
+        <p:txBody>
+          <a:bodyPr/>
+          <a:lstStyle/>
+          <a:p>
+            <a:endParaRPr lang="ko-KR" altLang="en-US"/>
+          </a:p>
+        </p:txBody>
       </p:sp>
       <p:sp>
         <p:nvSpPr>
@@ -16603,6 +16765,13 @@
             <a:prstDash val="solid"/>
           </a:ln>
         </p:spPr>
+        <p:txBody>
+          <a:bodyPr/>
+          <a:lstStyle/>
+          <a:p>
+            <a:endParaRPr lang="ko-KR" altLang="en-US"/>
+          </a:p>
+        </p:txBody>
       </p:sp>
       <p:sp>
         <p:nvSpPr>
@@ -16625,7 +16794,7 @@
           <a:bodyPr wrap="square" lIns="0" tIns="0" rIns="0" bIns="0" rtlCol="0" anchor="t"/>
           <a:lstStyle/>
           <a:p>
-            <a:pPr indent="0" marL="0">
+            <a:pPr marL="0" indent="0">
               <a:buNone/>
             </a:pPr>
             <a:r>
@@ -16664,7 +16833,7 @@
           <a:bodyPr wrap="square" lIns="0" tIns="0" rIns="0" bIns="0" rtlCol="0" anchor="t"/>
           <a:lstStyle/>
           <a:p>
-            <a:pPr algn="r" indent="0" marL="0">
+            <a:pPr marL="0" indent="0" algn="r">
               <a:buNone/>
             </a:pPr>
             <a:r>
@@ -16703,7 +16872,7 @@
           <a:bodyPr wrap="square" lIns="0" tIns="0" rIns="0" bIns="0" rtlCol="0" anchor="t"/>
           <a:lstStyle/>
           <a:p>
-            <a:pPr indent="0" marL="0">
+            <a:pPr marL="0" indent="0">
               <a:buNone/>
             </a:pPr>
             <a:r>
@@ -16742,7 +16911,7 @@
           <a:bodyPr wrap="square" lIns="0" tIns="0" rIns="0" bIns="0" rtlCol="0" anchor="t"/>
           <a:lstStyle/>
           <a:p>
-            <a:pPr indent="0" marL="0">
+            <a:pPr marL="0" indent="0">
               <a:lnSpc>
                 <a:spcPct val="120000"/>
               </a:lnSpc>
@@ -16762,7 +16931,7 @@
             <a:endParaRPr lang="en-US" sz="1400" dirty="0"/>
           </a:p>
           <a:p>
-            <a:pPr indent="0" marL="0">
+            <a:pPr marL="0" indent="0">
               <a:lnSpc>
                 <a:spcPct val="120000"/>
               </a:lnSpc>
@@ -16804,7 +16973,7 @@
           <a:bodyPr wrap="square" lIns="0" tIns="0" rIns="0" bIns="0" rtlCol="0" anchor="t"/>
           <a:lstStyle/>
           <a:p>
-            <a:pPr indent="0" marL="0">
+            <a:pPr marL="0" indent="0">
               <a:buNone/>
             </a:pPr>
             <a:r>
@@ -16843,7 +17012,7 @@
           <a:bodyPr wrap="square" lIns="0" tIns="0" rIns="0" bIns="0" rtlCol="0" anchor="t"/>
           <a:lstStyle/>
           <a:p>
-            <a:pPr indent="0" marL="0">
+            <a:pPr marL="0" indent="0">
               <a:lnSpc>
                 <a:spcPct val="120000"/>
               </a:lnSpc>
@@ -16863,7 +17032,7 @@
             <a:endParaRPr lang="en-US" sz="1400" dirty="0"/>
           </a:p>
           <a:p>
-            <a:pPr indent="0" marL="0">
+            <a:pPr marL="0" indent="0">
               <a:lnSpc>
                 <a:spcPct val="120000"/>
               </a:lnSpc>
@@ -16905,7 +17074,7 @@
           <a:bodyPr wrap="square" lIns="0" tIns="0" rIns="0" bIns="0" rtlCol="0" anchor="t"/>
           <a:lstStyle/>
           <a:p>
-            <a:pPr indent="0" marL="0">
+            <a:pPr marL="0" indent="0">
               <a:buNone/>
             </a:pPr>
             <a:r>
@@ -16944,7 +17113,7 @@
           <a:bodyPr wrap="square" lIns="0" tIns="0" rIns="0" bIns="0" rtlCol="0" anchor="t"/>
           <a:lstStyle/>
           <a:p>
-            <a:pPr indent="0" marL="0">
+            <a:pPr marL="0" indent="0">
               <a:lnSpc>
                 <a:spcPct val="120000"/>
               </a:lnSpc>
@@ -16964,7 +17133,7 @@
             <a:endParaRPr lang="en-US" sz="1400" dirty="0"/>
           </a:p>
           <a:p>
-            <a:pPr indent="0" marL="0">
+            <a:pPr marL="0" indent="0">
               <a:lnSpc>
                 <a:spcPct val="120000"/>
               </a:lnSpc>
@@ -17006,7 +17175,7 @@
           <a:bodyPr wrap="square" lIns="0" tIns="0" rIns="0" bIns="0" rtlCol="0" anchor="t"/>
           <a:lstStyle/>
           <a:p>
-            <a:pPr indent="0" marL="0">
+            <a:pPr marL="0" indent="0">
               <a:buNone/>
             </a:pPr>
             <a:r>
@@ -17045,7 +17214,7 @@
           <a:bodyPr wrap="square" lIns="0" tIns="0" rIns="0" bIns="0" rtlCol="0" anchor="t"/>
           <a:lstStyle/>
           <a:p>
-            <a:pPr indent="0" marL="0">
+            <a:pPr marL="0" indent="0">
               <a:lnSpc>
                 <a:spcPct val="120000"/>
               </a:lnSpc>
@@ -17065,7 +17234,7 @@
             <a:endParaRPr lang="en-US" sz="1400" dirty="0"/>
           </a:p>
           <a:p>
-            <a:pPr indent="0" marL="0">
+            <a:pPr marL="0" indent="0">
               <a:lnSpc>
                 <a:spcPct val="120000"/>
               </a:lnSpc>
@@ -17106,7 +17275,7 @@
           </a:prstGeom>
           <a:extLst>
             <a:ext uri="{C572A759-6A51-4108-AA02-DFA0A04FC94B}">
-              <ma14:wrappingTextBoxFlag xmlns:ma14="http://schemas.microsoft.com/office/mac/drawingml/2011/main" val="0"/>
+              <ma14:wrappingTextBoxFlag xmlns:ma14="http://schemas.microsoft.com/office/mac/drawingml/2011/main" xmlns="" val="0"/>
             </a:ext>
           </a:extLst>
         </p:spPr>
@@ -17127,7 +17296,7 @@
           <a:p>
             <a:pPr algn="r"/>
             <a:fld id="{F7021451-1387-4CA6-816F-3879F97B5CBC}" type="slidenum">
-              <a:rPr b="0" lang="en-US"/>
+              <a:rPr lang="en-US" b="0"/>
               <a:t>6</a:t>
             </a:fld>
             <a:endParaRPr lang="en-US"/>
@@ -17162,9 +17331,11 @@
       <p:sp>
         <p:nvSpPr>
           <p:cNvPr id="2" name="Text 0"/>
-          <p:cNvSpPr/>
+          <p:cNvSpPr>
+            <a:spLocks noGrp="1"/>
+          </p:cNvSpPr>
           <p:nvPr>
-            <p:ph idx="100" type="title" hasCustomPrompt="1"/>
+            <p:ph type="title" idx="100" hasCustomPrompt="1"/>
           </p:nvPr>
         </p:nvSpPr>
         <p:spPr>
@@ -17182,7 +17353,7 @@
           <a:bodyPr wrap="square" lIns="0" tIns="0" rIns="0" bIns="0" rtlCol="0" anchor="ctr"/>
           <a:lstStyle/>
           <a:p>
-            <a:pPr algn="l" indent="0" marL="0">
+            <a:pPr marL="0" indent="0" algn="l">
               <a:buNone/>
             </a:pPr>
             <a:r>
@@ -17224,6 +17395,13 @@
             <a:prstDash val="solid"/>
           </a:ln>
         </p:spPr>
+        <p:txBody>
+          <a:bodyPr/>
+          <a:lstStyle/>
+          <a:p>
+            <a:endParaRPr lang="ko-KR" altLang="en-US"/>
+          </a:p>
+        </p:txBody>
       </p:sp>
       <p:sp>
         <p:nvSpPr>
@@ -17246,7 +17424,7 @@
           <a:bodyPr wrap="none" lIns="0" tIns="0" rIns="0" bIns="0" rtlCol="0" anchor="t"/>
           <a:lstStyle/>
           <a:p>
-            <a:pPr indent="0" marL="0">
+            <a:pPr marL="0" indent="0">
               <a:lnSpc>
                 <a:spcPct val="120000"/>
               </a:lnSpc>
@@ -17266,7 +17444,7 @@
             <a:endParaRPr lang="en-US" sz="1050" dirty="0"/>
           </a:p>
           <a:p>
-            <a:pPr indent="0" marL="0">
+            <a:pPr marL="0" indent="0">
               <a:lnSpc>
                 <a:spcPct val="120000"/>
               </a:lnSpc>
@@ -17283,27 +17461,52 @@
               </a:rPr>
               <a:t> 257  </a:t>
             </a:r>
-            <a:pPr indent="0" marL="0">
+            <a:r>
+              <a:rPr lang="en-US" sz="1050" b="1" dirty="0">
+                <a:solidFill>
+                  <a:srgbClr val="0F766E"/>
+                </a:solidFill>
+                <a:latin typeface="Consolas" pitchFamily="34" charset="0"/>
+                <a:ea typeface="Consolas" pitchFamily="34" charset="-122"/>
+                <a:cs typeface="Consolas" pitchFamily="34" charset="-120"/>
+              </a:rPr>
+              <a:t>  if (UartDmaRx_Read(crc_header, 4, 5000) != HAL_OK ||</a:t>
+            </a:r>
+            <a:endParaRPr lang="en-US" sz="1050" dirty="0"/>
+          </a:p>
+          <a:p>
+            <a:pPr marL="0" indent="0">
               <a:lnSpc>
                 <a:spcPct val="120000"/>
               </a:lnSpc>
               <a:buNone/>
             </a:pPr>
             <a:r>
-              <a:rPr lang="en-US" sz="1050" b="1" dirty="0">
-                <a:solidFill>
-                  <a:srgbClr val="0F766E"/>
+              <a:rPr lang="en-US" sz="1050" dirty="0">
+                <a:solidFill>
+                  <a:srgbClr val="8A94A3"/>
                 </a:solidFill>
                 <a:latin typeface="Consolas" pitchFamily="34" charset="0"/>
                 <a:ea typeface="Consolas" pitchFamily="34" charset="-122"/>
                 <a:cs typeface="Consolas" pitchFamily="34" charset="-120"/>
               </a:rPr>
-              <a:t>  if (UartDmaRx_Read(crc_header, 4, 5000) != HAL_OK ||</a:t>
+              <a:t> 258  </a:t>
+            </a:r>
+            <a:r>
+              <a:rPr lang="en-US" sz="1050" b="1" dirty="0">
+                <a:solidFill>
+                  <a:srgbClr val="0F766E"/>
+                </a:solidFill>
+                <a:latin typeface="Consolas" pitchFamily="34" charset="0"/>
+                <a:ea typeface="Consolas" pitchFamily="34" charset="-122"/>
+                <a:cs typeface="Consolas" pitchFamily="34" charset="-120"/>
+              </a:rPr>
+              <a:t>      UartDmaRx_Read(file_buffer, count, 5000) != HAL_OK)</a:t>
             </a:r>
             <a:endParaRPr lang="en-US" sz="1050" dirty="0"/>
           </a:p>
           <a:p>
-            <a:pPr indent="0" marL="0">
+            <a:pPr marL="0" indent="0">
               <a:lnSpc>
                 <a:spcPct val="120000"/>
               </a:lnSpc>
@@ -17318,29 +17521,43 @@
                 <a:ea typeface="Consolas" pitchFamily="34" charset="-122"/>
                 <a:cs typeface="Consolas" pitchFamily="34" charset="-120"/>
               </a:rPr>
-              <a:t> 258  </a:t>
-            </a:r>
-            <a:pPr indent="0" marL="0">
+              <a:t> 260  </a:t>
+            </a:r>
+            <a:r>
+              <a:rPr lang="en-US" sz="1050" dirty="0">
+                <a:solidFill>
+                  <a:srgbClr val="1F2933"/>
+                </a:solidFill>
+                <a:latin typeface="Consolas" pitchFamily="34" charset="0"/>
+                <a:ea typeface="Consolas" pitchFamily="34" charset="-122"/>
+                <a:cs typeface="Consolas" pitchFamily="34" charset="-120"/>
+              </a:rPr>
+              <a:t>    send_line("ERROR file receive timeout or DMA overrun\n");</a:t>
+            </a:r>
+            <a:endParaRPr lang="en-US" sz="1050" dirty="0"/>
+          </a:p>
+          <a:p>
+            <a:pPr marL="0" indent="0">
               <a:lnSpc>
                 <a:spcPct val="120000"/>
               </a:lnSpc>
               <a:buNone/>
             </a:pPr>
             <a:r>
-              <a:rPr lang="en-US" sz="1050" b="1" dirty="0">
-                <a:solidFill>
-                  <a:srgbClr val="0F766E"/>
+              <a:rPr lang="en-US" sz="1050" dirty="0">
+                <a:solidFill>
+                  <a:srgbClr val="8A94A3"/>
                 </a:solidFill>
                 <a:latin typeface="Consolas" pitchFamily="34" charset="0"/>
                 <a:ea typeface="Consolas" pitchFamily="34" charset="-122"/>
                 <a:cs typeface="Consolas" pitchFamily="34" charset="-120"/>
               </a:rPr>
-              <a:t>      UartDmaRx_Read(file_buffer, count, 5000) != HAL_OK)</a:t>
+              <a:t>      ⋮</a:t>
             </a:r>
             <a:endParaRPr lang="en-US" sz="1050" dirty="0"/>
           </a:p>
           <a:p>
-            <a:pPr indent="0" marL="0">
+            <a:pPr marL="0" indent="0">
               <a:lnSpc>
                 <a:spcPct val="120000"/>
               </a:lnSpc>
@@ -17355,9 +17572,23 @@
                 <a:ea typeface="Consolas" pitchFamily="34" charset="-122"/>
                 <a:cs typeface="Consolas" pitchFamily="34" charset="-120"/>
               </a:rPr>
-              <a:t> 260  </a:t>
-            </a:r>
-            <a:pPr indent="0" marL="0">
+              <a:t> 263  </a:t>
+            </a:r>
+            <a:r>
+              <a:rPr lang="en-US" sz="1050" b="1" dirty="0">
+                <a:solidFill>
+                  <a:srgbClr val="0F766E"/>
+                </a:solidFill>
+                <a:latin typeface="Consolas" pitchFamily="34" charset="0"/>
+                <a:ea typeface="Consolas" pitchFamily="34" charset="-122"/>
+                <a:cs typeface="Consolas" pitchFamily="34" charset="-120"/>
+              </a:rPr>
+              <a:t>  if (crc32(file_buffer, count) != get_u32(crc_header))</a:t>
+            </a:r>
+            <a:endParaRPr lang="en-US" sz="1050" dirty="0"/>
+          </a:p>
+          <a:p>
+            <a:pPr marL="0" indent="0">
               <a:lnSpc>
                 <a:spcPct val="120000"/>
               </a:lnSpc>
@@ -17366,18 +17597,29 @@
             <a:r>
               <a:rPr lang="en-US" sz="1050" dirty="0">
                 <a:solidFill>
-                  <a:srgbClr val="1F2933"/>
+                  <a:srgbClr val="8A94A3"/>
                 </a:solidFill>
                 <a:latin typeface="Consolas" pitchFamily="34" charset="0"/>
                 <a:ea typeface="Consolas" pitchFamily="34" charset="-122"/>
                 <a:cs typeface="Consolas" pitchFamily="34" charset="-120"/>
               </a:rPr>
-              <a:t>    send_line("ERROR file receive timeout or DMA overrun\n");</a:t>
+              <a:t> 265  </a:t>
+            </a:r>
+            <a:r>
+              <a:rPr lang="en-US" sz="1050" dirty="0">
+                <a:solidFill>
+                  <a:srgbClr val="1F2933"/>
+                </a:solidFill>
+                <a:latin typeface="Consolas" pitchFamily="34" charset="0"/>
+                <a:ea typeface="Consolas" pitchFamily="34" charset="-122"/>
+                <a:cs typeface="Consolas" pitchFamily="34" charset="-120"/>
+              </a:rPr>
+              <a:t>    send_line("ERROR file chunk CRC\n");</a:t>
             </a:r>
             <a:endParaRPr lang="en-US" sz="1050" dirty="0"/>
           </a:p>
           <a:p>
-            <a:pPr indent="0" marL="0">
+            <a:pPr marL="0" indent="0">
               <a:lnSpc>
                 <a:spcPct val="120000"/>
               </a:lnSpc>
@@ -17397,7 +17639,7 @@
             <a:endParaRPr lang="en-US" sz="1050" dirty="0"/>
           </a:p>
           <a:p>
-            <a:pPr indent="0" marL="0">
+            <a:pPr marL="0" indent="0">
               <a:lnSpc>
                 <a:spcPct val="120000"/>
               </a:lnSpc>
@@ -17412,29 +17654,54 @@
                 <a:ea typeface="Consolas" pitchFamily="34" charset="-122"/>
                 <a:cs typeface="Consolas" pitchFamily="34" charset="-120"/>
               </a:rPr>
-              <a:t> 263  </a:t>
-            </a:r>
-            <a:pPr indent="0" marL="0">
+              <a:t> 268  </a:t>
+            </a:r>
+            <a:r>
+              <a:rPr lang="en-US" sz="1050" b="1" dirty="0">
+                <a:solidFill>
+                  <a:srgbClr val="0F766E"/>
+                </a:solidFill>
+                <a:latin typeface="Consolas" pitchFamily="34" charset="0"/>
+                <a:ea typeface="Consolas" pitchFamily="34" charset="-122"/>
+                <a:cs typeface="Consolas" pitchFamily="34" charset="-120"/>
+              </a:rPr>
+              <a:t>  if ((offset &amp; (BLOCK_BYTES - 1U)) == 0 &amp;&amp;</a:t>
+            </a:r>
+            <a:endParaRPr lang="en-US" sz="1050" dirty="0"/>
+          </a:p>
+          <a:p>
+            <a:pPr marL="0" indent="0">
               <a:lnSpc>
                 <a:spcPct val="120000"/>
               </a:lnSpc>
               <a:buNone/>
             </a:pPr>
             <a:r>
-              <a:rPr lang="en-US" sz="1050" b="1" dirty="0">
-                <a:solidFill>
-                  <a:srgbClr val="0F766E"/>
+              <a:rPr lang="en-US" sz="1050" dirty="0">
+                <a:solidFill>
+                  <a:srgbClr val="8A94A3"/>
                 </a:solidFill>
                 <a:latin typeface="Consolas" pitchFamily="34" charset="0"/>
                 <a:ea typeface="Consolas" pitchFamily="34" charset="-122"/>
                 <a:cs typeface="Consolas" pitchFamily="34" charset="-120"/>
               </a:rPr>
-              <a:t>  if (crc32(file_buffer, count) != get_u32(crc_header))</a:t>
+              <a:t> 269  </a:t>
+            </a:r>
+            <a:r>
+              <a:rPr lang="en-US" sz="1050" b="1" dirty="0">
+                <a:solidFill>
+                  <a:srgbClr val="0F766E"/>
+                </a:solidFill>
+                <a:latin typeface="Consolas" pitchFamily="34" charset="0"/>
+                <a:ea typeface="Consolas" pitchFamily="34" charset="-122"/>
+                <a:cs typeface="Consolas" pitchFamily="34" charset="-120"/>
+              </a:rPr>
+              <a:t>      FlashTest_EraseBlock64(flash, offset) != HAL_OK)</a:t>
             </a:r>
             <a:endParaRPr lang="en-US" sz="1050" dirty="0"/>
           </a:p>
           <a:p>
-            <a:pPr indent="0" marL="0">
+            <a:pPr marL="0" indent="0">
               <a:lnSpc>
                 <a:spcPct val="120000"/>
               </a:lnSpc>
@@ -17449,9 +17716,12 @@
                 <a:ea typeface="Consolas" pitchFamily="34" charset="-122"/>
                 <a:cs typeface="Consolas" pitchFamily="34" charset="-120"/>
               </a:rPr>
-              <a:t> 265  </a:t>
-            </a:r>
-            <a:pPr indent="0" marL="0">
+              <a:t>      ⋮</a:t>
+            </a:r>
+            <a:endParaRPr lang="en-US" sz="1050" dirty="0"/>
+          </a:p>
+          <a:p>
+            <a:pPr marL="0" indent="0">
               <a:lnSpc>
                 <a:spcPct val="120000"/>
               </a:lnSpc>
@@ -17460,18 +17730,29 @@
             <a:r>
               <a:rPr lang="en-US" sz="1050" dirty="0">
                 <a:solidFill>
-                  <a:srgbClr val="1F2933"/>
+                  <a:srgbClr val="8A94A3"/>
                 </a:solidFill>
                 <a:latin typeface="Consolas" pitchFamily="34" charset="0"/>
                 <a:ea typeface="Consolas" pitchFamily="34" charset="-122"/>
                 <a:cs typeface="Consolas" pitchFamily="34" charset="-120"/>
               </a:rPr>
-              <a:t>    send_line("ERROR file chunk CRC\n");</a:t>
+              <a:t> 279  </a:t>
+            </a:r>
+            <a:r>
+              <a:rPr lang="en-US" sz="1050" dirty="0">
+                <a:solidFill>
+                  <a:srgbClr val="1F2933"/>
+                </a:solidFill>
+                <a:latin typeface="Consolas" pitchFamily="34" charset="0"/>
+                <a:ea typeface="Consolas" pitchFamily="34" charset="-122"/>
+                <a:cs typeface="Consolas" pitchFamily="34" charset="-120"/>
+              </a:rPr>
+              <a:t>    if (FlashTest_ProgramPage(flash, offset + page, file_buffer + page, n) != HAL_OK)</a:t>
             </a:r>
             <a:endParaRPr lang="en-US" sz="1050" dirty="0"/>
           </a:p>
           <a:p>
-            <a:pPr indent="0" marL="0">
+            <a:pPr marL="0" indent="0">
               <a:lnSpc>
                 <a:spcPct val="120000"/>
               </a:lnSpc>
@@ -17491,7 +17772,7 @@
             <a:endParaRPr lang="en-US" sz="1050" dirty="0"/>
           </a:p>
           <a:p>
-            <a:pPr indent="0" marL="0">
+            <a:pPr marL="0" indent="0">
               <a:lnSpc>
                 <a:spcPct val="120000"/>
               </a:lnSpc>
@@ -17506,29 +17787,54 @@
                 <a:ea typeface="Consolas" pitchFamily="34" charset="-122"/>
                 <a:cs typeface="Consolas" pitchFamily="34" charset="-120"/>
               </a:rPr>
-              <a:t> 268  </a:t>
-            </a:r>
-            <a:pPr indent="0" marL="0">
+              <a:t> 285  </a:t>
+            </a:r>
+            <a:r>
+              <a:rPr lang="en-US" sz="1050" b="1" dirty="0">
+                <a:solidFill>
+                  <a:srgbClr val="0F766E"/>
+                </a:solidFill>
+                <a:latin typeface="Consolas" pitchFamily="34" charset="0"/>
+                <a:ea typeface="Consolas" pitchFamily="34" charset="-122"/>
+                <a:cs typeface="Consolas" pitchFamily="34" charset="-120"/>
+              </a:rPr>
+              <a:t>  if (FlashTest_Read(flash, offset, sector, count) != HAL_OK ||</a:t>
+            </a:r>
+            <a:endParaRPr lang="en-US" sz="1050" dirty="0"/>
+          </a:p>
+          <a:p>
+            <a:pPr marL="0" indent="0">
               <a:lnSpc>
                 <a:spcPct val="120000"/>
               </a:lnSpc>
               <a:buNone/>
             </a:pPr>
             <a:r>
-              <a:rPr lang="en-US" sz="1050" b="1" dirty="0">
-                <a:solidFill>
-                  <a:srgbClr val="0F766E"/>
+              <a:rPr lang="en-US" sz="1050" dirty="0">
+                <a:solidFill>
+                  <a:srgbClr val="8A94A3"/>
                 </a:solidFill>
                 <a:latin typeface="Consolas" pitchFamily="34" charset="0"/>
                 <a:ea typeface="Consolas" pitchFamily="34" charset="-122"/>
                 <a:cs typeface="Consolas" pitchFamily="34" charset="-120"/>
               </a:rPr>
-              <a:t>  if ((offset &amp; (BLOCK_BYTES - 1U)) == 0 &amp;&amp;</a:t>
+              <a:t> 286  </a:t>
+            </a:r>
+            <a:r>
+              <a:rPr lang="en-US" sz="1050" b="1" dirty="0">
+                <a:solidFill>
+                  <a:srgbClr val="0F766E"/>
+                </a:solidFill>
+                <a:latin typeface="Consolas" pitchFamily="34" charset="0"/>
+                <a:ea typeface="Consolas" pitchFamily="34" charset="-122"/>
+                <a:cs typeface="Consolas" pitchFamily="34" charset="-120"/>
+              </a:rPr>
+              <a:t>      memcmp(file_buffer, sector, count) != 0)</a:t>
             </a:r>
             <a:endParaRPr lang="en-US" sz="1050" dirty="0"/>
           </a:p>
           <a:p>
-            <a:pPr indent="0" marL="0">
+            <a:pPr marL="0" indent="0">
               <a:lnSpc>
                 <a:spcPct val="120000"/>
               </a:lnSpc>
@@ -17543,29 +17849,43 @@
                 <a:ea typeface="Consolas" pitchFamily="34" charset="-122"/>
                 <a:cs typeface="Consolas" pitchFamily="34" charset="-120"/>
               </a:rPr>
-              <a:t> 269  </a:t>
-            </a:r>
-            <a:pPr indent="0" marL="0">
+              <a:t> 288  </a:t>
+            </a:r>
+            <a:r>
+              <a:rPr lang="en-US" sz="1050" dirty="0">
+                <a:solidFill>
+                  <a:srgbClr val="1F2933"/>
+                </a:solidFill>
+                <a:latin typeface="Consolas" pitchFamily="34" charset="0"/>
+                <a:ea typeface="Consolas" pitchFamily="34" charset="-122"/>
+                <a:cs typeface="Consolas" pitchFamily="34" charset="-120"/>
+              </a:rPr>
+              <a:t>    send_line("ERROR file flash verification\n");</a:t>
+            </a:r>
+            <a:endParaRPr lang="en-US" sz="1050" dirty="0"/>
+          </a:p>
+          <a:p>
+            <a:pPr marL="0" indent="0">
               <a:lnSpc>
                 <a:spcPct val="120000"/>
               </a:lnSpc>
               <a:buNone/>
             </a:pPr>
             <a:r>
-              <a:rPr lang="en-US" sz="1050" b="1" dirty="0">
-                <a:solidFill>
-                  <a:srgbClr val="0F766E"/>
+              <a:rPr lang="en-US" sz="1050" dirty="0">
+                <a:solidFill>
+                  <a:srgbClr val="8A94A3"/>
                 </a:solidFill>
                 <a:latin typeface="Consolas" pitchFamily="34" charset="0"/>
                 <a:ea typeface="Consolas" pitchFamily="34" charset="-122"/>
                 <a:cs typeface="Consolas" pitchFamily="34" charset="-120"/>
               </a:rPr>
-              <a:t>      FlashTest_EraseBlock64(flash, offset) != HAL_OK)</a:t>
+              <a:t>      ⋮</a:t>
             </a:r>
             <a:endParaRPr lang="en-US" sz="1050" dirty="0"/>
           </a:p>
           <a:p>
-            <a:pPr indent="0" marL="0">
+            <a:pPr marL="0" indent="0">
               <a:lnSpc>
                 <a:spcPct val="120000"/>
               </a:lnSpc>
@@ -17580,12 +17900,23 @@
                 <a:ea typeface="Consolas" pitchFamily="34" charset="-122"/>
                 <a:cs typeface="Consolas" pitchFamily="34" charset="-120"/>
               </a:rPr>
-              <a:t>      ⋮</a:t>
+              <a:t> 291  </a:t>
+            </a:r>
+            <a:r>
+              <a:rPr lang="en-US" sz="1050" dirty="0">
+                <a:solidFill>
+                  <a:srgbClr val="1F2933"/>
+                </a:solidFill>
+                <a:latin typeface="Consolas" pitchFamily="34" charset="0"/>
+                <a:ea typeface="Consolas" pitchFamily="34" charset="-122"/>
+                <a:cs typeface="Consolas" pitchFamily="34" charset="-120"/>
+              </a:rPr>
+              <a:t>  crc = crc32_update(crc, sector, count);</a:t>
             </a:r>
             <a:endParaRPr lang="en-US" sz="1050" dirty="0"/>
           </a:p>
           <a:p>
-            <a:pPr indent="0" marL="0">
+            <a:pPr marL="0" indent="0">
               <a:lnSpc>
                 <a:spcPct val="120000"/>
               </a:lnSpc>
@@ -17600,9 +17931,23 @@
                 <a:ea typeface="Consolas" pitchFamily="34" charset="-122"/>
                 <a:cs typeface="Consolas" pitchFamily="34" charset="-120"/>
               </a:rPr>
-              <a:t> 279  </a:t>
-            </a:r>
-            <a:pPr indent="0" marL="0">
+              <a:t> 293  </a:t>
+            </a:r>
+            <a:r>
+              <a:rPr lang="en-US" sz="1050" b="1" dirty="0">
+                <a:solidFill>
+                  <a:srgbClr val="0F766E"/>
+                </a:solidFill>
+                <a:latin typeface="Consolas" pitchFamily="34" charset="0"/>
+                <a:ea typeface="Consolas" pitchFamily="34" charset="-122"/>
+                <a:cs typeface="Consolas" pitchFamily="34" charset="-120"/>
+              </a:rPr>
+              <a:t>  snprintf(line, sizeof(line), "ACK %lu\n", (unsigned long)(offset + count));</a:t>
+            </a:r>
+            <a:endParaRPr lang="en-US" sz="1050" dirty="0"/>
+          </a:p>
+          <a:p>
+            <a:pPr marL="0" indent="0">
               <a:lnSpc>
                 <a:spcPct val="120000"/>
               </a:lnSpc>
@@ -17611,18 +17956,18 @@
             <a:r>
               <a:rPr lang="en-US" sz="1050" dirty="0">
                 <a:solidFill>
-                  <a:srgbClr val="1F2933"/>
+                  <a:srgbClr val="8A94A3"/>
                 </a:solidFill>
                 <a:latin typeface="Consolas" pitchFamily="34" charset="0"/>
                 <a:ea typeface="Consolas" pitchFamily="34" charset="-122"/>
                 <a:cs typeface="Consolas" pitchFamily="34" charset="-120"/>
               </a:rPr>
-              <a:t>    if (FlashTest_ProgramPage(flash, offset + page, file_buffer + page, n) != HAL_OK)</a:t>
+              <a:t>      ⋮</a:t>
             </a:r>
             <a:endParaRPr lang="en-US" sz="1050" dirty="0"/>
           </a:p>
           <a:p>
-            <a:pPr indent="0" marL="0">
+            <a:pPr marL="0" indent="0">
               <a:lnSpc>
                 <a:spcPct val="120000"/>
               </a:lnSpc>
@@ -17637,12 +17982,23 @@
                 <a:ea typeface="Consolas" pitchFamily="34" charset="-122"/>
                 <a:cs typeface="Consolas" pitchFamily="34" charset="-120"/>
               </a:rPr>
-              <a:t>      ⋮</a:t>
+              <a:t> 297  </a:t>
+            </a:r>
+            <a:r>
+              <a:rPr lang="en-US" sz="1050" b="1" dirty="0">
+                <a:solidFill>
+                  <a:srgbClr val="0F766E"/>
+                </a:solidFill>
+                <a:latin typeface="Consolas" pitchFamily="34" charset="0"/>
+                <a:ea typeface="Consolas" pitchFamily="34" charset="-122"/>
+                <a:cs typeface="Consolas" pitchFamily="34" charset="-120"/>
+              </a:rPr>
+              <a:t>if (crc != expected_crc)</a:t>
             </a:r>
             <a:endParaRPr lang="en-US" sz="1050" dirty="0"/>
           </a:p>
           <a:p>
-            <a:pPr indent="0" marL="0">
+            <a:pPr marL="0" indent="0">
               <a:lnSpc>
                 <a:spcPct val="120000"/>
               </a:lnSpc>
@@ -17657,276 +18013,8 @@
                 <a:ea typeface="Consolas" pitchFamily="34" charset="-122"/>
                 <a:cs typeface="Consolas" pitchFamily="34" charset="-120"/>
               </a:rPr>
-              <a:t> 285  </a:t>
-            </a:r>
-            <a:pPr indent="0" marL="0">
-              <a:lnSpc>
-                <a:spcPct val="120000"/>
-              </a:lnSpc>
-              <a:buNone/>
-            </a:pPr>
-            <a:r>
-              <a:rPr lang="en-US" sz="1050" b="1" dirty="0">
-                <a:solidFill>
-                  <a:srgbClr val="0F766E"/>
-                </a:solidFill>
-                <a:latin typeface="Consolas" pitchFamily="34" charset="0"/>
-                <a:ea typeface="Consolas" pitchFamily="34" charset="-122"/>
-                <a:cs typeface="Consolas" pitchFamily="34" charset="-120"/>
-              </a:rPr>
-              <a:t>  if (FlashTest_Read(flash, offset, sector, count) != HAL_OK ||</a:t>
-            </a:r>
-            <a:endParaRPr lang="en-US" sz="1050" dirty="0"/>
-          </a:p>
-          <a:p>
-            <a:pPr indent="0" marL="0">
-              <a:lnSpc>
-                <a:spcPct val="120000"/>
-              </a:lnSpc>
-              <a:buNone/>
-            </a:pPr>
-            <a:r>
-              <a:rPr lang="en-US" sz="1050" dirty="0">
-                <a:solidFill>
-                  <a:srgbClr val="8A94A3"/>
-                </a:solidFill>
-                <a:latin typeface="Consolas" pitchFamily="34" charset="0"/>
-                <a:ea typeface="Consolas" pitchFamily="34" charset="-122"/>
-                <a:cs typeface="Consolas" pitchFamily="34" charset="-120"/>
-              </a:rPr>
-              <a:t> 286  </a:t>
-            </a:r>
-            <a:pPr indent="0" marL="0">
-              <a:lnSpc>
-                <a:spcPct val="120000"/>
-              </a:lnSpc>
-              <a:buNone/>
-            </a:pPr>
-            <a:r>
-              <a:rPr lang="en-US" sz="1050" b="1" dirty="0">
-                <a:solidFill>
-                  <a:srgbClr val="0F766E"/>
-                </a:solidFill>
-                <a:latin typeface="Consolas" pitchFamily="34" charset="0"/>
-                <a:ea typeface="Consolas" pitchFamily="34" charset="-122"/>
-                <a:cs typeface="Consolas" pitchFamily="34" charset="-120"/>
-              </a:rPr>
-              <a:t>      memcmp(file_buffer, sector, count) != 0)</a:t>
-            </a:r>
-            <a:endParaRPr lang="en-US" sz="1050" dirty="0"/>
-          </a:p>
-          <a:p>
-            <a:pPr indent="0" marL="0">
-              <a:lnSpc>
-                <a:spcPct val="120000"/>
-              </a:lnSpc>
-              <a:buNone/>
-            </a:pPr>
-            <a:r>
-              <a:rPr lang="en-US" sz="1050" dirty="0">
-                <a:solidFill>
-                  <a:srgbClr val="8A94A3"/>
-                </a:solidFill>
-                <a:latin typeface="Consolas" pitchFamily="34" charset="0"/>
-                <a:ea typeface="Consolas" pitchFamily="34" charset="-122"/>
-                <a:cs typeface="Consolas" pitchFamily="34" charset="-120"/>
-              </a:rPr>
-              <a:t> 288  </a:t>
-            </a:r>
-            <a:pPr indent="0" marL="0">
-              <a:lnSpc>
-                <a:spcPct val="120000"/>
-              </a:lnSpc>
-              <a:buNone/>
-            </a:pPr>
-            <a:r>
-              <a:rPr lang="en-US" sz="1050" dirty="0">
-                <a:solidFill>
-                  <a:srgbClr val="1F2933"/>
-                </a:solidFill>
-                <a:latin typeface="Consolas" pitchFamily="34" charset="0"/>
-                <a:ea typeface="Consolas" pitchFamily="34" charset="-122"/>
-                <a:cs typeface="Consolas" pitchFamily="34" charset="-120"/>
-              </a:rPr>
-              <a:t>    send_line("ERROR file flash verification\n");</a:t>
-            </a:r>
-            <a:endParaRPr lang="en-US" sz="1050" dirty="0"/>
-          </a:p>
-          <a:p>
-            <a:pPr indent="0" marL="0">
-              <a:lnSpc>
-                <a:spcPct val="120000"/>
-              </a:lnSpc>
-              <a:buNone/>
-            </a:pPr>
-            <a:r>
-              <a:rPr lang="en-US" sz="1050" dirty="0">
-                <a:solidFill>
-                  <a:srgbClr val="8A94A3"/>
-                </a:solidFill>
-                <a:latin typeface="Consolas" pitchFamily="34" charset="0"/>
-                <a:ea typeface="Consolas" pitchFamily="34" charset="-122"/>
-                <a:cs typeface="Consolas" pitchFamily="34" charset="-120"/>
-              </a:rPr>
-              <a:t>      ⋮</a:t>
-            </a:r>
-            <a:endParaRPr lang="en-US" sz="1050" dirty="0"/>
-          </a:p>
-          <a:p>
-            <a:pPr indent="0" marL="0">
-              <a:lnSpc>
-                <a:spcPct val="120000"/>
-              </a:lnSpc>
-              <a:buNone/>
-            </a:pPr>
-            <a:r>
-              <a:rPr lang="en-US" sz="1050" dirty="0">
-                <a:solidFill>
-                  <a:srgbClr val="8A94A3"/>
-                </a:solidFill>
-                <a:latin typeface="Consolas" pitchFamily="34" charset="0"/>
-                <a:ea typeface="Consolas" pitchFamily="34" charset="-122"/>
-                <a:cs typeface="Consolas" pitchFamily="34" charset="-120"/>
-              </a:rPr>
-              <a:t> 291  </a:t>
-            </a:r>
-            <a:pPr indent="0" marL="0">
-              <a:lnSpc>
-                <a:spcPct val="120000"/>
-              </a:lnSpc>
-              <a:buNone/>
-            </a:pPr>
-            <a:r>
-              <a:rPr lang="en-US" sz="1050" dirty="0">
-                <a:solidFill>
-                  <a:srgbClr val="1F2933"/>
-                </a:solidFill>
-                <a:latin typeface="Consolas" pitchFamily="34" charset="0"/>
-                <a:ea typeface="Consolas" pitchFamily="34" charset="-122"/>
-                <a:cs typeface="Consolas" pitchFamily="34" charset="-120"/>
-              </a:rPr>
-              <a:t>  crc = crc32_update(crc, sector, count);</a:t>
-            </a:r>
-            <a:endParaRPr lang="en-US" sz="1050" dirty="0"/>
-          </a:p>
-          <a:p>
-            <a:pPr indent="0" marL="0">
-              <a:lnSpc>
-                <a:spcPct val="120000"/>
-              </a:lnSpc>
-              <a:buNone/>
-            </a:pPr>
-            <a:r>
-              <a:rPr lang="en-US" sz="1050" dirty="0">
-                <a:solidFill>
-                  <a:srgbClr val="8A94A3"/>
-                </a:solidFill>
-                <a:latin typeface="Consolas" pitchFamily="34" charset="0"/>
-                <a:ea typeface="Consolas" pitchFamily="34" charset="-122"/>
-                <a:cs typeface="Consolas" pitchFamily="34" charset="-120"/>
-              </a:rPr>
-              <a:t> 293  </a:t>
-            </a:r>
-            <a:pPr indent="0" marL="0">
-              <a:lnSpc>
-                <a:spcPct val="120000"/>
-              </a:lnSpc>
-              <a:buNone/>
-            </a:pPr>
-            <a:r>
-              <a:rPr lang="en-US" sz="1050" b="1" dirty="0">
-                <a:solidFill>
-                  <a:srgbClr val="0F766E"/>
-                </a:solidFill>
-                <a:latin typeface="Consolas" pitchFamily="34" charset="0"/>
-                <a:ea typeface="Consolas" pitchFamily="34" charset="-122"/>
-                <a:cs typeface="Consolas" pitchFamily="34" charset="-120"/>
-              </a:rPr>
-              <a:t>  snprintf(line, sizeof(line), "ACK %lu\n", (unsigned long)(offset + count));</a:t>
-            </a:r>
-            <a:endParaRPr lang="en-US" sz="1050" dirty="0"/>
-          </a:p>
-          <a:p>
-            <a:pPr indent="0" marL="0">
-              <a:lnSpc>
-                <a:spcPct val="120000"/>
-              </a:lnSpc>
-              <a:buNone/>
-            </a:pPr>
-            <a:r>
-              <a:rPr lang="en-US" sz="1050" dirty="0">
-                <a:solidFill>
-                  <a:srgbClr val="8A94A3"/>
-                </a:solidFill>
-                <a:latin typeface="Consolas" pitchFamily="34" charset="0"/>
-                <a:ea typeface="Consolas" pitchFamily="34" charset="-122"/>
-                <a:cs typeface="Consolas" pitchFamily="34" charset="-120"/>
-              </a:rPr>
-              <a:t>      ⋮</a:t>
-            </a:r>
-            <a:endParaRPr lang="en-US" sz="1050" dirty="0"/>
-          </a:p>
-          <a:p>
-            <a:pPr indent="0" marL="0">
-              <a:lnSpc>
-                <a:spcPct val="120000"/>
-              </a:lnSpc>
-              <a:buNone/>
-            </a:pPr>
-            <a:r>
-              <a:rPr lang="en-US" sz="1050" dirty="0">
-                <a:solidFill>
-                  <a:srgbClr val="8A94A3"/>
-                </a:solidFill>
-                <a:latin typeface="Consolas" pitchFamily="34" charset="0"/>
-                <a:ea typeface="Consolas" pitchFamily="34" charset="-122"/>
-                <a:cs typeface="Consolas" pitchFamily="34" charset="-120"/>
-              </a:rPr>
-              <a:t> 297  </a:t>
-            </a:r>
-            <a:pPr indent="0" marL="0">
-              <a:lnSpc>
-                <a:spcPct val="120000"/>
-              </a:lnSpc>
-              <a:buNone/>
-            </a:pPr>
-            <a:r>
-              <a:rPr lang="en-US" sz="1050" b="1" dirty="0">
-                <a:solidFill>
-                  <a:srgbClr val="0F766E"/>
-                </a:solidFill>
-                <a:latin typeface="Consolas" pitchFamily="34" charset="0"/>
-                <a:ea typeface="Consolas" pitchFamily="34" charset="-122"/>
-                <a:cs typeface="Consolas" pitchFamily="34" charset="-120"/>
-              </a:rPr>
-              <a:t>if (crc != expected_crc)</a:t>
-            </a:r>
-            <a:endParaRPr lang="en-US" sz="1050" dirty="0"/>
-          </a:p>
-          <a:p>
-            <a:pPr indent="0" marL="0">
-              <a:lnSpc>
-                <a:spcPct val="120000"/>
-              </a:lnSpc>
-              <a:buNone/>
-            </a:pPr>
-            <a:r>
-              <a:rPr lang="en-US" sz="1050" dirty="0">
-                <a:solidFill>
-                  <a:srgbClr val="8A94A3"/>
-                </a:solidFill>
-                <a:latin typeface="Consolas" pitchFamily="34" charset="0"/>
-                <a:ea typeface="Consolas" pitchFamily="34" charset="-122"/>
-                <a:cs typeface="Consolas" pitchFamily="34" charset="-120"/>
-              </a:rPr>
               <a:t> 299  </a:t>
             </a:r>
-            <a:pPr indent="0" marL="0">
-              <a:lnSpc>
-                <a:spcPct val="120000"/>
-              </a:lnSpc>
-              <a:buNone/>
-            </a:pPr>
             <a:r>
               <a:rPr lang="en-US" sz="1050" dirty="0">
                 <a:solidFill>
@@ -17963,7 +18051,7 @@
           <a:bodyPr wrap="square" lIns="0" tIns="0" rIns="0" bIns="0" rtlCol="0" anchor="t"/>
           <a:lstStyle/>
           <a:p>
-            <a:pPr indent="0" marL="0">
+            <a:pPr marL="0" indent="0">
               <a:lnSpc>
                 <a:spcPct val="110000"/>
               </a:lnSpc>
@@ -17983,7 +18071,7 @@
             <a:endParaRPr lang="en-US" sz="1600" dirty="0"/>
           </a:p>
           <a:p>
-            <a:pPr indent="0" marL="0">
+            <a:pPr marL="0" indent="0">
               <a:lnSpc>
                 <a:spcPct val="110000"/>
               </a:lnSpc>
@@ -18006,7 +18094,7 @@
             <a:endParaRPr lang="en-US" sz="1600" dirty="0"/>
           </a:p>
           <a:p>
-            <a:pPr indent="0" marL="0">
+            <a:pPr marL="0" indent="0">
               <a:lnSpc>
                 <a:spcPct val="110000"/>
               </a:lnSpc>
@@ -18026,7 +18114,7 @@
             <a:endParaRPr lang="en-US" sz="1600" dirty="0"/>
           </a:p>
           <a:p>
-            <a:pPr indent="0" marL="0">
+            <a:pPr marL="0" indent="0">
               <a:lnSpc>
                 <a:spcPct val="110000"/>
               </a:lnSpc>
@@ -18049,7 +18137,7 @@
             <a:endParaRPr lang="en-US" sz="1600" dirty="0"/>
           </a:p>
           <a:p>
-            <a:pPr indent="0" marL="0">
+            <a:pPr marL="0" indent="0">
               <a:lnSpc>
                 <a:spcPct val="110000"/>
               </a:lnSpc>
@@ -18069,7 +18157,7 @@
             <a:endParaRPr lang="en-US" sz="1600" dirty="0"/>
           </a:p>
           <a:p>
-            <a:pPr indent="0" marL="0">
+            <a:pPr marL="0" indent="0">
               <a:lnSpc>
                 <a:spcPct val="110000"/>
               </a:lnSpc>
@@ -18092,7 +18180,7 @@
             <a:endParaRPr lang="en-US" sz="1600" dirty="0"/>
           </a:p>
           <a:p>
-            <a:pPr indent="0" marL="0">
+            <a:pPr marL="0" indent="0">
               <a:lnSpc>
                 <a:spcPct val="110000"/>
               </a:lnSpc>
@@ -18112,7 +18200,7 @@
             <a:endParaRPr lang="en-US" sz="1600" dirty="0"/>
           </a:p>
           <a:p>
-            <a:pPr indent="0" marL="0">
+            <a:pPr marL="0" indent="0">
               <a:lnSpc>
                 <a:spcPct val="110000"/>
               </a:lnSpc>
@@ -18135,7 +18223,7 @@
             <a:endParaRPr lang="en-US" sz="1600" dirty="0"/>
           </a:p>
           <a:p>
-            <a:pPr indent="0" marL="0">
+            <a:pPr marL="0" indent="0">
               <a:lnSpc>
                 <a:spcPct val="110000"/>
               </a:lnSpc>
@@ -18155,7 +18243,7 @@
             <a:endParaRPr lang="en-US" sz="1600" dirty="0"/>
           </a:p>
           <a:p>
-            <a:pPr indent="0" marL="0">
+            <a:pPr marL="0" indent="0">
               <a:lnSpc>
                 <a:spcPct val="110000"/>
               </a:lnSpc>
@@ -18178,7 +18266,7 @@
             <a:endParaRPr lang="en-US" sz="1600" dirty="0"/>
           </a:p>
           <a:p>
-            <a:pPr indent="0" marL="0">
+            <a:pPr marL="0" indent="0">
               <a:lnSpc>
                 <a:spcPct val="110000"/>
               </a:lnSpc>
@@ -18198,7 +18286,7 @@
             <a:endParaRPr lang="en-US" sz="1600" dirty="0"/>
           </a:p>
           <a:p>
-            <a:pPr indent="0" marL="0">
+            <a:pPr marL="0" indent="0">
               <a:lnSpc>
                 <a:spcPct val="110000"/>
               </a:lnSpc>
@@ -18242,7 +18330,7 @@
           </a:prstGeom>
           <a:extLst>
             <a:ext uri="{C572A759-6A51-4108-AA02-DFA0A04FC94B}">
-              <ma14:wrappingTextBoxFlag xmlns:ma14="http://schemas.microsoft.com/office/mac/drawingml/2011/main" val="0"/>
+              <ma14:wrappingTextBoxFlag xmlns:ma14="http://schemas.microsoft.com/office/mac/drawingml/2011/main" xmlns="" val="0"/>
             </a:ext>
           </a:extLst>
         </p:spPr>
@@ -18263,7 +18351,7 @@
           <a:p>
             <a:pPr algn="r"/>
             <a:fld id="{F7021451-1387-4CA6-816F-3879F97B5CBC}" type="slidenum">
-              <a:rPr b="0" lang="en-US"/>
+              <a:rPr lang="en-US" b="0"/>
               <a:t>7</a:t>
             </a:fld>
             <a:endParaRPr lang="en-US"/>
@@ -18298,9 +18386,11 @@
       <p:sp>
         <p:nvSpPr>
           <p:cNvPr id="2" name="Text 0"/>
-          <p:cNvSpPr/>
+          <p:cNvSpPr>
+            <a:spLocks noGrp="1"/>
+          </p:cNvSpPr>
           <p:nvPr>
-            <p:ph idx="100" type="title" hasCustomPrompt="1"/>
+            <p:ph type="title" idx="100" hasCustomPrompt="1"/>
           </p:nvPr>
         </p:nvSpPr>
         <p:spPr>
@@ -18318,7 +18408,7 @@
           <a:bodyPr wrap="square" lIns="0" tIns="0" rIns="0" bIns="0" rtlCol="0" anchor="ctr"/>
           <a:lstStyle/>
           <a:p>
-            <a:pPr algn="l" indent="0" marL="0">
+            <a:pPr marL="0" indent="0" algn="l">
               <a:buNone/>
             </a:pPr>
             <a:r>
@@ -18360,6 +18450,13 @@
             <a:prstDash val="solid"/>
           </a:ln>
         </p:spPr>
+        <p:txBody>
+          <a:bodyPr/>
+          <a:lstStyle/>
+          <a:p>
+            <a:endParaRPr lang="ko-KR" altLang="en-US"/>
+          </a:p>
+        </p:txBody>
       </p:sp>
       <p:sp>
         <p:nvSpPr>
@@ -18382,7 +18479,7 @@
           <a:bodyPr wrap="none" lIns="0" tIns="0" rIns="0" bIns="0" rtlCol="0" anchor="t"/>
           <a:lstStyle/>
           <a:p>
-            <a:pPr indent="0" marL="0">
+            <a:pPr marL="0" indent="0">
               <a:lnSpc>
                 <a:spcPct val="120000"/>
               </a:lnSpc>
@@ -18402,7 +18499,7 @@
             <a:endParaRPr lang="en-US" sz="1150" dirty="0"/>
           </a:p>
           <a:p>
-            <a:pPr indent="0" marL="0">
+            <a:pPr marL="0" indent="0">
               <a:lnSpc>
                 <a:spcPct val="120000"/>
               </a:lnSpc>
@@ -18419,27 +18516,52 @@
               </a:rPr>
               <a:t>  54  </a:t>
             </a:r>
-            <a:pPr indent="0" marL="0">
+            <a:r>
+              <a:rPr lang="en-US" sz="1150" b="1" dirty="0">
+                <a:solidFill>
+                  <a:srgbClr val="0F766E"/>
+                </a:solidFill>
+                <a:latin typeface="Consolas" pitchFamily="34" charset="0"/>
+                <a:ea typeface="Consolas" pitchFamily="34" charset="-122"/>
+                <a:cs typeface="Consolas" pitchFamily="34" charset="-120"/>
+              </a:rPr>
+              <a:t>if (bank != (completed_blocks &amp; 1U))</a:t>
+            </a:r>
+            <a:endParaRPr lang="en-US" sz="1150" dirty="0"/>
+          </a:p>
+          <a:p>
+            <a:pPr marL="0" indent="0">
               <a:lnSpc>
                 <a:spcPct val="120000"/>
               </a:lnSpc>
               <a:buNone/>
             </a:pPr>
             <a:r>
-              <a:rPr lang="en-US" sz="1150" b="1" dirty="0">
-                <a:solidFill>
-                  <a:srgbClr val="0F766E"/>
+              <a:rPr lang="en-US" sz="1150" dirty="0">
+                <a:solidFill>
+                  <a:srgbClr val="8A94A3"/>
                 </a:solidFill>
                 <a:latin typeface="Consolas" pitchFamily="34" charset="0"/>
                 <a:ea typeface="Consolas" pitchFamily="34" charset="-122"/>
                 <a:cs typeface="Consolas" pitchFamily="34" charset="-120"/>
               </a:rPr>
-              <a:t>if (bank != (completed_blocks &amp; 1U))</a:t>
+              <a:t>  55  </a:t>
+            </a:r>
+            <a:r>
+              <a:rPr lang="en-US" sz="1150" dirty="0">
+                <a:solidFill>
+                  <a:srgbClr val="1F2933"/>
+                </a:solidFill>
+                <a:latin typeface="Consolas" pitchFamily="34" charset="0"/>
+                <a:ea typeface="Consolas" pitchFamily="34" charset="-122"/>
+                <a:cs typeface="Consolas" pitchFamily="34" charset="-120"/>
+              </a:rPr>
+              <a:t>{</a:t>
             </a:r>
             <a:endParaRPr lang="en-US" sz="1150" dirty="0"/>
           </a:p>
           <a:p>
-            <a:pPr indent="0" marL="0">
+            <a:pPr marL="0" indent="0">
               <a:lnSpc>
                 <a:spcPct val="120000"/>
               </a:lnSpc>
@@ -18454,9 +18576,23 @@
                 <a:ea typeface="Consolas" pitchFamily="34" charset="-122"/>
                 <a:cs typeface="Consolas" pitchFamily="34" charset="-120"/>
               </a:rPr>
-              <a:t>  55  </a:t>
-            </a:r>
-            <a:pPr indent="0" marL="0">
+              <a:t>  56  </a:t>
+            </a:r>
+            <a:r>
+              <a:rPr lang="en-US" sz="1150" dirty="0">
+                <a:solidFill>
+                  <a:srgbClr val="1F2933"/>
+                </a:solidFill>
+                <a:latin typeface="Consolas" pitchFamily="34" charset="0"/>
+                <a:ea typeface="Consolas" pitchFamily="34" charset="-122"/>
+                <a:cs typeface="Consolas" pitchFamily="34" charset="-120"/>
+              </a:rPr>
+              <a:t>  rx_error = 1;</a:t>
+            </a:r>
+            <a:endParaRPr lang="en-US" sz="1150" dirty="0"/>
+          </a:p>
+          <a:p>
+            <a:pPr marL="0" indent="0">
               <a:lnSpc>
                 <a:spcPct val="120000"/>
               </a:lnSpc>
@@ -18465,18 +18601,29 @@
             <a:r>
               <a:rPr lang="en-US" sz="1150" dirty="0">
                 <a:solidFill>
-                  <a:srgbClr val="1F2933"/>
+                  <a:srgbClr val="8A94A3"/>
                 </a:solidFill>
                 <a:latin typeface="Consolas" pitchFamily="34" charset="0"/>
                 <a:ea typeface="Consolas" pitchFamily="34" charset="-122"/>
                 <a:cs typeface="Consolas" pitchFamily="34" charset="-120"/>
               </a:rPr>
-              <a:t>{</a:t>
+              <a:t>  57  </a:t>
+            </a:r>
+            <a:r>
+              <a:rPr lang="en-US" sz="1150" dirty="0">
+                <a:solidFill>
+                  <a:srgbClr val="1F2933"/>
+                </a:solidFill>
+                <a:latin typeface="Consolas" pitchFamily="34" charset="0"/>
+                <a:ea typeface="Consolas" pitchFamily="34" charset="-122"/>
+                <a:cs typeface="Consolas" pitchFamily="34" charset="-120"/>
+              </a:rPr>
+              <a:t>  ++overrun_count;</a:t>
             </a:r>
             <a:endParaRPr lang="en-US" sz="1150" dirty="0"/>
           </a:p>
           <a:p>
-            <a:pPr indent="0" marL="0">
+            <a:pPr marL="0" indent="0">
               <a:lnSpc>
                 <a:spcPct val="120000"/>
               </a:lnSpc>
@@ -18491,9 +18638,23 @@
                 <a:ea typeface="Consolas" pitchFamily="34" charset="-122"/>
                 <a:cs typeface="Consolas" pitchFamily="34" charset="-120"/>
               </a:rPr>
-              <a:t>  56  </a:t>
-            </a:r>
-            <a:pPr indent="0" marL="0">
+              <a:t>  58  </a:t>
+            </a:r>
+            <a:r>
+              <a:rPr lang="en-US" sz="1150" dirty="0">
+                <a:solidFill>
+                  <a:srgbClr val="1F2933"/>
+                </a:solidFill>
+                <a:latin typeface="Consolas" pitchFamily="34" charset="0"/>
+                <a:ea typeface="Consolas" pitchFamily="34" charset="-122"/>
+                <a:cs typeface="Consolas" pitchFamily="34" charset="-120"/>
+              </a:rPr>
+              <a:t>}</a:t>
+            </a:r>
+            <a:endParaRPr lang="en-US" sz="1150" dirty="0"/>
+          </a:p>
+          <a:p>
+            <a:pPr marL="0" indent="0">
               <a:lnSpc>
                 <a:spcPct val="120000"/>
               </a:lnSpc>
@@ -18502,18 +18663,18 @@
             <a:r>
               <a:rPr lang="en-US" sz="1150" dirty="0">
                 <a:solidFill>
-                  <a:srgbClr val="1F2933"/>
+                  <a:srgbClr val="8A94A3"/>
                 </a:solidFill>
                 <a:latin typeface="Consolas" pitchFamily="34" charset="0"/>
                 <a:ea typeface="Consolas" pitchFamily="34" charset="-122"/>
                 <a:cs typeface="Consolas" pitchFamily="34" charset="-120"/>
               </a:rPr>
-              <a:t>  rx_error = 1;</a:t>
+              <a:t>      ⋮</a:t>
             </a:r>
             <a:endParaRPr lang="en-US" sz="1150" dirty="0"/>
           </a:p>
           <a:p>
-            <a:pPr indent="0" marL="0">
+            <a:pPr marL="0" indent="0">
               <a:lnSpc>
                 <a:spcPct val="120000"/>
               </a:lnSpc>
@@ -18528,9 +18689,23 @@
                 <a:ea typeface="Consolas" pitchFamily="34" charset="-122"/>
                 <a:cs typeface="Consolas" pitchFamily="34" charset="-120"/>
               </a:rPr>
-              <a:t>  57  </a:t>
-            </a:r>
-            <a:pPr indent="0" marL="0">
+              <a:t> 131  </a:t>
+            </a:r>
+            <a:r>
+              <a:rPr lang="en-US" sz="1150" dirty="0">
+                <a:solidFill>
+                  <a:srgbClr val="1F2933"/>
+                </a:solidFill>
+                <a:latin typeface="Consolas" pitchFamily="34" charset="0"/>
+                <a:ea typeface="Consolas" pitchFamily="34" charset="-122"/>
+                <a:cs typeface="Consolas" pitchFamily="34" charset="-120"/>
+              </a:rPr>
+              <a:t>  uint32_t available = produced_count() - consumed;</a:t>
+            </a:r>
+            <a:endParaRPr lang="en-US" sz="1150" dirty="0"/>
+          </a:p>
+          <a:p>
+            <a:pPr marL="0" indent="0">
               <a:lnSpc>
                 <a:spcPct val="120000"/>
               </a:lnSpc>
@@ -18539,18 +18714,29 @@
             <a:r>
               <a:rPr lang="en-US" sz="1150" dirty="0">
                 <a:solidFill>
-                  <a:srgbClr val="1F2933"/>
+                  <a:srgbClr val="8A94A3"/>
                 </a:solidFill>
                 <a:latin typeface="Consolas" pitchFamily="34" charset="0"/>
                 <a:ea typeface="Consolas" pitchFamily="34" charset="-122"/>
                 <a:cs typeface="Consolas" pitchFamily="34" charset="-120"/>
               </a:rPr>
-              <a:t>  ++overrun_count;</a:t>
+              <a:t> 134  </a:t>
+            </a:r>
+            <a:r>
+              <a:rPr lang="en-US" sz="1150" b="1" dirty="0">
+                <a:solidFill>
+                  <a:srgbClr val="0F766E"/>
+                </a:solidFill>
+                <a:latin typeface="Consolas" pitchFamily="34" charset="0"/>
+                <a:ea typeface="Consolas" pitchFamily="34" charset="-122"/>
+                <a:cs typeface="Consolas" pitchFamily="34" charset="-120"/>
+              </a:rPr>
+              <a:t>  if (available &gt; TOTAL_BYTES)</a:t>
             </a:r>
             <a:endParaRPr lang="en-US" sz="1150" dirty="0"/>
           </a:p>
           <a:p>
-            <a:pPr indent="0" marL="0">
+            <a:pPr marL="0" indent="0">
               <a:lnSpc>
                 <a:spcPct val="120000"/>
               </a:lnSpc>
@@ -18565,9 +18751,23 @@
                 <a:ea typeface="Consolas" pitchFamily="34" charset="-122"/>
                 <a:cs typeface="Consolas" pitchFamily="34" charset="-120"/>
               </a:rPr>
-              <a:t>  58  </a:t>
-            </a:r>
-            <a:pPr indent="0" marL="0">
+              <a:t> 136  </a:t>
+            </a:r>
+            <a:r>
+              <a:rPr lang="en-US" sz="1150" dirty="0">
+                <a:solidFill>
+                  <a:srgbClr val="1F2933"/>
+                </a:solidFill>
+                <a:latin typeface="Consolas" pitchFamily="34" charset="0"/>
+                <a:ea typeface="Consolas" pitchFamily="34" charset="-122"/>
+                <a:cs typeface="Consolas" pitchFamily="34" charset="-120"/>
+              </a:rPr>
+              <a:t>    rx_error = 1;</a:t>
+            </a:r>
+            <a:endParaRPr lang="en-US" sz="1150" dirty="0"/>
+          </a:p>
+          <a:p>
+            <a:pPr marL="0" indent="0">
               <a:lnSpc>
                 <a:spcPct val="120000"/>
               </a:lnSpc>
@@ -18576,18 +18776,29 @@
             <a:r>
               <a:rPr lang="en-US" sz="1150" dirty="0">
                 <a:solidFill>
-                  <a:srgbClr val="1F2933"/>
+                  <a:srgbClr val="8A94A3"/>
                 </a:solidFill>
                 <a:latin typeface="Consolas" pitchFamily="34" charset="0"/>
                 <a:ea typeface="Consolas" pitchFamily="34" charset="-122"/>
                 <a:cs typeface="Consolas" pitchFamily="34" charset="-120"/>
               </a:rPr>
-              <a:t>}</a:t>
+              <a:t> 137  </a:t>
+            </a:r>
+            <a:r>
+              <a:rPr lang="en-US" sz="1150" dirty="0">
+                <a:solidFill>
+                  <a:srgbClr val="1F2933"/>
+                </a:solidFill>
+                <a:latin typeface="Consolas" pitchFamily="34" charset="0"/>
+                <a:ea typeface="Consolas" pitchFamily="34" charset="-122"/>
+                <a:cs typeface="Consolas" pitchFamily="34" charset="-120"/>
+              </a:rPr>
+              <a:t>    ++overrun_count;</a:t>
             </a:r>
             <a:endParaRPr lang="en-US" sz="1150" dirty="0"/>
           </a:p>
           <a:p>
-            <a:pPr indent="0" marL="0">
+            <a:pPr marL="0" indent="0">
               <a:lnSpc>
                 <a:spcPct val="120000"/>
               </a:lnSpc>
@@ -18607,7 +18818,7 @@
             <a:endParaRPr lang="en-US" sz="1150" dirty="0"/>
           </a:p>
           <a:p>
-            <a:pPr indent="0" marL="0">
+            <a:pPr marL="0" indent="0">
               <a:lnSpc>
                 <a:spcPct val="120000"/>
               </a:lnSpc>
@@ -18622,9 +18833,23 @@
                 <a:ea typeface="Consolas" pitchFamily="34" charset="-122"/>
                 <a:cs typeface="Consolas" pitchFamily="34" charset="-120"/>
               </a:rPr>
-              <a:t> 131  </a:t>
-            </a:r>
-            <a:pPr indent="0" marL="0">
+              <a:t> 151  </a:t>
+            </a:r>
+            <a:r>
+              <a:rPr lang="en-US" sz="1150" dirty="0">
+                <a:solidFill>
+                  <a:srgbClr val="1F2933"/>
+                </a:solidFill>
+                <a:latin typeface="Consolas" pitchFamily="34" charset="0"/>
+                <a:ea typeface="Consolas" pitchFamily="34" charset="-122"/>
+                <a:cs typeface="Consolas" pitchFamily="34" charset="-120"/>
+              </a:rPr>
+              <a:t>    /* Fail rather than accept a copy that DMA may have overwritten. */</a:t>
+            </a:r>
+            <a:endParaRPr lang="en-US" sz="1150" dirty="0"/>
+          </a:p>
+          <a:p>
+            <a:pPr marL="0" indent="0">
               <a:lnSpc>
                 <a:spcPct val="120000"/>
               </a:lnSpc>
@@ -18633,24 +18858,72 @@
             <a:r>
               <a:rPr lang="en-US" sz="1150" dirty="0">
                 <a:solidFill>
-                  <a:srgbClr val="1F2933"/>
+                  <a:srgbClr val="8A94A3"/>
                 </a:solidFill>
                 <a:latin typeface="Consolas" pitchFamily="34" charset="0"/>
                 <a:ea typeface="Consolas" pitchFamily="34" charset="-122"/>
                 <a:cs typeface="Consolas" pitchFamily="34" charset="-120"/>
               </a:rPr>
-              <a:t>  uint32_t available = produced_count() - consumed;</a:t>
+              <a:t> 152  </a:t>
+            </a:r>
+            <a:r>
+              <a:rPr lang="en-US" sz="1150" b="1" dirty="0">
+                <a:solidFill>
+                  <a:srgbClr val="0F766E"/>
+                </a:solidFill>
+                <a:latin typeface="Consolas" pitchFamily="34" charset="0"/>
+                <a:ea typeface="Consolas" pitchFamily="34" charset="-122"/>
+                <a:cs typeface="Consolas" pitchFamily="34" charset="-120"/>
+              </a:rPr>
+              <a:t>    if (produced_count() - consumed &gt; TOTAL_BYTES)</a:t>
             </a:r>
             <a:endParaRPr lang="en-US" sz="1150" dirty="0"/>
           </a:p>
           <a:p>
-            <a:pPr indent="0" marL="0">
+            <a:pPr marL="0" indent="0">
               <a:lnSpc>
                 <a:spcPct val="120000"/>
               </a:lnSpc>
               <a:buNone/>
             </a:pPr>
             <a:r>
+              <a:rPr lang="en-US" sz="600" dirty="0">
+                <a:solidFill>
+                  <a:srgbClr val="000000"/>
+                </a:solidFill>
+              </a:rPr>
+              <a:t> </a:t>
+            </a:r>
+            <a:endParaRPr lang="en-US" sz="1150" dirty="0"/>
+          </a:p>
+          <a:p>
+            <a:pPr marL="0" indent="0">
+              <a:lnSpc>
+                <a:spcPct val="120000"/>
+              </a:lnSpc>
+              <a:buNone/>
+            </a:pPr>
+            <a:r>
+              <a:rPr lang="en-US" sz="1150" b="1" dirty="0">
+                <a:solidFill>
+                  <a:srgbClr val="5F6B7A"/>
+                </a:solidFill>
+                <a:latin typeface="Malgun Gothic" pitchFamily="34" charset="0"/>
+                <a:ea typeface="Malgun Gothic" pitchFamily="34" charset="-122"/>
+                <a:cs typeface="Malgun Gothic" pitchFamily="34" charset="-120"/>
+              </a:rPr>
+              <a:t>pc/demo_roundtrip.py</a:t>
+            </a:r>
+            <a:endParaRPr lang="en-US" sz="1150" dirty="0"/>
+          </a:p>
+          <a:p>
+            <a:pPr marL="0" indent="0">
+              <a:lnSpc>
+                <a:spcPct val="120000"/>
+              </a:lnSpc>
+              <a:buNone/>
+            </a:pPr>
+            <a:r>
               <a:rPr lang="en-US" sz="1150" dirty="0">
                 <a:solidFill>
                   <a:srgbClr val="8A94A3"/>
@@ -18659,293 +18932,39 @@
                 <a:ea typeface="Consolas" pitchFamily="34" charset="-122"/>
                 <a:cs typeface="Consolas" pitchFamily="34" charset="-120"/>
               </a:rPr>
-              <a:t> 134  </a:t>
-            </a:r>
-            <a:pPr indent="0" marL="0">
+              <a:t>  54  </a:t>
+            </a:r>
+            <a:r>
+              <a:rPr lang="en-US" sz="1150" dirty="0">
+                <a:solidFill>
+                  <a:srgbClr val="1F2933"/>
+                </a:solidFill>
+                <a:latin typeface="Consolas" pitchFamily="34" charset="0"/>
+                <a:ea typeface="Consolas" pitchFamily="34" charset="-122"/>
+                <a:cs typeface="Consolas" pitchFamily="34" charset="-120"/>
+              </a:rPr>
+              <a:t>a, b, overruns = dma_stats(port)</a:t>
+            </a:r>
+            <a:endParaRPr lang="en-US" sz="1150" dirty="0"/>
+          </a:p>
+          <a:p>
+            <a:pPr marL="0" indent="0">
               <a:lnSpc>
                 <a:spcPct val="120000"/>
               </a:lnSpc>
               <a:buNone/>
             </a:pPr>
             <a:r>
-              <a:rPr lang="en-US" sz="1150" b="1" dirty="0">
-                <a:solidFill>
-                  <a:srgbClr val="0F766E"/>
+              <a:rPr lang="en-US" sz="1150" dirty="0">
+                <a:solidFill>
+                  <a:srgbClr val="8A94A3"/>
                 </a:solidFill>
                 <a:latin typeface="Consolas" pitchFamily="34" charset="0"/>
                 <a:ea typeface="Consolas" pitchFamily="34" charset="-122"/>
                 <a:cs typeface="Consolas" pitchFamily="34" charset="-120"/>
               </a:rPr>
-              <a:t>  if (available &gt; TOTAL_BYTES)</a:t>
-            </a:r>
-            <a:endParaRPr lang="en-US" sz="1150" dirty="0"/>
-          </a:p>
-          <a:p>
-            <a:pPr indent="0" marL="0">
-              <a:lnSpc>
-                <a:spcPct val="120000"/>
-              </a:lnSpc>
-              <a:buNone/>
-            </a:pPr>
-            <a:r>
-              <a:rPr lang="en-US" sz="1150" dirty="0">
-                <a:solidFill>
-                  <a:srgbClr val="8A94A3"/>
-                </a:solidFill>
-                <a:latin typeface="Consolas" pitchFamily="34" charset="0"/>
-                <a:ea typeface="Consolas" pitchFamily="34" charset="-122"/>
-                <a:cs typeface="Consolas" pitchFamily="34" charset="-120"/>
-              </a:rPr>
-              <a:t> 136  </a:t>
-            </a:r>
-            <a:pPr indent="0" marL="0">
-              <a:lnSpc>
-                <a:spcPct val="120000"/>
-              </a:lnSpc>
-              <a:buNone/>
-            </a:pPr>
-            <a:r>
-              <a:rPr lang="en-US" sz="1150" dirty="0">
-                <a:solidFill>
-                  <a:srgbClr val="1F2933"/>
-                </a:solidFill>
-                <a:latin typeface="Consolas" pitchFamily="34" charset="0"/>
-                <a:ea typeface="Consolas" pitchFamily="34" charset="-122"/>
-                <a:cs typeface="Consolas" pitchFamily="34" charset="-120"/>
-              </a:rPr>
-              <a:t>    rx_error = 1;</a:t>
-            </a:r>
-            <a:endParaRPr lang="en-US" sz="1150" dirty="0"/>
-          </a:p>
-          <a:p>
-            <a:pPr indent="0" marL="0">
-              <a:lnSpc>
-                <a:spcPct val="120000"/>
-              </a:lnSpc>
-              <a:buNone/>
-            </a:pPr>
-            <a:r>
-              <a:rPr lang="en-US" sz="1150" dirty="0">
-                <a:solidFill>
-                  <a:srgbClr val="8A94A3"/>
-                </a:solidFill>
-                <a:latin typeface="Consolas" pitchFamily="34" charset="0"/>
-                <a:ea typeface="Consolas" pitchFamily="34" charset="-122"/>
-                <a:cs typeface="Consolas" pitchFamily="34" charset="-120"/>
-              </a:rPr>
-              <a:t> 137  </a:t>
-            </a:r>
-            <a:pPr indent="0" marL="0">
-              <a:lnSpc>
-                <a:spcPct val="120000"/>
-              </a:lnSpc>
-              <a:buNone/>
-            </a:pPr>
-            <a:r>
-              <a:rPr lang="en-US" sz="1150" dirty="0">
-                <a:solidFill>
-                  <a:srgbClr val="1F2933"/>
-                </a:solidFill>
-                <a:latin typeface="Consolas" pitchFamily="34" charset="0"/>
-                <a:ea typeface="Consolas" pitchFamily="34" charset="-122"/>
-                <a:cs typeface="Consolas" pitchFamily="34" charset="-120"/>
-              </a:rPr>
-              <a:t>    ++overrun_count;</a:t>
-            </a:r>
-            <a:endParaRPr lang="en-US" sz="1150" dirty="0"/>
-          </a:p>
-          <a:p>
-            <a:pPr indent="0" marL="0">
-              <a:lnSpc>
-                <a:spcPct val="120000"/>
-              </a:lnSpc>
-              <a:buNone/>
-            </a:pPr>
-            <a:r>
-              <a:rPr lang="en-US" sz="1150" dirty="0">
-                <a:solidFill>
-                  <a:srgbClr val="8A94A3"/>
-                </a:solidFill>
-                <a:latin typeface="Consolas" pitchFamily="34" charset="0"/>
-                <a:ea typeface="Consolas" pitchFamily="34" charset="-122"/>
-                <a:cs typeface="Consolas" pitchFamily="34" charset="-120"/>
-              </a:rPr>
-              <a:t>      ⋮</a:t>
-            </a:r>
-            <a:endParaRPr lang="en-US" sz="1150" dirty="0"/>
-          </a:p>
-          <a:p>
-            <a:pPr indent="0" marL="0">
-              <a:lnSpc>
-                <a:spcPct val="120000"/>
-              </a:lnSpc>
-              <a:buNone/>
-            </a:pPr>
-            <a:r>
-              <a:rPr lang="en-US" sz="1150" dirty="0">
-                <a:solidFill>
-                  <a:srgbClr val="8A94A3"/>
-                </a:solidFill>
-                <a:latin typeface="Consolas" pitchFamily="34" charset="0"/>
-                <a:ea typeface="Consolas" pitchFamily="34" charset="-122"/>
-                <a:cs typeface="Consolas" pitchFamily="34" charset="-120"/>
-              </a:rPr>
-              <a:t> 151  </a:t>
-            </a:r>
-            <a:pPr indent="0" marL="0">
-              <a:lnSpc>
-                <a:spcPct val="120000"/>
-              </a:lnSpc>
-              <a:buNone/>
-            </a:pPr>
-            <a:r>
-              <a:rPr lang="en-US" sz="1150" dirty="0">
-                <a:solidFill>
-                  <a:srgbClr val="1F2933"/>
-                </a:solidFill>
-                <a:latin typeface="Consolas" pitchFamily="34" charset="0"/>
-                <a:ea typeface="Consolas" pitchFamily="34" charset="-122"/>
-                <a:cs typeface="Consolas" pitchFamily="34" charset="-120"/>
-              </a:rPr>
-              <a:t>    /* Fail rather than accept a copy that DMA may have overwritten. */</a:t>
-            </a:r>
-            <a:endParaRPr lang="en-US" sz="1150" dirty="0"/>
-          </a:p>
-          <a:p>
-            <a:pPr indent="0" marL="0">
-              <a:lnSpc>
-                <a:spcPct val="120000"/>
-              </a:lnSpc>
-              <a:buNone/>
-            </a:pPr>
-            <a:r>
-              <a:rPr lang="en-US" sz="1150" dirty="0">
-                <a:solidFill>
-                  <a:srgbClr val="8A94A3"/>
-                </a:solidFill>
-                <a:latin typeface="Consolas" pitchFamily="34" charset="0"/>
-                <a:ea typeface="Consolas" pitchFamily="34" charset="-122"/>
-                <a:cs typeface="Consolas" pitchFamily="34" charset="-120"/>
-              </a:rPr>
-              <a:t> 152  </a:t>
-            </a:r>
-            <a:pPr indent="0" marL="0">
-              <a:lnSpc>
-                <a:spcPct val="120000"/>
-              </a:lnSpc>
-              <a:buNone/>
-            </a:pPr>
-            <a:r>
-              <a:rPr lang="en-US" sz="1150" b="1" dirty="0">
-                <a:solidFill>
-                  <a:srgbClr val="0F766E"/>
-                </a:solidFill>
-                <a:latin typeface="Consolas" pitchFamily="34" charset="0"/>
-                <a:ea typeface="Consolas" pitchFamily="34" charset="-122"/>
-                <a:cs typeface="Consolas" pitchFamily="34" charset="-120"/>
-              </a:rPr>
-              <a:t>    if (produced_count() - consumed &gt; TOTAL_BYTES)</a:t>
-            </a:r>
-            <a:endParaRPr lang="en-US" sz="1150" dirty="0"/>
-          </a:p>
-          <a:p>
-            <a:pPr indent="0" marL="0">
-              <a:lnSpc>
-                <a:spcPct val="120000"/>
-              </a:lnSpc>
-              <a:buNone/>
-            </a:pPr>
-            <a:r>
-              <a:rPr lang="en-US" sz="600" dirty="0">
-                <a:solidFill>
-                  <a:srgbClr val="000000"/>
-                </a:solidFill>
-              </a:rPr>
-              <a:t> </a:t>
-            </a:r>
-            <a:endParaRPr lang="en-US" sz="1150" dirty="0"/>
-          </a:p>
-          <a:p>
-            <a:pPr indent="0" marL="0">
-              <a:lnSpc>
-                <a:spcPct val="120000"/>
-              </a:lnSpc>
-              <a:buNone/>
-            </a:pPr>
-            <a:r>
-              <a:rPr lang="en-US" sz="1150" b="1" dirty="0">
-                <a:solidFill>
-                  <a:srgbClr val="5F6B7A"/>
-                </a:solidFill>
-                <a:latin typeface="Malgun Gothic" pitchFamily="34" charset="0"/>
-                <a:ea typeface="Malgun Gothic" pitchFamily="34" charset="-122"/>
-                <a:cs typeface="Malgun Gothic" pitchFamily="34" charset="-120"/>
-              </a:rPr>
-              <a:t>pc/demo_roundtrip.py</a:t>
-            </a:r>
-            <a:endParaRPr lang="en-US" sz="1150" dirty="0"/>
-          </a:p>
-          <a:p>
-            <a:pPr indent="0" marL="0">
-              <a:lnSpc>
-                <a:spcPct val="120000"/>
-              </a:lnSpc>
-              <a:buNone/>
-            </a:pPr>
-            <a:r>
-              <a:rPr lang="en-US" sz="1150" dirty="0">
-                <a:solidFill>
-                  <a:srgbClr val="8A94A3"/>
-                </a:solidFill>
-                <a:latin typeface="Consolas" pitchFamily="34" charset="0"/>
-                <a:ea typeface="Consolas" pitchFamily="34" charset="-122"/>
-                <a:cs typeface="Consolas" pitchFamily="34" charset="-120"/>
-              </a:rPr>
-              <a:t>  54  </a:t>
-            </a:r>
-            <a:pPr indent="0" marL="0">
-              <a:lnSpc>
-                <a:spcPct val="120000"/>
-              </a:lnSpc>
-              <a:buNone/>
-            </a:pPr>
-            <a:r>
-              <a:rPr lang="en-US" sz="1150" dirty="0">
-                <a:solidFill>
-                  <a:srgbClr val="1F2933"/>
-                </a:solidFill>
-                <a:latin typeface="Consolas" pitchFamily="34" charset="0"/>
-                <a:ea typeface="Consolas" pitchFamily="34" charset="-122"/>
-                <a:cs typeface="Consolas" pitchFamily="34" charset="-120"/>
-              </a:rPr>
-              <a:t>a, b, overruns = dma_stats(port)</a:t>
-            </a:r>
-            <a:endParaRPr lang="en-US" sz="1150" dirty="0"/>
-          </a:p>
-          <a:p>
-            <a:pPr indent="0" marL="0">
-              <a:lnSpc>
-                <a:spcPct val="120000"/>
-              </a:lnSpc>
-              <a:buNone/>
-            </a:pPr>
-            <a:r>
-              <a:rPr lang="en-US" sz="1150" dirty="0">
-                <a:solidFill>
-                  <a:srgbClr val="8A94A3"/>
-                </a:solidFill>
-                <a:latin typeface="Consolas" pitchFamily="34" charset="0"/>
-                <a:ea typeface="Consolas" pitchFamily="34" charset="-122"/>
-                <a:cs typeface="Consolas" pitchFamily="34" charset="-120"/>
-              </a:rPr>
               <a:t>  55  </a:t>
             </a:r>
-            <a:pPr indent="0" marL="0">
-              <a:lnSpc>
-                <a:spcPct val="120000"/>
-              </a:lnSpc>
-              <a:buNone/>
-            </a:pPr>
             <a:r>
               <a:rPr lang="en-US" sz="1150" b="1" dirty="0">
                 <a:solidFill>
@@ -18982,7 +19001,7 @@
           <a:bodyPr wrap="square" lIns="0" tIns="0" rIns="0" bIns="0" rtlCol="0" anchor="t"/>
           <a:lstStyle/>
           <a:p>
-            <a:pPr indent="0" marL="0">
+            <a:pPr marL="0" indent="0">
               <a:lnSpc>
                 <a:spcPct val="110000"/>
               </a:lnSpc>
@@ -19002,7 +19021,7 @@
             <a:endParaRPr lang="en-US" sz="1600" dirty="0"/>
           </a:p>
           <a:p>
-            <a:pPr indent="0" marL="0">
+            <a:pPr marL="0" indent="0">
               <a:lnSpc>
                 <a:spcPct val="110000"/>
               </a:lnSpc>
@@ -19020,12 +19039,34 @@
                 <a:ea typeface="Malgun Gothic" pitchFamily="34" charset="-122"/>
                 <a:cs typeface="Malgun Gothic" pitchFamily="34" charset="-120"/>
               </a:rPr>
-              <a:t>DMA 완료 은행 순서가 어긋나면 초과로 기록</a:t>
+              <a:t>DMA </a:t>
+            </a:r>
+            <a:r>
+              <a:rPr lang="en-US" sz="1400" dirty="0" err="1">
+                <a:solidFill>
+                  <a:srgbClr val="1F2933"/>
+                </a:solidFill>
+                <a:latin typeface="Malgun Gothic" pitchFamily="34" charset="0"/>
+                <a:ea typeface="Malgun Gothic" pitchFamily="34" charset="-122"/>
+                <a:cs typeface="Malgun Gothic" pitchFamily="34" charset="-120"/>
+              </a:rPr>
+              <a:t>완료</a:t>
+            </a:r>
+            <a:r>
+              <a:rPr lang="en-US" sz="1400" dirty="0">
+                <a:solidFill>
+                  <a:srgbClr val="1F2933"/>
+                </a:solidFill>
+                <a:latin typeface="Malgun Gothic" pitchFamily="34" charset="0"/>
+                <a:ea typeface="Malgun Gothic" pitchFamily="34" charset="-122"/>
+                <a:cs typeface="Malgun Gothic" pitchFamily="34" charset="-120"/>
+              </a:rPr>
+              <a:t> Bank 순서가 어긋나면 초과로 기록</a:t>
             </a:r>
             <a:endParaRPr lang="en-US" sz="1600" dirty="0"/>
           </a:p>
           <a:p>
-            <a:pPr indent="0" marL="0">
+            <a:pPr marL="0" indent="0">
               <a:lnSpc>
                 <a:spcPct val="110000"/>
               </a:lnSpc>
@@ -19045,7 +19086,7 @@
             <a:endParaRPr lang="en-US" sz="1600" dirty="0"/>
           </a:p>
           <a:p>
-            <a:pPr indent="0" marL="0">
+            <a:pPr marL="0" indent="0">
               <a:lnSpc>
                 <a:spcPct val="110000"/>
               </a:lnSpc>
@@ -19068,7 +19109,7 @@
             <a:endParaRPr lang="en-US" sz="1600" dirty="0"/>
           </a:p>
           <a:p>
-            <a:pPr indent="0" marL="0">
+            <a:pPr marL="0" indent="0">
               <a:lnSpc>
                 <a:spcPct val="110000"/>
               </a:lnSpc>
@@ -19088,7 +19129,7 @@
             <a:endParaRPr lang="en-US" sz="1600" dirty="0"/>
           </a:p>
           <a:p>
-            <a:pPr indent="0" marL="0">
+            <a:pPr marL="0" indent="0">
               <a:lnSpc>
                 <a:spcPct val="110000"/>
               </a:lnSpc>
@@ -19107,113 +19148,6 @@
                 <a:cs typeface="Malgun Gothic" pitchFamily="34" charset="-120"/>
               </a:rPr>
               <a:t>Demo 끝에 통계를 요청해 초과가 1회라도 있으면 실패</a:t>
-            </a:r>
-            <a:endParaRPr lang="en-US" sz="1600" dirty="0"/>
-          </a:p>
-        </p:txBody>
-      </p:sp>
-      <p:sp>
-        <p:nvSpPr>
-          <p:cNvPr id="6" name="Shape 4"/>
-          <p:cNvSpPr/>
-          <p:nvPr/>
-        </p:nvSpPr>
-        <p:spPr>
-          <a:xfrm>
-            <a:off x="8412480" y="4937760"/>
-            <a:ext cx="3227832" cy="1234440"/>
-          </a:xfrm>
-          <a:prstGeom prst="rect">
-            <a:avLst/>
-          </a:prstGeom>
-          <a:solidFill>
-            <a:srgbClr val="E3F1EF"/>
-          </a:solidFill>
-          <a:ln w="12700">
-            <a:solidFill>
-              <a:srgbClr val="E3F1EF"/>
-            </a:solidFill>
-            <a:prstDash val="solid"/>
-          </a:ln>
-        </p:spPr>
-      </p:sp>
-      <p:sp>
-        <p:nvSpPr>
-          <p:cNvPr id="7" name="Text 5"/>
-          <p:cNvSpPr txBox="1"/>
-          <p:nvPr/>
-        </p:nvSpPr>
-        <p:spPr>
-          <a:xfrm>
-            <a:off x="8549640" y="5029200"/>
-            <a:ext cx="3017520" cy="1051560"/>
-          </a:xfrm>
-          <a:prstGeom prst="rect">
-            <a:avLst/>
-          </a:prstGeom>
-          <a:noFill/>
-          <a:ln/>
-        </p:spPr>
-        <p:txBody>
-          <a:bodyPr wrap="square" lIns="0" tIns="0" rIns="0" bIns="0" rtlCol="0" anchor="t"/>
-          <a:lstStyle/>
-          <a:p>
-            <a:pPr indent="0" marL="0">
-              <a:lnSpc>
-                <a:spcPct val="115000"/>
-              </a:lnSpc>
-              <a:buNone/>
-            </a:pPr>
-            <a:r>
-              <a:rPr lang="en-US" sz="1300" b="1" dirty="0">
-                <a:solidFill>
-                  <a:srgbClr val="0F766E"/>
-                </a:solidFill>
-                <a:latin typeface="Malgun Gothic" pitchFamily="34" charset="0"/>
-                <a:ea typeface="Malgun Gothic" pitchFamily="34" charset="-122"/>
-                <a:cs typeface="Malgun Gothic" pitchFamily="34" charset="-120"/>
-              </a:rPr>
-              <a:t>최신 저장 실행 (2026-10-15 20:01)</a:t>
-            </a:r>
-            <a:endParaRPr lang="en-US" sz="1600" dirty="0"/>
-          </a:p>
-          <a:p>
-            <a:pPr indent="0" marL="0">
-              <a:lnSpc>
-                <a:spcPct val="115000"/>
-              </a:lnSpc>
-              <a:buNone/>
-            </a:pPr>
-            <a:r>
-              <a:rPr lang="en-US" sz="1400" b="1" dirty="0">
-                <a:solidFill>
-                  <a:srgbClr val="1F2933"/>
-                </a:solidFill>
-                <a:latin typeface="Malgun Gothic" pitchFamily="34" charset="0"/>
-                <a:ea typeface="Malgun Gothic" pitchFamily="34" charset="-122"/>
-                <a:cs typeface="Malgun Gothic" pitchFamily="34" charset="-120"/>
-              </a:rPr>
-              <a:t>M0 384회 · M1 384회 · 초과 0회</a:t>
-            </a:r>
-            <a:endParaRPr lang="en-US" sz="1600" dirty="0"/>
-          </a:p>
-          <a:p>
-            <a:pPr indent="0" marL="0">
-              <a:lnSpc>
-                <a:spcPct val="115000"/>
-              </a:lnSpc>
-              <a:buNone/>
-            </a:pPr>
-            <a:r>
-              <a:rPr lang="en-US" sz="1000" dirty="0">
-                <a:solidFill>
-                  <a:srgbClr val="5F6B7A"/>
-                </a:solidFill>
-                <a:latin typeface="Malgun Gothic" pitchFamily="34" charset="0"/>
-                <a:ea typeface="Malgun Gothic" pitchFamily="34" charset="-122"/>
-                <a:cs typeface="Malgun Gothic" pitchFamily="34" charset="-120"/>
-              </a:rPr>
-              <a:t>demo_report_20261015_200146_452196.json</a:t>
             </a:r>
             <a:endParaRPr lang="en-US" sz="1600" dirty="0"/>
           </a:p>
@@ -19239,7 +19173,7 @@
           </a:prstGeom>
           <a:extLst>
             <a:ext uri="{C572A759-6A51-4108-AA02-DFA0A04FC94B}">
-              <ma14:wrappingTextBoxFlag xmlns:ma14="http://schemas.microsoft.com/office/mac/drawingml/2011/main" val="0"/>
+              <ma14:wrappingTextBoxFlag xmlns:ma14="http://schemas.microsoft.com/office/mac/drawingml/2011/main" xmlns="" val="0"/>
             </a:ext>
           </a:extLst>
         </p:spPr>
@@ -19260,7 +19194,7 @@
           <a:p>
             <a:pPr algn="r"/>
             <a:fld id="{F7021451-1387-4CA6-816F-3879F97B5CBC}" type="slidenum">
-              <a:rPr b="0" lang="en-US"/>
+              <a:rPr lang="en-US" b="0"/>
               <a:t>8</a:t>
             </a:fld>
             <a:endParaRPr lang="en-US"/>
@@ -19295,9 +19229,11 @@
       <p:sp>
         <p:nvSpPr>
           <p:cNvPr id="2" name="Text 0"/>
-          <p:cNvSpPr/>
+          <p:cNvSpPr>
+            <a:spLocks noGrp="1"/>
+          </p:cNvSpPr>
           <p:nvPr>
-            <p:ph idx="100" type="title" hasCustomPrompt="1"/>
+            <p:ph type="title" idx="100" hasCustomPrompt="1"/>
           </p:nvPr>
         </p:nvSpPr>
         <p:spPr>
@@ -19315,7 +19251,7 @@
           <a:bodyPr wrap="square" lIns="0" tIns="0" rIns="0" bIns="0" rtlCol="0" anchor="ctr"/>
           <a:lstStyle/>
           <a:p>
-            <a:pPr algn="l" indent="0" marL="0">
+            <a:pPr marL="0" indent="0" algn="l">
               <a:buNone/>
             </a:pPr>
             <a:r>
@@ -19357,6 +19293,13 @@
             <a:prstDash val="solid"/>
           </a:ln>
         </p:spPr>
+        <p:txBody>
+          <a:bodyPr/>
+          <a:lstStyle/>
+          <a:p>
+            <a:endParaRPr lang="ko-KR" altLang="en-US"/>
+          </a:p>
+        </p:txBody>
       </p:sp>
       <p:sp>
         <p:nvSpPr>
@@ -19379,7 +19322,7 @@
           <a:bodyPr wrap="none" lIns="0" tIns="0" rIns="0" bIns="0" rtlCol="0" anchor="t"/>
           <a:lstStyle/>
           <a:p>
-            <a:pPr indent="0" marL="0">
+            <a:pPr marL="0" indent="0">
               <a:lnSpc>
                 <a:spcPct val="120000"/>
               </a:lnSpc>
@@ -19399,7 +19342,7 @@
             <a:endParaRPr lang="en-US" sz="1100" dirty="0"/>
           </a:p>
           <a:p>
-            <a:pPr indent="0" marL="0">
+            <a:pPr marL="0" indent="0">
               <a:lnSpc>
                 <a:spcPct val="120000"/>
               </a:lnSpc>
@@ -19416,7 +19359,21 @@
               </a:rPr>
               <a:t>  66  </a:t>
             </a:r>
-            <a:pPr indent="0" marL="0">
+            <a:r>
+              <a:rPr lang="en-US" sz="1100" dirty="0">
+                <a:solidFill>
+                  <a:srgbClr val="1F2933"/>
+                </a:solidFill>
+                <a:latin typeface="Consolas" pitchFamily="34" charset="0"/>
+                <a:ea typeface="Consolas" pitchFamily="34" charset="-122"/>
+                <a:cs typeface="Consolas" pitchFamily="34" charset="-120"/>
+              </a:rPr>
+              <a:t>  HAL_StatusTypeDef status = read_data(qspi, 0x05, 0, &amp;sr1, 1, 0);</a:t>
+            </a:r>
+            <a:endParaRPr lang="en-US" sz="1100" dirty="0"/>
+          </a:p>
+          <a:p>
+            <a:pPr marL="0" indent="0">
               <a:lnSpc>
                 <a:spcPct val="120000"/>
               </a:lnSpc>
@@ -19425,18 +19382,29 @@
             <a:r>
               <a:rPr lang="en-US" sz="1100" dirty="0">
                 <a:solidFill>
-                  <a:srgbClr val="1F2933"/>
+                  <a:srgbClr val="8A94A3"/>
                 </a:solidFill>
                 <a:latin typeface="Consolas" pitchFamily="34" charset="0"/>
                 <a:ea typeface="Consolas" pitchFamily="34" charset="-122"/>
                 <a:cs typeface="Consolas" pitchFamily="34" charset="-120"/>
               </a:rPr>
-              <a:t>  HAL_StatusTypeDef status = read_data(qspi, 0x05, 0, &amp;sr1, 1, 0);</a:t>
+              <a:t>  69  </a:t>
+            </a:r>
+            <a:r>
+              <a:rPr lang="en-US" sz="1100" b="1" dirty="0">
+                <a:solidFill>
+                  <a:srgbClr val="0F766E"/>
+                </a:solidFill>
+                <a:latin typeface="Consolas" pitchFamily="34" charset="0"/>
+                <a:ea typeface="Consolas" pitchFamily="34" charset="-122"/>
+                <a:cs typeface="Consolas" pitchFamily="34" charset="-120"/>
+              </a:rPr>
+              <a:t>  if ((sr1 &amp; 0x01U) == 0)</a:t>
             </a:r>
             <a:endParaRPr lang="en-US" sz="1100" dirty="0"/>
           </a:p>
           <a:p>
-            <a:pPr indent="0" marL="0">
+            <a:pPr marL="0" indent="0">
               <a:lnSpc>
                 <a:spcPct val="120000"/>
               </a:lnSpc>
@@ -19451,29 +19419,43 @@
                 <a:ea typeface="Consolas" pitchFamily="34" charset="-122"/>
                 <a:cs typeface="Consolas" pitchFamily="34" charset="-120"/>
               </a:rPr>
-              <a:t>  69  </a:t>
-            </a:r>
-            <a:pPr indent="0" marL="0">
+              <a:t>  70  </a:t>
+            </a:r>
+            <a:r>
+              <a:rPr lang="en-US" sz="1100" dirty="0">
+                <a:solidFill>
+                  <a:srgbClr val="1F2933"/>
+                </a:solidFill>
+                <a:latin typeface="Consolas" pitchFamily="34" charset="0"/>
+                <a:ea typeface="Consolas" pitchFamily="34" charset="-122"/>
+                <a:cs typeface="Consolas" pitchFamily="34" charset="-120"/>
+              </a:rPr>
+              <a:t>    return HAL_OK;</a:t>
+            </a:r>
+            <a:endParaRPr lang="en-US" sz="1100" dirty="0"/>
+          </a:p>
+          <a:p>
+            <a:pPr marL="0" indent="0">
               <a:lnSpc>
                 <a:spcPct val="120000"/>
               </a:lnSpc>
               <a:buNone/>
             </a:pPr>
             <a:r>
-              <a:rPr lang="en-US" sz="1100" b="1" dirty="0">
-                <a:solidFill>
-                  <a:srgbClr val="0F766E"/>
+              <a:rPr lang="en-US" sz="1100" dirty="0">
+                <a:solidFill>
+                  <a:srgbClr val="8A94A3"/>
                 </a:solidFill>
                 <a:latin typeface="Consolas" pitchFamily="34" charset="0"/>
                 <a:ea typeface="Consolas" pitchFamily="34" charset="-122"/>
                 <a:cs typeface="Consolas" pitchFamily="34" charset="-120"/>
               </a:rPr>
-              <a:t>  if ((sr1 &amp; 0x01U) == 0)</a:t>
+              <a:t>      ⋮</a:t>
             </a:r>
             <a:endParaRPr lang="en-US" sz="1100" dirty="0"/>
           </a:p>
           <a:p>
-            <a:pPr indent="0" marL="0">
+            <a:pPr marL="0" indent="0">
               <a:lnSpc>
                 <a:spcPct val="120000"/>
               </a:lnSpc>
@@ -19488,9 +19470,23 @@
                 <a:ea typeface="Consolas" pitchFamily="34" charset="-122"/>
                 <a:cs typeface="Consolas" pitchFamily="34" charset="-120"/>
               </a:rPr>
-              <a:t>  70  </a:t>
-            </a:r>
-            <a:pPr indent="0" marL="0">
+              <a:t>  79  </a:t>
+            </a:r>
+            <a:r>
+              <a:rPr lang="en-US" sz="1100" dirty="0">
+                <a:solidFill>
+                  <a:srgbClr val="1F2933"/>
+                </a:solidFill>
+                <a:latin typeface="Consolas" pitchFamily="34" charset="0"/>
+                <a:ea typeface="Consolas" pitchFamily="34" charset="-122"/>
+                <a:cs typeface="Consolas" pitchFamily="34" charset="-120"/>
+              </a:rPr>
+              <a:t>HAL_StatusTypeDef status = send_command(qspi, 0x06, 0, 0);</a:t>
+            </a:r>
+            <a:endParaRPr lang="en-US" sz="1100" dirty="0"/>
+          </a:p>
+          <a:p>
+            <a:pPr marL="0" indent="0">
               <a:lnSpc>
                 <a:spcPct val="120000"/>
               </a:lnSpc>
@@ -19499,18 +19495,29 @@
             <a:r>
               <a:rPr lang="en-US" sz="1100" dirty="0">
                 <a:solidFill>
-                  <a:srgbClr val="1F2933"/>
+                  <a:srgbClr val="8A94A3"/>
                 </a:solidFill>
                 <a:latin typeface="Consolas" pitchFamily="34" charset="0"/>
                 <a:ea typeface="Consolas" pitchFamily="34" charset="-122"/>
                 <a:cs typeface="Consolas" pitchFamily="34" charset="-120"/>
               </a:rPr>
-              <a:t>    return HAL_OK;</a:t>
+              <a:t>  83  </a:t>
+            </a:r>
+            <a:r>
+              <a:rPr lang="en-US" sz="1100" dirty="0">
+                <a:solidFill>
+                  <a:srgbClr val="1F2933"/>
+                </a:solidFill>
+                <a:latin typeface="Consolas" pitchFamily="34" charset="0"/>
+                <a:ea typeface="Consolas" pitchFamily="34" charset="-122"/>
+                <a:cs typeface="Consolas" pitchFamily="34" charset="-120"/>
+              </a:rPr>
+              <a:t>status = read_data(qspi, 0x05, 0, &amp;sr1, 1, 0);</a:t>
             </a:r>
             <a:endParaRPr lang="en-US" sz="1100" dirty="0"/>
           </a:p>
           <a:p>
-            <a:pPr indent="0" marL="0">
+            <a:pPr marL="0" indent="0">
               <a:lnSpc>
                 <a:spcPct val="120000"/>
               </a:lnSpc>
@@ -19525,12 +19532,23 @@
                 <a:ea typeface="Consolas" pitchFamily="34" charset="-122"/>
                 <a:cs typeface="Consolas" pitchFamily="34" charset="-120"/>
               </a:rPr>
-              <a:t>      ⋮</a:t>
+              <a:t>  86  </a:t>
+            </a:r>
+            <a:r>
+              <a:rPr lang="en-US" sz="1100" b="1" dirty="0">
+                <a:solidFill>
+                  <a:srgbClr val="0F766E"/>
+                </a:solidFill>
+                <a:latin typeface="Consolas" pitchFamily="34" charset="0"/>
+                <a:ea typeface="Consolas" pitchFamily="34" charset="-122"/>
+                <a:cs typeface="Consolas" pitchFamily="34" charset="-120"/>
+              </a:rPr>
+              <a:t>return ((sr1 &amp; 0x03U) == 0x02U) ? HAL_OK : HAL_ERROR;</a:t>
             </a:r>
             <a:endParaRPr lang="en-US" sz="1100" dirty="0"/>
           </a:p>
           <a:p>
-            <a:pPr indent="0" marL="0">
+            <a:pPr marL="0" indent="0">
               <a:lnSpc>
                 <a:spcPct val="120000"/>
               </a:lnSpc>
@@ -19545,9 +19563,12 @@
                 <a:ea typeface="Consolas" pitchFamily="34" charset="-122"/>
                 <a:cs typeface="Consolas" pitchFamily="34" charset="-120"/>
               </a:rPr>
-              <a:t>  79  </a:t>
-            </a:r>
-            <a:pPr indent="0" marL="0">
+              <a:t>      ⋮</a:t>
+            </a:r>
+            <a:endParaRPr lang="en-US" sz="1100" dirty="0"/>
+          </a:p>
+          <a:p>
+            <a:pPr marL="0" indent="0">
               <a:lnSpc>
                 <a:spcPct val="120000"/>
               </a:lnSpc>
@@ -19556,18 +19577,29 @@
             <a:r>
               <a:rPr lang="en-US" sz="1100" dirty="0">
                 <a:solidFill>
-                  <a:srgbClr val="1F2933"/>
+                  <a:srgbClr val="8A94A3"/>
                 </a:solidFill>
                 <a:latin typeface="Consolas" pitchFamily="34" charset="0"/>
                 <a:ea typeface="Consolas" pitchFamily="34" charset="-122"/>
                 <a:cs typeface="Consolas" pitchFamily="34" charset="-120"/>
               </a:rPr>
-              <a:t>HAL_StatusTypeDef status = send_command(qspi, 0x06, 0, 0);</a:t>
+              <a:t> 102  </a:t>
+            </a:r>
+            <a:r>
+              <a:rPr lang="en-US" sz="1100" dirty="0">
+                <a:solidFill>
+                  <a:srgbClr val="1F2933"/>
+                </a:solidFill>
+                <a:latin typeface="Consolas" pitchFamily="34" charset="0"/>
+                <a:ea typeface="Consolas" pitchFamily="34" charset="-122"/>
+                <a:cs typeface="Consolas" pitchFamily="34" charset="-120"/>
+              </a:rPr>
+              <a:t>if (count == 0 || count &gt; PAGE_BYTES || address &gt;= 0x1000000U ||</a:t>
             </a:r>
             <a:endParaRPr lang="en-US" sz="1100" dirty="0"/>
           </a:p>
           <a:p>
-            <a:pPr indent="0" marL="0">
+            <a:pPr marL="0" indent="0">
               <a:lnSpc>
                 <a:spcPct val="120000"/>
               </a:lnSpc>
@@ -19582,9 +19614,23 @@
                 <a:ea typeface="Consolas" pitchFamily="34" charset="-122"/>
                 <a:cs typeface="Consolas" pitchFamily="34" charset="-120"/>
               </a:rPr>
-              <a:t>  83  </a:t>
-            </a:r>
-            <a:pPr indent="0" marL="0">
+              <a:t> 103  </a:t>
+            </a:r>
+            <a:r>
+              <a:rPr lang="en-US" sz="1100" dirty="0">
+                <a:solidFill>
+                  <a:srgbClr val="1F2933"/>
+                </a:solidFill>
+                <a:latin typeface="Consolas" pitchFamily="34" charset="0"/>
+                <a:ea typeface="Consolas" pitchFamily="34" charset="-122"/>
+                <a:cs typeface="Consolas" pitchFamily="34" charset="-120"/>
+              </a:rPr>
+              <a:t>    count &gt; 0x1000000U - address ||</a:t>
+            </a:r>
+            <a:endParaRPr lang="en-US" sz="1100" dirty="0"/>
+          </a:p>
+          <a:p>
+            <a:pPr marL="0" indent="0">
               <a:lnSpc>
                 <a:spcPct val="120000"/>
               </a:lnSpc>
@@ -19593,18 +19639,29 @@
             <a:r>
               <a:rPr lang="en-US" sz="1100" dirty="0">
                 <a:solidFill>
-                  <a:srgbClr val="1F2933"/>
+                  <a:srgbClr val="8A94A3"/>
                 </a:solidFill>
                 <a:latin typeface="Consolas" pitchFamily="34" charset="0"/>
                 <a:ea typeface="Consolas" pitchFamily="34" charset="-122"/>
                 <a:cs typeface="Consolas" pitchFamily="34" charset="-120"/>
               </a:rPr>
-              <a:t>status = read_data(qspi, 0x05, 0, &amp;sr1, 1, 0);</a:t>
+              <a:t> 104  </a:t>
+            </a:r>
+            <a:r>
+              <a:rPr lang="en-US" sz="1100" b="1" dirty="0">
+                <a:solidFill>
+                  <a:srgbClr val="0F766E"/>
+                </a:solidFill>
+                <a:latin typeface="Consolas" pitchFamily="34" charset="0"/>
+                <a:ea typeface="Consolas" pitchFamily="34" charset="-122"/>
+                <a:cs typeface="Consolas" pitchFamily="34" charset="-120"/>
+              </a:rPr>
+              <a:t>    (address &amp; (PAGE_BYTES - 1U)) + count &gt; PAGE_BYTES)</a:t>
             </a:r>
             <a:endParaRPr lang="en-US" sz="1100" dirty="0"/>
           </a:p>
           <a:p>
-            <a:pPr indent="0" marL="0">
+            <a:pPr marL="0" indent="0">
               <a:lnSpc>
                 <a:spcPct val="120000"/>
               </a:lnSpc>
@@ -19619,29 +19676,43 @@
                 <a:ea typeface="Consolas" pitchFamily="34" charset="-122"/>
                 <a:cs typeface="Consolas" pitchFamily="34" charset="-120"/>
               </a:rPr>
-              <a:t>  86  </a:t>
-            </a:r>
-            <a:pPr indent="0" marL="0">
+              <a:t> 105  </a:t>
+            </a:r>
+            <a:r>
+              <a:rPr lang="en-US" sz="1100" dirty="0">
+                <a:solidFill>
+                  <a:srgbClr val="1F2933"/>
+                </a:solidFill>
+                <a:latin typeface="Consolas" pitchFamily="34" charset="0"/>
+                <a:ea typeface="Consolas" pitchFamily="34" charset="-122"/>
+                <a:cs typeface="Consolas" pitchFamily="34" charset="-120"/>
+              </a:rPr>
+              <a:t>  return HAL_ERROR;</a:t>
+            </a:r>
+            <a:endParaRPr lang="en-US" sz="1100" dirty="0"/>
+          </a:p>
+          <a:p>
+            <a:pPr marL="0" indent="0">
               <a:lnSpc>
                 <a:spcPct val="120000"/>
               </a:lnSpc>
               <a:buNone/>
             </a:pPr>
             <a:r>
-              <a:rPr lang="en-US" sz="1100" b="1" dirty="0">
-                <a:solidFill>
-                  <a:srgbClr val="0F766E"/>
+              <a:rPr lang="en-US" sz="1100" dirty="0">
+                <a:solidFill>
+                  <a:srgbClr val="8A94A3"/>
                 </a:solidFill>
                 <a:latin typeface="Consolas" pitchFamily="34" charset="0"/>
                 <a:ea typeface="Consolas" pitchFamily="34" charset="-122"/>
                 <a:cs typeface="Consolas" pitchFamily="34" charset="-120"/>
               </a:rPr>
-              <a:t>return ((sr1 &amp; 0x03U) == 0x02U) ? HAL_OK : HAL_ERROR;</a:t>
+              <a:t>      ⋮</a:t>
             </a:r>
             <a:endParaRPr lang="en-US" sz="1100" dirty="0"/>
           </a:p>
           <a:p>
-            <a:pPr indent="0" marL="0">
+            <a:pPr marL="0" indent="0">
               <a:lnSpc>
                 <a:spcPct val="120000"/>
               </a:lnSpc>
@@ -19656,12 +19727,23 @@
                 <a:ea typeface="Consolas" pitchFamily="34" charset="-122"/>
                 <a:cs typeface="Consolas" pitchFamily="34" charset="-120"/>
               </a:rPr>
-              <a:t>      ⋮</a:t>
+              <a:t> 118  </a:t>
+            </a:r>
+            <a:r>
+              <a:rPr lang="en-US" sz="1100" b="1" dirty="0">
+                <a:solidFill>
+                  <a:srgbClr val="0F766E"/>
+                </a:solidFill>
+                <a:latin typeface="Consolas" pitchFamily="34" charset="0"/>
+                <a:ea typeface="Consolas" pitchFamily="34" charset="-122"/>
+                <a:cs typeface="Consolas" pitchFamily="34" charset="-120"/>
+              </a:rPr>
+              <a:t>return wait_ready(qspi, 100);</a:t>
             </a:r>
             <a:endParaRPr lang="en-US" sz="1100" dirty="0"/>
           </a:p>
           <a:p>
-            <a:pPr indent="0" marL="0">
+            <a:pPr marL="0" indent="0">
               <a:lnSpc>
                 <a:spcPct val="120000"/>
               </a:lnSpc>
@@ -19676,9 +19758,12 @@
                 <a:ea typeface="Consolas" pitchFamily="34" charset="-122"/>
                 <a:cs typeface="Consolas" pitchFamily="34" charset="-120"/>
               </a:rPr>
-              <a:t> 102  </a:t>
-            </a:r>
-            <a:pPr indent="0" marL="0">
+              <a:t>      ⋮</a:t>
+            </a:r>
+            <a:endParaRPr lang="en-US" sz="1100" dirty="0"/>
+          </a:p>
+          <a:p>
+            <a:pPr marL="0" indent="0">
               <a:lnSpc>
                 <a:spcPct val="120000"/>
               </a:lnSpc>
@@ -19687,18 +19772,29 @@
             <a:r>
               <a:rPr lang="en-US" sz="1100" dirty="0">
                 <a:solidFill>
-                  <a:srgbClr val="1F2933"/>
+                  <a:srgbClr val="8A94A3"/>
                 </a:solidFill>
                 <a:latin typeface="Consolas" pitchFamily="34" charset="0"/>
                 <a:ea typeface="Consolas" pitchFamily="34" charset="-122"/>
                 <a:cs typeface="Consolas" pitchFamily="34" charset="-120"/>
               </a:rPr>
-              <a:t>if (count == 0 || count &gt; PAGE_BYTES || address &gt;= 0x1000000U ||</a:t>
+              <a:t> 231  </a:t>
+            </a:r>
+            <a:r>
+              <a:rPr lang="en-US" sz="1100" b="1" dirty="0">
+                <a:solidFill>
+                  <a:srgbClr val="0F766E"/>
+                </a:solidFill>
+                <a:latin typeface="Consolas" pitchFamily="34" charset="0"/>
+                <a:ea typeface="Consolas" pitchFamily="34" charset="-122"/>
+                <a:cs typeface="Consolas" pitchFamily="34" charset="-120"/>
+              </a:rPr>
+              <a:t>HAL_StatusTypeDef status = wait_ready(qspi, 5000);</a:t>
             </a:r>
             <a:endParaRPr lang="en-US" sz="1100" dirty="0"/>
           </a:p>
           <a:p>
-            <a:pPr indent="0" marL="0">
+            <a:pPr marL="0" indent="0">
               <a:lnSpc>
                 <a:spcPct val="120000"/>
               </a:lnSpc>
@@ -19713,9 +19809,23 @@
                 <a:ea typeface="Consolas" pitchFamily="34" charset="-122"/>
                 <a:cs typeface="Consolas" pitchFamily="34" charset="-120"/>
               </a:rPr>
-              <a:t> 103  </a:t>
-            </a:r>
-            <a:pPr indent="0" marL="0">
+              <a:t> 233  </a:t>
+            </a:r>
+            <a:r>
+              <a:rPr lang="en-US" sz="1100" dirty="0">
+                <a:solidFill>
+                  <a:srgbClr val="1F2933"/>
+                </a:solidFill>
+                <a:latin typeface="Consolas" pitchFamily="34" charset="0"/>
+                <a:ea typeface="Consolas" pitchFamily="34" charset="-122"/>
+                <a:cs typeface="Consolas" pitchFamily="34" charset="-120"/>
+              </a:rPr>
+              <a:t>  status = write_enable(qspi);</a:t>
+            </a:r>
+            <a:endParaRPr lang="en-US" sz="1100" dirty="0"/>
+          </a:p>
+          <a:p>
+            <a:pPr marL="0" indent="0">
               <a:lnSpc>
                 <a:spcPct val="120000"/>
               </a:lnSpc>
@@ -19724,18 +19834,29 @@
             <a:r>
               <a:rPr lang="en-US" sz="1100" dirty="0">
                 <a:solidFill>
-                  <a:srgbClr val="1F2933"/>
+                  <a:srgbClr val="8A94A3"/>
                 </a:solidFill>
                 <a:latin typeface="Consolas" pitchFamily="34" charset="0"/>
                 <a:ea typeface="Consolas" pitchFamily="34" charset="-122"/>
                 <a:cs typeface="Consolas" pitchFamily="34" charset="-120"/>
               </a:rPr>
-              <a:t>    count &gt; 0x1000000U - address ||</a:t>
+              <a:t> 235  </a:t>
+            </a:r>
+            <a:r>
+              <a:rPr lang="en-US" sz="1100" dirty="0">
+                <a:solidFill>
+                  <a:srgbClr val="1F2933"/>
+                </a:solidFill>
+                <a:latin typeface="Consolas" pitchFamily="34" charset="0"/>
+                <a:ea typeface="Consolas" pitchFamily="34" charset="-122"/>
+                <a:cs typeface="Consolas" pitchFamily="34" charset="-120"/>
+              </a:rPr>
+              <a:t>  status = send_command(qspi, 0xD8, address, 1);</a:t>
             </a:r>
             <a:endParaRPr lang="en-US" sz="1100" dirty="0"/>
           </a:p>
           <a:p>
-            <a:pPr indent="0" marL="0">
+            <a:pPr marL="0" indent="0">
               <a:lnSpc>
                 <a:spcPct val="120000"/>
               </a:lnSpc>
@@ -19750,276 +19871,8 @@
                 <a:ea typeface="Consolas" pitchFamily="34" charset="-122"/>
                 <a:cs typeface="Consolas" pitchFamily="34" charset="-120"/>
               </a:rPr>
-              <a:t> 104  </a:t>
-            </a:r>
-            <a:pPr indent="0" marL="0">
-              <a:lnSpc>
-                <a:spcPct val="120000"/>
-              </a:lnSpc>
-              <a:buNone/>
-            </a:pPr>
-            <a:r>
-              <a:rPr lang="en-US" sz="1100" b="1" dirty="0">
-                <a:solidFill>
-                  <a:srgbClr val="0F766E"/>
-                </a:solidFill>
-                <a:latin typeface="Consolas" pitchFamily="34" charset="0"/>
-                <a:ea typeface="Consolas" pitchFamily="34" charset="-122"/>
-                <a:cs typeface="Consolas" pitchFamily="34" charset="-120"/>
-              </a:rPr>
-              <a:t>    (address &amp; (PAGE_BYTES - 1U)) + count &gt; PAGE_BYTES)</a:t>
-            </a:r>
-            <a:endParaRPr lang="en-US" sz="1100" dirty="0"/>
-          </a:p>
-          <a:p>
-            <a:pPr indent="0" marL="0">
-              <a:lnSpc>
-                <a:spcPct val="120000"/>
-              </a:lnSpc>
-              <a:buNone/>
-            </a:pPr>
-            <a:r>
-              <a:rPr lang="en-US" sz="1100" dirty="0">
-                <a:solidFill>
-                  <a:srgbClr val="8A94A3"/>
-                </a:solidFill>
-                <a:latin typeface="Consolas" pitchFamily="34" charset="0"/>
-                <a:ea typeface="Consolas" pitchFamily="34" charset="-122"/>
-                <a:cs typeface="Consolas" pitchFamily="34" charset="-120"/>
-              </a:rPr>
-              <a:t> 105  </a:t>
-            </a:r>
-            <a:pPr indent="0" marL="0">
-              <a:lnSpc>
-                <a:spcPct val="120000"/>
-              </a:lnSpc>
-              <a:buNone/>
-            </a:pPr>
-            <a:r>
-              <a:rPr lang="en-US" sz="1100" dirty="0">
-                <a:solidFill>
-                  <a:srgbClr val="1F2933"/>
-                </a:solidFill>
-                <a:latin typeface="Consolas" pitchFamily="34" charset="0"/>
-                <a:ea typeface="Consolas" pitchFamily="34" charset="-122"/>
-                <a:cs typeface="Consolas" pitchFamily="34" charset="-120"/>
-              </a:rPr>
-              <a:t>  return HAL_ERROR;</a:t>
-            </a:r>
-            <a:endParaRPr lang="en-US" sz="1100" dirty="0"/>
-          </a:p>
-          <a:p>
-            <a:pPr indent="0" marL="0">
-              <a:lnSpc>
-                <a:spcPct val="120000"/>
-              </a:lnSpc>
-              <a:buNone/>
-            </a:pPr>
-            <a:r>
-              <a:rPr lang="en-US" sz="1100" dirty="0">
-                <a:solidFill>
-                  <a:srgbClr val="8A94A3"/>
-                </a:solidFill>
-                <a:latin typeface="Consolas" pitchFamily="34" charset="0"/>
-                <a:ea typeface="Consolas" pitchFamily="34" charset="-122"/>
-                <a:cs typeface="Consolas" pitchFamily="34" charset="-120"/>
-              </a:rPr>
-              <a:t>      ⋮</a:t>
-            </a:r>
-            <a:endParaRPr lang="en-US" sz="1100" dirty="0"/>
-          </a:p>
-          <a:p>
-            <a:pPr indent="0" marL="0">
-              <a:lnSpc>
-                <a:spcPct val="120000"/>
-              </a:lnSpc>
-              <a:buNone/>
-            </a:pPr>
-            <a:r>
-              <a:rPr lang="en-US" sz="1100" dirty="0">
-                <a:solidFill>
-                  <a:srgbClr val="8A94A3"/>
-                </a:solidFill>
-                <a:latin typeface="Consolas" pitchFamily="34" charset="0"/>
-                <a:ea typeface="Consolas" pitchFamily="34" charset="-122"/>
-                <a:cs typeface="Consolas" pitchFamily="34" charset="-120"/>
-              </a:rPr>
-              <a:t> 118  </a:t>
-            </a:r>
-            <a:pPr indent="0" marL="0">
-              <a:lnSpc>
-                <a:spcPct val="120000"/>
-              </a:lnSpc>
-              <a:buNone/>
-            </a:pPr>
-            <a:r>
-              <a:rPr lang="en-US" sz="1100" b="1" dirty="0">
-                <a:solidFill>
-                  <a:srgbClr val="0F766E"/>
-                </a:solidFill>
-                <a:latin typeface="Consolas" pitchFamily="34" charset="0"/>
-                <a:ea typeface="Consolas" pitchFamily="34" charset="-122"/>
-                <a:cs typeface="Consolas" pitchFamily="34" charset="-120"/>
-              </a:rPr>
-              <a:t>return wait_ready(qspi, 100);</a:t>
-            </a:r>
-            <a:endParaRPr lang="en-US" sz="1100" dirty="0"/>
-          </a:p>
-          <a:p>
-            <a:pPr indent="0" marL="0">
-              <a:lnSpc>
-                <a:spcPct val="120000"/>
-              </a:lnSpc>
-              <a:buNone/>
-            </a:pPr>
-            <a:r>
-              <a:rPr lang="en-US" sz="1100" dirty="0">
-                <a:solidFill>
-                  <a:srgbClr val="8A94A3"/>
-                </a:solidFill>
-                <a:latin typeface="Consolas" pitchFamily="34" charset="0"/>
-                <a:ea typeface="Consolas" pitchFamily="34" charset="-122"/>
-                <a:cs typeface="Consolas" pitchFamily="34" charset="-120"/>
-              </a:rPr>
-              <a:t>      ⋮</a:t>
-            </a:r>
-            <a:endParaRPr lang="en-US" sz="1100" dirty="0"/>
-          </a:p>
-          <a:p>
-            <a:pPr indent="0" marL="0">
-              <a:lnSpc>
-                <a:spcPct val="120000"/>
-              </a:lnSpc>
-              <a:buNone/>
-            </a:pPr>
-            <a:r>
-              <a:rPr lang="en-US" sz="1100" dirty="0">
-                <a:solidFill>
-                  <a:srgbClr val="8A94A3"/>
-                </a:solidFill>
-                <a:latin typeface="Consolas" pitchFamily="34" charset="0"/>
-                <a:ea typeface="Consolas" pitchFamily="34" charset="-122"/>
-                <a:cs typeface="Consolas" pitchFamily="34" charset="-120"/>
-              </a:rPr>
-              <a:t> 231  </a:t>
-            </a:r>
-            <a:pPr indent="0" marL="0">
-              <a:lnSpc>
-                <a:spcPct val="120000"/>
-              </a:lnSpc>
-              <a:buNone/>
-            </a:pPr>
-            <a:r>
-              <a:rPr lang="en-US" sz="1100" b="1" dirty="0">
-                <a:solidFill>
-                  <a:srgbClr val="0F766E"/>
-                </a:solidFill>
-                <a:latin typeface="Consolas" pitchFamily="34" charset="0"/>
-                <a:ea typeface="Consolas" pitchFamily="34" charset="-122"/>
-                <a:cs typeface="Consolas" pitchFamily="34" charset="-120"/>
-              </a:rPr>
-              <a:t>HAL_StatusTypeDef status = wait_ready(qspi, 5000);</a:t>
-            </a:r>
-            <a:endParaRPr lang="en-US" sz="1100" dirty="0"/>
-          </a:p>
-          <a:p>
-            <a:pPr indent="0" marL="0">
-              <a:lnSpc>
-                <a:spcPct val="120000"/>
-              </a:lnSpc>
-              <a:buNone/>
-            </a:pPr>
-            <a:r>
-              <a:rPr lang="en-US" sz="1100" dirty="0">
-                <a:solidFill>
-                  <a:srgbClr val="8A94A3"/>
-                </a:solidFill>
-                <a:latin typeface="Consolas" pitchFamily="34" charset="0"/>
-                <a:ea typeface="Consolas" pitchFamily="34" charset="-122"/>
-                <a:cs typeface="Consolas" pitchFamily="34" charset="-120"/>
-              </a:rPr>
-              <a:t> 233  </a:t>
-            </a:r>
-            <a:pPr indent="0" marL="0">
-              <a:lnSpc>
-                <a:spcPct val="120000"/>
-              </a:lnSpc>
-              <a:buNone/>
-            </a:pPr>
-            <a:r>
-              <a:rPr lang="en-US" sz="1100" dirty="0">
-                <a:solidFill>
-                  <a:srgbClr val="1F2933"/>
-                </a:solidFill>
-                <a:latin typeface="Consolas" pitchFamily="34" charset="0"/>
-                <a:ea typeface="Consolas" pitchFamily="34" charset="-122"/>
-                <a:cs typeface="Consolas" pitchFamily="34" charset="-120"/>
-              </a:rPr>
-              <a:t>  status = write_enable(qspi);</a:t>
-            </a:r>
-            <a:endParaRPr lang="en-US" sz="1100" dirty="0"/>
-          </a:p>
-          <a:p>
-            <a:pPr indent="0" marL="0">
-              <a:lnSpc>
-                <a:spcPct val="120000"/>
-              </a:lnSpc>
-              <a:buNone/>
-            </a:pPr>
-            <a:r>
-              <a:rPr lang="en-US" sz="1100" dirty="0">
-                <a:solidFill>
-                  <a:srgbClr val="8A94A3"/>
-                </a:solidFill>
-                <a:latin typeface="Consolas" pitchFamily="34" charset="0"/>
-                <a:ea typeface="Consolas" pitchFamily="34" charset="-122"/>
-                <a:cs typeface="Consolas" pitchFamily="34" charset="-120"/>
-              </a:rPr>
-              <a:t> 235  </a:t>
-            </a:r>
-            <a:pPr indent="0" marL="0">
-              <a:lnSpc>
-                <a:spcPct val="120000"/>
-              </a:lnSpc>
-              <a:buNone/>
-            </a:pPr>
-            <a:r>
-              <a:rPr lang="en-US" sz="1100" dirty="0">
-                <a:solidFill>
-                  <a:srgbClr val="1F2933"/>
-                </a:solidFill>
-                <a:latin typeface="Consolas" pitchFamily="34" charset="0"/>
-                <a:ea typeface="Consolas" pitchFamily="34" charset="-122"/>
-                <a:cs typeface="Consolas" pitchFamily="34" charset="-120"/>
-              </a:rPr>
-              <a:t>  status = send_command(qspi, 0xD8, address, 1);</a:t>
-            </a:r>
-            <a:endParaRPr lang="en-US" sz="1100" dirty="0"/>
-          </a:p>
-          <a:p>
-            <a:pPr indent="0" marL="0">
-              <a:lnSpc>
-                <a:spcPct val="120000"/>
-              </a:lnSpc>
-              <a:buNone/>
-            </a:pPr>
-            <a:r>
-              <a:rPr lang="en-US" sz="1100" dirty="0">
-                <a:solidFill>
-                  <a:srgbClr val="8A94A3"/>
-                </a:solidFill>
-                <a:latin typeface="Consolas" pitchFamily="34" charset="0"/>
-                <a:ea typeface="Consolas" pitchFamily="34" charset="-122"/>
-                <a:cs typeface="Consolas" pitchFamily="34" charset="-120"/>
-              </a:rPr>
               <a:t> 237  </a:t>
             </a:r>
-            <a:pPr indent="0" marL="0">
-              <a:lnSpc>
-                <a:spcPct val="120000"/>
-              </a:lnSpc>
-              <a:buNone/>
-            </a:pPr>
             <a:r>
               <a:rPr lang="en-US" sz="1100" b="1" dirty="0">
                 <a:solidFill>
@@ -20056,7 +19909,7 @@
           <a:bodyPr wrap="square" lIns="0" tIns="0" rIns="0" bIns="0" rtlCol="0" anchor="t"/>
           <a:lstStyle/>
           <a:p>
-            <a:pPr indent="0" marL="0">
+            <a:pPr marL="0" indent="0">
               <a:lnSpc>
                 <a:spcPct val="125000"/>
               </a:lnSpc>
@@ -20073,13 +19926,38 @@
               </a:rPr>
               <a:t>삭제  </a:t>
             </a:r>
-            <a:pPr indent="0" marL="0">
+            <a:r>
+              <a:rPr lang="en-US" sz="1300" dirty="0">
+                <a:solidFill>
+                  <a:srgbClr val="1F2933"/>
+                </a:solidFill>
+                <a:latin typeface="Consolas" pitchFamily="34" charset="0"/>
+                <a:ea typeface="Consolas" pitchFamily="34" charset="-122"/>
+                <a:cs typeface="Consolas" pitchFamily="34" charset="-120"/>
+              </a:rPr>
+              <a:t>05h → 06h·WEL → D8h → 05h</a:t>
+            </a:r>
+            <a:endParaRPr lang="en-US" sz="1300" dirty="0"/>
+          </a:p>
+          <a:p>
+            <a:pPr marL="0" indent="0">
               <a:lnSpc>
                 <a:spcPct val="125000"/>
               </a:lnSpc>
               <a:buNone/>
             </a:pPr>
             <a:r>
+              <a:rPr lang="en-US" sz="1300" b="1" dirty="0">
+                <a:solidFill>
+                  <a:srgbClr val="1F2933"/>
+                </a:solidFill>
+                <a:latin typeface="Malgun Gothic" pitchFamily="34" charset="0"/>
+                <a:ea typeface="Malgun Gothic" pitchFamily="34" charset="-122"/>
+                <a:cs typeface="Malgun Gothic" pitchFamily="34" charset="-120"/>
+              </a:rPr>
+              <a:t>쓰기  </a:t>
+            </a:r>
+            <a:r>
               <a:rPr lang="en-US" sz="1300" dirty="0">
                 <a:solidFill>
                   <a:srgbClr val="1F2933"/>
@@ -20088,12 +19966,12 @@
                 <a:ea typeface="Consolas" pitchFamily="34" charset="-122"/>
                 <a:cs typeface="Consolas" pitchFamily="34" charset="-120"/>
               </a:rPr>
-              <a:t>05h → 06h·WEL → D8h → 05h</a:t>
+              <a:t>06h·WEL → 02h → 05h</a:t>
             </a:r>
             <a:endParaRPr lang="en-US" sz="1300" dirty="0"/>
           </a:p>
           <a:p>
-            <a:pPr indent="0" marL="0">
+            <a:pPr marL="0" indent="0">
               <a:lnSpc>
                 <a:spcPct val="125000"/>
               </a:lnSpc>
@@ -20108,51 +19986,8 @@
                 <a:ea typeface="Malgun Gothic" pitchFamily="34" charset="-122"/>
                 <a:cs typeface="Malgun Gothic" pitchFamily="34" charset="-120"/>
               </a:rPr>
-              <a:t>쓰기  </a:t>
-            </a:r>
-            <a:pPr indent="0" marL="0">
-              <a:lnSpc>
-                <a:spcPct val="125000"/>
-              </a:lnSpc>
-              <a:buNone/>
-            </a:pPr>
-            <a:r>
-              <a:rPr lang="en-US" sz="1300" dirty="0">
-                <a:solidFill>
-                  <a:srgbClr val="1F2933"/>
-                </a:solidFill>
-                <a:latin typeface="Consolas" pitchFamily="34" charset="0"/>
-                <a:ea typeface="Consolas" pitchFamily="34" charset="-122"/>
-                <a:cs typeface="Consolas" pitchFamily="34" charset="-120"/>
-              </a:rPr>
-              <a:t>06h·WEL → 02h → 05h</a:t>
-            </a:r>
-            <a:endParaRPr lang="en-US" sz="1300" dirty="0"/>
-          </a:p>
-          <a:p>
-            <a:pPr indent="0" marL="0">
-              <a:lnSpc>
-                <a:spcPct val="125000"/>
-              </a:lnSpc>
-              <a:buNone/>
-            </a:pPr>
-            <a:r>
-              <a:rPr lang="en-US" sz="1300" b="1" dirty="0">
-                <a:solidFill>
-                  <a:srgbClr val="1F2933"/>
-                </a:solidFill>
-                <a:latin typeface="Malgun Gothic" pitchFamily="34" charset="0"/>
-                <a:ea typeface="Malgun Gothic" pitchFamily="34" charset="-122"/>
-                <a:cs typeface="Malgun Gothic" pitchFamily="34" charset="-120"/>
-              </a:rPr>
               <a:t>읽기  </a:t>
             </a:r>
-            <a:pPr indent="0" marL="0">
-              <a:lnSpc>
-                <a:spcPct val="125000"/>
-              </a:lnSpc>
-              <a:buNone/>
-            </a:pPr>
             <a:r>
               <a:rPr lang="en-US" sz="1300" dirty="0">
                 <a:solidFill>
@@ -20189,7 +20024,7 @@
           <a:bodyPr wrap="square" lIns="0" tIns="0" rIns="0" bIns="0" rtlCol="0" anchor="t"/>
           <a:lstStyle/>
           <a:p>
-            <a:pPr indent="0" marL="0">
+            <a:pPr marL="0" indent="0">
               <a:lnSpc>
                 <a:spcPct val="110000"/>
               </a:lnSpc>
@@ -20209,7 +20044,7 @@
             <a:endParaRPr lang="en-US" sz="1600" dirty="0"/>
           </a:p>
           <a:p>
-            <a:pPr indent="0" marL="0">
+            <a:pPr marL="0" indent="0">
               <a:lnSpc>
                 <a:spcPct val="110000"/>
               </a:lnSpc>
@@ -20232,7 +20067,7 @@
             <a:endParaRPr lang="en-US" sz="1600" dirty="0"/>
           </a:p>
           <a:p>
-            <a:pPr indent="0" marL="0">
+            <a:pPr marL="0" indent="0">
               <a:lnSpc>
                 <a:spcPct val="110000"/>
               </a:lnSpc>
@@ -20252,7 +20087,7 @@
             <a:endParaRPr lang="en-US" sz="1600" dirty="0"/>
           </a:p>
           <a:p>
-            <a:pPr indent="0" marL="0">
+            <a:pPr marL="0" indent="0">
               <a:lnSpc>
                 <a:spcPct val="110000"/>
               </a:lnSpc>
@@ -20275,7 +20110,7 @@
             <a:endParaRPr lang="en-US" sz="1600" dirty="0"/>
           </a:p>
           <a:p>
-            <a:pPr indent="0" marL="0">
+            <a:pPr marL="0" indent="0">
               <a:lnSpc>
                 <a:spcPct val="110000"/>
               </a:lnSpc>
@@ -20295,7 +20130,7 @@
             <a:endParaRPr lang="en-US" sz="1600" dirty="0"/>
           </a:p>
           <a:p>
-            <a:pPr indent="0" marL="0">
+            <a:pPr marL="0" indent="0">
               <a:lnSpc>
                 <a:spcPct val="110000"/>
               </a:lnSpc>
@@ -20318,7 +20153,7 @@
             <a:endParaRPr lang="en-US" sz="1600" dirty="0"/>
           </a:p>
           <a:p>
-            <a:pPr indent="0" marL="0">
+            <a:pPr marL="0" indent="0">
               <a:lnSpc>
                 <a:spcPct val="110000"/>
               </a:lnSpc>
@@ -20338,7 +20173,7 @@
             <a:endParaRPr lang="en-US" sz="1600" dirty="0"/>
           </a:p>
           <a:p>
-            <a:pPr indent="0" marL="0">
+            <a:pPr marL="0" indent="0">
               <a:lnSpc>
                 <a:spcPct val="110000"/>
               </a:lnSpc>
@@ -20383,7 +20218,7 @@
           <a:bodyPr wrap="square" lIns="0" tIns="0" rIns="0" bIns="0" rtlCol="0" anchor="t"/>
           <a:lstStyle/>
           <a:p>
-            <a:pPr indent="0" marL="0">
+            <a:pPr marL="0" indent="0">
               <a:buNone/>
             </a:pPr>
             <a:r>
@@ -20421,7 +20256,7 @@
           </a:prstGeom>
           <a:extLst>
             <a:ext uri="{C572A759-6A51-4108-AA02-DFA0A04FC94B}">
-              <ma14:wrappingTextBoxFlag xmlns:ma14="http://schemas.microsoft.com/office/mac/drawingml/2011/main" val="0"/>
+              <ma14:wrappingTextBoxFlag xmlns:ma14="http://schemas.microsoft.com/office/mac/drawingml/2011/main" xmlns="" val="0"/>
             </a:ext>
           </a:extLst>
         </p:spPr>
@@ -20442,7 +20277,7 @@
           <a:p>
             <a:pPr algn="r"/>
             <a:fld id="{F7021451-1387-4CA6-816F-3879F97B5CBC}" type="slidenum">
-              <a:rPr b="0" lang="en-US"/>
+              <a:rPr lang="en-US" b="0"/>
               <a:t>9</a:t>
             </a:fld>
             <a:endParaRPr lang="en-US"/>
@@ -20750,4 +20585,319 @@
     </a:ext>
   </a:extLst>
 </a:theme>
+</file>
+
+<file path=ppt/theme/theme2.xml><?xml version="1.0" encoding="utf-8"?>
+<a:theme xmlns:a="http://schemas.openxmlformats.org/drawingml/2006/main" name="Office 테마">
+  <a:themeElements>
+    <a:clrScheme name="Office">
+      <a:dk1>
+        <a:sysClr val="windowText" lastClr="000000"/>
+      </a:dk1>
+      <a:lt1>
+        <a:sysClr val="window" lastClr="FFFFFF"/>
+      </a:lt1>
+      <a:dk2>
+        <a:srgbClr val="0E2841"/>
+      </a:dk2>
+      <a:lt2>
+        <a:srgbClr val="E8E8E8"/>
+      </a:lt2>
+      <a:accent1>
+        <a:srgbClr val="156082"/>
+      </a:accent1>
+      <a:accent2>
+        <a:srgbClr val="E97132"/>
+      </a:accent2>
+      <a:accent3>
+        <a:srgbClr val="196B24"/>
+      </a:accent3>
+      <a:accent4>
+        <a:srgbClr val="0F9ED5"/>
+      </a:accent4>
+      <a:accent5>
+        <a:srgbClr val="A02B93"/>
+      </a:accent5>
+      <a:accent6>
+        <a:srgbClr val="4EA72E"/>
+      </a:accent6>
+      <a:hlink>
+        <a:srgbClr val="467886"/>
+      </a:hlink>
+      <a:folHlink>
+        <a:srgbClr val="96607D"/>
+      </a:folHlink>
+    </a:clrScheme>
+    <a:fontScheme name="Office">
+      <a:majorFont>
+        <a:latin typeface="맑은 고딕" panose="02110004020202020204"/>
+        <a:ea typeface=""/>
+        <a:cs typeface=""/>
+        <a:font script="Jpan" typeface="游ゴシック Light"/>
+        <a:font script="Hang" typeface="맑은 고딕"/>
+        <a:font script="Hans" typeface="等线 Light"/>
+        <a:font script="Hant" typeface="新細明體"/>
+        <a:font script="Arab" typeface="Times New Roman"/>
+        <a:font script="Hebr" typeface="Times New Roman"/>
+        <a:font script="Thai" typeface="Angsana New"/>
+        <a:font script="Ethi" typeface="Nyala"/>
+        <a:font script="Beng" typeface="Vrinda"/>
+        <a:font script="Gujr" typeface="Shruti"/>
+        <a:font script="Khmr" typeface="MoolBoran"/>
+        <a:font script="Knda" typeface="Tunga"/>
+        <a:font script="Guru" typeface="Raavi"/>
+        <a:font script="Cans" typeface="Euphemia"/>
+        <a:font script="Cher" typeface="Plantagenet Cherokee"/>
+        <a:font script="Yiii" typeface="Microsoft Yi Baiti"/>
+        <a:font script="Tibt" typeface="Microsoft Himalaya"/>
+        <a:font script="Thaa" typeface="MV Boli"/>
+        <a:font script="Deva" typeface="Mangal"/>
+        <a:font script="Telu" typeface="Gautami"/>
+        <a:font script="Taml" typeface="Latha"/>
+        <a:font script="Syrc" typeface="Estrangelo Edessa"/>
+        <a:font script="Orya" typeface="Kalinga"/>
+        <a:font script="Mlym" typeface="Kartika"/>
+        <a:font script="Laoo" typeface="DokChampa"/>
+        <a:font script="Sinh" typeface="Iskoola Pota"/>
+        <a:font script="Mong" typeface="Mongolian Baiti"/>
+        <a:font script="Viet" typeface="Times New Roman"/>
+        <a:font script="Uigh" typeface="Microsoft Uighur"/>
+        <a:font script="Geor" typeface="Sylfaen"/>
+        <a:font script="Armn" typeface="Arial"/>
+        <a:font script="Bugi" typeface="Leelawadee UI"/>
+        <a:font script="Bopo" typeface="Microsoft JhengHei"/>
+        <a:font script="Java" typeface="Javanese Text"/>
+        <a:font script="Lisu" typeface="Segoe UI"/>
+        <a:font script="Mymr" typeface="Myanmar Text"/>
+        <a:font script="Nkoo" typeface="Ebrima"/>
+        <a:font script="Olck" typeface="Nirmala UI"/>
+        <a:font script="Osma" typeface="Ebrima"/>
+        <a:font script="Phag" typeface="Phagspa"/>
+        <a:font script="Syrn" typeface="Estrangelo Edessa"/>
+        <a:font script="Syrj" typeface="Estrangelo Edessa"/>
+        <a:font script="Syre" typeface="Estrangelo Edessa"/>
+        <a:font script="Sora" typeface="Nirmala UI"/>
+        <a:font script="Tale" typeface="Microsoft Tai Le"/>
+        <a:font script="Talu" typeface="Microsoft New Tai Lue"/>
+        <a:font script="Tfng" typeface="Ebrima"/>
+      </a:majorFont>
+      <a:minorFont>
+        <a:latin typeface="맑은 고딕" panose="02110004020202020204"/>
+        <a:ea typeface=""/>
+        <a:cs typeface=""/>
+        <a:font script="Jpan" typeface="游ゴシック"/>
+        <a:font script="Hang" typeface="맑은 고딕"/>
+        <a:font script="Hans" typeface="等线"/>
+        <a:font script="Hant" typeface="新細明體"/>
+        <a:font script="Arab" typeface="Arial"/>
+        <a:font script="Hebr" typeface="Arial"/>
+        <a:font script="Thai" typeface="Cordia New"/>
+        <a:font script="Ethi" typeface="Nyala"/>
+        <a:font script="Beng" typeface="Vrinda"/>
+        <a:font script="Gujr" typeface="Shruti"/>
+        <a:font script="Khmr" typeface="DaunPenh"/>
+        <a:font script="Knda" typeface="Tunga"/>
+        <a:font script="Guru" typeface="Raavi"/>
+        <a:font script="Cans" typeface="Euphemia"/>
+        <a:font script="Cher" typeface="Plantagenet Cherokee"/>
+        <a:font script="Yiii" typeface="Microsoft Yi Baiti"/>
+        <a:font script="Tibt" typeface="Microsoft Himalaya"/>
+        <a:font script="Thaa" typeface="MV Boli"/>
+        <a:font script="Deva" typeface="Mangal"/>
+        <a:font script="Telu" typeface="Gautami"/>
+        <a:font script="Taml" typeface="Latha"/>
+        <a:font script="Syrc" typeface="Estrangelo Edessa"/>
+        <a:font script="Orya" typeface="Kalinga"/>
+        <a:font script="Mlym" typeface="Kartika"/>
+        <a:font script="Laoo" typeface="DokChampa"/>
+        <a:font script="Sinh" typeface="Iskoola Pota"/>
+        <a:font script="Mong" typeface="Mongolian Baiti"/>
+        <a:font script="Viet" typeface="Arial"/>
+        <a:font script="Uigh" typeface="Microsoft Uighur"/>
+        <a:font script="Geor" typeface="Sylfaen"/>
+        <a:font script="Armn" typeface="Arial"/>
+        <a:font script="Bugi" typeface="Leelawadee UI"/>
+        <a:font script="Bopo" typeface="Microsoft JhengHei"/>
+        <a:font script="Java" typeface="Javanese Text"/>
+        <a:font script="Lisu" typeface="Segoe UI"/>
+        <a:font script="Mymr" typeface="Myanmar Text"/>
+        <a:font script="Nkoo" typeface="Ebrima"/>
+        <a:font script="Olck" typeface="Nirmala UI"/>
+        <a:font script="Osma" typeface="Ebrima"/>
+        <a:font script="Phag" typeface="Phagspa"/>
+        <a:font script="Syrn" typeface="Estrangelo Edessa"/>
+        <a:font script="Syrj" typeface="Estrangelo Edessa"/>
+        <a:font script="Syre" typeface="Estrangelo Edessa"/>
+        <a:font script="Sora" typeface="Nirmala UI"/>
+        <a:font script="Tale" typeface="Microsoft Tai Le"/>
+        <a:font script="Talu" typeface="Microsoft New Tai Lue"/>
+        <a:font script="Tfng" typeface="Ebrima"/>
+      </a:minorFont>
+    </a:fontScheme>
+    <a:fmtScheme name="Office">
+      <a:fillStyleLst>
+        <a:solidFill>
+          <a:schemeClr val="phClr"/>
+        </a:solidFill>
+        <a:gradFill rotWithShape="1">
+          <a:gsLst>
+            <a:gs pos="0">
+              <a:schemeClr val="phClr">
+                <a:lumMod val="110000"/>
+                <a:satMod val="105000"/>
+                <a:tint val="67000"/>
+              </a:schemeClr>
+            </a:gs>
+            <a:gs pos="50000">
+              <a:schemeClr val="phClr">
+                <a:lumMod val="105000"/>
+                <a:satMod val="103000"/>
+                <a:tint val="73000"/>
+              </a:schemeClr>
+            </a:gs>
+            <a:gs pos="100000">
+              <a:schemeClr val="phClr">
+                <a:lumMod val="105000"/>
+                <a:satMod val="109000"/>
+                <a:tint val="81000"/>
+              </a:schemeClr>
+            </a:gs>
+          </a:gsLst>
+          <a:lin ang="5400000" scaled="0"/>
+        </a:gradFill>
+        <a:gradFill rotWithShape="1">
+          <a:gsLst>
+            <a:gs pos="0">
+              <a:schemeClr val="phClr">
+                <a:satMod val="103000"/>
+                <a:lumMod val="102000"/>
+                <a:tint val="94000"/>
+              </a:schemeClr>
+            </a:gs>
+            <a:gs pos="50000">
+              <a:schemeClr val="phClr">
+                <a:satMod val="110000"/>
+                <a:lumMod val="100000"/>
+                <a:shade val="100000"/>
+              </a:schemeClr>
+            </a:gs>
+            <a:gs pos="100000">
+              <a:schemeClr val="phClr">
+                <a:lumMod val="99000"/>
+                <a:satMod val="120000"/>
+                <a:shade val="78000"/>
+              </a:schemeClr>
+            </a:gs>
+          </a:gsLst>
+          <a:lin ang="5400000" scaled="0"/>
+        </a:gradFill>
+      </a:fillStyleLst>
+      <a:lnStyleLst>
+        <a:ln w="12700" cap="flat" cmpd="sng" algn="ctr">
+          <a:solidFill>
+            <a:schemeClr val="phClr"/>
+          </a:solidFill>
+          <a:prstDash val="solid"/>
+          <a:miter lim="800000"/>
+        </a:ln>
+        <a:ln w="19050" cap="flat" cmpd="sng" algn="ctr">
+          <a:solidFill>
+            <a:schemeClr val="phClr"/>
+          </a:solidFill>
+          <a:prstDash val="solid"/>
+          <a:miter lim="800000"/>
+        </a:ln>
+        <a:ln w="25400" cap="flat" cmpd="sng" algn="ctr">
+          <a:solidFill>
+            <a:schemeClr val="phClr"/>
+          </a:solidFill>
+          <a:prstDash val="solid"/>
+          <a:miter lim="800000"/>
+        </a:ln>
+      </a:lnStyleLst>
+      <a:effectStyleLst>
+        <a:effectStyle>
+          <a:effectLst/>
+        </a:effectStyle>
+        <a:effectStyle>
+          <a:effectLst/>
+        </a:effectStyle>
+        <a:effectStyle>
+          <a:effectLst>
+            <a:outerShdw blurRad="57150" dist="19050" dir="5400000" algn="ctr" rotWithShape="0">
+              <a:srgbClr val="000000">
+                <a:alpha val="63000"/>
+              </a:srgbClr>
+            </a:outerShdw>
+          </a:effectLst>
+        </a:effectStyle>
+      </a:effectStyleLst>
+      <a:bgFillStyleLst>
+        <a:solidFill>
+          <a:schemeClr val="phClr"/>
+        </a:solidFill>
+        <a:solidFill>
+          <a:schemeClr val="phClr">
+            <a:tint val="95000"/>
+            <a:satMod val="170000"/>
+          </a:schemeClr>
+        </a:solidFill>
+        <a:gradFill rotWithShape="1">
+          <a:gsLst>
+            <a:gs pos="0">
+              <a:schemeClr val="phClr">
+                <a:tint val="93000"/>
+                <a:satMod val="150000"/>
+                <a:shade val="98000"/>
+                <a:lumMod val="102000"/>
+              </a:schemeClr>
+            </a:gs>
+            <a:gs pos="50000">
+              <a:schemeClr val="phClr">
+                <a:tint val="98000"/>
+                <a:satMod val="130000"/>
+                <a:shade val="90000"/>
+                <a:lumMod val="103000"/>
+              </a:schemeClr>
+            </a:gs>
+            <a:gs pos="100000">
+              <a:schemeClr val="phClr">
+                <a:shade val="63000"/>
+                <a:satMod val="120000"/>
+              </a:schemeClr>
+            </a:gs>
+          </a:gsLst>
+          <a:lin ang="5400000" scaled="0"/>
+        </a:gradFill>
+      </a:bgFillStyleLst>
+    </a:fmtScheme>
+  </a:themeElements>
+  <a:objectDefaults>
+    <a:lnDef>
+      <a:spPr/>
+      <a:bodyPr/>
+      <a:lstStyle/>
+      <a:style>
+        <a:lnRef idx="2">
+          <a:schemeClr val="accent1"/>
+        </a:lnRef>
+        <a:fillRef idx="0">
+          <a:schemeClr val="accent1"/>
+        </a:fillRef>
+        <a:effectRef idx="1">
+          <a:schemeClr val="accent1"/>
+        </a:effectRef>
+        <a:fontRef idx="minor">
+          <a:schemeClr val="tx1"/>
+        </a:fontRef>
+      </a:style>
+    </a:lnDef>
+  </a:objectDefaults>
+  <a:extraClrSchemeLst/>
+  <a:extLst>
+    <a:ext uri="{05A4C25C-085E-4340-85A3-A5531E510DB2}">
+      <thm15:themeFamily xmlns:thm15="http://schemas.microsoft.com/office/thememl/2012/main" name="Office Theme" id="{2E142A2C-CD16-42D6-873A-C26D2A0506FA}" vid="{1BDDFF52-6CD6-40A5-AB3C-68EB2F1E4D0A}"/>
+    </a:ext>
+  </a:extLst>
+</a:theme>
 </file>